--- a/docs/scade.pptx
+++ b/docs/scade.pptx
@@ -5,7 +5,7 @@
     <p:sldMasterId id="2147483648" r:id="rId1"/>
   </p:sldMasterIdLst>
   <p:notesMasterIdLst>
-    <p:notesMasterId r:id="rId20"/>
+    <p:notesMasterId r:id="rId21"/>
   </p:notesMasterIdLst>
   <p:sldIdLst>
     <p:sldId id="256" r:id="rId2"/>
@@ -22,10 +22,11 @@
     <p:sldId id="265" r:id="rId13"/>
     <p:sldId id="257" r:id="rId14"/>
     <p:sldId id="258" r:id="rId15"/>
-    <p:sldId id="270" r:id="rId16"/>
-    <p:sldId id="271" r:id="rId17"/>
-    <p:sldId id="273" r:id="rId18"/>
-    <p:sldId id="272" r:id="rId19"/>
+    <p:sldId id="274" r:id="rId16"/>
+    <p:sldId id="270" r:id="rId17"/>
+    <p:sldId id="271" r:id="rId18"/>
+    <p:sldId id="273" r:id="rId19"/>
+    <p:sldId id="272" r:id="rId20"/>
   </p:sldIdLst>
   <p:sldSz cx="12192000" cy="6858000"/>
   <p:notesSz cx="6858000" cy="9144000"/>
@@ -214,7 +215,7 @@
           <a:p>
             <a:fld id="{3744C8BF-56B8-46D4-ADA5-A0AF811348DF}" type="datetimeFigureOut">
               <a:rPr lang="zh-CN" altLang="en-US" smtClean="0"/>
-              <a:t>2023/8/20</a:t>
+              <a:t>2023/9/17</a:t>
             </a:fld>
             <a:endParaRPr lang="zh-CN" altLang="en-US"/>
           </a:p>
@@ -712,7 +713,7 @@
           <a:p>
             <a:fld id="{C61D74A4-027F-4A2B-8B92-D0C194C50910}" type="datetimeFigureOut">
               <a:rPr lang="zh-CN" altLang="en-US" smtClean="0"/>
-              <a:t>2023/8/20</a:t>
+              <a:t>2023/9/17</a:t>
             </a:fld>
             <a:endParaRPr lang="zh-CN" altLang="en-US"/>
           </a:p>
@@ -910,7 +911,7 @@
           <a:p>
             <a:fld id="{C61D74A4-027F-4A2B-8B92-D0C194C50910}" type="datetimeFigureOut">
               <a:rPr lang="zh-CN" altLang="en-US" smtClean="0"/>
-              <a:t>2023/8/20</a:t>
+              <a:t>2023/9/17</a:t>
             </a:fld>
             <a:endParaRPr lang="zh-CN" altLang="en-US"/>
           </a:p>
@@ -1118,7 +1119,7 @@
           <a:p>
             <a:fld id="{C61D74A4-027F-4A2B-8B92-D0C194C50910}" type="datetimeFigureOut">
               <a:rPr lang="zh-CN" altLang="en-US" smtClean="0"/>
-              <a:t>2023/8/20</a:t>
+              <a:t>2023/9/17</a:t>
             </a:fld>
             <a:endParaRPr lang="zh-CN" altLang="en-US"/>
           </a:p>
@@ -1316,7 +1317,7 @@
           <a:p>
             <a:fld id="{C61D74A4-027F-4A2B-8B92-D0C194C50910}" type="datetimeFigureOut">
               <a:rPr lang="zh-CN" altLang="en-US" smtClean="0"/>
-              <a:t>2023/8/20</a:t>
+              <a:t>2023/9/17</a:t>
             </a:fld>
             <a:endParaRPr lang="zh-CN" altLang="en-US"/>
           </a:p>
@@ -1591,7 +1592,7 @@
           <a:p>
             <a:fld id="{C61D74A4-027F-4A2B-8B92-D0C194C50910}" type="datetimeFigureOut">
               <a:rPr lang="zh-CN" altLang="en-US" smtClean="0"/>
-              <a:t>2023/8/20</a:t>
+              <a:t>2023/9/17</a:t>
             </a:fld>
             <a:endParaRPr lang="zh-CN" altLang="en-US"/>
           </a:p>
@@ -1856,7 +1857,7 @@
           <a:p>
             <a:fld id="{C61D74A4-027F-4A2B-8B92-D0C194C50910}" type="datetimeFigureOut">
               <a:rPr lang="zh-CN" altLang="en-US" smtClean="0"/>
-              <a:t>2023/8/20</a:t>
+              <a:t>2023/9/17</a:t>
             </a:fld>
             <a:endParaRPr lang="zh-CN" altLang="en-US"/>
           </a:p>
@@ -2268,7 +2269,7 @@
           <a:p>
             <a:fld id="{C61D74A4-027F-4A2B-8B92-D0C194C50910}" type="datetimeFigureOut">
               <a:rPr lang="zh-CN" altLang="en-US" smtClean="0"/>
-              <a:t>2023/8/20</a:t>
+              <a:t>2023/9/17</a:t>
             </a:fld>
             <a:endParaRPr lang="zh-CN" altLang="en-US"/>
           </a:p>
@@ -2409,7 +2410,7 @@
           <a:p>
             <a:fld id="{C61D74A4-027F-4A2B-8B92-D0C194C50910}" type="datetimeFigureOut">
               <a:rPr lang="zh-CN" altLang="en-US" smtClean="0"/>
-              <a:t>2023/8/20</a:t>
+              <a:t>2023/9/17</a:t>
             </a:fld>
             <a:endParaRPr lang="zh-CN" altLang="en-US"/>
           </a:p>
@@ -2522,7 +2523,7 @@
           <a:p>
             <a:fld id="{C61D74A4-027F-4A2B-8B92-D0C194C50910}" type="datetimeFigureOut">
               <a:rPr lang="zh-CN" altLang="en-US" smtClean="0"/>
-              <a:t>2023/8/20</a:t>
+              <a:t>2023/9/17</a:t>
             </a:fld>
             <a:endParaRPr lang="zh-CN" altLang="en-US"/>
           </a:p>
@@ -2833,7 +2834,7 @@
           <a:p>
             <a:fld id="{C61D74A4-027F-4A2B-8B92-D0C194C50910}" type="datetimeFigureOut">
               <a:rPr lang="zh-CN" altLang="en-US" smtClean="0"/>
-              <a:t>2023/8/20</a:t>
+              <a:t>2023/9/17</a:t>
             </a:fld>
             <a:endParaRPr lang="zh-CN" altLang="en-US"/>
           </a:p>
@@ -3121,7 +3122,7 @@
           <a:p>
             <a:fld id="{C61D74A4-027F-4A2B-8B92-D0C194C50910}" type="datetimeFigureOut">
               <a:rPr lang="zh-CN" altLang="en-US" smtClean="0"/>
-              <a:t>2023/8/20</a:t>
+              <a:t>2023/9/17</a:t>
             </a:fld>
             <a:endParaRPr lang="zh-CN" altLang="en-US"/>
           </a:p>
@@ -3362,7 +3363,7 @@
           <a:p>
             <a:fld id="{C61D74A4-027F-4A2B-8B92-D0C194C50910}" type="datetimeFigureOut">
               <a:rPr lang="zh-CN" altLang="en-US" smtClean="0"/>
-              <a:t>2023/8/20</a:t>
+              <a:t>2023/9/17</a:t>
             </a:fld>
             <a:endParaRPr lang="zh-CN" altLang="en-US"/>
           </a:p>
@@ -5250,7 +5251,7 @@
           <p:cNvPr id="4" name="图片 3">
             <a:extLst>
               <a:ext uri="{FF2B5EF4-FFF2-40B4-BE49-F238E27FC236}">
-                <a16:creationId xmlns:a16="http://schemas.microsoft.com/office/drawing/2014/main" id="{D301C140-BDBE-4148-A48E-5F74C4514D2B}"/>
+                <a16:creationId xmlns:a16="http://schemas.microsoft.com/office/drawing/2014/main" id="{49B21B92-F465-4FAA-9817-7A1D5DD58929}"/>
               </a:ext>
             </a:extLst>
           </p:cNvPr>
@@ -5267,8 +5268,8 @@
         </p:blipFill>
         <p:spPr>
           <a:xfrm>
-            <a:off x="602532" y="956145"/>
-            <a:ext cx="1600339" cy="373412"/>
+            <a:off x="556332" y="490413"/>
+            <a:ext cx="5011852" cy="2661160"/>
           </a:xfrm>
           <a:prstGeom prst="rect">
             <a:avLst/>
@@ -5280,7 +5281,7 @@
           <p:cNvPr id="5" name="图片 4">
             <a:extLst>
               <a:ext uri="{FF2B5EF4-FFF2-40B4-BE49-F238E27FC236}">
-                <a16:creationId xmlns:a16="http://schemas.microsoft.com/office/drawing/2014/main" id="{F9BBC734-04D3-4583-8C23-23058072C665}"/>
+                <a16:creationId xmlns:a16="http://schemas.microsoft.com/office/drawing/2014/main" id="{A39D49F8-1698-451E-858E-FBF612B8038C}"/>
               </a:ext>
             </a:extLst>
           </p:cNvPr>
@@ -5297,175 +5298,8 @@
         </p:blipFill>
         <p:spPr>
           <a:xfrm>
-            <a:off x="3321862" y="788490"/>
-            <a:ext cx="3383573" cy="541067"/>
-          </a:xfrm>
-          <a:prstGeom prst="rect">
-            <a:avLst/>
-          </a:prstGeom>
-        </p:spPr>
-      </p:pic>
-      <p:sp>
-        <p:nvSpPr>
-          <p:cNvPr id="6" name="文本框 5">
-            <a:extLst>
-              <a:ext uri="{FF2B5EF4-FFF2-40B4-BE49-F238E27FC236}">
-                <a16:creationId xmlns:a16="http://schemas.microsoft.com/office/drawing/2014/main" id="{A40EE023-2C81-4585-B497-1E86D33C9CFA}"/>
-              </a:ext>
-            </a:extLst>
-          </p:cNvPr>
-          <p:cNvSpPr txBox="1"/>
-          <p:nvPr/>
-        </p:nvSpPr>
-        <p:spPr>
-          <a:xfrm>
-            <a:off x="298580" y="233265"/>
-            <a:ext cx="6503436" cy="369332"/>
-          </a:xfrm>
-          <a:prstGeom prst="rect">
-            <a:avLst/>
-          </a:prstGeom>
-          <a:noFill/>
-        </p:spPr>
-        <p:txBody>
-          <a:bodyPr wrap="square" rtlCol="0">
-            <a:spAutoFit/>
-          </a:bodyPr>
-          <a:lstStyle/>
-          <a:p>
-            <a:r>
-              <a:rPr lang="zh-CN" altLang="en-US"/>
-              <a:t>要查看一个变量的</a:t>
-            </a:r>
-            <a:r>
-              <a:rPr lang="en-US" altLang="zh-CN"/>
-              <a:t>Properties</a:t>
-            </a:r>
-            <a:r>
-              <a:rPr lang="zh-CN" altLang="en-US"/>
-              <a:t>，需将其设置为</a:t>
-            </a:r>
-            <a:r>
-              <a:rPr lang="en-US" altLang="zh-CN"/>
-              <a:t>standard</a:t>
-            </a:r>
-          </a:p>
-        </p:txBody>
-      </p:sp>
-      <p:pic>
-        <p:nvPicPr>
-          <p:cNvPr id="8" name="图片 7">
-            <a:extLst>
-              <a:ext uri="{FF2B5EF4-FFF2-40B4-BE49-F238E27FC236}">
-                <a16:creationId xmlns:a16="http://schemas.microsoft.com/office/drawing/2014/main" id="{2BDD19EF-4BEB-413E-8891-06BC3215AD80}"/>
-              </a:ext>
-            </a:extLst>
-          </p:cNvPr>
-          <p:cNvPicPr>
-            <a:picLocks noChangeAspect="1"/>
-          </p:cNvPicPr>
-          <p:nvPr/>
-        </p:nvPicPr>
-        <p:blipFill>
-          <a:blip r:embed="rId4"/>
-          <a:stretch>
-            <a:fillRect/>
-          </a:stretch>
-        </p:blipFill>
-        <p:spPr>
-          <a:xfrm>
-            <a:off x="6810619" y="1329557"/>
-            <a:ext cx="4778849" cy="5402736"/>
-          </a:xfrm>
-          <a:prstGeom prst="rect">
-            <a:avLst/>
-          </a:prstGeom>
-        </p:spPr>
-      </p:pic>
-      <p:pic>
-        <p:nvPicPr>
-          <p:cNvPr id="9" name="图片 8">
-            <a:extLst>
-              <a:ext uri="{FF2B5EF4-FFF2-40B4-BE49-F238E27FC236}">
-                <a16:creationId xmlns:a16="http://schemas.microsoft.com/office/drawing/2014/main" id="{F29EF1F7-7E3E-4EC0-9047-16D8D753735A}"/>
-              </a:ext>
-            </a:extLst>
-          </p:cNvPr>
-          <p:cNvPicPr>
-            <a:picLocks noChangeAspect="1"/>
-          </p:cNvPicPr>
-          <p:nvPr/>
-        </p:nvPicPr>
-        <p:blipFill>
-          <a:blip r:embed="rId5"/>
-          <a:stretch>
-            <a:fillRect/>
-          </a:stretch>
-        </p:blipFill>
-        <p:spPr>
-          <a:xfrm>
-            <a:off x="381512" y="2307565"/>
-            <a:ext cx="5880699" cy="4424728"/>
-          </a:xfrm>
-          <a:prstGeom prst="rect">
-            <a:avLst/>
-          </a:prstGeom>
-        </p:spPr>
-      </p:pic>
-      <p:pic>
-        <p:nvPicPr>
-          <p:cNvPr id="10" name="图片 9">
-            <a:extLst>
-              <a:ext uri="{FF2B5EF4-FFF2-40B4-BE49-F238E27FC236}">
-                <a16:creationId xmlns:a16="http://schemas.microsoft.com/office/drawing/2014/main" id="{E117F73F-6348-4FCA-9575-91ABCF938300}"/>
-              </a:ext>
-            </a:extLst>
-          </p:cNvPr>
-          <p:cNvPicPr>
-            <a:picLocks noChangeAspect="1"/>
-          </p:cNvPicPr>
-          <p:nvPr/>
-        </p:nvPicPr>
-        <p:blipFill>
-          <a:blip r:embed="rId6"/>
-          <a:stretch>
-            <a:fillRect/>
-          </a:stretch>
-        </p:blipFill>
-        <p:spPr>
-          <a:xfrm>
-            <a:off x="7069645" y="417931"/>
-            <a:ext cx="3688400" cy="525826"/>
-          </a:xfrm>
-          <a:prstGeom prst="rect">
-            <a:avLst/>
-          </a:prstGeom>
-        </p:spPr>
-      </p:pic>
-      <p:pic>
-        <p:nvPicPr>
-          <p:cNvPr id="11" name="图片 10">
-            <a:extLst>
-              <a:ext uri="{FF2B5EF4-FFF2-40B4-BE49-F238E27FC236}">
-                <a16:creationId xmlns:a16="http://schemas.microsoft.com/office/drawing/2014/main" id="{ACE1CA47-480D-4520-80CB-5799CD38B813}"/>
-              </a:ext>
-            </a:extLst>
-          </p:cNvPr>
-          <p:cNvPicPr>
-            <a:picLocks noChangeAspect="1"/>
-          </p:cNvPicPr>
-          <p:nvPr/>
-        </p:nvPicPr>
-        <p:blipFill>
-          <a:blip r:embed="rId7"/>
-          <a:stretch>
-            <a:fillRect/>
-          </a:stretch>
-        </p:blipFill>
-        <p:spPr>
-          <a:xfrm>
-            <a:off x="680236" y="1515450"/>
-            <a:ext cx="4580017" cy="586791"/>
+            <a:off x="6491958" y="879496"/>
+            <a:ext cx="4801016" cy="3909399"/>
           </a:xfrm>
           <a:prstGeom prst="rect">
             <a:avLst/>
@@ -5475,7 +5309,7 @@
     </p:spTree>
     <p:extLst>
       <p:ext uri="{BB962C8B-B14F-4D97-AF65-F5344CB8AC3E}">
-        <p14:creationId xmlns:p14="http://schemas.microsoft.com/office/powerpoint/2010/main" val="2955482188"/>
+        <p14:creationId xmlns:p14="http://schemas.microsoft.com/office/powerpoint/2010/main" val="1637944361"/>
       </p:ext>
     </p:extLst>
   </p:cSld>
@@ -5507,7 +5341,7 @@
           <p:cNvPr id="4" name="图片 3">
             <a:extLst>
               <a:ext uri="{FF2B5EF4-FFF2-40B4-BE49-F238E27FC236}">
-                <a16:creationId xmlns:a16="http://schemas.microsoft.com/office/drawing/2014/main" id="{35E14CEE-25F3-44BA-84E9-907D73976424}"/>
+                <a16:creationId xmlns:a16="http://schemas.microsoft.com/office/drawing/2014/main" id="{D301C140-BDBE-4148-A48E-5F74C4514D2B}"/>
               </a:ext>
             </a:extLst>
           </p:cNvPr>
@@ -5524,8 +5358,8 @@
         </p:blipFill>
         <p:spPr>
           <a:xfrm>
-            <a:off x="290006" y="167393"/>
-            <a:ext cx="4054191" cy="327688"/>
+            <a:off x="602532" y="956145"/>
+            <a:ext cx="1600339" cy="373412"/>
           </a:xfrm>
           <a:prstGeom prst="rect">
             <a:avLst/>
@@ -5537,7 +5371,7 @@
           <p:cNvPr id="5" name="图片 4">
             <a:extLst>
               <a:ext uri="{FF2B5EF4-FFF2-40B4-BE49-F238E27FC236}">
-                <a16:creationId xmlns:a16="http://schemas.microsoft.com/office/drawing/2014/main" id="{DC8723F6-77C9-462D-AA3E-E12B8C8632C6}"/>
+                <a16:creationId xmlns:a16="http://schemas.microsoft.com/office/drawing/2014/main" id="{F9BBC734-04D3-4583-8C23-23058072C665}"/>
               </a:ext>
             </a:extLst>
           </p:cNvPr>
@@ -5554,20 +5388,67 @@
         </p:blipFill>
         <p:spPr>
           <a:xfrm>
-            <a:off x="182012" y="753664"/>
-            <a:ext cx="5669771" cy="5761219"/>
+            <a:off x="3321862" y="788490"/>
+            <a:ext cx="3383573" cy="541067"/>
           </a:xfrm>
           <a:prstGeom prst="rect">
             <a:avLst/>
           </a:prstGeom>
         </p:spPr>
       </p:pic>
+      <p:sp>
+        <p:nvSpPr>
+          <p:cNvPr id="6" name="文本框 5">
+            <a:extLst>
+              <a:ext uri="{FF2B5EF4-FFF2-40B4-BE49-F238E27FC236}">
+                <a16:creationId xmlns:a16="http://schemas.microsoft.com/office/drawing/2014/main" id="{A40EE023-2C81-4585-B497-1E86D33C9CFA}"/>
+              </a:ext>
+            </a:extLst>
+          </p:cNvPr>
+          <p:cNvSpPr txBox="1"/>
+          <p:nvPr/>
+        </p:nvSpPr>
+        <p:spPr>
+          <a:xfrm>
+            <a:off x="298580" y="233265"/>
+            <a:ext cx="6503436" cy="369332"/>
+          </a:xfrm>
+          <a:prstGeom prst="rect">
+            <a:avLst/>
+          </a:prstGeom>
+          <a:noFill/>
+        </p:spPr>
+        <p:txBody>
+          <a:bodyPr wrap="square" rtlCol="0">
+            <a:spAutoFit/>
+          </a:bodyPr>
+          <a:lstStyle/>
+          <a:p>
+            <a:r>
+              <a:rPr lang="zh-CN" altLang="en-US"/>
+              <a:t>要查看一个变量的</a:t>
+            </a:r>
+            <a:r>
+              <a:rPr lang="en-US" altLang="zh-CN"/>
+              <a:t>Properties</a:t>
+            </a:r>
+            <a:r>
+              <a:rPr lang="zh-CN" altLang="en-US"/>
+              <a:t>，需将其设置为</a:t>
+            </a:r>
+            <a:r>
+              <a:rPr lang="en-US" altLang="zh-CN"/>
+              <a:t>standard</a:t>
+            </a:r>
+          </a:p>
+        </p:txBody>
+      </p:sp>
       <p:pic>
         <p:nvPicPr>
-          <p:cNvPr id="6" name="图片 5">
-            <a:extLst>
-              <a:ext uri="{FF2B5EF4-FFF2-40B4-BE49-F238E27FC236}">
-                <a16:creationId xmlns:a16="http://schemas.microsoft.com/office/drawing/2014/main" id="{3619A6E3-078C-4664-85E0-A23BA65D44FB}"/>
+          <p:cNvPr id="8" name="图片 7">
+            <a:extLst>
+              <a:ext uri="{FF2B5EF4-FFF2-40B4-BE49-F238E27FC236}">
+                <a16:creationId xmlns:a16="http://schemas.microsoft.com/office/drawing/2014/main" id="{2BDD19EF-4BEB-413E-8891-06BC3215AD80}"/>
               </a:ext>
             </a:extLst>
           </p:cNvPr>
@@ -5584,8 +5465,98 @@
         </p:blipFill>
         <p:spPr>
           <a:xfrm>
-            <a:off x="6269366" y="875876"/>
-            <a:ext cx="4206605" cy="4397121"/>
+            <a:off x="6810619" y="1329557"/>
+            <a:ext cx="4778849" cy="5402736"/>
+          </a:xfrm>
+          <a:prstGeom prst="rect">
+            <a:avLst/>
+          </a:prstGeom>
+        </p:spPr>
+      </p:pic>
+      <p:pic>
+        <p:nvPicPr>
+          <p:cNvPr id="9" name="图片 8">
+            <a:extLst>
+              <a:ext uri="{FF2B5EF4-FFF2-40B4-BE49-F238E27FC236}">
+                <a16:creationId xmlns:a16="http://schemas.microsoft.com/office/drawing/2014/main" id="{F29EF1F7-7E3E-4EC0-9047-16D8D753735A}"/>
+              </a:ext>
+            </a:extLst>
+          </p:cNvPr>
+          <p:cNvPicPr>
+            <a:picLocks noChangeAspect="1"/>
+          </p:cNvPicPr>
+          <p:nvPr/>
+        </p:nvPicPr>
+        <p:blipFill>
+          <a:blip r:embed="rId5"/>
+          <a:stretch>
+            <a:fillRect/>
+          </a:stretch>
+        </p:blipFill>
+        <p:spPr>
+          <a:xfrm>
+            <a:off x="381512" y="2307565"/>
+            <a:ext cx="5880699" cy="4424728"/>
+          </a:xfrm>
+          <a:prstGeom prst="rect">
+            <a:avLst/>
+          </a:prstGeom>
+        </p:spPr>
+      </p:pic>
+      <p:pic>
+        <p:nvPicPr>
+          <p:cNvPr id="10" name="图片 9">
+            <a:extLst>
+              <a:ext uri="{FF2B5EF4-FFF2-40B4-BE49-F238E27FC236}">
+                <a16:creationId xmlns:a16="http://schemas.microsoft.com/office/drawing/2014/main" id="{E117F73F-6348-4FCA-9575-91ABCF938300}"/>
+              </a:ext>
+            </a:extLst>
+          </p:cNvPr>
+          <p:cNvPicPr>
+            <a:picLocks noChangeAspect="1"/>
+          </p:cNvPicPr>
+          <p:nvPr/>
+        </p:nvPicPr>
+        <p:blipFill>
+          <a:blip r:embed="rId6"/>
+          <a:stretch>
+            <a:fillRect/>
+          </a:stretch>
+        </p:blipFill>
+        <p:spPr>
+          <a:xfrm>
+            <a:off x="7069645" y="417931"/>
+            <a:ext cx="3688400" cy="525826"/>
+          </a:xfrm>
+          <a:prstGeom prst="rect">
+            <a:avLst/>
+          </a:prstGeom>
+        </p:spPr>
+      </p:pic>
+      <p:pic>
+        <p:nvPicPr>
+          <p:cNvPr id="11" name="图片 10">
+            <a:extLst>
+              <a:ext uri="{FF2B5EF4-FFF2-40B4-BE49-F238E27FC236}">
+                <a16:creationId xmlns:a16="http://schemas.microsoft.com/office/drawing/2014/main" id="{ACE1CA47-480D-4520-80CB-5799CD38B813}"/>
+              </a:ext>
+            </a:extLst>
+          </p:cNvPr>
+          <p:cNvPicPr>
+            <a:picLocks noChangeAspect="1"/>
+          </p:cNvPicPr>
+          <p:nvPr/>
+        </p:nvPicPr>
+        <p:blipFill>
+          <a:blip r:embed="rId7"/>
+          <a:stretch>
+            <a:fillRect/>
+          </a:stretch>
+        </p:blipFill>
+        <p:spPr>
+          <a:xfrm>
+            <a:off x="680236" y="1515450"/>
+            <a:ext cx="4580017" cy="586791"/>
           </a:xfrm>
           <a:prstGeom prst="rect">
             <a:avLst/>
@@ -5595,7 +5566,7 @@
     </p:spTree>
     <p:extLst>
       <p:ext uri="{BB962C8B-B14F-4D97-AF65-F5344CB8AC3E}">
-        <p14:creationId xmlns:p14="http://schemas.microsoft.com/office/powerpoint/2010/main" val="818967329"/>
+        <p14:creationId xmlns:p14="http://schemas.microsoft.com/office/powerpoint/2010/main" val="2955482188"/>
       </p:ext>
     </p:extLst>
   </p:cSld>
@@ -5627,6 +5598,126 @@
           <p:cNvPr id="4" name="图片 3">
             <a:extLst>
               <a:ext uri="{FF2B5EF4-FFF2-40B4-BE49-F238E27FC236}">
+                <a16:creationId xmlns:a16="http://schemas.microsoft.com/office/drawing/2014/main" id="{35E14CEE-25F3-44BA-84E9-907D73976424}"/>
+              </a:ext>
+            </a:extLst>
+          </p:cNvPr>
+          <p:cNvPicPr>
+            <a:picLocks noChangeAspect="1"/>
+          </p:cNvPicPr>
+          <p:nvPr/>
+        </p:nvPicPr>
+        <p:blipFill>
+          <a:blip r:embed="rId2"/>
+          <a:stretch>
+            <a:fillRect/>
+          </a:stretch>
+        </p:blipFill>
+        <p:spPr>
+          <a:xfrm>
+            <a:off x="290006" y="167393"/>
+            <a:ext cx="4054191" cy="327688"/>
+          </a:xfrm>
+          <a:prstGeom prst="rect">
+            <a:avLst/>
+          </a:prstGeom>
+        </p:spPr>
+      </p:pic>
+      <p:pic>
+        <p:nvPicPr>
+          <p:cNvPr id="5" name="图片 4">
+            <a:extLst>
+              <a:ext uri="{FF2B5EF4-FFF2-40B4-BE49-F238E27FC236}">
+                <a16:creationId xmlns:a16="http://schemas.microsoft.com/office/drawing/2014/main" id="{DC8723F6-77C9-462D-AA3E-E12B8C8632C6}"/>
+              </a:ext>
+            </a:extLst>
+          </p:cNvPr>
+          <p:cNvPicPr>
+            <a:picLocks noChangeAspect="1"/>
+          </p:cNvPicPr>
+          <p:nvPr/>
+        </p:nvPicPr>
+        <p:blipFill>
+          <a:blip r:embed="rId3"/>
+          <a:stretch>
+            <a:fillRect/>
+          </a:stretch>
+        </p:blipFill>
+        <p:spPr>
+          <a:xfrm>
+            <a:off x="182012" y="753664"/>
+            <a:ext cx="5669771" cy="5761219"/>
+          </a:xfrm>
+          <a:prstGeom prst="rect">
+            <a:avLst/>
+          </a:prstGeom>
+        </p:spPr>
+      </p:pic>
+      <p:pic>
+        <p:nvPicPr>
+          <p:cNvPr id="6" name="图片 5">
+            <a:extLst>
+              <a:ext uri="{FF2B5EF4-FFF2-40B4-BE49-F238E27FC236}">
+                <a16:creationId xmlns:a16="http://schemas.microsoft.com/office/drawing/2014/main" id="{3619A6E3-078C-4664-85E0-A23BA65D44FB}"/>
+              </a:ext>
+            </a:extLst>
+          </p:cNvPr>
+          <p:cNvPicPr>
+            <a:picLocks noChangeAspect="1"/>
+          </p:cNvPicPr>
+          <p:nvPr/>
+        </p:nvPicPr>
+        <p:blipFill>
+          <a:blip r:embed="rId4"/>
+          <a:stretch>
+            <a:fillRect/>
+          </a:stretch>
+        </p:blipFill>
+        <p:spPr>
+          <a:xfrm>
+            <a:off x="6269366" y="875876"/>
+            <a:ext cx="4206605" cy="4397121"/>
+          </a:xfrm>
+          <a:prstGeom prst="rect">
+            <a:avLst/>
+          </a:prstGeom>
+        </p:spPr>
+      </p:pic>
+    </p:spTree>
+    <p:extLst>
+      <p:ext uri="{BB962C8B-B14F-4D97-AF65-F5344CB8AC3E}">
+        <p14:creationId xmlns:p14="http://schemas.microsoft.com/office/powerpoint/2010/main" val="818967329"/>
+      </p:ext>
+    </p:extLst>
+  </p:cSld>
+  <p:clrMapOvr>
+    <a:masterClrMapping/>
+  </p:clrMapOvr>
+</p:sld>
+</file>
+
+<file path=ppt/slides/slide18.xml><?xml version="1.0" encoding="utf-8"?>
+<p:sld xmlns:a="http://schemas.openxmlformats.org/drawingml/2006/main" xmlns:r="http://schemas.openxmlformats.org/officeDocument/2006/relationships" xmlns:p="http://schemas.openxmlformats.org/presentationml/2006/main">
+  <p:cSld>
+    <p:spTree>
+      <p:nvGrpSpPr>
+        <p:cNvPr id="1" name=""/>
+        <p:cNvGrpSpPr/>
+        <p:nvPr/>
+      </p:nvGrpSpPr>
+      <p:grpSpPr>
+        <a:xfrm>
+          <a:off x="0" y="0"/>
+          <a:ext cx="0" cy="0"/>
+          <a:chOff x="0" y="0"/>
+          <a:chExt cx="0" cy="0"/>
+        </a:xfrm>
+      </p:grpSpPr>
+      <p:pic>
+        <p:nvPicPr>
+          <p:cNvPr id="4" name="图片 3">
+            <a:extLst>
+              <a:ext uri="{FF2B5EF4-FFF2-40B4-BE49-F238E27FC236}">
                 <a16:creationId xmlns:a16="http://schemas.microsoft.com/office/drawing/2014/main" id="{951296BE-53E7-4331-8EA2-8D1B24993956}"/>
               </a:ext>
             </a:extLst>
@@ -5803,7 +5894,7 @@
 </p:sld>
 </file>
 
-<file path=ppt/slides/slide18.xml><?xml version="1.0" encoding="utf-8"?>
+<file path=ppt/slides/slide19.xml><?xml version="1.0" encoding="utf-8"?>
 <p:sld xmlns:a="http://schemas.openxmlformats.org/drawingml/2006/main" xmlns:r="http://schemas.openxmlformats.org/officeDocument/2006/relationships" xmlns:p="http://schemas.openxmlformats.org/presentationml/2006/main">
   <p:cSld>
     <p:spTree>

--- a/docs/scade.pptx
+++ b/docs/scade.pptx
@@ -5,28 +5,29 @@
     <p:sldMasterId id="2147483648" r:id="rId1"/>
   </p:sldMasterIdLst>
   <p:notesMasterIdLst>
-    <p:notesMasterId r:id="rId21"/>
+    <p:notesMasterId r:id="rId22"/>
   </p:notesMasterIdLst>
   <p:sldIdLst>
     <p:sldId id="256" r:id="rId2"/>
     <p:sldId id="269" r:id="rId3"/>
-    <p:sldId id="259" r:id="rId4"/>
-    <p:sldId id="266" r:id="rId5"/>
-    <p:sldId id="260" r:id="rId6"/>
-    <p:sldId id="267" r:id="rId7"/>
-    <p:sldId id="261" r:id="rId8"/>
-    <p:sldId id="268" r:id="rId9"/>
-    <p:sldId id="262" r:id="rId10"/>
-    <p:sldId id="263" r:id="rId11"/>
-    <p:sldId id="264" r:id="rId12"/>
-    <p:sldId id="265" r:id="rId13"/>
-    <p:sldId id="257" r:id="rId14"/>
-    <p:sldId id="258" r:id="rId15"/>
-    <p:sldId id="274" r:id="rId16"/>
-    <p:sldId id="270" r:id="rId17"/>
-    <p:sldId id="271" r:id="rId18"/>
-    <p:sldId id="273" r:id="rId19"/>
-    <p:sldId id="272" r:id="rId20"/>
+    <p:sldId id="275" r:id="rId4"/>
+    <p:sldId id="259" r:id="rId5"/>
+    <p:sldId id="266" r:id="rId6"/>
+    <p:sldId id="260" r:id="rId7"/>
+    <p:sldId id="267" r:id="rId8"/>
+    <p:sldId id="261" r:id="rId9"/>
+    <p:sldId id="268" r:id="rId10"/>
+    <p:sldId id="262" r:id="rId11"/>
+    <p:sldId id="263" r:id="rId12"/>
+    <p:sldId id="264" r:id="rId13"/>
+    <p:sldId id="265" r:id="rId14"/>
+    <p:sldId id="257" r:id="rId15"/>
+    <p:sldId id="258" r:id="rId16"/>
+    <p:sldId id="274" r:id="rId17"/>
+    <p:sldId id="270" r:id="rId18"/>
+    <p:sldId id="271" r:id="rId19"/>
+    <p:sldId id="273" r:id="rId20"/>
+    <p:sldId id="272" r:id="rId21"/>
   </p:sldIdLst>
   <p:sldSz cx="12192000" cy="6858000"/>
   <p:notesSz cx="6858000" cy="9144000"/>
@@ -215,7 +216,7 @@
           <a:p>
             <a:fld id="{3744C8BF-56B8-46D4-ADA5-A0AF811348DF}" type="datetimeFigureOut">
               <a:rPr lang="zh-CN" altLang="en-US" smtClean="0"/>
-              <a:t>2023/9/17</a:t>
+              <a:t>2023/9/24</a:t>
             </a:fld>
             <a:endParaRPr lang="zh-CN" altLang="en-US"/>
           </a:p>
@@ -547,7 +548,7 @@
           <a:p>
             <a:fld id="{2FDDA1C1-A742-400D-836A-F7BD60EEB8F0}" type="slidenum">
               <a:rPr lang="zh-CN" altLang="en-US" smtClean="0"/>
-              <a:t>7</a:t>
+              <a:t>8</a:t>
             </a:fld>
             <a:endParaRPr lang="zh-CN" altLang="en-US"/>
           </a:p>
@@ -713,7 +714,7 @@
           <a:p>
             <a:fld id="{C61D74A4-027F-4A2B-8B92-D0C194C50910}" type="datetimeFigureOut">
               <a:rPr lang="zh-CN" altLang="en-US" smtClean="0"/>
-              <a:t>2023/9/17</a:t>
+              <a:t>2023/9/24</a:t>
             </a:fld>
             <a:endParaRPr lang="zh-CN" altLang="en-US"/>
           </a:p>
@@ -911,7 +912,7 @@
           <a:p>
             <a:fld id="{C61D74A4-027F-4A2B-8B92-D0C194C50910}" type="datetimeFigureOut">
               <a:rPr lang="zh-CN" altLang="en-US" smtClean="0"/>
-              <a:t>2023/9/17</a:t>
+              <a:t>2023/9/24</a:t>
             </a:fld>
             <a:endParaRPr lang="zh-CN" altLang="en-US"/>
           </a:p>
@@ -1119,7 +1120,7 @@
           <a:p>
             <a:fld id="{C61D74A4-027F-4A2B-8B92-D0C194C50910}" type="datetimeFigureOut">
               <a:rPr lang="zh-CN" altLang="en-US" smtClean="0"/>
-              <a:t>2023/9/17</a:t>
+              <a:t>2023/9/24</a:t>
             </a:fld>
             <a:endParaRPr lang="zh-CN" altLang="en-US"/>
           </a:p>
@@ -1317,7 +1318,7 @@
           <a:p>
             <a:fld id="{C61D74A4-027F-4A2B-8B92-D0C194C50910}" type="datetimeFigureOut">
               <a:rPr lang="zh-CN" altLang="en-US" smtClean="0"/>
-              <a:t>2023/9/17</a:t>
+              <a:t>2023/9/24</a:t>
             </a:fld>
             <a:endParaRPr lang="zh-CN" altLang="en-US"/>
           </a:p>
@@ -1592,7 +1593,7 @@
           <a:p>
             <a:fld id="{C61D74A4-027F-4A2B-8B92-D0C194C50910}" type="datetimeFigureOut">
               <a:rPr lang="zh-CN" altLang="en-US" smtClean="0"/>
-              <a:t>2023/9/17</a:t>
+              <a:t>2023/9/24</a:t>
             </a:fld>
             <a:endParaRPr lang="zh-CN" altLang="en-US"/>
           </a:p>
@@ -1857,7 +1858,7 @@
           <a:p>
             <a:fld id="{C61D74A4-027F-4A2B-8B92-D0C194C50910}" type="datetimeFigureOut">
               <a:rPr lang="zh-CN" altLang="en-US" smtClean="0"/>
-              <a:t>2023/9/17</a:t>
+              <a:t>2023/9/24</a:t>
             </a:fld>
             <a:endParaRPr lang="zh-CN" altLang="en-US"/>
           </a:p>
@@ -2269,7 +2270,7 @@
           <a:p>
             <a:fld id="{C61D74A4-027F-4A2B-8B92-D0C194C50910}" type="datetimeFigureOut">
               <a:rPr lang="zh-CN" altLang="en-US" smtClean="0"/>
-              <a:t>2023/9/17</a:t>
+              <a:t>2023/9/24</a:t>
             </a:fld>
             <a:endParaRPr lang="zh-CN" altLang="en-US"/>
           </a:p>
@@ -2410,7 +2411,7 @@
           <a:p>
             <a:fld id="{C61D74A4-027F-4A2B-8B92-D0C194C50910}" type="datetimeFigureOut">
               <a:rPr lang="zh-CN" altLang="en-US" smtClean="0"/>
-              <a:t>2023/9/17</a:t>
+              <a:t>2023/9/24</a:t>
             </a:fld>
             <a:endParaRPr lang="zh-CN" altLang="en-US"/>
           </a:p>
@@ -2523,7 +2524,7 @@
           <a:p>
             <a:fld id="{C61D74A4-027F-4A2B-8B92-D0C194C50910}" type="datetimeFigureOut">
               <a:rPr lang="zh-CN" altLang="en-US" smtClean="0"/>
-              <a:t>2023/9/17</a:t>
+              <a:t>2023/9/24</a:t>
             </a:fld>
             <a:endParaRPr lang="zh-CN" altLang="en-US"/>
           </a:p>
@@ -2834,7 +2835,7 @@
           <a:p>
             <a:fld id="{C61D74A4-027F-4A2B-8B92-D0C194C50910}" type="datetimeFigureOut">
               <a:rPr lang="zh-CN" altLang="en-US" smtClean="0"/>
-              <a:t>2023/9/17</a:t>
+              <a:t>2023/9/24</a:t>
             </a:fld>
             <a:endParaRPr lang="zh-CN" altLang="en-US"/>
           </a:p>
@@ -3122,7 +3123,7 @@
           <a:p>
             <a:fld id="{C61D74A4-027F-4A2B-8B92-D0C194C50910}" type="datetimeFigureOut">
               <a:rPr lang="zh-CN" altLang="en-US" smtClean="0"/>
-              <a:t>2023/9/17</a:t>
+              <a:t>2023/9/24</a:t>
             </a:fld>
             <a:endParaRPr lang="zh-CN" altLang="en-US"/>
           </a:p>
@@ -3363,7 +3364,7 @@
           <a:p>
             <a:fld id="{C61D74A4-027F-4A2B-8B92-D0C194C50910}" type="datetimeFigureOut">
               <a:rPr lang="zh-CN" altLang="en-US" smtClean="0"/>
-              <a:t>2023/9/17</a:t>
+              <a:t>2023/9/24</a:t>
             </a:fld>
             <a:endParaRPr lang="zh-CN" altLang="en-US"/>
           </a:p>
@@ -4433,10 +4434,10 @@
       </p:grpSpPr>
       <p:pic>
         <p:nvPicPr>
-          <p:cNvPr id="4" name="图片 3">
-            <a:extLst>
-              <a:ext uri="{FF2B5EF4-FFF2-40B4-BE49-F238E27FC236}">
-                <a16:creationId xmlns:a16="http://schemas.microsoft.com/office/drawing/2014/main" id="{F923AEB7-25D5-4A2A-9BCD-6581A488A288}"/>
+          <p:cNvPr id="6" name="图片 5">
+            <a:extLst>
+              <a:ext uri="{FF2B5EF4-FFF2-40B4-BE49-F238E27FC236}">
+                <a16:creationId xmlns:a16="http://schemas.microsoft.com/office/drawing/2014/main" id="{509F50C0-73BE-4778-94E5-BE7191AE3A8B}"/>
               </a:ext>
             </a:extLst>
           </p:cNvPr>
@@ -4453,8 +4454,38 @@
         </p:blipFill>
         <p:spPr>
           <a:xfrm>
-            <a:off x="422991" y="270588"/>
-            <a:ext cx="5417039" cy="6144001"/>
+            <a:off x="746713" y="497560"/>
+            <a:ext cx="8861344" cy="3673223"/>
+          </a:xfrm>
+          <a:prstGeom prst="rect">
+            <a:avLst/>
+          </a:prstGeom>
+        </p:spPr>
+      </p:pic>
+      <p:pic>
+        <p:nvPicPr>
+          <p:cNvPr id="7" name="图片 6">
+            <a:extLst>
+              <a:ext uri="{FF2B5EF4-FFF2-40B4-BE49-F238E27FC236}">
+                <a16:creationId xmlns:a16="http://schemas.microsoft.com/office/drawing/2014/main" id="{510CFCDF-D4BF-4CF2-93AA-3D4B75DE96B2}"/>
+              </a:ext>
+            </a:extLst>
+          </p:cNvPr>
+          <p:cNvPicPr>
+            <a:picLocks noChangeAspect="1"/>
+          </p:cNvPicPr>
+          <p:nvPr/>
+        </p:nvPicPr>
+        <p:blipFill>
+          <a:blip r:embed="rId3"/>
+          <a:stretch>
+            <a:fillRect/>
+          </a:stretch>
+        </p:blipFill>
+        <p:spPr>
+          <a:xfrm>
+            <a:off x="959136" y="4336536"/>
+            <a:ext cx="10143099" cy="2309060"/>
           </a:xfrm>
           <a:prstGeom prst="rect">
             <a:avLst/>
@@ -4464,7 +4495,7 @@
     </p:spTree>
     <p:extLst>
       <p:ext uri="{BB962C8B-B14F-4D97-AF65-F5344CB8AC3E}">
-        <p14:creationId xmlns:p14="http://schemas.microsoft.com/office/powerpoint/2010/main" val="4186694113"/>
+        <p14:creationId xmlns:p14="http://schemas.microsoft.com/office/powerpoint/2010/main" val="3322273779"/>
       </p:ext>
     </p:extLst>
   </p:cSld>
@@ -4496,7 +4527,7 @@
           <p:cNvPr id="4" name="图片 3">
             <a:extLst>
               <a:ext uri="{FF2B5EF4-FFF2-40B4-BE49-F238E27FC236}">
-                <a16:creationId xmlns:a16="http://schemas.microsoft.com/office/drawing/2014/main" id="{59EC8BF8-1703-4AB3-B5EE-8EBAC9BF506C}"/>
+                <a16:creationId xmlns:a16="http://schemas.microsoft.com/office/drawing/2014/main" id="{F923AEB7-25D5-4A2A-9BCD-6581A488A288}"/>
               </a:ext>
             </a:extLst>
           </p:cNvPr>
@@ -4513,38 +4544,8 @@
         </p:blipFill>
         <p:spPr>
           <a:xfrm>
-            <a:off x="580695" y="563053"/>
-            <a:ext cx="5027833" cy="5414652"/>
-          </a:xfrm>
-          <a:prstGeom prst="rect">
-            <a:avLst/>
-          </a:prstGeom>
-        </p:spPr>
-      </p:pic>
-      <p:pic>
-        <p:nvPicPr>
-          <p:cNvPr id="5" name="图片 4">
-            <a:extLst>
-              <a:ext uri="{FF2B5EF4-FFF2-40B4-BE49-F238E27FC236}">
-                <a16:creationId xmlns:a16="http://schemas.microsoft.com/office/drawing/2014/main" id="{3BFACC51-F388-4A0A-8D91-0DF76EA1AA31}"/>
-              </a:ext>
-            </a:extLst>
-          </p:cNvPr>
-          <p:cNvPicPr>
-            <a:picLocks noChangeAspect="1"/>
-          </p:cNvPicPr>
-          <p:nvPr/>
-        </p:nvPicPr>
-        <p:blipFill>
-          <a:blip r:embed="rId3"/>
-          <a:stretch>
-            <a:fillRect/>
-          </a:stretch>
-        </p:blipFill>
-        <p:spPr>
-          <a:xfrm>
-            <a:off x="6827939" y="132190"/>
-            <a:ext cx="4694327" cy="6439458"/>
+            <a:off x="422991" y="270588"/>
+            <a:ext cx="5417039" cy="6144001"/>
           </a:xfrm>
           <a:prstGeom prst="rect">
             <a:avLst/>
@@ -4554,7 +4555,7 @@
     </p:spTree>
     <p:extLst>
       <p:ext uri="{BB962C8B-B14F-4D97-AF65-F5344CB8AC3E}">
-        <p14:creationId xmlns:p14="http://schemas.microsoft.com/office/powerpoint/2010/main" val="2469949492"/>
+        <p14:creationId xmlns:p14="http://schemas.microsoft.com/office/powerpoint/2010/main" val="4186694113"/>
       </p:ext>
     </p:extLst>
   </p:cSld>
@@ -4586,7 +4587,7 @@
           <p:cNvPr id="4" name="图片 3">
             <a:extLst>
               <a:ext uri="{FF2B5EF4-FFF2-40B4-BE49-F238E27FC236}">
-                <a16:creationId xmlns:a16="http://schemas.microsoft.com/office/drawing/2014/main" id="{611ABE26-711E-40FE-AA87-9995F7ECB3E1}"/>
+                <a16:creationId xmlns:a16="http://schemas.microsoft.com/office/drawing/2014/main" id="{59EC8BF8-1703-4AB3-B5EE-8EBAC9BF506C}"/>
               </a:ext>
             </a:extLst>
           </p:cNvPr>
@@ -4603,8 +4604,8 @@
         </p:blipFill>
         <p:spPr>
           <a:xfrm>
-            <a:off x="323004" y="223524"/>
-            <a:ext cx="1562235" cy="495343"/>
+            <a:off x="580695" y="563053"/>
+            <a:ext cx="5027833" cy="5414652"/>
           </a:xfrm>
           <a:prstGeom prst="rect">
             <a:avLst/>
@@ -4616,7 +4617,7 @@
           <p:cNvPr id="5" name="图片 4">
             <a:extLst>
               <a:ext uri="{FF2B5EF4-FFF2-40B4-BE49-F238E27FC236}">
-                <a16:creationId xmlns:a16="http://schemas.microsoft.com/office/drawing/2014/main" id="{00DE3585-0865-47A2-A442-B24DD009E3FB}"/>
+                <a16:creationId xmlns:a16="http://schemas.microsoft.com/office/drawing/2014/main" id="{3BFACC51-F388-4A0A-8D91-0DF76EA1AA31}"/>
               </a:ext>
             </a:extLst>
           </p:cNvPr>
@@ -4633,38 +4634,8 @@
         </p:blipFill>
         <p:spPr>
           <a:xfrm>
-            <a:off x="217961" y="919064"/>
-            <a:ext cx="5075360" cy="1280271"/>
-          </a:xfrm>
-          <a:prstGeom prst="rect">
-            <a:avLst/>
-          </a:prstGeom>
-        </p:spPr>
-      </p:pic>
-      <p:pic>
-        <p:nvPicPr>
-          <p:cNvPr id="6" name="图片 5">
-            <a:extLst>
-              <a:ext uri="{FF2B5EF4-FFF2-40B4-BE49-F238E27FC236}">
-                <a16:creationId xmlns:a16="http://schemas.microsoft.com/office/drawing/2014/main" id="{EF26B6EB-ECC1-4099-BBC2-F9186EAF0306}"/>
-              </a:ext>
-            </a:extLst>
-          </p:cNvPr>
-          <p:cNvPicPr>
-            <a:picLocks noChangeAspect="1"/>
-          </p:cNvPicPr>
-          <p:nvPr/>
-        </p:nvPicPr>
-        <p:blipFill>
-          <a:blip r:embed="rId4"/>
-          <a:stretch>
-            <a:fillRect/>
-          </a:stretch>
-        </p:blipFill>
-        <p:spPr>
-          <a:xfrm>
-            <a:off x="217961" y="2399532"/>
-            <a:ext cx="4298052" cy="1219306"/>
+            <a:off x="6827939" y="132190"/>
+            <a:ext cx="4694327" cy="6439458"/>
           </a:xfrm>
           <a:prstGeom prst="rect">
             <a:avLst/>
@@ -4674,7 +4645,7 @@
     </p:spTree>
     <p:extLst>
       <p:ext uri="{BB962C8B-B14F-4D97-AF65-F5344CB8AC3E}">
-        <p14:creationId xmlns:p14="http://schemas.microsoft.com/office/powerpoint/2010/main" val="3825534563"/>
+        <p14:creationId xmlns:p14="http://schemas.microsoft.com/office/powerpoint/2010/main" val="2469949492"/>
       </p:ext>
     </p:extLst>
   </p:cSld>
@@ -4701,227 +4672,12 @@
           <a:chExt cx="0" cy="0"/>
         </a:xfrm>
       </p:grpSpPr>
-      <p:sp>
-        <p:nvSpPr>
-          <p:cNvPr id="4" name="文本框 3">
-            <a:extLst>
-              <a:ext uri="{FF2B5EF4-FFF2-40B4-BE49-F238E27FC236}">
-                <a16:creationId xmlns:a16="http://schemas.microsoft.com/office/drawing/2014/main" id="{4BBA05C8-9C7A-43DF-9507-9E1E7563848A}"/>
-              </a:ext>
-            </a:extLst>
-          </p:cNvPr>
-          <p:cNvSpPr txBox="1"/>
-          <p:nvPr/>
-        </p:nvSpPr>
-        <p:spPr>
-          <a:xfrm>
-            <a:off x="6220408" y="130628"/>
-            <a:ext cx="5971592" cy="6186309"/>
-          </a:xfrm>
-          <a:prstGeom prst="rect">
-            <a:avLst/>
-          </a:prstGeom>
-          <a:noFill/>
-        </p:spPr>
-        <p:txBody>
-          <a:bodyPr wrap="square" rtlCol="0">
-            <a:spAutoFit/>
-          </a:bodyPr>
-          <a:lstStyle/>
-          <a:p>
-            <a:r>
-              <a:rPr lang="en-US" altLang="zh-CN" b="1">
-                <a:solidFill>
-                  <a:srgbClr val="FF0000"/>
-                </a:solidFill>
-              </a:rPr>
-              <a:t>sensor temp : float32;</a:t>
-            </a:r>
-          </a:p>
-          <a:p>
-            <a:endParaRPr lang="en-US" altLang="zh-CN"/>
-          </a:p>
-          <a:p>
-            <a:r>
-              <a:rPr lang="en-US" altLang="zh-CN"/>
-              <a:t>const zero : float32 = 0.0;</a:t>
-            </a:r>
-          </a:p>
-          <a:p>
-            <a:endParaRPr lang="en-US" altLang="zh-CN"/>
-          </a:p>
-          <a:p>
-            <a:endParaRPr lang="en-US" altLang="zh-CN"/>
-          </a:p>
-          <a:p>
-            <a:r>
-              <a:rPr lang="en-US" altLang="zh-CN"/>
-              <a:t>/* xscade source: D:/scade_pro/example_const/Operator11.xscade */</a:t>
-            </a:r>
-          </a:p>
-          <a:p>
-            <a:r>
-              <a:rPr lang="en-US" altLang="zh-CN" b="1">
-                <a:solidFill>
-                  <a:srgbClr val="FF0000"/>
-                </a:solidFill>
-              </a:rPr>
-              <a:t>node gradient() returns (diff : float32)</a:t>
-            </a:r>
-          </a:p>
-          <a:p>
-            <a:r>
-              <a:rPr lang="en-US" altLang="zh-CN" b="1">
-                <a:solidFill>
-                  <a:srgbClr val="FF0000"/>
-                </a:solidFill>
-              </a:rPr>
-              <a:t>var</a:t>
-            </a:r>
-          </a:p>
-          <a:p>
-            <a:r>
-              <a:rPr lang="en-US" altLang="zh-CN" b="1">
-                <a:solidFill>
-                  <a:srgbClr val="FF0000"/>
-                </a:solidFill>
-              </a:rPr>
-              <a:t>  _L1 : float32;</a:t>
-            </a:r>
-          </a:p>
-          <a:p>
-            <a:r>
-              <a:rPr lang="en-US" altLang="zh-CN" b="1">
-                <a:solidFill>
-                  <a:srgbClr val="FF0000"/>
-                </a:solidFill>
-              </a:rPr>
-              <a:t>  _L2 : float32;</a:t>
-            </a:r>
-          </a:p>
-          <a:p>
-            <a:r>
-              <a:rPr lang="en-US" altLang="zh-CN" b="1">
-                <a:solidFill>
-                  <a:srgbClr val="FF0000"/>
-                </a:solidFill>
-              </a:rPr>
-              <a:t>  _L3 : float32;</a:t>
-            </a:r>
-          </a:p>
-          <a:p>
-            <a:r>
-              <a:rPr lang="en-US" altLang="zh-CN" b="1">
-                <a:solidFill>
-                  <a:srgbClr val="FF0000"/>
-                </a:solidFill>
-              </a:rPr>
-              <a:t>  _L5 : float32;</a:t>
-            </a:r>
-          </a:p>
-          <a:p>
-            <a:r>
-              <a:rPr lang="en-US" altLang="zh-CN" b="1">
-                <a:solidFill>
-                  <a:srgbClr val="FF0000"/>
-                </a:solidFill>
-              </a:rPr>
-              <a:t>  _L7 : float32;</a:t>
-            </a:r>
-          </a:p>
-          <a:p>
-            <a:r>
-              <a:rPr lang="en-US" altLang="zh-CN" b="1">
-                <a:solidFill>
-                  <a:srgbClr val="FF0000"/>
-                </a:solidFill>
-              </a:rPr>
-              <a:t>let</a:t>
-            </a:r>
-          </a:p>
-          <a:p>
-            <a:r>
-              <a:rPr lang="en-US" altLang="zh-CN" b="1">
-                <a:solidFill>
-                  <a:srgbClr val="FF0000"/>
-                </a:solidFill>
-              </a:rPr>
-              <a:t>  diff= _L1;</a:t>
-            </a:r>
-          </a:p>
-          <a:p>
-            <a:r>
-              <a:rPr lang="en-US" altLang="zh-CN" b="1">
-                <a:solidFill>
-                  <a:srgbClr val="FF0000"/>
-                </a:solidFill>
-              </a:rPr>
-              <a:t>  _L1= (_L7) #1 -&gt; (_L5);</a:t>
-            </a:r>
-          </a:p>
-          <a:p>
-            <a:r>
-              <a:rPr lang="en-US" altLang="zh-CN" b="1">
-                <a:solidFill>
-                  <a:srgbClr val="FF0000"/>
-                </a:solidFill>
-              </a:rPr>
-              <a:t>  _L2= temp;</a:t>
-            </a:r>
-          </a:p>
-          <a:p>
-            <a:r>
-              <a:rPr lang="en-US" altLang="zh-CN" b="1">
-                <a:solidFill>
-                  <a:srgbClr val="FF0000"/>
-                </a:solidFill>
-              </a:rPr>
-              <a:t>  _L3= #1 pre (_L2);</a:t>
-            </a:r>
-          </a:p>
-          <a:p>
-            <a:r>
-              <a:rPr lang="en-US" altLang="zh-CN" b="1">
-                <a:solidFill>
-                  <a:srgbClr val="FF0000"/>
-                </a:solidFill>
-              </a:rPr>
-              <a:t>  _L5= _L2 #1 - _L3;</a:t>
-            </a:r>
-          </a:p>
-          <a:p>
-            <a:r>
-              <a:rPr lang="en-US" altLang="zh-CN" b="1">
-                <a:solidFill>
-                  <a:srgbClr val="FF0000"/>
-                </a:solidFill>
-              </a:rPr>
-              <a:t>  _L7= zero;</a:t>
-            </a:r>
-          </a:p>
-          <a:p>
-            <a:r>
-              <a:rPr lang="en-US" altLang="zh-CN" b="1">
-                <a:solidFill>
-                  <a:srgbClr val="FF0000"/>
-                </a:solidFill>
-              </a:rPr>
-              <a:t>tel</a:t>
-            </a:r>
-            <a:endParaRPr lang="zh-CN" altLang="en-US" b="1">
-              <a:solidFill>
-                <a:srgbClr val="FF0000"/>
-              </a:solidFill>
-            </a:endParaRPr>
-          </a:p>
-        </p:txBody>
-      </p:sp>
       <p:pic>
         <p:nvPicPr>
-          <p:cNvPr id="5" name="图片 4">
-            <a:extLst>
-              <a:ext uri="{FF2B5EF4-FFF2-40B4-BE49-F238E27FC236}">
-                <a16:creationId xmlns:a16="http://schemas.microsoft.com/office/drawing/2014/main" id="{B42D7B8F-679B-4ACE-BAFF-636144F293CE}"/>
+          <p:cNvPr id="4" name="图片 3">
+            <a:extLst>
+              <a:ext uri="{FF2B5EF4-FFF2-40B4-BE49-F238E27FC236}">
+                <a16:creationId xmlns:a16="http://schemas.microsoft.com/office/drawing/2014/main" id="{611ABE26-711E-40FE-AA87-9995F7ECB3E1}"/>
               </a:ext>
             </a:extLst>
           </p:cNvPr>
@@ -4938,8 +4694,8 @@
         </p:blipFill>
         <p:spPr>
           <a:xfrm>
-            <a:off x="504758" y="345805"/>
-            <a:ext cx="4221846" cy="1127858"/>
+            <a:off x="323004" y="223524"/>
+            <a:ext cx="1562235" cy="495343"/>
           </a:xfrm>
           <a:prstGeom prst="rect">
             <a:avLst/>
@@ -4948,10 +4704,10 @@
       </p:pic>
       <p:pic>
         <p:nvPicPr>
-          <p:cNvPr id="6" name="图片 5">
-            <a:extLst>
-              <a:ext uri="{FF2B5EF4-FFF2-40B4-BE49-F238E27FC236}">
-                <a16:creationId xmlns:a16="http://schemas.microsoft.com/office/drawing/2014/main" id="{84699F2B-D1A5-4EAF-A897-C5290F1D34E6}"/>
+          <p:cNvPr id="5" name="图片 4">
+            <a:extLst>
+              <a:ext uri="{FF2B5EF4-FFF2-40B4-BE49-F238E27FC236}">
+                <a16:creationId xmlns:a16="http://schemas.microsoft.com/office/drawing/2014/main" id="{00DE3585-0865-47A2-A442-B24DD009E3FB}"/>
               </a:ext>
             </a:extLst>
           </p:cNvPr>
@@ -4968,8 +4724,38 @@
         </p:blipFill>
         <p:spPr>
           <a:xfrm>
-            <a:off x="185822" y="1995816"/>
-            <a:ext cx="5662151" cy="1821338"/>
+            <a:off x="217961" y="919064"/>
+            <a:ext cx="5075360" cy="1280271"/>
+          </a:xfrm>
+          <a:prstGeom prst="rect">
+            <a:avLst/>
+          </a:prstGeom>
+        </p:spPr>
+      </p:pic>
+      <p:pic>
+        <p:nvPicPr>
+          <p:cNvPr id="6" name="图片 5">
+            <a:extLst>
+              <a:ext uri="{FF2B5EF4-FFF2-40B4-BE49-F238E27FC236}">
+                <a16:creationId xmlns:a16="http://schemas.microsoft.com/office/drawing/2014/main" id="{EF26B6EB-ECC1-4099-BBC2-F9186EAF0306}"/>
+              </a:ext>
+            </a:extLst>
+          </p:cNvPr>
+          <p:cNvPicPr>
+            <a:picLocks noChangeAspect="1"/>
+          </p:cNvPicPr>
+          <p:nvPr/>
+        </p:nvPicPr>
+        <p:blipFill>
+          <a:blip r:embed="rId4"/>
+          <a:stretch>
+            <a:fillRect/>
+          </a:stretch>
+        </p:blipFill>
+        <p:spPr>
+          <a:xfrm>
+            <a:off x="217961" y="2399532"/>
+            <a:ext cx="4298052" cy="1219306"/>
           </a:xfrm>
           <a:prstGeom prst="rect">
             <a:avLst/>
@@ -4979,7 +4765,7 @@
     </p:spTree>
     <p:extLst>
       <p:ext uri="{BB962C8B-B14F-4D97-AF65-F5344CB8AC3E}">
-        <p14:creationId xmlns:p14="http://schemas.microsoft.com/office/powerpoint/2010/main" val="1578636295"/>
+        <p14:creationId xmlns:p14="http://schemas.microsoft.com/office/powerpoint/2010/main" val="3825534563"/>
       </p:ext>
     </p:extLst>
   </p:cSld>
@@ -5008,10 +4794,10 @@
       </p:grpSpPr>
       <p:sp>
         <p:nvSpPr>
-          <p:cNvPr id="5" name="文本框 4">
-            <a:extLst>
-              <a:ext uri="{FF2B5EF4-FFF2-40B4-BE49-F238E27FC236}">
-                <a16:creationId xmlns:a16="http://schemas.microsoft.com/office/drawing/2014/main" id="{EED49A9D-9A14-4B06-98C1-70B8156A8EA7}"/>
+          <p:cNvPr id="4" name="文本框 3">
+            <a:extLst>
+              <a:ext uri="{FF2B5EF4-FFF2-40B4-BE49-F238E27FC236}">
+                <a16:creationId xmlns:a16="http://schemas.microsoft.com/office/drawing/2014/main" id="{4BBA05C8-9C7A-43DF-9507-9E1E7563848A}"/>
               </a:ext>
             </a:extLst>
           </p:cNvPr>
@@ -5020,8 +4806,8 @@
         </p:nvSpPr>
         <p:spPr>
           <a:xfrm>
-            <a:off x="130629" y="214604"/>
-            <a:ext cx="3303036" cy="646331"/>
+            <a:off x="6220408" y="130628"/>
+            <a:ext cx="5971592" cy="6186309"/>
           </a:xfrm>
           <a:prstGeom prst="rect">
             <a:avLst/>
@@ -5035,191 +4821,256 @@
           <a:lstStyle/>
           <a:p>
             <a:r>
+              <a:rPr lang="en-US" altLang="zh-CN" b="1">
+                <a:solidFill>
+                  <a:srgbClr val="FF0000"/>
+                </a:solidFill>
+              </a:rPr>
+              <a:t>sensor temp : float32;</a:t>
+            </a:r>
+          </a:p>
+          <a:p>
+            <a:endParaRPr lang="en-US" altLang="zh-CN"/>
+          </a:p>
+          <a:p>
+            <a:r>
               <a:rPr lang="en-US" altLang="zh-CN"/>
-              <a:t>extern kcg_float32 temp;</a:t>
-            </a:r>
-          </a:p>
-          <a:p>
-            <a:endParaRPr lang="zh-CN" altLang="en-US"/>
-          </a:p>
-        </p:txBody>
-      </p:sp>
-      <p:sp>
-        <p:nvSpPr>
-          <p:cNvPr id="6" name="文本框 5">
-            <a:extLst>
-              <a:ext uri="{FF2B5EF4-FFF2-40B4-BE49-F238E27FC236}">
-                <a16:creationId xmlns:a16="http://schemas.microsoft.com/office/drawing/2014/main" id="{E02C9F65-D76A-44CC-9509-F9259A6904E7}"/>
-              </a:ext>
-            </a:extLst>
-          </p:cNvPr>
-          <p:cNvSpPr txBox="1"/>
+              <a:t>const zero : float32 = 0.0;</a:t>
+            </a:r>
+          </a:p>
+          <a:p>
+            <a:endParaRPr lang="en-US" altLang="zh-CN"/>
+          </a:p>
+          <a:p>
+            <a:endParaRPr lang="en-US" altLang="zh-CN"/>
+          </a:p>
+          <a:p>
+            <a:r>
+              <a:rPr lang="en-US" altLang="zh-CN"/>
+              <a:t>/* xscade source: D:/scade_pro/example_const/Operator11.xscade */</a:t>
+            </a:r>
+          </a:p>
+          <a:p>
+            <a:r>
+              <a:rPr lang="en-US" altLang="zh-CN" b="1">
+                <a:solidFill>
+                  <a:srgbClr val="FF0000"/>
+                </a:solidFill>
+              </a:rPr>
+              <a:t>node gradient() returns (diff : float32)</a:t>
+            </a:r>
+          </a:p>
+          <a:p>
+            <a:r>
+              <a:rPr lang="en-US" altLang="zh-CN" b="1">
+                <a:solidFill>
+                  <a:srgbClr val="FF0000"/>
+                </a:solidFill>
+              </a:rPr>
+              <a:t>var</a:t>
+            </a:r>
+          </a:p>
+          <a:p>
+            <a:r>
+              <a:rPr lang="en-US" altLang="zh-CN" b="1">
+                <a:solidFill>
+                  <a:srgbClr val="FF0000"/>
+                </a:solidFill>
+              </a:rPr>
+              <a:t>  _L1 : float32;</a:t>
+            </a:r>
+          </a:p>
+          <a:p>
+            <a:r>
+              <a:rPr lang="en-US" altLang="zh-CN" b="1">
+                <a:solidFill>
+                  <a:srgbClr val="FF0000"/>
+                </a:solidFill>
+              </a:rPr>
+              <a:t>  _L2 : float32;</a:t>
+            </a:r>
+          </a:p>
+          <a:p>
+            <a:r>
+              <a:rPr lang="en-US" altLang="zh-CN" b="1">
+                <a:solidFill>
+                  <a:srgbClr val="FF0000"/>
+                </a:solidFill>
+              </a:rPr>
+              <a:t>  _L3 : float32;</a:t>
+            </a:r>
+          </a:p>
+          <a:p>
+            <a:r>
+              <a:rPr lang="en-US" altLang="zh-CN" b="1">
+                <a:solidFill>
+                  <a:srgbClr val="FF0000"/>
+                </a:solidFill>
+              </a:rPr>
+              <a:t>  _L5 : float32;</a:t>
+            </a:r>
+          </a:p>
+          <a:p>
+            <a:r>
+              <a:rPr lang="en-US" altLang="zh-CN" b="1">
+                <a:solidFill>
+                  <a:srgbClr val="FF0000"/>
+                </a:solidFill>
+              </a:rPr>
+              <a:t>  _L7 : float32;</a:t>
+            </a:r>
+          </a:p>
+          <a:p>
+            <a:r>
+              <a:rPr lang="en-US" altLang="zh-CN" b="1">
+                <a:solidFill>
+                  <a:srgbClr val="FF0000"/>
+                </a:solidFill>
+              </a:rPr>
+              <a:t>let</a:t>
+            </a:r>
+          </a:p>
+          <a:p>
+            <a:r>
+              <a:rPr lang="en-US" altLang="zh-CN" b="1">
+                <a:solidFill>
+                  <a:srgbClr val="FF0000"/>
+                </a:solidFill>
+              </a:rPr>
+              <a:t>  diff= _L1;</a:t>
+            </a:r>
+          </a:p>
+          <a:p>
+            <a:r>
+              <a:rPr lang="en-US" altLang="zh-CN" b="1">
+                <a:solidFill>
+                  <a:srgbClr val="FF0000"/>
+                </a:solidFill>
+              </a:rPr>
+              <a:t>  _L1= (_L7) #1 -&gt; (_L5);</a:t>
+            </a:r>
+          </a:p>
+          <a:p>
+            <a:r>
+              <a:rPr lang="en-US" altLang="zh-CN" b="1">
+                <a:solidFill>
+                  <a:srgbClr val="FF0000"/>
+                </a:solidFill>
+              </a:rPr>
+              <a:t>  _L2= temp;</a:t>
+            </a:r>
+          </a:p>
+          <a:p>
+            <a:r>
+              <a:rPr lang="en-US" altLang="zh-CN" b="1">
+                <a:solidFill>
+                  <a:srgbClr val="FF0000"/>
+                </a:solidFill>
+              </a:rPr>
+              <a:t>  _L3= #1 pre (_L2);</a:t>
+            </a:r>
+          </a:p>
+          <a:p>
+            <a:r>
+              <a:rPr lang="en-US" altLang="zh-CN" b="1">
+                <a:solidFill>
+                  <a:srgbClr val="FF0000"/>
+                </a:solidFill>
+              </a:rPr>
+              <a:t>  _L5= _L2 #1 - _L3;</a:t>
+            </a:r>
+          </a:p>
+          <a:p>
+            <a:r>
+              <a:rPr lang="en-US" altLang="zh-CN" b="1">
+                <a:solidFill>
+                  <a:srgbClr val="FF0000"/>
+                </a:solidFill>
+              </a:rPr>
+              <a:t>  _L7= zero;</a:t>
+            </a:r>
+          </a:p>
+          <a:p>
+            <a:r>
+              <a:rPr lang="en-US" altLang="zh-CN" b="1">
+                <a:solidFill>
+                  <a:srgbClr val="FF0000"/>
+                </a:solidFill>
+              </a:rPr>
+              <a:t>tel</a:t>
+            </a:r>
+            <a:endParaRPr lang="zh-CN" altLang="en-US" b="1">
+              <a:solidFill>
+                <a:srgbClr val="FF0000"/>
+              </a:solidFill>
+            </a:endParaRPr>
+          </a:p>
+        </p:txBody>
+      </p:sp>
+      <p:pic>
+        <p:nvPicPr>
+          <p:cNvPr id="5" name="图片 4">
+            <a:extLst>
+              <a:ext uri="{FF2B5EF4-FFF2-40B4-BE49-F238E27FC236}">
+                <a16:creationId xmlns:a16="http://schemas.microsoft.com/office/drawing/2014/main" id="{B42D7B8F-679B-4ACE-BAFF-636144F293CE}"/>
+              </a:ext>
+            </a:extLst>
+          </p:cNvPr>
+          <p:cNvPicPr>
+            <a:picLocks noChangeAspect="1"/>
+          </p:cNvPicPr>
           <p:nvPr/>
-        </p:nvSpPr>
-        <p:spPr>
-          <a:xfrm>
-            <a:off x="130629" y="860935"/>
-            <a:ext cx="5598367" cy="3693319"/>
+        </p:nvPicPr>
+        <p:blipFill>
+          <a:blip r:embed="rId2"/>
+          <a:stretch>
+            <a:fillRect/>
+          </a:stretch>
+        </p:blipFill>
+        <p:spPr>
+          <a:xfrm>
+            <a:off x="504758" y="345805"/>
+            <a:ext cx="4221846" cy="1127858"/>
           </a:xfrm>
           <a:prstGeom prst="rect">
             <a:avLst/>
           </a:prstGeom>
-          <a:noFill/>
-        </p:spPr>
-        <p:txBody>
-          <a:bodyPr wrap="square" rtlCol="0">
-            <a:spAutoFit/>
-          </a:bodyPr>
-          <a:lstStyle/>
-          <a:p>
-            <a:r>
-              <a:rPr lang="en-US" altLang="zh-CN"/>
-              <a:t>void gradient(outC_gradient *outC)</a:t>
-            </a:r>
-          </a:p>
-          <a:p>
-            <a:r>
-              <a:rPr lang="en-US" altLang="zh-CN"/>
-              <a:t>{</a:t>
-            </a:r>
-          </a:p>
-          <a:p>
-            <a:r>
-              <a:rPr lang="en-US" altLang="zh-CN"/>
-              <a:t>  /* _L1= */</a:t>
-            </a:r>
-          </a:p>
-          <a:p>
-            <a:r>
-              <a:rPr lang="en-US" altLang="zh-CN"/>
-              <a:t>  if (outC-&gt;init) {</a:t>
-            </a:r>
-          </a:p>
-          <a:p>
-            <a:r>
-              <a:rPr lang="en-US" altLang="zh-CN"/>
-              <a:t>    outC-&gt;init = kcg_false;</a:t>
-            </a:r>
-          </a:p>
-          <a:p>
-            <a:r>
-              <a:rPr lang="en-US" altLang="zh-CN"/>
-              <a:t>    outC-&gt;diff = zero;</a:t>
-            </a:r>
-          </a:p>
-          <a:p>
-            <a:r>
-              <a:rPr lang="en-US" altLang="zh-CN"/>
-              <a:t>  }</a:t>
-            </a:r>
-          </a:p>
-          <a:p>
-            <a:r>
-              <a:rPr lang="en-US" altLang="zh-CN"/>
-              <a:t>  else {</a:t>
-            </a:r>
-          </a:p>
-          <a:p>
-            <a:r>
-              <a:rPr lang="en-US" altLang="zh-CN"/>
-              <a:t>    outC-&gt;diff = temp - outC-&gt;_L2;</a:t>
-            </a:r>
-          </a:p>
-          <a:p>
-            <a:r>
-              <a:rPr lang="en-US" altLang="zh-CN"/>
-              <a:t>  }</a:t>
-            </a:r>
-          </a:p>
-          <a:p>
-            <a:r>
-              <a:rPr lang="en-US" altLang="zh-CN"/>
-              <a:t>  outC-&gt;_L2 = temp;</a:t>
-            </a:r>
-          </a:p>
-          <a:p>
-            <a:r>
-              <a:rPr lang="en-US" altLang="zh-CN"/>
-              <a:t>}</a:t>
-            </a:r>
-          </a:p>
-          <a:p>
-            <a:endParaRPr lang="zh-CN" altLang="en-US"/>
-          </a:p>
-        </p:txBody>
-      </p:sp>
-      <p:sp>
-        <p:nvSpPr>
-          <p:cNvPr id="7" name="文本框 6">
-            <a:extLst>
-              <a:ext uri="{FF2B5EF4-FFF2-40B4-BE49-F238E27FC236}">
-                <a16:creationId xmlns:a16="http://schemas.microsoft.com/office/drawing/2014/main" id="{40C8EAF5-0143-40A6-B251-9A3E3D26FB65}"/>
-              </a:ext>
-            </a:extLst>
-          </p:cNvPr>
-          <p:cNvSpPr txBox="1"/>
+        </p:spPr>
+      </p:pic>
+      <p:pic>
+        <p:nvPicPr>
+          <p:cNvPr id="6" name="图片 5">
+            <a:extLst>
+              <a:ext uri="{FF2B5EF4-FFF2-40B4-BE49-F238E27FC236}">
+                <a16:creationId xmlns:a16="http://schemas.microsoft.com/office/drawing/2014/main" id="{84699F2B-D1A5-4EAF-A897-C5290F1D34E6}"/>
+              </a:ext>
+            </a:extLst>
+          </p:cNvPr>
+          <p:cNvPicPr>
+            <a:picLocks noChangeAspect="1"/>
+          </p:cNvPicPr>
           <p:nvPr/>
-        </p:nvSpPr>
-        <p:spPr>
-          <a:xfrm>
-            <a:off x="4907902" y="860935"/>
-            <a:ext cx="6606074" cy="2031325"/>
+        </p:nvPicPr>
+        <p:blipFill>
+          <a:blip r:embed="rId3"/>
+          <a:stretch>
+            <a:fillRect/>
+          </a:stretch>
+        </p:blipFill>
+        <p:spPr>
+          <a:xfrm>
+            <a:off x="185822" y="1995816"/>
+            <a:ext cx="5662151" cy="1821338"/>
           </a:xfrm>
           <a:prstGeom prst="rect">
             <a:avLst/>
           </a:prstGeom>
-          <a:noFill/>
-        </p:spPr>
-        <p:txBody>
-          <a:bodyPr wrap="square" rtlCol="0">
-            <a:spAutoFit/>
-          </a:bodyPr>
-          <a:lstStyle/>
-          <a:p>
-            <a:r>
-              <a:rPr lang="en-US" altLang="zh-CN"/>
-              <a:t>typedef struct {</a:t>
-            </a:r>
-          </a:p>
-          <a:p>
-            <a:r>
-              <a:rPr lang="en-US" altLang="zh-CN"/>
-              <a:t>    kcg_float32 /* _L1/, diff/ */ diff;</a:t>
-            </a:r>
-          </a:p>
-          <a:p>
-            <a:r>
-              <a:rPr lang="en-US" altLang="zh-CN"/>
-              <a:t>  kcg_bool init;</a:t>
-            </a:r>
-          </a:p>
-          <a:p>
-            <a:r>
-              <a:rPr lang="en-US" altLang="zh-CN"/>
-              <a:t>  kcg_float32 /* _L2/ */ _L2;</a:t>
-            </a:r>
-          </a:p>
-          <a:p>
-            <a:r>
-              <a:rPr lang="en-US" altLang="zh-CN"/>
-              <a:t>} outC_gradient;</a:t>
-            </a:r>
-          </a:p>
-          <a:p>
-            <a:r>
-              <a:rPr lang="en-US" altLang="zh-CN"/>
-              <a:t>extern void gradient(outC_gradient *outC);</a:t>
-            </a:r>
-          </a:p>
-          <a:p>
-            <a:endParaRPr lang="zh-CN" altLang="en-US"/>
-          </a:p>
-        </p:txBody>
-      </p:sp>
+        </p:spPr>
+      </p:pic>
     </p:spTree>
     <p:extLst>
       <p:ext uri="{BB962C8B-B14F-4D97-AF65-F5344CB8AC3E}">
-        <p14:creationId xmlns:p14="http://schemas.microsoft.com/office/powerpoint/2010/main" val="4149668451"/>
+        <p14:creationId xmlns:p14="http://schemas.microsoft.com/office/powerpoint/2010/main" val="1578636295"/>
       </p:ext>
     </p:extLst>
   </p:cSld>
@@ -5246,70 +5097,220 @@
           <a:chExt cx="0" cy="0"/>
         </a:xfrm>
       </p:grpSpPr>
-      <p:pic>
-        <p:nvPicPr>
-          <p:cNvPr id="4" name="图片 3">
-            <a:extLst>
-              <a:ext uri="{FF2B5EF4-FFF2-40B4-BE49-F238E27FC236}">
-                <a16:creationId xmlns:a16="http://schemas.microsoft.com/office/drawing/2014/main" id="{49B21B92-F465-4FAA-9817-7A1D5DD58929}"/>
-              </a:ext>
-            </a:extLst>
-          </p:cNvPr>
-          <p:cNvPicPr>
-            <a:picLocks noChangeAspect="1"/>
-          </p:cNvPicPr>
+      <p:sp>
+        <p:nvSpPr>
+          <p:cNvPr id="5" name="文本框 4">
+            <a:extLst>
+              <a:ext uri="{FF2B5EF4-FFF2-40B4-BE49-F238E27FC236}">
+                <a16:creationId xmlns:a16="http://schemas.microsoft.com/office/drawing/2014/main" id="{EED49A9D-9A14-4B06-98C1-70B8156A8EA7}"/>
+              </a:ext>
+            </a:extLst>
+          </p:cNvPr>
+          <p:cNvSpPr txBox="1"/>
           <p:nvPr/>
-        </p:nvPicPr>
-        <p:blipFill>
-          <a:blip r:embed="rId2"/>
-          <a:stretch>
-            <a:fillRect/>
-          </a:stretch>
-        </p:blipFill>
-        <p:spPr>
-          <a:xfrm>
-            <a:off x="556332" y="490413"/>
-            <a:ext cx="5011852" cy="2661160"/>
+        </p:nvSpPr>
+        <p:spPr>
+          <a:xfrm>
+            <a:off x="130629" y="214604"/>
+            <a:ext cx="3303036" cy="646331"/>
           </a:xfrm>
           <a:prstGeom prst="rect">
             <a:avLst/>
           </a:prstGeom>
-        </p:spPr>
-      </p:pic>
-      <p:pic>
-        <p:nvPicPr>
-          <p:cNvPr id="5" name="图片 4">
-            <a:extLst>
-              <a:ext uri="{FF2B5EF4-FFF2-40B4-BE49-F238E27FC236}">
-                <a16:creationId xmlns:a16="http://schemas.microsoft.com/office/drawing/2014/main" id="{A39D49F8-1698-451E-858E-FBF612B8038C}"/>
-              </a:ext>
-            </a:extLst>
-          </p:cNvPr>
-          <p:cNvPicPr>
-            <a:picLocks noChangeAspect="1"/>
-          </p:cNvPicPr>
+          <a:noFill/>
+        </p:spPr>
+        <p:txBody>
+          <a:bodyPr wrap="square" rtlCol="0">
+            <a:spAutoFit/>
+          </a:bodyPr>
+          <a:lstStyle/>
+          <a:p>
+            <a:r>
+              <a:rPr lang="en-US" altLang="zh-CN"/>
+              <a:t>extern kcg_float32 temp;</a:t>
+            </a:r>
+          </a:p>
+          <a:p>
+            <a:endParaRPr lang="zh-CN" altLang="en-US"/>
+          </a:p>
+        </p:txBody>
+      </p:sp>
+      <p:sp>
+        <p:nvSpPr>
+          <p:cNvPr id="6" name="文本框 5">
+            <a:extLst>
+              <a:ext uri="{FF2B5EF4-FFF2-40B4-BE49-F238E27FC236}">
+                <a16:creationId xmlns:a16="http://schemas.microsoft.com/office/drawing/2014/main" id="{E02C9F65-D76A-44CC-9509-F9259A6904E7}"/>
+              </a:ext>
+            </a:extLst>
+          </p:cNvPr>
+          <p:cNvSpPr txBox="1"/>
           <p:nvPr/>
-        </p:nvPicPr>
-        <p:blipFill>
-          <a:blip r:embed="rId3"/>
-          <a:stretch>
-            <a:fillRect/>
-          </a:stretch>
-        </p:blipFill>
-        <p:spPr>
-          <a:xfrm>
-            <a:off x="6491958" y="879496"/>
-            <a:ext cx="4801016" cy="3909399"/>
+        </p:nvSpPr>
+        <p:spPr>
+          <a:xfrm>
+            <a:off x="130629" y="860935"/>
+            <a:ext cx="5598367" cy="3693319"/>
           </a:xfrm>
           <a:prstGeom prst="rect">
             <a:avLst/>
           </a:prstGeom>
-        </p:spPr>
-      </p:pic>
+          <a:noFill/>
+        </p:spPr>
+        <p:txBody>
+          <a:bodyPr wrap="square" rtlCol="0">
+            <a:spAutoFit/>
+          </a:bodyPr>
+          <a:lstStyle/>
+          <a:p>
+            <a:r>
+              <a:rPr lang="en-US" altLang="zh-CN"/>
+              <a:t>void gradient(outC_gradient *outC)</a:t>
+            </a:r>
+          </a:p>
+          <a:p>
+            <a:r>
+              <a:rPr lang="en-US" altLang="zh-CN"/>
+              <a:t>{</a:t>
+            </a:r>
+          </a:p>
+          <a:p>
+            <a:r>
+              <a:rPr lang="en-US" altLang="zh-CN"/>
+              <a:t>  /* _L1= */</a:t>
+            </a:r>
+          </a:p>
+          <a:p>
+            <a:r>
+              <a:rPr lang="en-US" altLang="zh-CN"/>
+              <a:t>  if (outC-&gt;init) {</a:t>
+            </a:r>
+          </a:p>
+          <a:p>
+            <a:r>
+              <a:rPr lang="en-US" altLang="zh-CN"/>
+              <a:t>    outC-&gt;init = kcg_false;</a:t>
+            </a:r>
+          </a:p>
+          <a:p>
+            <a:r>
+              <a:rPr lang="en-US" altLang="zh-CN"/>
+              <a:t>    outC-&gt;diff = zero;</a:t>
+            </a:r>
+          </a:p>
+          <a:p>
+            <a:r>
+              <a:rPr lang="en-US" altLang="zh-CN"/>
+              <a:t>  }</a:t>
+            </a:r>
+          </a:p>
+          <a:p>
+            <a:r>
+              <a:rPr lang="en-US" altLang="zh-CN"/>
+              <a:t>  else {</a:t>
+            </a:r>
+          </a:p>
+          <a:p>
+            <a:r>
+              <a:rPr lang="en-US" altLang="zh-CN"/>
+              <a:t>    outC-&gt;diff = temp - outC-&gt;_L2;</a:t>
+            </a:r>
+          </a:p>
+          <a:p>
+            <a:r>
+              <a:rPr lang="en-US" altLang="zh-CN"/>
+              <a:t>  }</a:t>
+            </a:r>
+          </a:p>
+          <a:p>
+            <a:r>
+              <a:rPr lang="en-US" altLang="zh-CN"/>
+              <a:t>  outC-&gt;_L2 = temp;</a:t>
+            </a:r>
+          </a:p>
+          <a:p>
+            <a:r>
+              <a:rPr lang="en-US" altLang="zh-CN"/>
+              <a:t>}</a:t>
+            </a:r>
+          </a:p>
+          <a:p>
+            <a:endParaRPr lang="zh-CN" altLang="en-US"/>
+          </a:p>
+        </p:txBody>
+      </p:sp>
+      <p:sp>
+        <p:nvSpPr>
+          <p:cNvPr id="7" name="文本框 6">
+            <a:extLst>
+              <a:ext uri="{FF2B5EF4-FFF2-40B4-BE49-F238E27FC236}">
+                <a16:creationId xmlns:a16="http://schemas.microsoft.com/office/drawing/2014/main" id="{40C8EAF5-0143-40A6-B251-9A3E3D26FB65}"/>
+              </a:ext>
+            </a:extLst>
+          </p:cNvPr>
+          <p:cNvSpPr txBox="1"/>
+          <p:nvPr/>
+        </p:nvSpPr>
+        <p:spPr>
+          <a:xfrm>
+            <a:off x="4907902" y="860935"/>
+            <a:ext cx="6606074" cy="2031325"/>
+          </a:xfrm>
+          <a:prstGeom prst="rect">
+            <a:avLst/>
+          </a:prstGeom>
+          <a:noFill/>
+        </p:spPr>
+        <p:txBody>
+          <a:bodyPr wrap="square" rtlCol="0">
+            <a:spAutoFit/>
+          </a:bodyPr>
+          <a:lstStyle/>
+          <a:p>
+            <a:r>
+              <a:rPr lang="en-US" altLang="zh-CN"/>
+              <a:t>typedef struct {</a:t>
+            </a:r>
+          </a:p>
+          <a:p>
+            <a:r>
+              <a:rPr lang="en-US" altLang="zh-CN"/>
+              <a:t>    kcg_float32 /* _L1/, diff/ */ diff;</a:t>
+            </a:r>
+          </a:p>
+          <a:p>
+            <a:r>
+              <a:rPr lang="en-US" altLang="zh-CN"/>
+              <a:t>  kcg_bool init;</a:t>
+            </a:r>
+          </a:p>
+          <a:p>
+            <a:r>
+              <a:rPr lang="en-US" altLang="zh-CN"/>
+              <a:t>  kcg_float32 /* _L2/ */ _L2;</a:t>
+            </a:r>
+          </a:p>
+          <a:p>
+            <a:r>
+              <a:rPr lang="en-US" altLang="zh-CN"/>
+              <a:t>} outC_gradient;</a:t>
+            </a:r>
+          </a:p>
+          <a:p>
+            <a:r>
+              <a:rPr lang="en-US" altLang="zh-CN"/>
+              <a:t>extern void gradient(outC_gradient *outC);</a:t>
+            </a:r>
+          </a:p>
+          <a:p>
+            <a:endParaRPr lang="zh-CN" altLang="en-US"/>
+          </a:p>
+        </p:txBody>
+      </p:sp>
     </p:spTree>
     <p:extLst>
       <p:ext uri="{BB962C8B-B14F-4D97-AF65-F5344CB8AC3E}">
-        <p14:creationId xmlns:p14="http://schemas.microsoft.com/office/powerpoint/2010/main" val="1637944361"/>
+        <p14:creationId xmlns:p14="http://schemas.microsoft.com/office/powerpoint/2010/main" val="4149668451"/>
       </p:ext>
     </p:extLst>
   </p:cSld>
@@ -5341,7 +5342,7 @@
           <p:cNvPr id="4" name="图片 3">
             <a:extLst>
               <a:ext uri="{FF2B5EF4-FFF2-40B4-BE49-F238E27FC236}">
-                <a16:creationId xmlns:a16="http://schemas.microsoft.com/office/drawing/2014/main" id="{D301C140-BDBE-4148-A48E-5F74C4514D2B}"/>
+                <a16:creationId xmlns:a16="http://schemas.microsoft.com/office/drawing/2014/main" id="{49B21B92-F465-4FAA-9817-7A1D5DD58929}"/>
               </a:ext>
             </a:extLst>
           </p:cNvPr>
@@ -5358,8 +5359,8 @@
         </p:blipFill>
         <p:spPr>
           <a:xfrm>
-            <a:off x="602532" y="956145"/>
-            <a:ext cx="1600339" cy="373412"/>
+            <a:off x="556332" y="490413"/>
+            <a:ext cx="5011852" cy="2661160"/>
           </a:xfrm>
           <a:prstGeom prst="rect">
             <a:avLst/>
@@ -5371,7 +5372,7 @@
           <p:cNvPr id="5" name="图片 4">
             <a:extLst>
               <a:ext uri="{FF2B5EF4-FFF2-40B4-BE49-F238E27FC236}">
-                <a16:creationId xmlns:a16="http://schemas.microsoft.com/office/drawing/2014/main" id="{F9BBC734-04D3-4583-8C23-23058072C665}"/>
+                <a16:creationId xmlns:a16="http://schemas.microsoft.com/office/drawing/2014/main" id="{A39D49F8-1698-451E-858E-FBF612B8038C}"/>
               </a:ext>
             </a:extLst>
           </p:cNvPr>
@@ -5388,175 +5389,8 @@
         </p:blipFill>
         <p:spPr>
           <a:xfrm>
-            <a:off x="3321862" y="788490"/>
-            <a:ext cx="3383573" cy="541067"/>
-          </a:xfrm>
-          <a:prstGeom prst="rect">
-            <a:avLst/>
-          </a:prstGeom>
-        </p:spPr>
-      </p:pic>
-      <p:sp>
-        <p:nvSpPr>
-          <p:cNvPr id="6" name="文本框 5">
-            <a:extLst>
-              <a:ext uri="{FF2B5EF4-FFF2-40B4-BE49-F238E27FC236}">
-                <a16:creationId xmlns:a16="http://schemas.microsoft.com/office/drawing/2014/main" id="{A40EE023-2C81-4585-B497-1E86D33C9CFA}"/>
-              </a:ext>
-            </a:extLst>
-          </p:cNvPr>
-          <p:cNvSpPr txBox="1"/>
-          <p:nvPr/>
-        </p:nvSpPr>
-        <p:spPr>
-          <a:xfrm>
-            <a:off x="298580" y="233265"/>
-            <a:ext cx="6503436" cy="369332"/>
-          </a:xfrm>
-          <a:prstGeom prst="rect">
-            <a:avLst/>
-          </a:prstGeom>
-          <a:noFill/>
-        </p:spPr>
-        <p:txBody>
-          <a:bodyPr wrap="square" rtlCol="0">
-            <a:spAutoFit/>
-          </a:bodyPr>
-          <a:lstStyle/>
-          <a:p>
-            <a:r>
-              <a:rPr lang="zh-CN" altLang="en-US"/>
-              <a:t>要查看一个变量的</a:t>
-            </a:r>
-            <a:r>
-              <a:rPr lang="en-US" altLang="zh-CN"/>
-              <a:t>Properties</a:t>
-            </a:r>
-            <a:r>
-              <a:rPr lang="zh-CN" altLang="en-US"/>
-              <a:t>，需将其设置为</a:t>
-            </a:r>
-            <a:r>
-              <a:rPr lang="en-US" altLang="zh-CN"/>
-              <a:t>standard</a:t>
-            </a:r>
-          </a:p>
-        </p:txBody>
-      </p:sp>
-      <p:pic>
-        <p:nvPicPr>
-          <p:cNvPr id="8" name="图片 7">
-            <a:extLst>
-              <a:ext uri="{FF2B5EF4-FFF2-40B4-BE49-F238E27FC236}">
-                <a16:creationId xmlns:a16="http://schemas.microsoft.com/office/drawing/2014/main" id="{2BDD19EF-4BEB-413E-8891-06BC3215AD80}"/>
-              </a:ext>
-            </a:extLst>
-          </p:cNvPr>
-          <p:cNvPicPr>
-            <a:picLocks noChangeAspect="1"/>
-          </p:cNvPicPr>
-          <p:nvPr/>
-        </p:nvPicPr>
-        <p:blipFill>
-          <a:blip r:embed="rId4"/>
-          <a:stretch>
-            <a:fillRect/>
-          </a:stretch>
-        </p:blipFill>
-        <p:spPr>
-          <a:xfrm>
-            <a:off x="6810619" y="1329557"/>
-            <a:ext cx="4778849" cy="5402736"/>
-          </a:xfrm>
-          <a:prstGeom prst="rect">
-            <a:avLst/>
-          </a:prstGeom>
-        </p:spPr>
-      </p:pic>
-      <p:pic>
-        <p:nvPicPr>
-          <p:cNvPr id="9" name="图片 8">
-            <a:extLst>
-              <a:ext uri="{FF2B5EF4-FFF2-40B4-BE49-F238E27FC236}">
-                <a16:creationId xmlns:a16="http://schemas.microsoft.com/office/drawing/2014/main" id="{F29EF1F7-7E3E-4EC0-9047-16D8D753735A}"/>
-              </a:ext>
-            </a:extLst>
-          </p:cNvPr>
-          <p:cNvPicPr>
-            <a:picLocks noChangeAspect="1"/>
-          </p:cNvPicPr>
-          <p:nvPr/>
-        </p:nvPicPr>
-        <p:blipFill>
-          <a:blip r:embed="rId5"/>
-          <a:stretch>
-            <a:fillRect/>
-          </a:stretch>
-        </p:blipFill>
-        <p:spPr>
-          <a:xfrm>
-            <a:off x="381512" y="2307565"/>
-            <a:ext cx="5880699" cy="4424728"/>
-          </a:xfrm>
-          <a:prstGeom prst="rect">
-            <a:avLst/>
-          </a:prstGeom>
-        </p:spPr>
-      </p:pic>
-      <p:pic>
-        <p:nvPicPr>
-          <p:cNvPr id="10" name="图片 9">
-            <a:extLst>
-              <a:ext uri="{FF2B5EF4-FFF2-40B4-BE49-F238E27FC236}">
-                <a16:creationId xmlns:a16="http://schemas.microsoft.com/office/drawing/2014/main" id="{E117F73F-6348-4FCA-9575-91ABCF938300}"/>
-              </a:ext>
-            </a:extLst>
-          </p:cNvPr>
-          <p:cNvPicPr>
-            <a:picLocks noChangeAspect="1"/>
-          </p:cNvPicPr>
-          <p:nvPr/>
-        </p:nvPicPr>
-        <p:blipFill>
-          <a:blip r:embed="rId6"/>
-          <a:stretch>
-            <a:fillRect/>
-          </a:stretch>
-        </p:blipFill>
-        <p:spPr>
-          <a:xfrm>
-            <a:off x="7069645" y="417931"/>
-            <a:ext cx="3688400" cy="525826"/>
-          </a:xfrm>
-          <a:prstGeom prst="rect">
-            <a:avLst/>
-          </a:prstGeom>
-        </p:spPr>
-      </p:pic>
-      <p:pic>
-        <p:nvPicPr>
-          <p:cNvPr id="11" name="图片 10">
-            <a:extLst>
-              <a:ext uri="{FF2B5EF4-FFF2-40B4-BE49-F238E27FC236}">
-                <a16:creationId xmlns:a16="http://schemas.microsoft.com/office/drawing/2014/main" id="{ACE1CA47-480D-4520-80CB-5799CD38B813}"/>
-              </a:ext>
-            </a:extLst>
-          </p:cNvPr>
-          <p:cNvPicPr>
-            <a:picLocks noChangeAspect="1"/>
-          </p:cNvPicPr>
-          <p:nvPr/>
-        </p:nvPicPr>
-        <p:blipFill>
-          <a:blip r:embed="rId7"/>
-          <a:stretch>
-            <a:fillRect/>
-          </a:stretch>
-        </p:blipFill>
-        <p:spPr>
-          <a:xfrm>
-            <a:off x="680236" y="1515450"/>
-            <a:ext cx="4580017" cy="586791"/>
+            <a:off x="6491958" y="879496"/>
+            <a:ext cx="4801016" cy="3909399"/>
           </a:xfrm>
           <a:prstGeom prst="rect">
             <a:avLst/>
@@ -5566,7 +5400,7 @@
     </p:spTree>
     <p:extLst>
       <p:ext uri="{BB962C8B-B14F-4D97-AF65-F5344CB8AC3E}">
-        <p14:creationId xmlns:p14="http://schemas.microsoft.com/office/powerpoint/2010/main" val="2955482188"/>
+        <p14:creationId xmlns:p14="http://schemas.microsoft.com/office/powerpoint/2010/main" val="1637944361"/>
       </p:ext>
     </p:extLst>
   </p:cSld>
@@ -5598,7 +5432,7 @@
           <p:cNvPr id="4" name="图片 3">
             <a:extLst>
               <a:ext uri="{FF2B5EF4-FFF2-40B4-BE49-F238E27FC236}">
-                <a16:creationId xmlns:a16="http://schemas.microsoft.com/office/drawing/2014/main" id="{35E14CEE-25F3-44BA-84E9-907D73976424}"/>
+                <a16:creationId xmlns:a16="http://schemas.microsoft.com/office/drawing/2014/main" id="{D301C140-BDBE-4148-A48E-5F74C4514D2B}"/>
               </a:ext>
             </a:extLst>
           </p:cNvPr>
@@ -5615,8 +5449,8 @@
         </p:blipFill>
         <p:spPr>
           <a:xfrm>
-            <a:off x="290006" y="167393"/>
-            <a:ext cx="4054191" cy="327688"/>
+            <a:off x="602532" y="956145"/>
+            <a:ext cx="1600339" cy="373412"/>
           </a:xfrm>
           <a:prstGeom prst="rect">
             <a:avLst/>
@@ -5628,7 +5462,7 @@
           <p:cNvPr id="5" name="图片 4">
             <a:extLst>
               <a:ext uri="{FF2B5EF4-FFF2-40B4-BE49-F238E27FC236}">
-                <a16:creationId xmlns:a16="http://schemas.microsoft.com/office/drawing/2014/main" id="{DC8723F6-77C9-462D-AA3E-E12B8C8632C6}"/>
+                <a16:creationId xmlns:a16="http://schemas.microsoft.com/office/drawing/2014/main" id="{F9BBC734-04D3-4583-8C23-23058072C665}"/>
               </a:ext>
             </a:extLst>
           </p:cNvPr>
@@ -5645,20 +5479,67 @@
         </p:blipFill>
         <p:spPr>
           <a:xfrm>
-            <a:off x="182012" y="753664"/>
-            <a:ext cx="5669771" cy="5761219"/>
+            <a:off x="3321862" y="788490"/>
+            <a:ext cx="3383573" cy="541067"/>
           </a:xfrm>
           <a:prstGeom prst="rect">
             <a:avLst/>
           </a:prstGeom>
         </p:spPr>
       </p:pic>
+      <p:sp>
+        <p:nvSpPr>
+          <p:cNvPr id="6" name="文本框 5">
+            <a:extLst>
+              <a:ext uri="{FF2B5EF4-FFF2-40B4-BE49-F238E27FC236}">
+                <a16:creationId xmlns:a16="http://schemas.microsoft.com/office/drawing/2014/main" id="{A40EE023-2C81-4585-B497-1E86D33C9CFA}"/>
+              </a:ext>
+            </a:extLst>
+          </p:cNvPr>
+          <p:cNvSpPr txBox="1"/>
+          <p:nvPr/>
+        </p:nvSpPr>
+        <p:spPr>
+          <a:xfrm>
+            <a:off x="298580" y="233265"/>
+            <a:ext cx="6503436" cy="369332"/>
+          </a:xfrm>
+          <a:prstGeom prst="rect">
+            <a:avLst/>
+          </a:prstGeom>
+          <a:noFill/>
+        </p:spPr>
+        <p:txBody>
+          <a:bodyPr wrap="square" rtlCol="0">
+            <a:spAutoFit/>
+          </a:bodyPr>
+          <a:lstStyle/>
+          <a:p>
+            <a:r>
+              <a:rPr lang="zh-CN" altLang="en-US"/>
+              <a:t>要查看一个变量的</a:t>
+            </a:r>
+            <a:r>
+              <a:rPr lang="en-US" altLang="zh-CN"/>
+              <a:t>Properties</a:t>
+            </a:r>
+            <a:r>
+              <a:rPr lang="zh-CN" altLang="en-US"/>
+              <a:t>，需将其设置为</a:t>
+            </a:r>
+            <a:r>
+              <a:rPr lang="en-US" altLang="zh-CN"/>
+              <a:t>standard</a:t>
+            </a:r>
+          </a:p>
+        </p:txBody>
+      </p:sp>
       <p:pic>
         <p:nvPicPr>
-          <p:cNvPr id="6" name="图片 5">
-            <a:extLst>
-              <a:ext uri="{FF2B5EF4-FFF2-40B4-BE49-F238E27FC236}">
-                <a16:creationId xmlns:a16="http://schemas.microsoft.com/office/drawing/2014/main" id="{3619A6E3-078C-4664-85E0-A23BA65D44FB}"/>
+          <p:cNvPr id="8" name="图片 7">
+            <a:extLst>
+              <a:ext uri="{FF2B5EF4-FFF2-40B4-BE49-F238E27FC236}">
+                <a16:creationId xmlns:a16="http://schemas.microsoft.com/office/drawing/2014/main" id="{2BDD19EF-4BEB-413E-8891-06BC3215AD80}"/>
               </a:ext>
             </a:extLst>
           </p:cNvPr>
@@ -5675,8 +5556,98 @@
         </p:blipFill>
         <p:spPr>
           <a:xfrm>
-            <a:off x="6269366" y="875876"/>
-            <a:ext cx="4206605" cy="4397121"/>
+            <a:off x="6810619" y="1329557"/>
+            <a:ext cx="4778849" cy="5402736"/>
+          </a:xfrm>
+          <a:prstGeom prst="rect">
+            <a:avLst/>
+          </a:prstGeom>
+        </p:spPr>
+      </p:pic>
+      <p:pic>
+        <p:nvPicPr>
+          <p:cNvPr id="9" name="图片 8">
+            <a:extLst>
+              <a:ext uri="{FF2B5EF4-FFF2-40B4-BE49-F238E27FC236}">
+                <a16:creationId xmlns:a16="http://schemas.microsoft.com/office/drawing/2014/main" id="{F29EF1F7-7E3E-4EC0-9047-16D8D753735A}"/>
+              </a:ext>
+            </a:extLst>
+          </p:cNvPr>
+          <p:cNvPicPr>
+            <a:picLocks noChangeAspect="1"/>
+          </p:cNvPicPr>
+          <p:nvPr/>
+        </p:nvPicPr>
+        <p:blipFill>
+          <a:blip r:embed="rId5"/>
+          <a:stretch>
+            <a:fillRect/>
+          </a:stretch>
+        </p:blipFill>
+        <p:spPr>
+          <a:xfrm>
+            <a:off x="381512" y="2307565"/>
+            <a:ext cx="5880699" cy="4424728"/>
+          </a:xfrm>
+          <a:prstGeom prst="rect">
+            <a:avLst/>
+          </a:prstGeom>
+        </p:spPr>
+      </p:pic>
+      <p:pic>
+        <p:nvPicPr>
+          <p:cNvPr id="10" name="图片 9">
+            <a:extLst>
+              <a:ext uri="{FF2B5EF4-FFF2-40B4-BE49-F238E27FC236}">
+                <a16:creationId xmlns:a16="http://schemas.microsoft.com/office/drawing/2014/main" id="{E117F73F-6348-4FCA-9575-91ABCF938300}"/>
+              </a:ext>
+            </a:extLst>
+          </p:cNvPr>
+          <p:cNvPicPr>
+            <a:picLocks noChangeAspect="1"/>
+          </p:cNvPicPr>
+          <p:nvPr/>
+        </p:nvPicPr>
+        <p:blipFill>
+          <a:blip r:embed="rId6"/>
+          <a:stretch>
+            <a:fillRect/>
+          </a:stretch>
+        </p:blipFill>
+        <p:spPr>
+          <a:xfrm>
+            <a:off x="7069645" y="417931"/>
+            <a:ext cx="3688400" cy="525826"/>
+          </a:xfrm>
+          <a:prstGeom prst="rect">
+            <a:avLst/>
+          </a:prstGeom>
+        </p:spPr>
+      </p:pic>
+      <p:pic>
+        <p:nvPicPr>
+          <p:cNvPr id="11" name="图片 10">
+            <a:extLst>
+              <a:ext uri="{FF2B5EF4-FFF2-40B4-BE49-F238E27FC236}">
+                <a16:creationId xmlns:a16="http://schemas.microsoft.com/office/drawing/2014/main" id="{ACE1CA47-480D-4520-80CB-5799CD38B813}"/>
+              </a:ext>
+            </a:extLst>
+          </p:cNvPr>
+          <p:cNvPicPr>
+            <a:picLocks noChangeAspect="1"/>
+          </p:cNvPicPr>
+          <p:nvPr/>
+        </p:nvPicPr>
+        <p:blipFill>
+          <a:blip r:embed="rId7"/>
+          <a:stretch>
+            <a:fillRect/>
+          </a:stretch>
+        </p:blipFill>
+        <p:spPr>
+          <a:xfrm>
+            <a:off x="680236" y="1515450"/>
+            <a:ext cx="4580017" cy="586791"/>
           </a:xfrm>
           <a:prstGeom prst="rect">
             <a:avLst/>
@@ -5686,7 +5657,7 @@
     </p:spTree>
     <p:extLst>
       <p:ext uri="{BB962C8B-B14F-4D97-AF65-F5344CB8AC3E}">
-        <p14:creationId xmlns:p14="http://schemas.microsoft.com/office/powerpoint/2010/main" val="818967329"/>
+        <p14:creationId xmlns:p14="http://schemas.microsoft.com/office/powerpoint/2010/main" val="2955482188"/>
       </p:ext>
     </p:extLst>
   </p:cSld>
@@ -5718,7 +5689,7 @@
           <p:cNvPr id="4" name="图片 3">
             <a:extLst>
               <a:ext uri="{FF2B5EF4-FFF2-40B4-BE49-F238E27FC236}">
-                <a16:creationId xmlns:a16="http://schemas.microsoft.com/office/drawing/2014/main" id="{951296BE-53E7-4331-8EA2-8D1B24993956}"/>
+                <a16:creationId xmlns:a16="http://schemas.microsoft.com/office/drawing/2014/main" id="{35E14CEE-25F3-44BA-84E9-907D73976424}"/>
               </a:ext>
             </a:extLst>
           </p:cNvPr>
@@ -5735,8 +5706,8 @@
         </p:blipFill>
         <p:spPr>
           <a:xfrm>
-            <a:off x="342444" y="118493"/>
-            <a:ext cx="2842506" cy="548688"/>
+            <a:off x="290006" y="167393"/>
+            <a:ext cx="4054191" cy="327688"/>
           </a:xfrm>
           <a:prstGeom prst="rect">
             <a:avLst/>
@@ -5745,10 +5716,10 @@
       </p:pic>
       <p:pic>
         <p:nvPicPr>
-          <p:cNvPr id="6" name="图片 5">
-            <a:extLst>
-              <a:ext uri="{FF2B5EF4-FFF2-40B4-BE49-F238E27FC236}">
-                <a16:creationId xmlns:a16="http://schemas.microsoft.com/office/drawing/2014/main" id="{8A79DC77-505D-4AB4-AF30-C401A603D843}"/>
+          <p:cNvPr id="5" name="图片 4">
+            <a:extLst>
+              <a:ext uri="{FF2B5EF4-FFF2-40B4-BE49-F238E27FC236}">
+                <a16:creationId xmlns:a16="http://schemas.microsoft.com/office/drawing/2014/main" id="{DC8723F6-77C9-462D-AA3E-E12B8C8632C6}"/>
               </a:ext>
             </a:extLst>
           </p:cNvPr>
@@ -5765,8 +5736,8 @@
         </p:blipFill>
         <p:spPr>
           <a:xfrm>
-            <a:off x="592206" y="878888"/>
-            <a:ext cx="3179377" cy="5689747"/>
+            <a:off x="182012" y="753664"/>
+            <a:ext cx="5669771" cy="5761219"/>
           </a:xfrm>
           <a:prstGeom prst="rect">
             <a:avLst/>
@@ -5775,10 +5746,10 @@
       </p:pic>
       <p:pic>
         <p:nvPicPr>
-          <p:cNvPr id="7" name="图片 6">
-            <a:extLst>
-              <a:ext uri="{FF2B5EF4-FFF2-40B4-BE49-F238E27FC236}">
-                <a16:creationId xmlns:a16="http://schemas.microsoft.com/office/drawing/2014/main" id="{C9B48BCA-9321-46FD-A006-857DF9DF3F6A}"/>
+          <p:cNvPr id="6" name="图片 5">
+            <a:extLst>
+              <a:ext uri="{FF2B5EF4-FFF2-40B4-BE49-F238E27FC236}">
+                <a16:creationId xmlns:a16="http://schemas.microsoft.com/office/drawing/2014/main" id="{3619A6E3-078C-4664-85E0-A23BA65D44FB}"/>
               </a:ext>
             </a:extLst>
           </p:cNvPr>
@@ -5795,96 +5766,18 @@
         </p:blipFill>
         <p:spPr>
           <a:xfrm>
-            <a:off x="4052625" y="855526"/>
-            <a:ext cx="2872102" cy="5146948"/>
+            <a:off x="6269366" y="875876"/>
+            <a:ext cx="4206605" cy="4397121"/>
           </a:xfrm>
           <a:prstGeom prst="rect">
             <a:avLst/>
           </a:prstGeom>
         </p:spPr>
       </p:pic>
-      <p:sp>
-        <p:nvSpPr>
-          <p:cNvPr id="8" name="文本框 7">
-            <a:extLst>
-              <a:ext uri="{FF2B5EF4-FFF2-40B4-BE49-F238E27FC236}">
-                <a16:creationId xmlns:a16="http://schemas.microsoft.com/office/drawing/2014/main" id="{D385EB79-1701-48AD-BE64-119771FDB137}"/>
-              </a:ext>
-            </a:extLst>
-          </p:cNvPr>
-          <p:cNvSpPr txBox="1"/>
-          <p:nvPr/>
-        </p:nvSpPr>
-        <p:spPr>
-          <a:xfrm>
-            <a:off x="7205769" y="855526"/>
-            <a:ext cx="4048217" cy="2308324"/>
-          </a:xfrm>
-          <a:prstGeom prst="rect">
-            <a:avLst/>
-          </a:prstGeom>
-          <a:noFill/>
-        </p:spPr>
-        <p:txBody>
-          <a:bodyPr wrap="square" rtlCol="0">
-            <a:spAutoFit/>
-          </a:bodyPr>
-          <a:lstStyle/>
-          <a:p>
-            <a:r>
-              <a:rPr lang="en-US" altLang="zh-CN" b="1"/>
-              <a:t>Node</a:t>
-            </a:r>
-            <a:r>
-              <a:rPr lang="zh-CN" altLang="en-US" b="1"/>
-              <a:t>和</a:t>
-            </a:r>
-            <a:r>
-              <a:rPr lang="en-US" altLang="zh-CN" b="1"/>
-              <a:t>function</a:t>
-            </a:r>
-            <a:r>
-              <a:rPr lang="zh-CN" altLang="en-US" b="1"/>
-              <a:t>操作符区别</a:t>
-            </a:r>
-            <a:r>
-              <a:rPr lang="zh-CN" altLang="en-US"/>
-              <a:t>：</a:t>
-            </a:r>
-            <a:endParaRPr lang="en-US" altLang="zh-CN"/>
-          </a:p>
-          <a:p>
-            <a:r>
-              <a:rPr lang="en-US" altLang="zh-CN"/>
-              <a:t>Node</a:t>
-            </a:r>
-            <a:r>
-              <a:rPr lang="zh-CN" altLang="en-US"/>
-              <a:t>类型操作符会自动生成额外的上下文环境，以保存时序相关信息。例如当用到时间操作符，状态机，变量的延时设置等建模单元时就需要把自定义操作符的属性设置为</a:t>
-            </a:r>
-            <a:r>
-              <a:rPr lang="en-US" altLang="zh-CN"/>
-              <a:t>Node</a:t>
-            </a:r>
-            <a:r>
-              <a:rPr lang="zh-CN" altLang="en-US"/>
-              <a:t>类型，而</a:t>
-            </a:r>
-            <a:r>
-              <a:rPr lang="en-US" altLang="zh-CN"/>
-              <a:t>function</a:t>
-            </a:r>
-            <a:r>
-              <a:rPr lang="zh-CN" altLang="en-US"/>
-              <a:t>类型是不需要生成额外的上下文环境的。</a:t>
-            </a:r>
-          </a:p>
-        </p:txBody>
-      </p:sp>
     </p:spTree>
     <p:extLst>
       <p:ext uri="{BB962C8B-B14F-4D97-AF65-F5344CB8AC3E}">
-        <p14:creationId xmlns:p14="http://schemas.microsoft.com/office/powerpoint/2010/main" val="1017257588"/>
+        <p14:creationId xmlns:p14="http://schemas.microsoft.com/office/powerpoint/2010/main" val="818967329"/>
       </p:ext>
     </p:extLst>
   </p:cSld>
@@ -5911,96 +5804,12 @@
           <a:chExt cx="0" cy="0"/>
         </a:xfrm>
       </p:grpSpPr>
-      <p:sp>
-        <p:nvSpPr>
-          <p:cNvPr id="4" name="文本框 3">
-            <a:extLst>
-              <a:ext uri="{FF2B5EF4-FFF2-40B4-BE49-F238E27FC236}">
-                <a16:creationId xmlns:a16="http://schemas.microsoft.com/office/drawing/2014/main" id="{6948AFCE-90A6-4E33-AEC7-43FA823F0E66}"/>
-              </a:ext>
-            </a:extLst>
-          </p:cNvPr>
-          <p:cNvSpPr txBox="1"/>
-          <p:nvPr/>
-        </p:nvSpPr>
-        <p:spPr>
-          <a:xfrm>
-            <a:off x="242596" y="279918"/>
-            <a:ext cx="6960637" cy="646331"/>
-          </a:xfrm>
-          <a:prstGeom prst="rect">
-            <a:avLst/>
-          </a:prstGeom>
-          <a:noFill/>
-        </p:spPr>
-        <p:txBody>
-          <a:bodyPr wrap="square" rtlCol="0">
-            <a:spAutoFit/>
-          </a:bodyPr>
-          <a:lstStyle/>
-          <a:p>
-            <a:r>
-              <a:rPr lang="en-US" altLang="zh-CN"/>
-              <a:t>Scade_lex</a:t>
-            </a:r>
-            <a:r>
-              <a:rPr lang="zh-CN" altLang="en-US"/>
-              <a:t>有问题，若是</a:t>
-            </a:r>
-            <a:r>
-              <a:rPr lang="en-US" altLang="zh-CN"/>
-              <a:t>0x1</a:t>
-            </a:r>
-            <a:r>
-              <a:rPr lang="zh-CN" altLang="en-US"/>
-              <a:t>应该是</a:t>
-            </a:r>
-            <a:r>
-              <a:rPr lang="en-US" altLang="zh-CN"/>
-              <a:t>integernum</a:t>
-            </a:r>
-            <a:r>
-              <a:rPr lang="zh-CN" altLang="en-US"/>
-              <a:t>，但是输出确把</a:t>
-            </a:r>
-            <a:r>
-              <a:rPr lang="en-US" altLang="zh-CN"/>
-              <a:t>0</a:t>
-            </a:r>
-            <a:r>
-              <a:rPr lang="zh-CN" altLang="en-US"/>
-              <a:t>当成</a:t>
-            </a:r>
-            <a:r>
-              <a:rPr lang="en-US" altLang="zh-CN"/>
-              <a:t>intconst</a:t>
-            </a:r>
-            <a:r>
-              <a:rPr lang="zh-CN" altLang="en-US"/>
-              <a:t>，</a:t>
-            </a:r>
-            <a:r>
-              <a:rPr lang="en-US" altLang="zh-CN"/>
-              <a:t>x1</a:t>
-            </a:r>
-            <a:r>
-              <a:rPr lang="zh-CN" altLang="en-US"/>
-              <a:t>当做</a:t>
-            </a:r>
-            <a:r>
-              <a:rPr lang="en-US" altLang="zh-CN"/>
-              <a:t>lv6id</a:t>
-            </a:r>
-            <a:endParaRPr lang="zh-CN" altLang="en-US"/>
-          </a:p>
-        </p:txBody>
-      </p:sp>
       <p:pic>
         <p:nvPicPr>
-          <p:cNvPr id="5" name="图片 4">
-            <a:extLst>
-              <a:ext uri="{FF2B5EF4-FFF2-40B4-BE49-F238E27FC236}">
-                <a16:creationId xmlns:a16="http://schemas.microsoft.com/office/drawing/2014/main" id="{C57870FC-C433-47CD-81FE-4B55EB61DA27}"/>
+          <p:cNvPr id="4" name="图片 3">
+            <a:extLst>
+              <a:ext uri="{FF2B5EF4-FFF2-40B4-BE49-F238E27FC236}">
+                <a16:creationId xmlns:a16="http://schemas.microsoft.com/office/drawing/2014/main" id="{951296BE-53E7-4331-8EA2-8D1B24993956}"/>
               </a:ext>
             </a:extLst>
           </p:cNvPr>
@@ -6017,8 +5826,8 @@
         </p:blipFill>
         <p:spPr>
           <a:xfrm>
-            <a:off x="393822" y="1442889"/>
-            <a:ext cx="5249525" cy="4575356"/>
+            <a:off x="342444" y="118493"/>
+            <a:ext cx="2842506" cy="548688"/>
           </a:xfrm>
           <a:prstGeom prst="rect">
             <a:avLst/>
@@ -6030,7 +5839,7 @@
           <p:cNvPr id="6" name="图片 5">
             <a:extLst>
               <a:ext uri="{FF2B5EF4-FFF2-40B4-BE49-F238E27FC236}">
-                <a16:creationId xmlns:a16="http://schemas.microsoft.com/office/drawing/2014/main" id="{9F9C964D-C154-4F7A-83EC-C09D2410C9BE}"/>
+                <a16:creationId xmlns:a16="http://schemas.microsoft.com/office/drawing/2014/main" id="{8A79DC77-505D-4AB4-AF30-C401A603D843}"/>
               </a:ext>
             </a:extLst>
           </p:cNvPr>
@@ -6047,8 +5856,8 @@
         </p:blipFill>
         <p:spPr>
           <a:xfrm>
-            <a:off x="5794346" y="1126539"/>
-            <a:ext cx="6226080" cy="5616427"/>
+            <a:off x="592206" y="878888"/>
+            <a:ext cx="3179377" cy="5689747"/>
           </a:xfrm>
           <a:prstGeom prst="rect">
             <a:avLst/>
@@ -6057,10 +5866,10 @@
       </p:pic>
       <p:pic>
         <p:nvPicPr>
-          <p:cNvPr id="2" name="图片 1">
-            <a:extLst>
-              <a:ext uri="{FF2B5EF4-FFF2-40B4-BE49-F238E27FC236}">
-                <a16:creationId xmlns:a16="http://schemas.microsoft.com/office/drawing/2014/main" id="{47B76DFF-E3E0-4F26-A0A7-1DB2B8DD5FD1}"/>
+          <p:cNvPr id="7" name="图片 6">
+            <a:extLst>
+              <a:ext uri="{FF2B5EF4-FFF2-40B4-BE49-F238E27FC236}">
+                <a16:creationId xmlns:a16="http://schemas.microsoft.com/office/drawing/2014/main" id="{C9B48BCA-9321-46FD-A006-857DF9DF3F6A}"/>
               </a:ext>
             </a:extLst>
           </p:cNvPr>
@@ -6077,18 +5886,96 @@
         </p:blipFill>
         <p:spPr>
           <a:xfrm>
-            <a:off x="7767962" y="89606"/>
-            <a:ext cx="3210876" cy="936788"/>
+            <a:off x="4052625" y="855526"/>
+            <a:ext cx="2872102" cy="5146948"/>
           </a:xfrm>
           <a:prstGeom prst="rect">
             <a:avLst/>
           </a:prstGeom>
         </p:spPr>
       </p:pic>
+      <p:sp>
+        <p:nvSpPr>
+          <p:cNvPr id="8" name="文本框 7">
+            <a:extLst>
+              <a:ext uri="{FF2B5EF4-FFF2-40B4-BE49-F238E27FC236}">
+                <a16:creationId xmlns:a16="http://schemas.microsoft.com/office/drawing/2014/main" id="{D385EB79-1701-48AD-BE64-119771FDB137}"/>
+              </a:ext>
+            </a:extLst>
+          </p:cNvPr>
+          <p:cNvSpPr txBox="1"/>
+          <p:nvPr/>
+        </p:nvSpPr>
+        <p:spPr>
+          <a:xfrm>
+            <a:off x="7205769" y="855526"/>
+            <a:ext cx="4048217" cy="2308324"/>
+          </a:xfrm>
+          <a:prstGeom prst="rect">
+            <a:avLst/>
+          </a:prstGeom>
+          <a:noFill/>
+        </p:spPr>
+        <p:txBody>
+          <a:bodyPr wrap="square" rtlCol="0">
+            <a:spAutoFit/>
+          </a:bodyPr>
+          <a:lstStyle/>
+          <a:p>
+            <a:r>
+              <a:rPr lang="en-US" altLang="zh-CN" b="1"/>
+              <a:t>Node</a:t>
+            </a:r>
+            <a:r>
+              <a:rPr lang="zh-CN" altLang="en-US" b="1"/>
+              <a:t>和</a:t>
+            </a:r>
+            <a:r>
+              <a:rPr lang="en-US" altLang="zh-CN" b="1"/>
+              <a:t>function</a:t>
+            </a:r>
+            <a:r>
+              <a:rPr lang="zh-CN" altLang="en-US" b="1"/>
+              <a:t>操作符区别</a:t>
+            </a:r>
+            <a:r>
+              <a:rPr lang="zh-CN" altLang="en-US"/>
+              <a:t>：</a:t>
+            </a:r>
+            <a:endParaRPr lang="en-US" altLang="zh-CN"/>
+          </a:p>
+          <a:p>
+            <a:r>
+              <a:rPr lang="en-US" altLang="zh-CN"/>
+              <a:t>Node</a:t>
+            </a:r>
+            <a:r>
+              <a:rPr lang="zh-CN" altLang="en-US"/>
+              <a:t>类型操作符会自动生成额外的上下文环境，以保存时序相关信息。例如当用到时间操作符，状态机，变量的延时设置等建模单元时就需要把自定义操作符的属性设置为</a:t>
+            </a:r>
+            <a:r>
+              <a:rPr lang="en-US" altLang="zh-CN"/>
+              <a:t>Node</a:t>
+            </a:r>
+            <a:r>
+              <a:rPr lang="zh-CN" altLang="en-US"/>
+              <a:t>类型，而</a:t>
+            </a:r>
+            <a:r>
+              <a:rPr lang="en-US" altLang="zh-CN"/>
+              <a:t>function</a:t>
+            </a:r>
+            <a:r>
+              <a:rPr lang="zh-CN" altLang="en-US"/>
+              <a:t>类型是不需要生成额外的上下文环境的。</a:t>
+            </a:r>
+          </a:p>
+        </p:txBody>
+      </p:sp>
     </p:spTree>
     <p:extLst>
       <p:ext uri="{BB962C8B-B14F-4D97-AF65-F5344CB8AC3E}">
-        <p14:creationId xmlns:p14="http://schemas.microsoft.com/office/powerpoint/2010/main" val="1204162928"/>
+        <p14:creationId xmlns:p14="http://schemas.microsoft.com/office/powerpoint/2010/main" val="1017257588"/>
       </p:ext>
     </p:extLst>
   </p:cSld>
@@ -6158,6 +6045,210 @@
 </p:sld>
 </file>
 
+<file path=ppt/slides/slide20.xml><?xml version="1.0" encoding="utf-8"?>
+<p:sld xmlns:a="http://schemas.openxmlformats.org/drawingml/2006/main" xmlns:r="http://schemas.openxmlformats.org/officeDocument/2006/relationships" xmlns:p="http://schemas.openxmlformats.org/presentationml/2006/main">
+  <p:cSld>
+    <p:spTree>
+      <p:nvGrpSpPr>
+        <p:cNvPr id="1" name=""/>
+        <p:cNvGrpSpPr/>
+        <p:nvPr/>
+      </p:nvGrpSpPr>
+      <p:grpSpPr>
+        <a:xfrm>
+          <a:off x="0" y="0"/>
+          <a:ext cx="0" cy="0"/>
+          <a:chOff x="0" y="0"/>
+          <a:chExt cx="0" cy="0"/>
+        </a:xfrm>
+      </p:grpSpPr>
+      <p:sp>
+        <p:nvSpPr>
+          <p:cNvPr id="4" name="文本框 3">
+            <a:extLst>
+              <a:ext uri="{FF2B5EF4-FFF2-40B4-BE49-F238E27FC236}">
+                <a16:creationId xmlns:a16="http://schemas.microsoft.com/office/drawing/2014/main" id="{6948AFCE-90A6-4E33-AEC7-43FA823F0E66}"/>
+              </a:ext>
+            </a:extLst>
+          </p:cNvPr>
+          <p:cNvSpPr txBox="1"/>
+          <p:nvPr/>
+        </p:nvSpPr>
+        <p:spPr>
+          <a:xfrm>
+            <a:off x="242596" y="279918"/>
+            <a:ext cx="6960637" cy="646331"/>
+          </a:xfrm>
+          <a:prstGeom prst="rect">
+            <a:avLst/>
+          </a:prstGeom>
+          <a:noFill/>
+        </p:spPr>
+        <p:txBody>
+          <a:bodyPr wrap="square" rtlCol="0">
+            <a:spAutoFit/>
+          </a:bodyPr>
+          <a:lstStyle/>
+          <a:p>
+            <a:r>
+              <a:rPr lang="en-US" altLang="zh-CN"/>
+              <a:t>Scade_lex</a:t>
+            </a:r>
+            <a:r>
+              <a:rPr lang="zh-CN" altLang="en-US"/>
+              <a:t>有问题，若是</a:t>
+            </a:r>
+            <a:r>
+              <a:rPr lang="en-US" altLang="zh-CN"/>
+              <a:t>0x1</a:t>
+            </a:r>
+            <a:r>
+              <a:rPr lang="zh-CN" altLang="en-US"/>
+              <a:t>应该是</a:t>
+            </a:r>
+            <a:r>
+              <a:rPr lang="en-US" altLang="zh-CN"/>
+              <a:t>integernum</a:t>
+            </a:r>
+            <a:r>
+              <a:rPr lang="zh-CN" altLang="en-US"/>
+              <a:t>，但是输出确把</a:t>
+            </a:r>
+            <a:r>
+              <a:rPr lang="en-US" altLang="zh-CN"/>
+              <a:t>0</a:t>
+            </a:r>
+            <a:r>
+              <a:rPr lang="zh-CN" altLang="en-US"/>
+              <a:t>当成</a:t>
+            </a:r>
+            <a:r>
+              <a:rPr lang="en-US" altLang="zh-CN"/>
+              <a:t>intconst</a:t>
+            </a:r>
+            <a:r>
+              <a:rPr lang="zh-CN" altLang="en-US"/>
+              <a:t>，</a:t>
+            </a:r>
+            <a:r>
+              <a:rPr lang="en-US" altLang="zh-CN"/>
+              <a:t>x1</a:t>
+            </a:r>
+            <a:r>
+              <a:rPr lang="zh-CN" altLang="en-US"/>
+              <a:t>当做</a:t>
+            </a:r>
+            <a:r>
+              <a:rPr lang="en-US" altLang="zh-CN"/>
+              <a:t>lv6id</a:t>
+            </a:r>
+            <a:endParaRPr lang="zh-CN" altLang="en-US"/>
+          </a:p>
+        </p:txBody>
+      </p:sp>
+      <p:pic>
+        <p:nvPicPr>
+          <p:cNvPr id="5" name="图片 4">
+            <a:extLst>
+              <a:ext uri="{FF2B5EF4-FFF2-40B4-BE49-F238E27FC236}">
+                <a16:creationId xmlns:a16="http://schemas.microsoft.com/office/drawing/2014/main" id="{C57870FC-C433-47CD-81FE-4B55EB61DA27}"/>
+              </a:ext>
+            </a:extLst>
+          </p:cNvPr>
+          <p:cNvPicPr>
+            <a:picLocks noChangeAspect="1"/>
+          </p:cNvPicPr>
+          <p:nvPr/>
+        </p:nvPicPr>
+        <p:blipFill>
+          <a:blip r:embed="rId2"/>
+          <a:stretch>
+            <a:fillRect/>
+          </a:stretch>
+        </p:blipFill>
+        <p:spPr>
+          <a:xfrm>
+            <a:off x="393822" y="1442889"/>
+            <a:ext cx="5249525" cy="4575356"/>
+          </a:xfrm>
+          <a:prstGeom prst="rect">
+            <a:avLst/>
+          </a:prstGeom>
+        </p:spPr>
+      </p:pic>
+      <p:pic>
+        <p:nvPicPr>
+          <p:cNvPr id="6" name="图片 5">
+            <a:extLst>
+              <a:ext uri="{FF2B5EF4-FFF2-40B4-BE49-F238E27FC236}">
+                <a16:creationId xmlns:a16="http://schemas.microsoft.com/office/drawing/2014/main" id="{9F9C964D-C154-4F7A-83EC-C09D2410C9BE}"/>
+              </a:ext>
+            </a:extLst>
+          </p:cNvPr>
+          <p:cNvPicPr>
+            <a:picLocks noChangeAspect="1"/>
+          </p:cNvPicPr>
+          <p:nvPr/>
+        </p:nvPicPr>
+        <p:blipFill>
+          <a:blip r:embed="rId3"/>
+          <a:stretch>
+            <a:fillRect/>
+          </a:stretch>
+        </p:blipFill>
+        <p:spPr>
+          <a:xfrm>
+            <a:off x="5794346" y="1126539"/>
+            <a:ext cx="6226080" cy="5616427"/>
+          </a:xfrm>
+          <a:prstGeom prst="rect">
+            <a:avLst/>
+          </a:prstGeom>
+        </p:spPr>
+      </p:pic>
+      <p:pic>
+        <p:nvPicPr>
+          <p:cNvPr id="2" name="图片 1">
+            <a:extLst>
+              <a:ext uri="{FF2B5EF4-FFF2-40B4-BE49-F238E27FC236}">
+                <a16:creationId xmlns:a16="http://schemas.microsoft.com/office/drawing/2014/main" id="{47B76DFF-E3E0-4F26-A0A7-1DB2B8DD5FD1}"/>
+              </a:ext>
+            </a:extLst>
+          </p:cNvPr>
+          <p:cNvPicPr>
+            <a:picLocks noChangeAspect="1"/>
+          </p:cNvPicPr>
+          <p:nvPr/>
+        </p:nvPicPr>
+        <p:blipFill>
+          <a:blip r:embed="rId4"/>
+          <a:stretch>
+            <a:fillRect/>
+          </a:stretch>
+        </p:blipFill>
+        <p:spPr>
+          <a:xfrm>
+            <a:off x="7767962" y="89606"/>
+            <a:ext cx="3210876" cy="936788"/>
+          </a:xfrm>
+          <a:prstGeom prst="rect">
+            <a:avLst/>
+          </a:prstGeom>
+        </p:spPr>
+      </p:pic>
+    </p:spTree>
+    <p:extLst>
+      <p:ext uri="{BB962C8B-B14F-4D97-AF65-F5344CB8AC3E}">
+        <p14:creationId xmlns:p14="http://schemas.microsoft.com/office/powerpoint/2010/main" val="1204162928"/>
+      </p:ext>
+    </p:extLst>
+  </p:cSld>
+  <p:clrMapOvr>
+    <a:masterClrMapping/>
+  </p:clrMapOvr>
+</p:sld>
+</file>
+
 <file path=ppt/slides/slide3.xml><?xml version="1.0" encoding="utf-8"?>
 <p:sld xmlns:a="http://schemas.openxmlformats.org/drawingml/2006/main" xmlns:r="http://schemas.openxmlformats.org/officeDocument/2006/relationships" xmlns:p="http://schemas.openxmlformats.org/presentationml/2006/main">
   <p:cSld>
@@ -6175,12 +6266,88 @@
           <a:chExt cx="0" cy="0"/>
         </a:xfrm>
       </p:grpSpPr>
+      <p:sp>
+        <p:nvSpPr>
+          <p:cNvPr id="4" name="文本框 3">
+            <a:extLst>
+              <a:ext uri="{FF2B5EF4-FFF2-40B4-BE49-F238E27FC236}">
+                <a16:creationId xmlns:a16="http://schemas.microsoft.com/office/drawing/2014/main" id="{6DA28287-0CA3-4469-AE3F-91EA1434E666}"/>
+              </a:ext>
+            </a:extLst>
+          </p:cNvPr>
+          <p:cNvSpPr txBox="1"/>
+          <p:nvPr/>
+        </p:nvSpPr>
+        <p:spPr>
+          <a:xfrm>
+            <a:off x="417250" y="470517"/>
+            <a:ext cx="5678750" cy="369332"/>
+          </a:xfrm>
+          <a:prstGeom prst="rect">
+            <a:avLst/>
+          </a:prstGeom>
+          <a:noFill/>
+        </p:spPr>
+        <p:txBody>
+          <a:bodyPr wrap="square" rtlCol="0">
+            <a:spAutoFit/>
+          </a:bodyPr>
+          <a:lstStyle/>
+          <a:p>
+            <a:r>
+              <a:rPr lang="en-US" altLang="zh-CN"/>
+              <a:t>init</a:t>
+            </a:r>
+            <a:r>
+              <a:rPr lang="zh-CN" altLang="en-US"/>
+              <a:t>操作符</a:t>
+            </a:r>
+            <a:r>
+              <a:rPr lang="en-US" altLang="zh-CN"/>
+              <a:t>-&gt;</a:t>
+            </a:r>
+            <a:endParaRPr lang="zh-CN" altLang="en-US"/>
+          </a:p>
+        </p:txBody>
+      </p:sp>
+      <p:sp>
+        <p:nvSpPr>
+          <p:cNvPr id="5" name="文本框 4">
+            <a:extLst>
+              <a:ext uri="{FF2B5EF4-FFF2-40B4-BE49-F238E27FC236}">
+                <a16:creationId xmlns:a16="http://schemas.microsoft.com/office/drawing/2014/main" id="{9310550E-0FB4-4DF9-846C-07CF64385894}"/>
+              </a:ext>
+            </a:extLst>
+          </p:cNvPr>
+          <p:cNvSpPr txBox="1"/>
+          <p:nvPr/>
+        </p:nvSpPr>
+        <p:spPr>
+          <a:xfrm>
+            <a:off x="266331" y="994299"/>
+            <a:ext cx="4030462" cy="1473463"/>
+          </a:xfrm>
+          <a:prstGeom prst="rect">
+            <a:avLst/>
+          </a:prstGeom>
+          <a:noFill/>
+        </p:spPr>
+        <p:txBody>
+          <a:bodyPr wrap="square" rtlCol="0">
+            <a:spAutoFit/>
+          </a:bodyPr>
+          <a:lstStyle/>
+          <a:p>
+            <a:endParaRPr lang="zh-CN" altLang="en-US"/>
+          </a:p>
+        </p:txBody>
+      </p:sp>
       <p:pic>
         <p:nvPicPr>
-          <p:cNvPr id="4" name="图片 3">
-            <a:extLst>
-              <a:ext uri="{FF2B5EF4-FFF2-40B4-BE49-F238E27FC236}">
-                <a16:creationId xmlns:a16="http://schemas.microsoft.com/office/drawing/2014/main" id="{CA924E91-1974-4D1B-AC82-F3145E823666}"/>
+          <p:cNvPr id="6" name="图片 5">
+            <a:extLst>
+              <a:ext uri="{FF2B5EF4-FFF2-40B4-BE49-F238E27FC236}">
+                <a16:creationId xmlns:a16="http://schemas.microsoft.com/office/drawing/2014/main" id="{C2213817-CEAD-44E2-9BF2-3D8C18E10675}"/>
               </a:ext>
             </a:extLst>
           </p:cNvPr>
@@ -6197,8 +6364,8 @@
         </p:blipFill>
         <p:spPr>
           <a:xfrm>
-            <a:off x="563623" y="451230"/>
-            <a:ext cx="4763638" cy="1620166"/>
+            <a:off x="458679" y="920768"/>
+            <a:ext cx="4656223" cy="1546994"/>
           </a:xfrm>
           <a:prstGeom prst="rect">
             <a:avLst/>
@@ -6210,7 +6377,7 @@
           <p:cNvPr id="7" name="文本框 6">
             <a:extLst>
               <a:ext uri="{FF2B5EF4-FFF2-40B4-BE49-F238E27FC236}">
-                <a16:creationId xmlns:a16="http://schemas.microsoft.com/office/drawing/2014/main" id="{15BCA35D-79E5-481E-9BCF-804F9122932B}"/>
+                <a16:creationId xmlns:a16="http://schemas.microsoft.com/office/drawing/2014/main" id="{BCF366D4-D354-4548-8E29-C3842F96427C}"/>
               </a:ext>
             </a:extLst>
           </p:cNvPr>
@@ -6219,8 +6386,8 @@
         </p:nvSpPr>
         <p:spPr>
           <a:xfrm>
-            <a:off x="354563" y="2407298"/>
-            <a:ext cx="3079102" cy="369332"/>
+            <a:off x="665825" y="2716567"/>
+            <a:ext cx="9392575" cy="369332"/>
           </a:xfrm>
           <a:prstGeom prst="rect">
             <a:avLst/>
@@ -6234,86 +6401,37 @@
           <a:lstStyle/>
           <a:p>
             <a:r>
+              <a:rPr lang="zh-CN" altLang="en-US"/>
+              <a:t>在第一周期，</a:t>
+            </a:r>
+            <a:r>
               <a:rPr lang="en-US" altLang="zh-CN"/>
-              <a:t>Scade</a:t>
-            </a:r>
-            <a:r>
-              <a:rPr lang="zh-CN" altLang="en-US"/>
-              <a:t>程序</a:t>
-            </a:r>
-          </a:p>
-        </p:txBody>
-      </p:sp>
-      <p:sp>
-        <p:nvSpPr>
-          <p:cNvPr id="2" name="文本框 1">
-            <a:extLst>
-              <a:ext uri="{FF2B5EF4-FFF2-40B4-BE49-F238E27FC236}">
-                <a16:creationId xmlns:a16="http://schemas.microsoft.com/office/drawing/2014/main" id="{78624E08-959C-488E-90C7-F10E762EF3B3}"/>
-              </a:ext>
-            </a:extLst>
-          </p:cNvPr>
-          <p:cNvSpPr txBox="1"/>
-          <p:nvPr/>
-        </p:nvSpPr>
-        <p:spPr>
-          <a:xfrm>
-            <a:off x="253637" y="190239"/>
-            <a:ext cx="2267339" cy="369332"/>
-          </a:xfrm>
-          <a:prstGeom prst="rect">
-            <a:avLst/>
-          </a:prstGeom>
-          <a:noFill/>
-        </p:spPr>
-        <p:txBody>
-          <a:bodyPr wrap="square" rtlCol="0">
-            <a:spAutoFit/>
-          </a:bodyPr>
-          <a:lstStyle/>
-          <a:p>
+              <a:t>F</a:t>
+            </a:r>
+            <a:r>
+              <a:rPr lang="zh-CN" altLang="en-US"/>
+              <a:t>的输出由输入</a:t>
+            </a:r>
             <a:r>
               <a:rPr lang="en-US" altLang="zh-CN"/>
-              <a:t>fby</a:t>
+              <a:t>i</a:t>
+            </a:r>
+            <a:r>
+              <a:rPr lang="zh-CN" altLang="en-US"/>
+              <a:t>提供。从第二周期开始，操作符变为</a:t>
+            </a:r>
+            <a:r>
+              <a:rPr lang="en-US" altLang="zh-CN"/>
+              <a:t>F=f</a:t>
             </a:r>
             <a:endParaRPr lang="zh-CN" altLang="en-US"/>
           </a:p>
         </p:txBody>
       </p:sp>
-      <p:pic>
-        <p:nvPicPr>
-          <p:cNvPr id="9" name="图片 8">
-            <a:extLst>
-              <a:ext uri="{FF2B5EF4-FFF2-40B4-BE49-F238E27FC236}">
-                <a16:creationId xmlns:a16="http://schemas.microsoft.com/office/drawing/2014/main" id="{5243F77F-94D5-4490-B8CB-CF4E366F53B4}"/>
-              </a:ext>
-            </a:extLst>
-          </p:cNvPr>
-          <p:cNvPicPr>
-            <a:picLocks noChangeAspect="1"/>
-          </p:cNvPicPr>
-          <p:nvPr/>
-        </p:nvPicPr>
-        <p:blipFill>
-          <a:blip r:embed="rId3"/>
-          <a:stretch>
-            <a:fillRect/>
-          </a:stretch>
-        </p:blipFill>
-        <p:spPr>
-          <a:xfrm>
-            <a:off x="524961" y="3143190"/>
-            <a:ext cx="5817408" cy="2640405"/>
-          </a:xfrm>
-          <a:prstGeom prst="rect">
-            <a:avLst/>
-          </a:prstGeom>
-        </p:spPr>
-      </p:pic>
     </p:spTree>
     <p:extLst>
       <p:ext uri="{BB962C8B-B14F-4D97-AF65-F5344CB8AC3E}">
-        <p14:creationId xmlns:p14="http://schemas.microsoft.com/office/powerpoint/2010/main" val="3328114629"/>
+        <p14:creationId xmlns:p14="http://schemas.microsoft.com/office/powerpoint/2010/main" val="1525841761"/>
       </p:ext>
     </p:extLst>
   </p:cSld>
@@ -6345,7 +6463,7 @@
           <p:cNvPr id="4" name="图片 3">
             <a:extLst>
               <a:ext uri="{FF2B5EF4-FFF2-40B4-BE49-F238E27FC236}">
-                <a16:creationId xmlns:a16="http://schemas.microsoft.com/office/drawing/2014/main" id="{260AB899-7C04-4FD2-8492-4A8C395037F8}"/>
+                <a16:creationId xmlns:a16="http://schemas.microsoft.com/office/drawing/2014/main" id="{CA924E91-1974-4D1B-AC82-F3145E823666}"/>
               </a:ext>
             </a:extLst>
           </p:cNvPr>
@@ -6362,20 +6480,95 @@
         </p:blipFill>
         <p:spPr>
           <a:xfrm>
-            <a:off x="88087" y="46653"/>
-            <a:ext cx="5235746" cy="3279923"/>
+            <a:off x="563623" y="451230"/>
+            <a:ext cx="4763638" cy="1620166"/>
           </a:xfrm>
           <a:prstGeom prst="rect">
             <a:avLst/>
           </a:prstGeom>
         </p:spPr>
       </p:pic>
+      <p:sp>
+        <p:nvSpPr>
+          <p:cNvPr id="7" name="文本框 6">
+            <a:extLst>
+              <a:ext uri="{FF2B5EF4-FFF2-40B4-BE49-F238E27FC236}">
+                <a16:creationId xmlns:a16="http://schemas.microsoft.com/office/drawing/2014/main" id="{15BCA35D-79E5-481E-9BCF-804F9122932B}"/>
+              </a:ext>
+            </a:extLst>
+          </p:cNvPr>
+          <p:cNvSpPr txBox="1"/>
+          <p:nvPr/>
+        </p:nvSpPr>
+        <p:spPr>
+          <a:xfrm>
+            <a:off x="354563" y="2407298"/>
+            <a:ext cx="3079102" cy="369332"/>
+          </a:xfrm>
+          <a:prstGeom prst="rect">
+            <a:avLst/>
+          </a:prstGeom>
+          <a:noFill/>
+        </p:spPr>
+        <p:txBody>
+          <a:bodyPr wrap="square" rtlCol="0">
+            <a:spAutoFit/>
+          </a:bodyPr>
+          <a:lstStyle/>
+          <a:p>
+            <a:r>
+              <a:rPr lang="en-US" altLang="zh-CN"/>
+              <a:t>Scade</a:t>
+            </a:r>
+            <a:r>
+              <a:rPr lang="zh-CN" altLang="en-US"/>
+              <a:t>程序</a:t>
+            </a:r>
+          </a:p>
+        </p:txBody>
+      </p:sp>
+      <p:sp>
+        <p:nvSpPr>
+          <p:cNvPr id="2" name="文本框 1">
+            <a:extLst>
+              <a:ext uri="{FF2B5EF4-FFF2-40B4-BE49-F238E27FC236}">
+                <a16:creationId xmlns:a16="http://schemas.microsoft.com/office/drawing/2014/main" id="{78624E08-959C-488E-90C7-F10E762EF3B3}"/>
+              </a:ext>
+            </a:extLst>
+          </p:cNvPr>
+          <p:cNvSpPr txBox="1"/>
+          <p:nvPr/>
+        </p:nvSpPr>
+        <p:spPr>
+          <a:xfrm>
+            <a:off x="253637" y="190239"/>
+            <a:ext cx="2267339" cy="369332"/>
+          </a:xfrm>
+          <a:prstGeom prst="rect">
+            <a:avLst/>
+          </a:prstGeom>
+          <a:noFill/>
+        </p:spPr>
+        <p:txBody>
+          <a:bodyPr wrap="square" rtlCol="0">
+            <a:spAutoFit/>
+          </a:bodyPr>
+          <a:lstStyle/>
+          <a:p>
+            <a:r>
+              <a:rPr lang="en-US" altLang="zh-CN"/>
+              <a:t>fby</a:t>
+            </a:r>
+            <a:endParaRPr lang="zh-CN" altLang="en-US"/>
+          </a:p>
+        </p:txBody>
+      </p:sp>
       <p:pic>
         <p:nvPicPr>
-          <p:cNvPr id="5" name="图片 4">
-            <a:extLst>
-              <a:ext uri="{FF2B5EF4-FFF2-40B4-BE49-F238E27FC236}">
-                <a16:creationId xmlns:a16="http://schemas.microsoft.com/office/drawing/2014/main" id="{0038BA2E-1D29-4AAE-81D1-155805573AD4}"/>
+          <p:cNvPr id="9" name="图片 8">
+            <a:extLst>
+              <a:ext uri="{FF2B5EF4-FFF2-40B4-BE49-F238E27FC236}">
+                <a16:creationId xmlns:a16="http://schemas.microsoft.com/office/drawing/2014/main" id="{5243F77F-94D5-4490-B8CB-CF4E366F53B4}"/>
               </a:ext>
             </a:extLst>
           </p:cNvPr>
@@ -6392,8 +6585,8 @@
         </p:blipFill>
         <p:spPr>
           <a:xfrm>
-            <a:off x="6974082" y="84915"/>
-            <a:ext cx="4366638" cy="3459780"/>
+            <a:off x="524961" y="3143190"/>
+            <a:ext cx="5817408" cy="2640405"/>
           </a:xfrm>
           <a:prstGeom prst="rect">
             <a:avLst/>
@@ -6402,10 +6595,10 @@
       </p:pic>
       <p:pic>
         <p:nvPicPr>
-          <p:cNvPr id="6" name="图片 5">
-            <a:extLst>
-              <a:ext uri="{FF2B5EF4-FFF2-40B4-BE49-F238E27FC236}">
-                <a16:creationId xmlns:a16="http://schemas.microsoft.com/office/drawing/2014/main" id="{E79149CF-A550-4F2E-A5D5-8FD6EE25612E}"/>
+          <p:cNvPr id="3" name="图片 2">
+            <a:extLst>
+              <a:ext uri="{FF2B5EF4-FFF2-40B4-BE49-F238E27FC236}">
+                <a16:creationId xmlns:a16="http://schemas.microsoft.com/office/drawing/2014/main" id="{8CA6A65F-830A-4339-B48E-4CD7CF9354E5}"/>
               </a:ext>
             </a:extLst>
           </p:cNvPr>
@@ -6422,18 +6615,53 @@
         </p:blipFill>
         <p:spPr>
           <a:xfrm>
-            <a:off x="3461734" y="3040346"/>
-            <a:ext cx="3406435" cy="3985605"/>
+            <a:off x="5851273" y="790486"/>
+            <a:ext cx="5105842" cy="784928"/>
           </a:xfrm>
           <a:prstGeom prst="rect">
             <a:avLst/>
           </a:prstGeom>
         </p:spPr>
       </p:pic>
+      <p:sp>
+        <p:nvSpPr>
+          <p:cNvPr id="5" name="文本框 4">
+            <a:extLst>
+              <a:ext uri="{FF2B5EF4-FFF2-40B4-BE49-F238E27FC236}">
+                <a16:creationId xmlns:a16="http://schemas.microsoft.com/office/drawing/2014/main" id="{FEBA729A-A044-4E15-87F5-7EC28AF45C76}"/>
+              </a:ext>
+            </a:extLst>
+          </p:cNvPr>
+          <p:cNvSpPr txBox="1"/>
+          <p:nvPr/>
+        </p:nvSpPr>
+        <p:spPr>
+          <a:xfrm>
+            <a:off x="5851273" y="1793289"/>
+            <a:ext cx="4899585" cy="646331"/>
+          </a:xfrm>
+          <a:prstGeom prst="rect">
+            <a:avLst/>
+          </a:prstGeom>
+          <a:noFill/>
+        </p:spPr>
+        <p:txBody>
+          <a:bodyPr wrap="square" rtlCol="0">
+            <a:spAutoFit/>
+          </a:bodyPr>
+          <a:lstStyle/>
+          <a:p>
+            <a:r>
+              <a:rPr lang="zh-CN" altLang="en-US"/>
+              <a:t>为延迟若干的周期输入提供一个默认值，延迟的周期值必须是正整数。</a:t>
+            </a:r>
+          </a:p>
+        </p:txBody>
+      </p:sp>
     </p:spTree>
     <p:extLst>
       <p:ext uri="{BB962C8B-B14F-4D97-AF65-F5344CB8AC3E}">
-        <p14:creationId xmlns:p14="http://schemas.microsoft.com/office/powerpoint/2010/main" val="1930989333"/>
+        <p14:creationId xmlns:p14="http://schemas.microsoft.com/office/powerpoint/2010/main" val="3328114629"/>
       </p:ext>
     </p:extLst>
   </p:cSld>
@@ -6465,7 +6693,7 @@
           <p:cNvPr id="4" name="图片 3">
             <a:extLst>
               <a:ext uri="{FF2B5EF4-FFF2-40B4-BE49-F238E27FC236}">
-                <a16:creationId xmlns:a16="http://schemas.microsoft.com/office/drawing/2014/main" id="{201A004D-CB92-4EE5-B9E7-9A4466B5FFD6}"/>
+                <a16:creationId xmlns:a16="http://schemas.microsoft.com/office/drawing/2014/main" id="{260AB899-7C04-4FD2-8492-4A8C395037F8}"/>
               </a:ext>
             </a:extLst>
           </p:cNvPr>
@@ -6482,56 +6710,20 @@
         </p:blipFill>
         <p:spPr>
           <a:xfrm>
-            <a:off x="642039" y="483180"/>
-            <a:ext cx="5029636" cy="1562235"/>
+            <a:off x="88087" y="46653"/>
+            <a:ext cx="5235746" cy="3279923"/>
           </a:xfrm>
           <a:prstGeom prst="rect">
             <a:avLst/>
           </a:prstGeom>
         </p:spPr>
       </p:pic>
-      <p:sp>
-        <p:nvSpPr>
-          <p:cNvPr id="2" name="文本框 1">
-            <a:extLst>
-              <a:ext uri="{FF2B5EF4-FFF2-40B4-BE49-F238E27FC236}">
-                <a16:creationId xmlns:a16="http://schemas.microsoft.com/office/drawing/2014/main" id="{C70C3900-75FC-4D3E-806E-E68CD198D5CC}"/>
-              </a:ext>
-            </a:extLst>
-          </p:cNvPr>
-          <p:cNvSpPr txBox="1"/>
-          <p:nvPr/>
-        </p:nvSpPr>
-        <p:spPr>
-          <a:xfrm>
-            <a:off x="270588" y="195943"/>
-            <a:ext cx="2453951" cy="382555"/>
-          </a:xfrm>
-          <a:prstGeom prst="rect">
-            <a:avLst/>
-          </a:prstGeom>
-          <a:noFill/>
-        </p:spPr>
-        <p:txBody>
-          <a:bodyPr wrap="square" rtlCol="0">
-            <a:spAutoFit/>
-          </a:bodyPr>
-          <a:lstStyle/>
-          <a:p>
-            <a:r>
-              <a:rPr lang="en-US" altLang="zh-CN"/>
-              <a:t>Pre -&gt;</a:t>
-            </a:r>
-            <a:endParaRPr lang="zh-CN" altLang="en-US"/>
-          </a:p>
-        </p:txBody>
-      </p:sp>
       <p:pic>
         <p:nvPicPr>
-          <p:cNvPr id="3" name="图片 2">
-            <a:extLst>
-              <a:ext uri="{FF2B5EF4-FFF2-40B4-BE49-F238E27FC236}">
-                <a16:creationId xmlns:a16="http://schemas.microsoft.com/office/drawing/2014/main" id="{96065FC7-AA9A-40A2-9E1A-0F5E75ED793B}"/>
+          <p:cNvPr id="5" name="图片 4">
+            <a:extLst>
+              <a:ext uri="{FF2B5EF4-FFF2-40B4-BE49-F238E27FC236}">
+                <a16:creationId xmlns:a16="http://schemas.microsoft.com/office/drawing/2014/main" id="{0038BA2E-1D29-4AAE-81D1-155805573AD4}"/>
               </a:ext>
             </a:extLst>
           </p:cNvPr>
@@ -6548,8 +6740,38 @@
         </p:blipFill>
         <p:spPr>
           <a:xfrm>
-            <a:off x="742040" y="2481940"/>
-            <a:ext cx="5674683" cy="3163079"/>
+            <a:off x="6974082" y="84915"/>
+            <a:ext cx="4366638" cy="3459780"/>
+          </a:xfrm>
+          <a:prstGeom prst="rect">
+            <a:avLst/>
+          </a:prstGeom>
+        </p:spPr>
+      </p:pic>
+      <p:pic>
+        <p:nvPicPr>
+          <p:cNvPr id="6" name="图片 5">
+            <a:extLst>
+              <a:ext uri="{FF2B5EF4-FFF2-40B4-BE49-F238E27FC236}">
+                <a16:creationId xmlns:a16="http://schemas.microsoft.com/office/drawing/2014/main" id="{E79149CF-A550-4F2E-A5D5-8FD6EE25612E}"/>
+              </a:ext>
+            </a:extLst>
+          </p:cNvPr>
+          <p:cNvPicPr>
+            <a:picLocks noChangeAspect="1"/>
+          </p:cNvPicPr>
+          <p:nvPr/>
+        </p:nvPicPr>
+        <p:blipFill>
+          <a:blip r:embed="rId4"/>
+          <a:stretch>
+            <a:fillRect/>
+          </a:stretch>
+        </p:blipFill>
+        <p:spPr>
+          <a:xfrm>
+            <a:off x="3461734" y="3040346"/>
+            <a:ext cx="3406435" cy="3985605"/>
           </a:xfrm>
           <a:prstGeom prst="rect">
             <a:avLst/>
@@ -6559,7 +6781,7 @@
     </p:spTree>
     <p:extLst>
       <p:ext uri="{BB962C8B-B14F-4D97-AF65-F5344CB8AC3E}">
-        <p14:creationId xmlns:p14="http://schemas.microsoft.com/office/powerpoint/2010/main" val="535751406"/>
+        <p14:creationId xmlns:p14="http://schemas.microsoft.com/office/powerpoint/2010/main" val="1930989333"/>
       </p:ext>
     </p:extLst>
   </p:cSld>
@@ -6591,7 +6813,7 @@
           <p:cNvPr id="4" name="图片 3">
             <a:extLst>
               <a:ext uri="{FF2B5EF4-FFF2-40B4-BE49-F238E27FC236}">
-                <a16:creationId xmlns:a16="http://schemas.microsoft.com/office/drawing/2014/main" id="{E90D756C-EADC-4CF6-9F68-0DA27F6EAA42}"/>
+                <a16:creationId xmlns:a16="http://schemas.microsoft.com/office/drawing/2014/main" id="{201A004D-CB92-4EE5-B9E7-9A4466B5FFD6}"/>
               </a:ext>
             </a:extLst>
           </p:cNvPr>
@@ -6608,20 +6830,56 @@
         </p:blipFill>
         <p:spPr>
           <a:xfrm>
-            <a:off x="329201" y="198591"/>
-            <a:ext cx="5692633" cy="3475021"/>
+            <a:off x="642039" y="483180"/>
+            <a:ext cx="5029636" cy="1562235"/>
           </a:xfrm>
           <a:prstGeom prst="rect">
             <a:avLst/>
           </a:prstGeom>
         </p:spPr>
       </p:pic>
+      <p:sp>
+        <p:nvSpPr>
+          <p:cNvPr id="2" name="文本框 1">
+            <a:extLst>
+              <a:ext uri="{FF2B5EF4-FFF2-40B4-BE49-F238E27FC236}">
+                <a16:creationId xmlns:a16="http://schemas.microsoft.com/office/drawing/2014/main" id="{C70C3900-75FC-4D3E-806E-E68CD198D5CC}"/>
+              </a:ext>
+            </a:extLst>
+          </p:cNvPr>
+          <p:cNvSpPr txBox="1"/>
+          <p:nvPr/>
+        </p:nvSpPr>
+        <p:spPr>
+          <a:xfrm>
+            <a:off x="270588" y="195943"/>
+            <a:ext cx="2453951" cy="382555"/>
+          </a:xfrm>
+          <a:prstGeom prst="rect">
+            <a:avLst/>
+          </a:prstGeom>
+          <a:noFill/>
+        </p:spPr>
+        <p:txBody>
+          <a:bodyPr wrap="square" rtlCol="0">
+            <a:spAutoFit/>
+          </a:bodyPr>
+          <a:lstStyle/>
+          <a:p>
+            <a:r>
+              <a:rPr lang="en-US" altLang="zh-CN"/>
+              <a:t>Pre -&gt;</a:t>
+            </a:r>
+            <a:endParaRPr lang="zh-CN" altLang="en-US"/>
+          </a:p>
+        </p:txBody>
+      </p:sp>
       <p:pic>
         <p:nvPicPr>
-          <p:cNvPr id="5" name="图片 4">
-            <a:extLst>
-              <a:ext uri="{FF2B5EF4-FFF2-40B4-BE49-F238E27FC236}">
-                <a16:creationId xmlns:a16="http://schemas.microsoft.com/office/drawing/2014/main" id="{A696FAED-6993-4363-8EBC-CFE5A5C089E4}"/>
+          <p:cNvPr id="3" name="图片 2">
+            <a:extLst>
+              <a:ext uri="{FF2B5EF4-FFF2-40B4-BE49-F238E27FC236}">
+                <a16:creationId xmlns:a16="http://schemas.microsoft.com/office/drawing/2014/main" id="{96065FC7-AA9A-40A2-9E1A-0F5E75ED793B}"/>
               </a:ext>
             </a:extLst>
           </p:cNvPr>
@@ -6638,18 +6896,57 @@
         </p:blipFill>
         <p:spPr>
           <a:xfrm>
-            <a:off x="6598931" y="198591"/>
-            <a:ext cx="4699845" cy="6306338"/>
+            <a:off x="742040" y="2481940"/>
+            <a:ext cx="5674683" cy="3163079"/>
           </a:xfrm>
           <a:prstGeom prst="rect">
             <a:avLst/>
           </a:prstGeom>
         </p:spPr>
       </p:pic>
+      <p:sp>
+        <p:nvSpPr>
+          <p:cNvPr id="5" name="文本框 4">
+            <a:extLst>
+              <a:ext uri="{FF2B5EF4-FFF2-40B4-BE49-F238E27FC236}">
+                <a16:creationId xmlns:a16="http://schemas.microsoft.com/office/drawing/2014/main" id="{9E0C087A-5130-48F8-AA18-A294A8D8468B}"/>
+              </a:ext>
+            </a:extLst>
+          </p:cNvPr>
+          <p:cNvSpPr txBox="1"/>
+          <p:nvPr/>
+        </p:nvSpPr>
+        <p:spPr>
+          <a:xfrm>
+            <a:off x="5477522" y="328474"/>
+            <a:ext cx="5788241" cy="369332"/>
+          </a:xfrm>
+          <a:prstGeom prst="rect">
+            <a:avLst/>
+          </a:prstGeom>
+          <a:noFill/>
+        </p:spPr>
+        <p:txBody>
+          <a:bodyPr wrap="square" rtlCol="0">
+            <a:spAutoFit/>
+          </a:bodyPr>
+          <a:lstStyle/>
+          <a:p>
+            <a:r>
+              <a:rPr lang="en-US" altLang="zh-CN"/>
+              <a:t>Pre</a:t>
+            </a:r>
+            <a:r>
+              <a:rPr lang="zh-CN" altLang="en-US"/>
+              <a:t>作用是输出前一周期输入的值</a:t>
+            </a:r>
+          </a:p>
+        </p:txBody>
+      </p:sp>
     </p:spTree>
     <p:extLst>
       <p:ext uri="{BB962C8B-B14F-4D97-AF65-F5344CB8AC3E}">
-        <p14:creationId xmlns:p14="http://schemas.microsoft.com/office/powerpoint/2010/main" val="4218902705"/>
+        <p14:creationId xmlns:p14="http://schemas.microsoft.com/office/powerpoint/2010/main" val="535751406"/>
       </p:ext>
     </p:extLst>
   </p:cSld>
@@ -6681,7 +6978,37 @@
           <p:cNvPr id="4" name="图片 3">
             <a:extLst>
               <a:ext uri="{FF2B5EF4-FFF2-40B4-BE49-F238E27FC236}">
-                <a16:creationId xmlns:a16="http://schemas.microsoft.com/office/drawing/2014/main" id="{9689FC1C-D87D-4689-AE37-E48C61D49906}"/>
+                <a16:creationId xmlns:a16="http://schemas.microsoft.com/office/drawing/2014/main" id="{E90D756C-EADC-4CF6-9F68-0DA27F6EAA42}"/>
+              </a:ext>
+            </a:extLst>
+          </p:cNvPr>
+          <p:cNvPicPr>
+            <a:picLocks noChangeAspect="1"/>
+          </p:cNvPicPr>
+          <p:nvPr/>
+        </p:nvPicPr>
+        <p:blipFill>
+          <a:blip r:embed="rId2"/>
+          <a:stretch>
+            <a:fillRect/>
+          </a:stretch>
+        </p:blipFill>
+        <p:spPr>
+          <a:xfrm>
+            <a:off x="329201" y="198591"/>
+            <a:ext cx="5692633" cy="3475021"/>
+          </a:xfrm>
+          <a:prstGeom prst="rect">
+            <a:avLst/>
+          </a:prstGeom>
+        </p:spPr>
+      </p:pic>
+      <p:pic>
+        <p:nvPicPr>
+          <p:cNvPr id="5" name="图片 4">
+            <a:extLst>
+              <a:ext uri="{FF2B5EF4-FFF2-40B4-BE49-F238E27FC236}">
+                <a16:creationId xmlns:a16="http://schemas.microsoft.com/office/drawing/2014/main" id="{A696FAED-6993-4363-8EBC-CFE5A5C089E4}"/>
               </a:ext>
             </a:extLst>
           </p:cNvPr>
@@ -6698,74 +7025,8 @@
         </p:blipFill>
         <p:spPr>
           <a:xfrm>
-            <a:off x="548679" y="273019"/>
-            <a:ext cx="4488569" cy="1310754"/>
-          </a:xfrm>
-          <a:prstGeom prst="rect">
-            <a:avLst/>
-          </a:prstGeom>
-        </p:spPr>
-      </p:pic>
-      <p:sp>
-        <p:nvSpPr>
-          <p:cNvPr id="2" name="文本框 1">
-            <a:extLst>
-              <a:ext uri="{FF2B5EF4-FFF2-40B4-BE49-F238E27FC236}">
-                <a16:creationId xmlns:a16="http://schemas.microsoft.com/office/drawing/2014/main" id="{AD69C2AF-66DF-4FF7-A09D-D079402A313E}"/>
-              </a:ext>
-            </a:extLst>
-          </p:cNvPr>
-          <p:cNvSpPr txBox="1"/>
-          <p:nvPr/>
-        </p:nvSpPr>
-        <p:spPr>
-          <a:xfrm>
-            <a:off x="130629" y="130629"/>
-            <a:ext cx="1446244" cy="369332"/>
-          </a:xfrm>
-          <a:prstGeom prst="rect">
-            <a:avLst/>
-          </a:prstGeom>
-          <a:noFill/>
-        </p:spPr>
-        <p:txBody>
-          <a:bodyPr wrap="square" rtlCol="0">
-            <a:spAutoFit/>
-          </a:bodyPr>
-          <a:lstStyle/>
-          <a:p>
-            <a:r>
-              <a:rPr lang="en-US" altLang="zh-CN"/>
-              <a:t>times</a:t>
-            </a:r>
-            <a:endParaRPr lang="zh-CN" altLang="en-US"/>
-          </a:p>
-        </p:txBody>
-      </p:sp>
-      <p:pic>
-        <p:nvPicPr>
-          <p:cNvPr id="3" name="图片 2">
-            <a:extLst>
-              <a:ext uri="{FF2B5EF4-FFF2-40B4-BE49-F238E27FC236}">
-                <a16:creationId xmlns:a16="http://schemas.microsoft.com/office/drawing/2014/main" id="{D0551829-9E65-4F3D-8A24-AF90A43D59EA}"/>
-              </a:ext>
-            </a:extLst>
-          </p:cNvPr>
-          <p:cNvPicPr>
-            <a:picLocks noChangeAspect="1"/>
-          </p:cNvPicPr>
-          <p:nvPr/>
-        </p:nvPicPr>
-        <p:blipFill>
-          <a:blip r:embed="rId4"/>
-          <a:stretch>
-            <a:fillRect/>
-          </a:stretch>
-        </p:blipFill>
-        <p:spPr>
-          <a:xfrm>
-            <a:off x="548679" y="1940767"/>
-            <a:ext cx="6992785" cy="2976465"/>
+            <a:off x="6598931" y="198591"/>
+            <a:ext cx="4699845" cy="6306338"/>
           </a:xfrm>
           <a:prstGeom prst="rect">
             <a:avLst/>
@@ -6775,7 +7036,7 @@
     </p:spTree>
     <p:extLst>
       <p:ext uri="{BB962C8B-B14F-4D97-AF65-F5344CB8AC3E}">
-        <p14:creationId xmlns:p14="http://schemas.microsoft.com/office/powerpoint/2010/main" val="4203107974"/>
+        <p14:creationId xmlns:p14="http://schemas.microsoft.com/office/powerpoint/2010/main" val="4218902705"/>
       </p:ext>
     </p:extLst>
   </p:cSld>
@@ -6807,37 +7068,7 @@
           <p:cNvPr id="4" name="图片 3">
             <a:extLst>
               <a:ext uri="{FF2B5EF4-FFF2-40B4-BE49-F238E27FC236}">
-                <a16:creationId xmlns:a16="http://schemas.microsoft.com/office/drawing/2014/main" id="{A42FC0EB-7890-4F87-8FEC-262A37139D76}"/>
-              </a:ext>
-            </a:extLst>
-          </p:cNvPr>
-          <p:cNvPicPr>
-            <a:picLocks noChangeAspect="1"/>
-          </p:cNvPicPr>
-          <p:nvPr/>
-        </p:nvPicPr>
-        <p:blipFill>
-          <a:blip r:embed="rId2"/>
-          <a:stretch>
-            <a:fillRect/>
-          </a:stretch>
-        </p:blipFill>
-        <p:spPr>
-          <a:xfrm>
-            <a:off x="288809" y="260338"/>
-            <a:ext cx="6538527" cy="3276884"/>
-          </a:xfrm>
-          <a:prstGeom prst="rect">
-            <a:avLst/>
-          </a:prstGeom>
-        </p:spPr>
-      </p:pic>
-      <p:pic>
-        <p:nvPicPr>
-          <p:cNvPr id="5" name="图片 4">
-            <a:extLst>
-              <a:ext uri="{FF2B5EF4-FFF2-40B4-BE49-F238E27FC236}">
-                <a16:creationId xmlns:a16="http://schemas.microsoft.com/office/drawing/2014/main" id="{6EC9F0D5-F754-47F8-92B5-709B0433253E}"/>
+                <a16:creationId xmlns:a16="http://schemas.microsoft.com/office/drawing/2014/main" id="{9689FC1C-D87D-4689-AE37-E48C61D49906}"/>
               </a:ext>
             </a:extLst>
           </p:cNvPr>
@@ -6854,8 +7085,74 @@
         </p:blipFill>
         <p:spPr>
           <a:xfrm>
-            <a:off x="6026301" y="1270820"/>
-            <a:ext cx="6073666" cy="5326842"/>
+            <a:off x="548679" y="273019"/>
+            <a:ext cx="4488569" cy="1310754"/>
+          </a:xfrm>
+          <a:prstGeom prst="rect">
+            <a:avLst/>
+          </a:prstGeom>
+        </p:spPr>
+      </p:pic>
+      <p:sp>
+        <p:nvSpPr>
+          <p:cNvPr id="2" name="文本框 1">
+            <a:extLst>
+              <a:ext uri="{FF2B5EF4-FFF2-40B4-BE49-F238E27FC236}">
+                <a16:creationId xmlns:a16="http://schemas.microsoft.com/office/drawing/2014/main" id="{AD69C2AF-66DF-4FF7-A09D-D079402A313E}"/>
+              </a:ext>
+            </a:extLst>
+          </p:cNvPr>
+          <p:cNvSpPr txBox="1"/>
+          <p:nvPr/>
+        </p:nvSpPr>
+        <p:spPr>
+          <a:xfrm>
+            <a:off x="130629" y="130629"/>
+            <a:ext cx="1446244" cy="369332"/>
+          </a:xfrm>
+          <a:prstGeom prst="rect">
+            <a:avLst/>
+          </a:prstGeom>
+          <a:noFill/>
+        </p:spPr>
+        <p:txBody>
+          <a:bodyPr wrap="square" rtlCol="0">
+            <a:spAutoFit/>
+          </a:bodyPr>
+          <a:lstStyle/>
+          <a:p>
+            <a:r>
+              <a:rPr lang="en-US" altLang="zh-CN"/>
+              <a:t>times</a:t>
+            </a:r>
+            <a:endParaRPr lang="zh-CN" altLang="en-US"/>
+          </a:p>
+        </p:txBody>
+      </p:sp>
+      <p:pic>
+        <p:nvPicPr>
+          <p:cNvPr id="3" name="图片 2">
+            <a:extLst>
+              <a:ext uri="{FF2B5EF4-FFF2-40B4-BE49-F238E27FC236}">
+                <a16:creationId xmlns:a16="http://schemas.microsoft.com/office/drawing/2014/main" id="{D0551829-9E65-4F3D-8A24-AF90A43D59EA}"/>
+              </a:ext>
+            </a:extLst>
+          </p:cNvPr>
+          <p:cNvPicPr>
+            <a:picLocks noChangeAspect="1"/>
+          </p:cNvPicPr>
+          <p:nvPr/>
+        </p:nvPicPr>
+        <p:blipFill>
+          <a:blip r:embed="rId4"/>
+          <a:stretch>
+            <a:fillRect/>
+          </a:stretch>
+        </p:blipFill>
+        <p:spPr>
+          <a:xfrm>
+            <a:off x="548679" y="1940767"/>
+            <a:ext cx="6992785" cy="2976465"/>
           </a:xfrm>
           <a:prstGeom prst="rect">
             <a:avLst/>
@@ -6865,7 +7162,7 @@
     </p:spTree>
     <p:extLst>
       <p:ext uri="{BB962C8B-B14F-4D97-AF65-F5344CB8AC3E}">
-        <p14:creationId xmlns:p14="http://schemas.microsoft.com/office/powerpoint/2010/main" val="278895512"/>
+        <p14:creationId xmlns:p14="http://schemas.microsoft.com/office/powerpoint/2010/main" val="4203107974"/>
       </p:ext>
     </p:extLst>
   </p:cSld>
@@ -6894,10 +7191,10 @@
       </p:grpSpPr>
       <p:pic>
         <p:nvPicPr>
-          <p:cNvPr id="6" name="图片 5">
-            <a:extLst>
-              <a:ext uri="{FF2B5EF4-FFF2-40B4-BE49-F238E27FC236}">
-                <a16:creationId xmlns:a16="http://schemas.microsoft.com/office/drawing/2014/main" id="{509F50C0-73BE-4778-94E5-BE7191AE3A8B}"/>
+          <p:cNvPr id="4" name="图片 3">
+            <a:extLst>
+              <a:ext uri="{FF2B5EF4-FFF2-40B4-BE49-F238E27FC236}">
+                <a16:creationId xmlns:a16="http://schemas.microsoft.com/office/drawing/2014/main" id="{A42FC0EB-7890-4F87-8FEC-262A37139D76}"/>
               </a:ext>
             </a:extLst>
           </p:cNvPr>
@@ -6914,8 +7211,8 @@
         </p:blipFill>
         <p:spPr>
           <a:xfrm>
-            <a:off x="746713" y="497560"/>
-            <a:ext cx="8861344" cy="3673223"/>
+            <a:off x="288809" y="260338"/>
+            <a:ext cx="6538527" cy="3276884"/>
           </a:xfrm>
           <a:prstGeom prst="rect">
             <a:avLst/>
@@ -6924,10 +7221,10 @@
       </p:pic>
       <p:pic>
         <p:nvPicPr>
-          <p:cNvPr id="7" name="图片 6">
-            <a:extLst>
-              <a:ext uri="{FF2B5EF4-FFF2-40B4-BE49-F238E27FC236}">
-                <a16:creationId xmlns:a16="http://schemas.microsoft.com/office/drawing/2014/main" id="{510CFCDF-D4BF-4CF2-93AA-3D4B75DE96B2}"/>
+          <p:cNvPr id="5" name="图片 4">
+            <a:extLst>
+              <a:ext uri="{FF2B5EF4-FFF2-40B4-BE49-F238E27FC236}">
+                <a16:creationId xmlns:a16="http://schemas.microsoft.com/office/drawing/2014/main" id="{6EC9F0D5-F754-47F8-92B5-709B0433253E}"/>
               </a:ext>
             </a:extLst>
           </p:cNvPr>
@@ -6944,8 +7241,8 @@
         </p:blipFill>
         <p:spPr>
           <a:xfrm>
-            <a:off x="959136" y="4336536"/>
-            <a:ext cx="10143099" cy="2309060"/>
+            <a:off x="6026301" y="1270820"/>
+            <a:ext cx="6073666" cy="5326842"/>
           </a:xfrm>
           <a:prstGeom prst="rect">
             <a:avLst/>
@@ -6955,7 +7252,7 @@
     </p:spTree>
     <p:extLst>
       <p:ext uri="{BB962C8B-B14F-4D97-AF65-F5344CB8AC3E}">
-        <p14:creationId xmlns:p14="http://schemas.microsoft.com/office/powerpoint/2010/main" val="3322273779"/>
+        <p14:creationId xmlns:p14="http://schemas.microsoft.com/office/powerpoint/2010/main" val="278895512"/>
       </p:ext>
     </p:extLst>
   </p:cSld>

--- a/docs/scade.pptx
+++ b/docs/scade.pptx
@@ -5,7 +5,7 @@
     <p:sldMasterId id="2147483648" r:id="rId1"/>
   </p:sldMasterIdLst>
   <p:notesMasterIdLst>
-    <p:notesMasterId r:id="rId22"/>
+    <p:notesMasterId r:id="rId23"/>
   </p:notesMasterIdLst>
   <p:sldIdLst>
     <p:sldId id="256" r:id="rId2"/>
@@ -15,19 +15,20 @@
     <p:sldId id="266" r:id="rId6"/>
     <p:sldId id="260" r:id="rId7"/>
     <p:sldId id="267" r:id="rId8"/>
-    <p:sldId id="261" r:id="rId9"/>
-    <p:sldId id="268" r:id="rId10"/>
-    <p:sldId id="262" r:id="rId11"/>
-    <p:sldId id="263" r:id="rId12"/>
-    <p:sldId id="264" r:id="rId13"/>
-    <p:sldId id="265" r:id="rId14"/>
-    <p:sldId id="257" r:id="rId15"/>
-    <p:sldId id="258" r:id="rId16"/>
-    <p:sldId id="274" r:id="rId17"/>
-    <p:sldId id="270" r:id="rId18"/>
-    <p:sldId id="271" r:id="rId19"/>
-    <p:sldId id="273" r:id="rId20"/>
-    <p:sldId id="272" r:id="rId21"/>
+    <p:sldId id="276" r:id="rId9"/>
+    <p:sldId id="261" r:id="rId10"/>
+    <p:sldId id="268" r:id="rId11"/>
+    <p:sldId id="262" r:id="rId12"/>
+    <p:sldId id="263" r:id="rId13"/>
+    <p:sldId id="264" r:id="rId14"/>
+    <p:sldId id="265" r:id="rId15"/>
+    <p:sldId id="257" r:id="rId16"/>
+    <p:sldId id="258" r:id="rId17"/>
+    <p:sldId id="274" r:id="rId18"/>
+    <p:sldId id="270" r:id="rId19"/>
+    <p:sldId id="271" r:id="rId20"/>
+    <p:sldId id="273" r:id="rId21"/>
+    <p:sldId id="272" r:id="rId22"/>
   </p:sldIdLst>
   <p:sldSz cx="12192000" cy="6858000"/>
   <p:notesSz cx="6858000" cy="9144000"/>
@@ -216,7 +217,7 @@
           <a:p>
             <a:fld id="{3744C8BF-56B8-46D4-ADA5-A0AF811348DF}" type="datetimeFigureOut">
               <a:rPr lang="zh-CN" altLang="en-US" smtClean="0"/>
-              <a:t>2023/9/24</a:t>
+              <a:t>2023/10/7</a:t>
             </a:fld>
             <a:endParaRPr lang="zh-CN" altLang="en-US"/>
           </a:p>
@@ -548,7 +549,7 @@
           <a:p>
             <a:fld id="{2FDDA1C1-A742-400D-836A-F7BD60EEB8F0}" type="slidenum">
               <a:rPr lang="zh-CN" altLang="en-US" smtClean="0"/>
-              <a:t>8</a:t>
+              <a:t>9</a:t>
             </a:fld>
             <a:endParaRPr lang="zh-CN" altLang="en-US"/>
           </a:p>
@@ -714,7 +715,7 @@
           <a:p>
             <a:fld id="{C61D74A4-027F-4A2B-8B92-D0C194C50910}" type="datetimeFigureOut">
               <a:rPr lang="zh-CN" altLang="en-US" smtClean="0"/>
-              <a:t>2023/9/24</a:t>
+              <a:t>2023/10/7</a:t>
             </a:fld>
             <a:endParaRPr lang="zh-CN" altLang="en-US"/>
           </a:p>
@@ -912,7 +913,7 @@
           <a:p>
             <a:fld id="{C61D74A4-027F-4A2B-8B92-D0C194C50910}" type="datetimeFigureOut">
               <a:rPr lang="zh-CN" altLang="en-US" smtClean="0"/>
-              <a:t>2023/9/24</a:t>
+              <a:t>2023/10/7</a:t>
             </a:fld>
             <a:endParaRPr lang="zh-CN" altLang="en-US"/>
           </a:p>
@@ -1120,7 +1121,7 @@
           <a:p>
             <a:fld id="{C61D74A4-027F-4A2B-8B92-D0C194C50910}" type="datetimeFigureOut">
               <a:rPr lang="zh-CN" altLang="en-US" smtClean="0"/>
-              <a:t>2023/9/24</a:t>
+              <a:t>2023/10/7</a:t>
             </a:fld>
             <a:endParaRPr lang="zh-CN" altLang="en-US"/>
           </a:p>
@@ -1318,7 +1319,7 @@
           <a:p>
             <a:fld id="{C61D74A4-027F-4A2B-8B92-D0C194C50910}" type="datetimeFigureOut">
               <a:rPr lang="zh-CN" altLang="en-US" smtClean="0"/>
-              <a:t>2023/9/24</a:t>
+              <a:t>2023/10/7</a:t>
             </a:fld>
             <a:endParaRPr lang="zh-CN" altLang="en-US"/>
           </a:p>
@@ -1593,7 +1594,7 @@
           <a:p>
             <a:fld id="{C61D74A4-027F-4A2B-8B92-D0C194C50910}" type="datetimeFigureOut">
               <a:rPr lang="zh-CN" altLang="en-US" smtClean="0"/>
-              <a:t>2023/9/24</a:t>
+              <a:t>2023/10/7</a:t>
             </a:fld>
             <a:endParaRPr lang="zh-CN" altLang="en-US"/>
           </a:p>
@@ -1858,7 +1859,7 @@
           <a:p>
             <a:fld id="{C61D74A4-027F-4A2B-8B92-D0C194C50910}" type="datetimeFigureOut">
               <a:rPr lang="zh-CN" altLang="en-US" smtClean="0"/>
-              <a:t>2023/9/24</a:t>
+              <a:t>2023/10/7</a:t>
             </a:fld>
             <a:endParaRPr lang="zh-CN" altLang="en-US"/>
           </a:p>
@@ -2270,7 +2271,7 @@
           <a:p>
             <a:fld id="{C61D74A4-027F-4A2B-8B92-D0C194C50910}" type="datetimeFigureOut">
               <a:rPr lang="zh-CN" altLang="en-US" smtClean="0"/>
-              <a:t>2023/9/24</a:t>
+              <a:t>2023/10/7</a:t>
             </a:fld>
             <a:endParaRPr lang="zh-CN" altLang="en-US"/>
           </a:p>
@@ -2411,7 +2412,7 @@
           <a:p>
             <a:fld id="{C61D74A4-027F-4A2B-8B92-D0C194C50910}" type="datetimeFigureOut">
               <a:rPr lang="zh-CN" altLang="en-US" smtClean="0"/>
-              <a:t>2023/9/24</a:t>
+              <a:t>2023/10/7</a:t>
             </a:fld>
             <a:endParaRPr lang="zh-CN" altLang="en-US"/>
           </a:p>
@@ -2524,7 +2525,7 @@
           <a:p>
             <a:fld id="{C61D74A4-027F-4A2B-8B92-D0C194C50910}" type="datetimeFigureOut">
               <a:rPr lang="zh-CN" altLang="en-US" smtClean="0"/>
-              <a:t>2023/9/24</a:t>
+              <a:t>2023/10/7</a:t>
             </a:fld>
             <a:endParaRPr lang="zh-CN" altLang="en-US"/>
           </a:p>
@@ -2835,7 +2836,7 @@
           <a:p>
             <a:fld id="{C61D74A4-027F-4A2B-8B92-D0C194C50910}" type="datetimeFigureOut">
               <a:rPr lang="zh-CN" altLang="en-US" smtClean="0"/>
-              <a:t>2023/9/24</a:t>
+              <a:t>2023/10/7</a:t>
             </a:fld>
             <a:endParaRPr lang="zh-CN" altLang="en-US"/>
           </a:p>
@@ -3123,7 +3124,7 @@
           <a:p>
             <a:fld id="{C61D74A4-027F-4A2B-8B92-D0C194C50910}" type="datetimeFigureOut">
               <a:rPr lang="zh-CN" altLang="en-US" smtClean="0"/>
-              <a:t>2023/9/24</a:t>
+              <a:t>2023/10/7</a:t>
             </a:fld>
             <a:endParaRPr lang="zh-CN" altLang="en-US"/>
           </a:p>
@@ -3364,7 +3365,7 @@
           <a:p>
             <a:fld id="{C61D74A4-027F-4A2B-8B92-D0C194C50910}" type="datetimeFigureOut">
               <a:rPr lang="zh-CN" altLang="en-US" smtClean="0"/>
-              <a:t>2023/9/24</a:t>
+              <a:t>2023/10/7</a:t>
             </a:fld>
             <a:endParaRPr lang="zh-CN" altLang="en-US"/>
           </a:p>
@@ -4434,10 +4435,10 @@
       </p:grpSpPr>
       <p:pic>
         <p:nvPicPr>
-          <p:cNvPr id="6" name="图片 5">
-            <a:extLst>
-              <a:ext uri="{FF2B5EF4-FFF2-40B4-BE49-F238E27FC236}">
-                <a16:creationId xmlns:a16="http://schemas.microsoft.com/office/drawing/2014/main" id="{509F50C0-73BE-4778-94E5-BE7191AE3A8B}"/>
+          <p:cNvPr id="4" name="图片 3">
+            <a:extLst>
+              <a:ext uri="{FF2B5EF4-FFF2-40B4-BE49-F238E27FC236}">
+                <a16:creationId xmlns:a16="http://schemas.microsoft.com/office/drawing/2014/main" id="{A42FC0EB-7890-4F87-8FEC-262A37139D76}"/>
               </a:ext>
             </a:extLst>
           </p:cNvPr>
@@ -4454,8 +4455,8 @@
         </p:blipFill>
         <p:spPr>
           <a:xfrm>
-            <a:off x="746713" y="497560"/>
-            <a:ext cx="8861344" cy="3673223"/>
+            <a:off x="288809" y="260338"/>
+            <a:ext cx="6538527" cy="3276884"/>
           </a:xfrm>
           <a:prstGeom prst="rect">
             <a:avLst/>
@@ -4464,10 +4465,10 @@
       </p:pic>
       <p:pic>
         <p:nvPicPr>
-          <p:cNvPr id="7" name="图片 6">
-            <a:extLst>
-              <a:ext uri="{FF2B5EF4-FFF2-40B4-BE49-F238E27FC236}">
-                <a16:creationId xmlns:a16="http://schemas.microsoft.com/office/drawing/2014/main" id="{510CFCDF-D4BF-4CF2-93AA-3D4B75DE96B2}"/>
+          <p:cNvPr id="5" name="图片 4">
+            <a:extLst>
+              <a:ext uri="{FF2B5EF4-FFF2-40B4-BE49-F238E27FC236}">
+                <a16:creationId xmlns:a16="http://schemas.microsoft.com/office/drawing/2014/main" id="{6EC9F0D5-F754-47F8-92B5-709B0433253E}"/>
               </a:ext>
             </a:extLst>
           </p:cNvPr>
@@ -4484,8 +4485,8 @@
         </p:blipFill>
         <p:spPr>
           <a:xfrm>
-            <a:off x="959136" y="4336536"/>
-            <a:ext cx="10143099" cy="2309060"/>
+            <a:off x="6026301" y="1270820"/>
+            <a:ext cx="6073666" cy="5326842"/>
           </a:xfrm>
           <a:prstGeom prst="rect">
             <a:avLst/>
@@ -4495,7 +4496,7 @@
     </p:spTree>
     <p:extLst>
       <p:ext uri="{BB962C8B-B14F-4D97-AF65-F5344CB8AC3E}">
-        <p14:creationId xmlns:p14="http://schemas.microsoft.com/office/powerpoint/2010/main" val="3322273779"/>
+        <p14:creationId xmlns:p14="http://schemas.microsoft.com/office/powerpoint/2010/main" val="278895512"/>
       </p:ext>
     </p:extLst>
   </p:cSld>
@@ -4524,10 +4525,10 @@
       </p:grpSpPr>
       <p:pic>
         <p:nvPicPr>
-          <p:cNvPr id="4" name="图片 3">
-            <a:extLst>
-              <a:ext uri="{FF2B5EF4-FFF2-40B4-BE49-F238E27FC236}">
-                <a16:creationId xmlns:a16="http://schemas.microsoft.com/office/drawing/2014/main" id="{F923AEB7-25D5-4A2A-9BCD-6581A488A288}"/>
+          <p:cNvPr id="6" name="图片 5">
+            <a:extLst>
+              <a:ext uri="{FF2B5EF4-FFF2-40B4-BE49-F238E27FC236}">
+                <a16:creationId xmlns:a16="http://schemas.microsoft.com/office/drawing/2014/main" id="{509F50C0-73BE-4778-94E5-BE7191AE3A8B}"/>
               </a:ext>
             </a:extLst>
           </p:cNvPr>
@@ -4544,8 +4545,38 @@
         </p:blipFill>
         <p:spPr>
           <a:xfrm>
-            <a:off x="422991" y="270588"/>
-            <a:ext cx="5417039" cy="6144001"/>
+            <a:off x="746713" y="497560"/>
+            <a:ext cx="8861344" cy="3673223"/>
+          </a:xfrm>
+          <a:prstGeom prst="rect">
+            <a:avLst/>
+          </a:prstGeom>
+        </p:spPr>
+      </p:pic>
+      <p:pic>
+        <p:nvPicPr>
+          <p:cNvPr id="7" name="图片 6">
+            <a:extLst>
+              <a:ext uri="{FF2B5EF4-FFF2-40B4-BE49-F238E27FC236}">
+                <a16:creationId xmlns:a16="http://schemas.microsoft.com/office/drawing/2014/main" id="{510CFCDF-D4BF-4CF2-93AA-3D4B75DE96B2}"/>
+              </a:ext>
+            </a:extLst>
+          </p:cNvPr>
+          <p:cNvPicPr>
+            <a:picLocks noChangeAspect="1"/>
+          </p:cNvPicPr>
+          <p:nvPr/>
+        </p:nvPicPr>
+        <p:blipFill>
+          <a:blip r:embed="rId3"/>
+          <a:stretch>
+            <a:fillRect/>
+          </a:stretch>
+        </p:blipFill>
+        <p:spPr>
+          <a:xfrm>
+            <a:off x="959136" y="4336536"/>
+            <a:ext cx="10143099" cy="2309060"/>
           </a:xfrm>
           <a:prstGeom prst="rect">
             <a:avLst/>
@@ -4555,7 +4586,7 @@
     </p:spTree>
     <p:extLst>
       <p:ext uri="{BB962C8B-B14F-4D97-AF65-F5344CB8AC3E}">
-        <p14:creationId xmlns:p14="http://schemas.microsoft.com/office/powerpoint/2010/main" val="4186694113"/>
+        <p14:creationId xmlns:p14="http://schemas.microsoft.com/office/powerpoint/2010/main" val="3322273779"/>
       </p:ext>
     </p:extLst>
   </p:cSld>
@@ -4587,7 +4618,7 @@
           <p:cNvPr id="4" name="图片 3">
             <a:extLst>
               <a:ext uri="{FF2B5EF4-FFF2-40B4-BE49-F238E27FC236}">
-                <a16:creationId xmlns:a16="http://schemas.microsoft.com/office/drawing/2014/main" id="{59EC8BF8-1703-4AB3-B5EE-8EBAC9BF506C}"/>
+                <a16:creationId xmlns:a16="http://schemas.microsoft.com/office/drawing/2014/main" id="{F923AEB7-25D5-4A2A-9BCD-6581A488A288}"/>
               </a:ext>
             </a:extLst>
           </p:cNvPr>
@@ -4604,38 +4635,8 @@
         </p:blipFill>
         <p:spPr>
           <a:xfrm>
-            <a:off x="580695" y="563053"/>
-            <a:ext cx="5027833" cy="5414652"/>
-          </a:xfrm>
-          <a:prstGeom prst="rect">
-            <a:avLst/>
-          </a:prstGeom>
-        </p:spPr>
-      </p:pic>
-      <p:pic>
-        <p:nvPicPr>
-          <p:cNvPr id="5" name="图片 4">
-            <a:extLst>
-              <a:ext uri="{FF2B5EF4-FFF2-40B4-BE49-F238E27FC236}">
-                <a16:creationId xmlns:a16="http://schemas.microsoft.com/office/drawing/2014/main" id="{3BFACC51-F388-4A0A-8D91-0DF76EA1AA31}"/>
-              </a:ext>
-            </a:extLst>
-          </p:cNvPr>
-          <p:cNvPicPr>
-            <a:picLocks noChangeAspect="1"/>
-          </p:cNvPicPr>
-          <p:nvPr/>
-        </p:nvPicPr>
-        <p:blipFill>
-          <a:blip r:embed="rId3"/>
-          <a:stretch>
-            <a:fillRect/>
-          </a:stretch>
-        </p:blipFill>
-        <p:spPr>
-          <a:xfrm>
-            <a:off x="6827939" y="132190"/>
-            <a:ext cx="4694327" cy="6439458"/>
+            <a:off x="422991" y="270588"/>
+            <a:ext cx="5417039" cy="6144001"/>
           </a:xfrm>
           <a:prstGeom prst="rect">
             <a:avLst/>
@@ -4645,7 +4646,7 @@
     </p:spTree>
     <p:extLst>
       <p:ext uri="{BB962C8B-B14F-4D97-AF65-F5344CB8AC3E}">
-        <p14:creationId xmlns:p14="http://schemas.microsoft.com/office/powerpoint/2010/main" val="2469949492"/>
+        <p14:creationId xmlns:p14="http://schemas.microsoft.com/office/powerpoint/2010/main" val="4186694113"/>
       </p:ext>
     </p:extLst>
   </p:cSld>
@@ -4677,7 +4678,7 @@
           <p:cNvPr id="4" name="图片 3">
             <a:extLst>
               <a:ext uri="{FF2B5EF4-FFF2-40B4-BE49-F238E27FC236}">
-                <a16:creationId xmlns:a16="http://schemas.microsoft.com/office/drawing/2014/main" id="{611ABE26-711E-40FE-AA87-9995F7ECB3E1}"/>
+                <a16:creationId xmlns:a16="http://schemas.microsoft.com/office/drawing/2014/main" id="{59EC8BF8-1703-4AB3-B5EE-8EBAC9BF506C}"/>
               </a:ext>
             </a:extLst>
           </p:cNvPr>
@@ -4694,8 +4695,8 @@
         </p:blipFill>
         <p:spPr>
           <a:xfrm>
-            <a:off x="323004" y="223524"/>
-            <a:ext cx="1562235" cy="495343"/>
+            <a:off x="580695" y="563053"/>
+            <a:ext cx="5027833" cy="5414652"/>
           </a:xfrm>
           <a:prstGeom prst="rect">
             <a:avLst/>
@@ -4707,7 +4708,7 @@
           <p:cNvPr id="5" name="图片 4">
             <a:extLst>
               <a:ext uri="{FF2B5EF4-FFF2-40B4-BE49-F238E27FC236}">
-                <a16:creationId xmlns:a16="http://schemas.microsoft.com/office/drawing/2014/main" id="{00DE3585-0865-47A2-A442-B24DD009E3FB}"/>
+                <a16:creationId xmlns:a16="http://schemas.microsoft.com/office/drawing/2014/main" id="{3BFACC51-F388-4A0A-8D91-0DF76EA1AA31}"/>
               </a:ext>
             </a:extLst>
           </p:cNvPr>
@@ -4724,38 +4725,8 @@
         </p:blipFill>
         <p:spPr>
           <a:xfrm>
-            <a:off x="217961" y="919064"/>
-            <a:ext cx="5075360" cy="1280271"/>
-          </a:xfrm>
-          <a:prstGeom prst="rect">
-            <a:avLst/>
-          </a:prstGeom>
-        </p:spPr>
-      </p:pic>
-      <p:pic>
-        <p:nvPicPr>
-          <p:cNvPr id="6" name="图片 5">
-            <a:extLst>
-              <a:ext uri="{FF2B5EF4-FFF2-40B4-BE49-F238E27FC236}">
-                <a16:creationId xmlns:a16="http://schemas.microsoft.com/office/drawing/2014/main" id="{EF26B6EB-ECC1-4099-BBC2-F9186EAF0306}"/>
-              </a:ext>
-            </a:extLst>
-          </p:cNvPr>
-          <p:cNvPicPr>
-            <a:picLocks noChangeAspect="1"/>
-          </p:cNvPicPr>
-          <p:nvPr/>
-        </p:nvPicPr>
-        <p:blipFill>
-          <a:blip r:embed="rId4"/>
-          <a:stretch>
-            <a:fillRect/>
-          </a:stretch>
-        </p:blipFill>
-        <p:spPr>
-          <a:xfrm>
-            <a:off x="217961" y="2399532"/>
-            <a:ext cx="4298052" cy="1219306"/>
+            <a:off x="6827939" y="132190"/>
+            <a:ext cx="4694327" cy="6439458"/>
           </a:xfrm>
           <a:prstGeom prst="rect">
             <a:avLst/>
@@ -4765,7 +4736,7 @@
     </p:spTree>
     <p:extLst>
       <p:ext uri="{BB962C8B-B14F-4D97-AF65-F5344CB8AC3E}">
-        <p14:creationId xmlns:p14="http://schemas.microsoft.com/office/powerpoint/2010/main" val="3825534563"/>
+        <p14:creationId xmlns:p14="http://schemas.microsoft.com/office/powerpoint/2010/main" val="2469949492"/>
       </p:ext>
     </p:extLst>
   </p:cSld>
@@ -4792,227 +4763,12 @@
           <a:chExt cx="0" cy="0"/>
         </a:xfrm>
       </p:grpSpPr>
-      <p:sp>
-        <p:nvSpPr>
-          <p:cNvPr id="4" name="文本框 3">
-            <a:extLst>
-              <a:ext uri="{FF2B5EF4-FFF2-40B4-BE49-F238E27FC236}">
-                <a16:creationId xmlns:a16="http://schemas.microsoft.com/office/drawing/2014/main" id="{4BBA05C8-9C7A-43DF-9507-9E1E7563848A}"/>
-              </a:ext>
-            </a:extLst>
-          </p:cNvPr>
-          <p:cNvSpPr txBox="1"/>
-          <p:nvPr/>
-        </p:nvSpPr>
-        <p:spPr>
-          <a:xfrm>
-            <a:off x="6220408" y="130628"/>
-            <a:ext cx="5971592" cy="6186309"/>
-          </a:xfrm>
-          <a:prstGeom prst="rect">
-            <a:avLst/>
-          </a:prstGeom>
-          <a:noFill/>
-        </p:spPr>
-        <p:txBody>
-          <a:bodyPr wrap="square" rtlCol="0">
-            <a:spAutoFit/>
-          </a:bodyPr>
-          <a:lstStyle/>
-          <a:p>
-            <a:r>
-              <a:rPr lang="en-US" altLang="zh-CN" b="1">
-                <a:solidFill>
-                  <a:srgbClr val="FF0000"/>
-                </a:solidFill>
-              </a:rPr>
-              <a:t>sensor temp : float32;</a:t>
-            </a:r>
-          </a:p>
-          <a:p>
-            <a:endParaRPr lang="en-US" altLang="zh-CN"/>
-          </a:p>
-          <a:p>
-            <a:r>
-              <a:rPr lang="en-US" altLang="zh-CN"/>
-              <a:t>const zero : float32 = 0.0;</a:t>
-            </a:r>
-          </a:p>
-          <a:p>
-            <a:endParaRPr lang="en-US" altLang="zh-CN"/>
-          </a:p>
-          <a:p>
-            <a:endParaRPr lang="en-US" altLang="zh-CN"/>
-          </a:p>
-          <a:p>
-            <a:r>
-              <a:rPr lang="en-US" altLang="zh-CN"/>
-              <a:t>/* xscade source: D:/scade_pro/example_const/Operator11.xscade */</a:t>
-            </a:r>
-          </a:p>
-          <a:p>
-            <a:r>
-              <a:rPr lang="en-US" altLang="zh-CN" b="1">
-                <a:solidFill>
-                  <a:srgbClr val="FF0000"/>
-                </a:solidFill>
-              </a:rPr>
-              <a:t>node gradient() returns (diff : float32)</a:t>
-            </a:r>
-          </a:p>
-          <a:p>
-            <a:r>
-              <a:rPr lang="en-US" altLang="zh-CN" b="1">
-                <a:solidFill>
-                  <a:srgbClr val="FF0000"/>
-                </a:solidFill>
-              </a:rPr>
-              <a:t>var</a:t>
-            </a:r>
-          </a:p>
-          <a:p>
-            <a:r>
-              <a:rPr lang="en-US" altLang="zh-CN" b="1">
-                <a:solidFill>
-                  <a:srgbClr val="FF0000"/>
-                </a:solidFill>
-              </a:rPr>
-              <a:t>  _L1 : float32;</a:t>
-            </a:r>
-          </a:p>
-          <a:p>
-            <a:r>
-              <a:rPr lang="en-US" altLang="zh-CN" b="1">
-                <a:solidFill>
-                  <a:srgbClr val="FF0000"/>
-                </a:solidFill>
-              </a:rPr>
-              <a:t>  _L2 : float32;</a:t>
-            </a:r>
-          </a:p>
-          <a:p>
-            <a:r>
-              <a:rPr lang="en-US" altLang="zh-CN" b="1">
-                <a:solidFill>
-                  <a:srgbClr val="FF0000"/>
-                </a:solidFill>
-              </a:rPr>
-              <a:t>  _L3 : float32;</a:t>
-            </a:r>
-          </a:p>
-          <a:p>
-            <a:r>
-              <a:rPr lang="en-US" altLang="zh-CN" b="1">
-                <a:solidFill>
-                  <a:srgbClr val="FF0000"/>
-                </a:solidFill>
-              </a:rPr>
-              <a:t>  _L5 : float32;</a:t>
-            </a:r>
-          </a:p>
-          <a:p>
-            <a:r>
-              <a:rPr lang="en-US" altLang="zh-CN" b="1">
-                <a:solidFill>
-                  <a:srgbClr val="FF0000"/>
-                </a:solidFill>
-              </a:rPr>
-              <a:t>  _L7 : float32;</a:t>
-            </a:r>
-          </a:p>
-          <a:p>
-            <a:r>
-              <a:rPr lang="en-US" altLang="zh-CN" b="1">
-                <a:solidFill>
-                  <a:srgbClr val="FF0000"/>
-                </a:solidFill>
-              </a:rPr>
-              <a:t>let</a:t>
-            </a:r>
-          </a:p>
-          <a:p>
-            <a:r>
-              <a:rPr lang="en-US" altLang="zh-CN" b="1">
-                <a:solidFill>
-                  <a:srgbClr val="FF0000"/>
-                </a:solidFill>
-              </a:rPr>
-              <a:t>  diff= _L1;</a:t>
-            </a:r>
-          </a:p>
-          <a:p>
-            <a:r>
-              <a:rPr lang="en-US" altLang="zh-CN" b="1">
-                <a:solidFill>
-                  <a:srgbClr val="FF0000"/>
-                </a:solidFill>
-              </a:rPr>
-              <a:t>  _L1= (_L7) #1 -&gt; (_L5);</a:t>
-            </a:r>
-          </a:p>
-          <a:p>
-            <a:r>
-              <a:rPr lang="en-US" altLang="zh-CN" b="1">
-                <a:solidFill>
-                  <a:srgbClr val="FF0000"/>
-                </a:solidFill>
-              </a:rPr>
-              <a:t>  _L2= temp;</a:t>
-            </a:r>
-          </a:p>
-          <a:p>
-            <a:r>
-              <a:rPr lang="en-US" altLang="zh-CN" b="1">
-                <a:solidFill>
-                  <a:srgbClr val="FF0000"/>
-                </a:solidFill>
-              </a:rPr>
-              <a:t>  _L3= #1 pre (_L2);</a:t>
-            </a:r>
-          </a:p>
-          <a:p>
-            <a:r>
-              <a:rPr lang="en-US" altLang="zh-CN" b="1">
-                <a:solidFill>
-                  <a:srgbClr val="FF0000"/>
-                </a:solidFill>
-              </a:rPr>
-              <a:t>  _L5= _L2 #1 - _L3;</a:t>
-            </a:r>
-          </a:p>
-          <a:p>
-            <a:r>
-              <a:rPr lang="en-US" altLang="zh-CN" b="1">
-                <a:solidFill>
-                  <a:srgbClr val="FF0000"/>
-                </a:solidFill>
-              </a:rPr>
-              <a:t>  _L7= zero;</a:t>
-            </a:r>
-          </a:p>
-          <a:p>
-            <a:r>
-              <a:rPr lang="en-US" altLang="zh-CN" b="1">
-                <a:solidFill>
-                  <a:srgbClr val="FF0000"/>
-                </a:solidFill>
-              </a:rPr>
-              <a:t>tel</a:t>
-            </a:r>
-            <a:endParaRPr lang="zh-CN" altLang="en-US" b="1">
-              <a:solidFill>
-                <a:srgbClr val="FF0000"/>
-              </a:solidFill>
-            </a:endParaRPr>
-          </a:p>
-        </p:txBody>
-      </p:sp>
       <p:pic>
         <p:nvPicPr>
-          <p:cNvPr id="5" name="图片 4">
-            <a:extLst>
-              <a:ext uri="{FF2B5EF4-FFF2-40B4-BE49-F238E27FC236}">
-                <a16:creationId xmlns:a16="http://schemas.microsoft.com/office/drawing/2014/main" id="{B42D7B8F-679B-4ACE-BAFF-636144F293CE}"/>
+          <p:cNvPr id="4" name="图片 3">
+            <a:extLst>
+              <a:ext uri="{FF2B5EF4-FFF2-40B4-BE49-F238E27FC236}">
+                <a16:creationId xmlns:a16="http://schemas.microsoft.com/office/drawing/2014/main" id="{611ABE26-711E-40FE-AA87-9995F7ECB3E1}"/>
               </a:ext>
             </a:extLst>
           </p:cNvPr>
@@ -5029,8 +4785,8 @@
         </p:blipFill>
         <p:spPr>
           <a:xfrm>
-            <a:off x="504758" y="345805"/>
-            <a:ext cx="4221846" cy="1127858"/>
+            <a:off x="323004" y="223524"/>
+            <a:ext cx="1562235" cy="495343"/>
           </a:xfrm>
           <a:prstGeom prst="rect">
             <a:avLst/>
@@ -5039,10 +4795,10 @@
       </p:pic>
       <p:pic>
         <p:nvPicPr>
-          <p:cNvPr id="6" name="图片 5">
-            <a:extLst>
-              <a:ext uri="{FF2B5EF4-FFF2-40B4-BE49-F238E27FC236}">
-                <a16:creationId xmlns:a16="http://schemas.microsoft.com/office/drawing/2014/main" id="{84699F2B-D1A5-4EAF-A897-C5290F1D34E6}"/>
+          <p:cNvPr id="5" name="图片 4">
+            <a:extLst>
+              <a:ext uri="{FF2B5EF4-FFF2-40B4-BE49-F238E27FC236}">
+                <a16:creationId xmlns:a16="http://schemas.microsoft.com/office/drawing/2014/main" id="{00DE3585-0865-47A2-A442-B24DD009E3FB}"/>
               </a:ext>
             </a:extLst>
           </p:cNvPr>
@@ -5059,8 +4815,38 @@
         </p:blipFill>
         <p:spPr>
           <a:xfrm>
-            <a:off x="185822" y="1995816"/>
-            <a:ext cx="5662151" cy="1821338"/>
+            <a:off x="217961" y="919064"/>
+            <a:ext cx="5075360" cy="1280271"/>
+          </a:xfrm>
+          <a:prstGeom prst="rect">
+            <a:avLst/>
+          </a:prstGeom>
+        </p:spPr>
+      </p:pic>
+      <p:pic>
+        <p:nvPicPr>
+          <p:cNvPr id="6" name="图片 5">
+            <a:extLst>
+              <a:ext uri="{FF2B5EF4-FFF2-40B4-BE49-F238E27FC236}">
+                <a16:creationId xmlns:a16="http://schemas.microsoft.com/office/drawing/2014/main" id="{EF26B6EB-ECC1-4099-BBC2-F9186EAF0306}"/>
+              </a:ext>
+            </a:extLst>
+          </p:cNvPr>
+          <p:cNvPicPr>
+            <a:picLocks noChangeAspect="1"/>
+          </p:cNvPicPr>
+          <p:nvPr/>
+        </p:nvPicPr>
+        <p:blipFill>
+          <a:blip r:embed="rId4"/>
+          <a:stretch>
+            <a:fillRect/>
+          </a:stretch>
+        </p:blipFill>
+        <p:spPr>
+          <a:xfrm>
+            <a:off x="217961" y="2399532"/>
+            <a:ext cx="4298052" cy="1219306"/>
           </a:xfrm>
           <a:prstGeom prst="rect">
             <a:avLst/>
@@ -5070,7 +4856,7 @@
     </p:spTree>
     <p:extLst>
       <p:ext uri="{BB962C8B-B14F-4D97-AF65-F5344CB8AC3E}">
-        <p14:creationId xmlns:p14="http://schemas.microsoft.com/office/powerpoint/2010/main" val="1578636295"/>
+        <p14:creationId xmlns:p14="http://schemas.microsoft.com/office/powerpoint/2010/main" val="3825534563"/>
       </p:ext>
     </p:extLst>
   </p:cSld>
@@ -5099,10 +4885,10 @@
       </p:grpSpPr>
       <p:sp>
         <p:nvSpPr>
-          <p:cNvPr id="5" name="文本框 4">
-            <a:extLst>
-              <a:ext uri="{FF2B5EF4-FFF2-40B4-BE49-F238E27FC236}">
-                <a16:creationId xmlns:a16="http://schemas.microsoft.com/office/drawing/2014/main" id="{EED49A9D-9A14-4B06-98C1-70B8156A8EA7}"/>
+          <p:cNvPr id="4" name="文本框 3">
+            <a:extLst>
+              <a:ext uri="{FF2B5EF4-FFF2-40B4-BE49-F238E27FC236}">
+                <a16:creationId xmlns:a16="http://schemas.microsoft.com/office/drawing/2014/main" id="{4BBA05C8-9C7A-43DF-9507-9E1E7563848A}"/>
               </a:ext>
             </a:extLst>
           </p:cNvPr>
@@ -5111,8 +4897,8 @@
         </p:nvSpPr>
         <p:spPr>
           <a:xfrm>
-            <a:off x="130629" y="214604"/>
-            <a:ext cx="3303036" cy="646331"/>
+            <a:off x="6220408" y="130628"/>
+            <a:ext cx="5971592" cy="6186309"/>
           </a:xfrm>
           <a:prstGeom prst="rect">
             <a:avLst/>
@@ -5126,191 +4912,256 @@
           <a:lstStyle/>
           <a:p>
             <a:r>
+              <a:rPr lang="en-US" altLang="zh-CN" b="1">
+                <a:solidFill>
+                  <a:srgbClr val="FF0000"/>
+                </a:solidFill>
+              </a:rPr>
+              <a:t>sensor temp : float32;</a:t>
+            </a:r>
+          </a:p>
+          <a:p>
+            <a:endParaRPr lang="en-US" altLang="zh-CN"/>
+          </a:p>
+          <a:p>
+            <a:r>
               <a:rPr lang="en-US" altLang="zh-CN"/>
-              <a:t>extern kcg_float32 temp;</a:t>
-            </a:r>
-          </a:p>
-          <a:p>
-            <a:endParaRPr lang="zh-CN" altLang="en-US"/>
-          </a:p>
-        </p:txBody>
-      </p:sp>
-      <p:sp>
-        <p:nvSpPr>
-          <p:cNvPr id="6" name="文本框 5">
-            <a:extLst>
-              <a:ext uri="{FF2B5EF4-FFF2-40B4-BE49-F238E27FC236}">
-                <a16:creationId xmlns:a16="http://schemas.microsoft.com/office/drawing/2014/main" id="{E02C9F65-D76A-44CC-9509-F9259A6904E7}"/>
-              </a:ext>
-            </a:extLst>
-          </p:cNvPr>
-          <p:cNvSpPr txBox="1"/>
+              <a:t>const zero : float32 = 0.0;</a:t>
+            </a:r>
+          </a:p>
+          <a:p>
+            <a:endParaRPr lang="en-US" altLang="zh-CN"/>
+          </a:p>
+          <a:p>
+            <a:endParaRPr lang="en-US" altLang="zh-CN"/>
+          </a:p>
+          <a:p>
+            <a:r>
+              <a:rPr lang="en-US" altLang="zh-CN"/>
+              <a:t>/* xscade source: D:/scade_pro/example_const/Operator11.xscade */</a:t>
+            </a:r>
+          </a:p>
+          <a:p>
+            <a:r>
+              <a:rPr lang="en-US" altLang="zh-CN" b="1">
+                <a:solidFill>
+                  <a:srgbClr val="FF0000"/>
+                </a:solidFill>
+              </a:rPr>
+              <a:t>node gradient() returns (diff : float32)</a:t>
+            </a:r>
+          </a:p>
+          <a:p>
+            <a:r>
+              <a:rPr lang="en-US" altLang="zh-CN" b="1">
+                <a:solidFill>
+                  <a:srgbClr val="FF0000"/>
+                </a:solidFill>
+              </a:rPr>
+              <a:t>var</a:t>
+            </a:r>
+          </a:p>
+          <a:p>
+            <a:r>
+              <a:rPr lang="en-US" altLang="zh-CN" b="1">
+                <a:solidFill>
+                  <a:srgbClr val="FF0000"/>
+                </a:solidFill>
+              </a:rPr>
+              <a:t>  _L1 : float32;</a:t>
+            </a:r>
+          </a:p>
+          <a:p>
+            <a:r>
+              <a:rPr lang="en-US" altLang="zh-CN" b="1">
+                <a:solidFill>
+                  <a:srgbClr val="FF0000"/>
+                </a:solidFill>
+              </a:rPr>
+              <a:t>  _L2 : float32;</a:t>
+            </a:r>
+          </a:p>
+          <a:p>
+            <a:r>
+              <a:rPr lang="en-US" altLang="zh-CN" b="1">
+                <a:solidFill>
+                  <a:srgbClr val="FF0000"/>
+                </a:solidFill>
+              </a:rPr>
+              <a:t>  _L3 : float32;</a:t>
+            </a:r>
+          </a:p>
+          <a:p>
+            <a:r>
+              <a:rPr lang="en-US" altLang="zh-CN" b="1">
+                <a:solidFill>
+                  <a:srgbClr val="FF0000"/>
+                </a:solidFill>
+              </a:rPr>
+              <a:t>  _L5 : float32;</a:t>
+            </a:r>
+          </a:p>
+          <a:p>
+            <a:r>
+              <a:rPr lang="en-US" altLang="zh-CN" b="1">
+                <a:solidFill>
+                  <a:srgbClr val="FF0000"/>
+                </a:solidFill>
+              </a:rPr>
+              <a:t>  _L7 : float32;</a:t>
+            </a:r>
+          </a:p>
+          <a:p>
+            <a:r>
+              <a:rPr lang="en-US" altLang="zh-CN" b="1">
+                <a:solidFill>
+                  <a:srgbClr val="FF0000"/>
+                </a:solidFill>
+              </a:rPr>
+              <a:t>let</a:t>
+            </a:r>
+          </a:p>
+          <a:p>
+            <a:r>
+              <a:rPr lang="en-US" altLang="zh-CN" b="1">
+                <a:solidFill>
+                  <a:srgbClr val="FF0000"/>
+                </a:solidFill>
+              </a:rPr>
+              <a:t>  diff= _L1;</a:t>
+            </a:r>
+          </a:p>
+          <a:p>
+            <a:r>
+              <a:rPr lang="en-US" altLang="zh-CN" b="1">
+                <a:solidFill>
+                  <a:srgbClr val="FF0000"/>
+                </a:solidFill>
+              </a:rPr>
+              <a:t>  _L1= (_L7) #1 -&gt; (_L5);</a:t>
+            </a:r>
+          </a:p>
+          <a:p>
+            <a:r>
+              <a:rPr lang="en-US" altLang="zh-CN" b="1">
+                <a:solidFill>
+                  <a:srgbClr val="FF0000"/>
+                </a:solidFill>
+              </a:rPr>
+              <a:t>  _L2= temp;</a:t>
+            </a:r>
+          </a:p>
+          <a:p>
+            <a:r>
+              <a:rPr lang="en-US" altLang="zh-CN" b="1">
+                <a:solidFill>
+                  <a:srgbClr val="FF0000"/>
+                </a:solidFill>
+              </a:rPr>
+              <a:t>  _L3= #1 pre (_L2);</a:t>
+            </a:r>
+          </a:p>
+          <a:p>
+            <a:r>
+              <a:rPr lang="en-US" altLang="zh-CN" b="1">
+                <a:solidFill>
+                  <a:srgbClr val="FF0000"/>
+                </a:solidFill>
+              </a:rPr>
+              <a:t>  _L5= _L2 #1 - _L3;</a:t>
+            </a:r>
+          </a:p>
+          <a:p>
+            <a:r>
+              <a:rPr lang="en-US" altLang="zh-CN" b="1">
+                <a:solidFill>
+                  <a:srgbClr val="FF0000"/>
+                </a:solidFill>
+              </a:rPr>
+              <a:t>  _L7= zero;</a:t>
+            </a:r>
+          </a:p>
+          <a:p>
+            <a:r>
+              <a:rPr lang="en-US" altLang="zh-CN" b="1">
+                <a:solidFill>
+                  <a:srgbClr val="FF0000"/>
+                </a:solidFill>
+              </a:rPr>
+              <a:t>tel</a:t>
+            </a:r>
+            <a:endParaRPr lang="zh-CN" altLang="en-US" b="1">
+              <a:solidFill>
+                <a:srgbClr val="FF0000"/>
+              </a:solidFill>
+            </a:endParaRPr>
+          </a:p>
+        </p:txBody>
+      </p:sp>
+      <p:pic>
+        <p:nvPicPr>
+          <p:cNvPr id="5" name="图片 4">
+            <a:extLst>
+              <a:ext uri="{FF2B5EF4-FFF2-40B4-BE49-F238E27FC236}">
+                <a16:creationId xmlns:a16="http://schemas.microsoft.com/office/drawing/2014/main" id="{B42D7B8F-679B-4ACE-BAFF-636144F293CE}"/>
+              </a:ext>
+            </a:extLst>
+          </p:cNvPr>
+          <p:cNvPicPr>
+            <a:picLocks noChangeAspect="1"/>
+          </p:cNvPicPr>
           <p:nvPr/>
-        </p:nvSpPr>
-        <p:spPr>
-          <a:xfrm>
-            <a:off x="130629" y="860935"/>
-            <a:ext cx="5598367" cy="3693319"/>
+        </p:nvPicPr>
+        <p:blipFill>
+          <a:blip r:embed="rId2"/>
+          <a:stretch>
+            <a:fillRect/>
+          </a:stretch>
+        </p:blipFill>
+        <p:spPr>
+          <a:xfrm>
+            <a:off x="504758" y="345805"/>
+            <a:ext cx="4221846" cy="1127858"/>
           </a:xfrm>
           <a:prstGeom prst="rect">
             <a:avLst/>
           </a:prstGeom>
-          <a:noFill/>
-        </p:spPr>
-        <p:txBody>
-          <a:bodyPr wrap="square" rtlCol="0">
-            <a:spAutoFit/>
-          </a:bodyPr>
-          <a:lstStyle/>
-          <a:p>
-            <a:r>
-              <a:rPr lang="en-US" altLang="zh-CN"/>
-              <a:t>void gradient(outC_gradient *outC)</a:t>
-            </a:r>
-          </a:p>
-          <a:p>
-            <a:r>
-              <a:rPr lang="en-US" altLang="zh-CN"/>
-              <a:t>{</a:t>
-            </a:r>
-          </a:p>
-          <a:p>
-            <a:r>
-              <a:rPr lang="en-US" altLang="zh-CN"/>
-              <a:t>  /* _L1= */</a:t>
-            </a:r>
-          </a:p>
-          <a:p>
-            <a:r>
-              <a:rPr lang="en-US" altLang="zh-CN"/>
-              <a:t>  if (outC-&gt;init) {</a:t>
-            </a:r>
-          </a:p>
-          <a:p>
-            <a:r>
-              <a:rPr lang="en-US" altLang="zh-CN"/>
-              <a:t>    outC-&gt;init = kcg_false;</a:t>
-            </a:r>
-          </a:p>
-          <a:p>
-            <a:r>
-              <a:rPr lang="en-US" altLang="zh-CN"/>
-              <a:t>    outC-&gt;diff = zero;</a:t>
-            </a:r>
-          </a:p>
-          <a:p>
-            <a:r>
-              <a:rPr lang="en-US" altLang="zh-CN"/>
-              <a:t>  }</a:t>
-            </a:r>
-          </a:p>
-          <a:p>
-            <a:r>
-              <a:rPr lang="en-US" altLang="zh-CN"/>
-              <a:t>  else {</a:t>
-            </a:r>
-          </a:p>
-          <a:p>
-            <a:r>
-              <a:rPr lang="en-US" altLang="zh-CN"/>
-              <a:t>    outC-&gt;diff = temp - outC-&gt;_L2;</a:t>
-            </a:r>
-          </a:p>
-          <a:p>
-            <a:r>
-              <a:rPr lang="en-US" altLang="zh-CN"/>
-              <a:t>  }</a:t>
-            </a:r>
-          </a:p>
-          <a:p>
-            <a:r>
-              <a:rPr lang="en-US" altLang="zh-CN"/>
-              <a:t>  outC-&gt;_L2 = temp;</a:t>
-            </a:r>
-          </a:p>
-          <a:p>
-            <a:r>
-              <a:rPr lang="en-US" altLang="zh-CN"/>
-              <a:t>}</a:t>
-            </a:r>
-          </a:p>
-          <a:p>
-            <a:endParaRPr lang="zh-CN" altLang="en-US"/>
-          </a:p>
-        </p:txBody>
-      </p:sp>
-      <p:sp>
-        <p:nvSpPr>
-          <p:cNvPr id="7" name="文本框 6">
-            <a:extLst>
-              <a:ext uri="{FF2B5EF4-FFF2-40B4-BE49-F238E27FC236}">
-                <a16:creationId xmlns:a16="http://schemas.microsoft.com/office/drawing/2014/main" id="{40C8EAF5-0143-40A6-B251-9A3E3D26FB65}"/>
-              </a:ext>
-            </a:extLst>
-          </p:cNvPr>
-          <p:cNvSpPr txBox="1"/>
+        </p:spPr>
+      </p:pic>
+      <p:pic>
+        <p:nvPicPr>
+          <p:cNvPr id="6" name="图片 5">
+            <a:extLst>
+              <a:ext uri="{FF2B5EF4-FFF2-40B4-BE49-F238E27FC236}">
+                <a16:creationId xmlns:a16="http://schemas.microsoft.com/office/drawing/2014/main" id="{84699F2B-D1A5-4EAF-A897-C5290F1D34E6}"/>
+              </a:ext>
+            </a:extLst>
+          </p:cNvPr>
+          <p:cNvPicPr>
+            <a:picLocks noChangeAspect="1"/>
+          </p:cNvPicPr>
           <p:nvPr/>
-        </p:nvSpPr>
-        <p:spPr>
-          <a:xfrm>
-            <a:off x="4907902" y="860935"/>
-            <a:ext cx="6606074" cy="2031325"/>
+        </p:nvPicPr>
+        <p:blipFill>
+          <a:blip r:embed="rId3"/>
+          <a:stretch>
+            <a:fillRect/>
+          </a:stretch>
+        </p:blipFill>
+        <p:spPr>
+          <a:xfrm>
+            <a:off x="185822" y="1995816"/>
+            <a:ext cx="5662151" cy="1821338"/>
           </a:xfrm>
           <a:prstGeom prst="rect">
             <a:avLst/>
           </a:prstGeom>
-          <a:noFill/>
-        </p:spPr>
-        <p:txBody>
-          <a:bodyPr wrap="square" rtlCol="0">
-            <a:spAutoFit/>
-          </a:bodyPr>
-          <a:lstStyle/>
-          <a:p>
-            <a:r>
-              <a:rPr lang="en-US" altLang="zh-CN"/>
-              <a:t>typedef struct {</a:t>
-            </a:r>
-          </a:p>
-          <a:p>
-            <a:r>
-              <a:rPr lang="en-US" altLang="zh-CN"/>
-              <a:t>    kcg_float32 /* _L1/, diff/ */ diff;</a:t>
-            </a:r>
-          </a:p>
-          <a:p>
-            <a:r>
-              <a:rPr lang="en-US" altLang="zh-CN"/>
-              <a:t>  kcg_bool init;</a:t>
-            </a:r>
-          </a:p>
-          <a:p>
-            <a:r>
-              <a:rPr lang="en-US" altLang="zh-CN"/>
-              <a:t>  kcg_float32 /* _L2/ */ _L2;</a:t>
-            </a:r>
-          </a:p>
-          <a:p>
-            <a:r>
-              <a:rPr lang="en-US" altLang="zh-CN"/>
-              <a:t>} outC_gradient;</a:t>
-            </a:r>
-          </a:p>
-          <a:p>
-            <a:r>
-              <a:rPr lang="en-US" altLang="zh-CN"/>
-              <a:t>extern void gradient(outC_gradient *outC);</a:t>
-            </a:r>
-          </a:p>
-          <a:p>
-            <a:endParaRPr lang="zh-CN" altLang="en-US"/>
-          </a:p>
-        </p:txBody>
-      </p:sp>
+        </p:spPr>
+      </p:pic>
     </p:spTree>
     <p:extLst>
       <p:ext uri="{BB962C8B-B14F-4D97-AF65-F5344CB8AC3E}">
-        <p14:creationId xmlns:p14="http://schemas.microsoft.com/office/powerpoint/2010/main" val="4149668451"/>
+        <p14:creationId xmlns:p14="http://schemas.microsoft.com/office/powerpoint/2010/main" val="1578636295"/>
       </p:ext>
     </p:extLst>
   </p:cSld>
@@ -5337,70 +5188,220 @@
           <a:chExt cx="0" cy="0"/>
         </a:xfrm>
       </p:grpSpPr>
-      <p:pic>
-        <p:nvPicPr>
-          <p:cNvPr id="4" name="图片 3">
-            <a:extLst>
-              <a:ext uri="{FF2B5EF4-FFF2-40B4-BE49-F238E27FC236}">
-                <a16:creationId xmlns:a16="http://schemas.microsoft.com/office/drawing/2014/main" id="{49B21B92-F465-4FAA-9817-7A1D5DD58929}"/>
-              </a:ext>
-            </a:extLst>
-          </p:cNvPr>
-          <p:cNvPicPr>
-            <a:picLocks noChangeAspect="1"/>
-          </p:cNvPicPr>
+      <p:sp>
+        <p:nvSpPr>
+          <p:cNvPr id="5" name="文本框 4">
+            <a:extLst>
+              <a:ext uri="{FF2B5EF4-FFF2-40B4-BE49-F238E27FC236}">
+                <a16:creationId xmlns:a16="http://schemas.microsoft.com/office/drawing/2014/main" id="{EED49A9D-9A14-4B06-98C1-70B8156A8EA7}"/>
+              </a:ext>
+            </a:extLst>
+          </p:cNvPr>
+          <p:cNvSpPr txBox="1"/>
           <p:nvPr/>
-        </p:nvPicPr>
-        <p:blipFill>
-          <a:blip r:embed="rId2"/>
-          <a:stretch>
-            <a:fillRect/>
-          </a:stretch>
-        </p:blipFill>
-        <p:spPr>
-          <a:xfrm>
-            <a:off x="556332" y="490413"/>
-            <a:ext cx="5011852" cy="2661160"/>
+        </p:nvSpPr>
+        <p:spPr>
+          <a:xfrm>
+            <a:off x="130629" y="214604"/>
+            <a:ext cx="3303036" cy="646331"/>
           </a:xfrm>
           <a:prstGeom prst="rect">
             <a:avLst/>
           </a:prstGeom>
-        </p:spPr>
-      </p:pic>
-      <p:pic>
-        <p:nvPicPr>
-          <p:cNvPr id="5" name="图片 4">
-            <a:extLst>
-              <a:ext uri="{FF2B5EF4-FFF2-40B4-BE49-F238E27FC236}">
-                <a16:creationId xmlns:a16="http://schemas.microsoft.com/office/drawing/2014/main" id="{A39D49F8-1698-451E-858E-FBF612B8038C}"/>
-              </a:ext>
-            </a:extLst>
-          </p:cNvPr>
-          <p:cNvPicPr>
-            <a:picLocks noChangeAspect="1"/>
-          </p:cNvPicPr>
+          <a:noFill/>
+        </p:spPr>
+        <p:txBody>
+          <a:bodyPr wrap="square" rtlCol="0">
+            <a:spAutoFit/>
+          </a:bodyPr>
+          <a:lstStyle/>
+          <a:p>
+            <a:r>
+              <a:rPr lang="en-US" altLang="zh-CN"/>
+              <a:t>extern kcg_float32 temp;</a:t>
+            </a:r>
+          </a:p>
+          <a:p>
+            <a:endParaRPr lang="zh-CN" altLang="en-US"/>
+          </a:p>
+        </p:txBody>
+      </p:sp>
+      <p:sp>
+        <p:nvSpPr>
+          <p:cNvPr id="6" name="文本框 5">
+            <a:extLst>
+              <a:ext uri="{FF2B5EF4-FFF2-40B4-BE49-F238E27FC236}">
+                <a16:creationId xmlns:a16="http://schemas.microsoft.com/office/drawing/2014/main" id="{E02C9F65-D76A-44CC-9509-F9259A6904E7}"/>
+              </a:ext>
+            </a:extLst>
+          </p:cNvPr>
+          <p:cNvSpPr txBox="1"/>
           <p:nvPr/>
-        </p:nvPicPr>
-        <p:blipFill>
-          <a:blip r:embed="rId3"/>
-          <a:stretch>
-            <a:fillRect/>
-          </a:stretch>
-        </p:blipFill>
-        <p:spPr>
-          <a:xfrm>
-            <a:off x="6491958" y="879496"/>
-            <a:ext cx="4801016" cy="3909399"/>
+        </p:nvSpPr>
+        <p:spPr>
+          <a:xfrm>
+            <a:off x="130629" y="860935"/>
+            <a:ext cx="5598367" cy="3693319"/>
           </a:xfrm>
           <a:prstGeom prst="rect">
             <a:avLst/>
           </a:prstGeom>
-        </p:spPr>
-      </p:pic>
+          <a:noFill/>
+        </p:spPr>
+        <p:txBody>
+          <a:bodyPr wrap="square" rtlCol="0">
+            <a:spAutoFit/>
+          </a:bodyPr>
+          <a:lstStyle/>
+          <a:p>
+            <a:r>
+              <a:rPr lang="en-US" altLang="zh-CN"/>
+              <a:t>void gradient(outC_gradient *outC)</a:t>
+            </a:r>
+          </a:p>
+          <a:p>
+            <a:r>
+              <a:rPr lang="en-US" altLang="zh-CN"/>
+              <a:t>{</a:t>
+            </a:r>
+          </a:p>
+          <a:p>
+            <a:r>
+              <a:rPr lang="en-US" altLang="zh-CN"/>
+              <a:t>  /* _L1= */</a:t>
+            </a:r>
+          </a:p>
+          <a:p>
+            <a:r>
+              <a:rPr lang="en-US" altLang="zh-CN"/>
+              <a:t>  if (outC-&gt;init) {</a:t>
+            </a:r>
+          </a:p>
+          <a:p>
+            <a:r>
+              <a:rPr lang="en-US" altLang="zh-CN"/>
+              <a:t>    outC-&gt;init = kcg_false;</a:t>
+            </a:r>
+          </a:p>
+          <a:p>
+            <a:r>
+              <a:rPr lang="en-US" altLang="zh-CN"/>
+              <a:t>    outC-&gt;diff = zero;</a:t>
+            </a:r>
+          </a:p>
+          <a:p>
+            <a:r>
+              <a:rPr lang="en-US" altLang="zh-CN"/>
+              <a:t>  }</a:t>
+            </a:r>
+          </a:p>
+          <a:p>
+            <a:r>
+              <a:rPr lang="en-US" altLang="zh-CN"/>
+              <a:t>  else {</a:t>
+            </a:r>
+          </a:p>
+          <a:p>
+            <a:r>
+              <a:rPr lang="en-US" altLang="zh-CN"/>
+              <a:t>    outC-&gt;diff = temp - outC-&gt;_L2;</a:t>
+            </a:r>
+          </a:p>
+          <a:p>
+            <a:r>
+              <a:rPr lang="en-US" altLang="zh-CN"/>
+              <a:t>  }</a:t>
+            </a:r>
+          </a:p>
+          <a:p>
+            <a:r>
+              <a:rPr lang="en-US" altLang="zh-CN"/>
+              <a:t>  outC-&gt;_L2 = temp;</a:t>
+            </a:r>
+          </a:p>
+          <a:p>
+            <a:r>
+              <a:rPr lang="en-US" altLang="zh-CN"/>
+              <a:t>}</a:t>
+            </a:r>
+          </a:p>
+          <a:p>
+            <a:endParaRPr lang="zh-CN" altLang="en-US"/>
+          </a:p>
+        </p:txBody>
+      </p:sp>
+      <p:sp>
+        <p:nvSpPr>
+          <p:cNvPr id="7" name="文本框 6">
+            <a:extLst>
+              <a:ext uri="{FF2B5EF4-FFF2-40B4-BE49-F238E27FC236}">
+                <a16:creationId xmlns:a16="http://schemas.microsoft.com/office/drawing/2014/main" id="{40C8EAF5-0143-40A6-B251-9A3E3D26FB65}"/>
+              </a:ext>
+            </a:extLst>
+          </p:cNvPr>
+          <p:cNvSpPr txBox="1"/>
+          <p:nvPr/>
+        </p:nvSpPr>
+        <p:spPr>
+          <a:xfrm>
+            <a:off x="4907902" y="860935"/>
+            <a:ext cx="6606074" cy="2031325"/>
+          </a:xfrm>
+          <a:prstGeom prst="rect">
+            <a:avLst/>
+          </a:prstGeom>
+          <a:noFill/>
+        </p:spPr>
+        <p:txBody>
+          <a:bodyPr wrap="square" rtlCol="0">
+            <a:spAutoFit/>
+          </a:bodyPr>
+          <a:lstStyle/>
+          <a:p>
+            <a:r>
+              <a:rPr lang="en-US" altLang="zh-CN"/>
+              <a:t>typedef struct {</a:t>
+            </a:r>
+          </a:p>
+          <a:p>
+            <a:r>
+              <a:rPr lang="en-US" altLang="zh-CN"/>
+              <a:t>    kcg_float32 /* _L1/, diff/ */ diff;</a:t>
+            </a:r>
+          </a:p>
+          <a:p>
+            <a:r>
+              <a:rPr lang="en-US" altLang="zh-CN"/>
+              <a:t>  kcg_bool init;</a:t>
+            </a:r>
+          </a:p>
+          <a:p>
+            <a:r>
+              <a:rPr lang="en-US" altLang="zh-CN"/>
+              <a:t>  kcg_float32 /* _L2/ */ _L2;</a:t>
+            </a:r>
+          </a:p>
+          <a:p>
+            <a:r>
+              <a:rPr lang="en-US" altLang="zh-CN"/>
+              <a:t>} outC_gradient;</a:t>
+            </a:r>
+          </a:p>
+          <a:p>
+            <a:r>
+              <a:rPr lang="en-US" altLang="zh-CN"/>
+              <a:t>extern void gradient(outC_gradient *outC);</a:t>
+            </a:r>
+          </a:p>
+          <a:p>
+            <a:endParaRPr lang="zh-CN" altLang="en-US"/>
+          </a:p>
+        </p:txBody>
+      </p:sp>
     </p:spTree>
     <p:extLst>
       <p:ext uri="{BB962C8B-B14F-4D97-AF65-F5344CB8AC3E}">
-        <p14:creationId xmlns:p14="http://schemas.microsoft.com/office/powerpoint/2010/main" val="1637944361"/>
+        <p14:creationId xmlns:p14="http://schemas.microsoft.com/office/powerpoint/2010/main" val="4149668451"/>
       </p:ext>
     </p:extLst>
   </p:cSld>
@@ -5432,7 +5433,7 @@
           <p:cNvPr id="4" name="图片 3">
             <a:extLst>
               <a:ext uri="{FF2B5EF4-FFF2-40B4-BE49-F238E27FC236}">
-                <a16:creationId xmlns:a16="http://schemas.microsoft.com/office/drawing/2014/main" id="{D301C140-BDBE-4148-A48E-5F74C4514D2B}"/>
+                <a16:creationId xmlns:a16="http://schemas.microsoft.com/office/drawing/2014/main" id="{49B21B92-F465-4FAA-9817-7A1D5DD58929}"/>
               </a:ext>
             </a:extLst>
           </p:cNvPr>
@@ -5449,8 +5450,8 @@
         </p:blipFill>
         <p:spPr>
           <a:xfrm>
-            <a:off x="602532" y="956145"/>
-            <a:ext cx="1600339" cy="373412"/>
+            <a:off x="556332" y="490413"/>
+            <a:ext cx="5011852" cy="2661160"/>
           </a:xfrm>
           <a:prstGeom prst="rect">
             <a:avLst/>
@@ -5462,7 +5463,7 @@
           <p:cNvPr id="5" name="图片 4">
             <a:extLst>
               <a:ext uri="{FF2B5EF4-FFF2-40B4-BE49-F238E27FC236}">
-                <a16:creationId xmlns:a16="http://schemas.microsoft.com/office/drawing/2014/main" id="{F9BBC734-04D3-4583-8C23-23058072C665}"/>
+                <a16:creationId xmlns:a16="http://schemas.microsoft.com/office/drawing/2014/main" id="{A39D49F8-1698-451E-858E-FBF612B8038C}"/>
               </a:ext>
             </a:extLst>
           </p:cNvPr>
@@ -5479,175 +5480,8 @@
         </p:blipFill>
         <p:spPr>
           <a:xfrm>
-            <a:off x="3321862" y="788490"/>
-            <a:ext cx="3383573" cy="541067"/>
-          </a:xfrm>
-          <a:prstGeom prst="rect">
-            <a:avLst/>
-          </a:prstGeom>
-        </p:spPr>
-      </p:pic>
-      <p:sp>
-        <p:nvSpPr>
-          <p:cNvPr id="6" name="文本框 5">
-            <a:extLst>
-              <a:ext uri="{FF2B5EF4-FFF2-40B4-BE49-F238E27FC236}">
-                <a16:creationId xmlns:a16="http://schemas.microsoft.com/office/drawing/2014/main" id="{A40EE023-2C81-4585-B497-1E86D33C9CFA}"/>
-              </a:ext>
-            </a:extLst>
-          </p:cNvPr>
-          <p:cNvSpPr txBox="1"/>
-          <p:nvPr/>
-        </p:nvSpPr>
-        <p:spPr>
-          <a:xfrm>
-            <a:off x="298580" y="233265"/>
-            <a:ext cx="6503436" cy="369332"/>
-          </a:xfrm>
-          <a:prstGeom prst="rect">
-            <a:avLst/>
-          </a:prstGeom>
-          <a:noFill/>
-        </p:spPr>
-        <p:txBody>
-          <a:bodyPr wrap="square" rtlCol="0">
-            <a:spAutoFit/>
-          </a:bodyPr>
-          <a:lstStyle/>
-          <a:p>
-            <a:r>
-              <a:rPr lang="zh-CN" altLang="en-US"/>
-              <a:t>要查看一个变量的</a:t>
-            </a:r>
-            <a:r>
-              <a:rPr lang="en-US" altLang="zh-CN"/>
-              <a:t>Properties</a:t>
-            </a:r>
-            <a:r>
-              <a:rPr lang="zh-CN" altLang="en-US"/>
-              <a:t>，需将其设置为</a:t>
-            </a:r>
-            <a:r>
-              <a:rPr lang="en-US" altLang="zh-CN"/>
-              <a:t>standard</a:t>
-            </a:r>
-          </a:p>
-        </p:txBody>
-      </p:sp>
-      <p:pic>
-        <p:nvPicPr>
-          <p:cNvPr id="8" name="图片 7">
-            <a:extLst>
-              <a:ext uri="{FF2B5EF4-FFF2-40B4-BE49-F238E27FC236}">
-                <a16:creationId xmlns:a16="http://schemas.microsoft.com/office/drawing/2014/main" id="{2BDD19EF-4BEB-413E-8891-06BC3215AD80}"/>
-              </a:ext>
-            </a:extLst>
-          </p:cNvPr>
-          <p:cNvPicPr>
-            <a:picLocks noChangeAspect="1"/>
-          </p:cNvPicPr>
-          <p:nvPr/>
-        </p:nvPicPr>
-        <p:blipFill>
-          <a:blip r:embed="rId4"/>
-          <a:stretch>
-            <a:fillRect/>
-          </a:stretch>
-        </p:blipFill>
-        <p:spPr>
-          <a:xfrm>
-            <a:off x="6810619" y="1329557"/>
-            <a:ext cx="4778849" cy="5402736"/>
-          </a:xfrm>
-          <a:prstGeom prst="rect">
-            <a:avLst/>
-          </a:prstGeom>
-        </p:spPr>
-      </p:pic>
-      <p:pic>
-        <p:nvPicPr>
-          <p:cNvPr id="9" name="图片 8">
-            <a:extLst>
-              <a:ext uri="{FF2B5EF4-FFF2-40B4-BE49-F238E27FC236}">
-                <a16:creationId xmlns:a16="http://schemas.microsoft.com/office/drawing/2014/main" id="{F29EF1F7-7E3E-4EC0-9047-16D8D753735A}"/>
-              </a:ext>
-            </a:extLst>
-          </p:cNvPr>
-          <p:cNvPicPr>
-            <a:picLocks noChangeAspect="1"/>
-          </p:cNvPicPr>
-          <p:nvPr/>
-        </p:nvPicPr>
-        <p:blipFill>
-          <a:blip r:embed="rId5"/>
-          <a:stretch>
-            <a:fillRect/>
-          </a:stretch>
-        </p:blipFill>
-        <p:spPr>
-          <a:xfrm>
-            <a:off x="381512" y="2307565"/>
-            <a:ext cx="5880699" cy="4424728"/>
-          </a:xfrm>
-          <a:prstGeom prst="rect">
-            <a:avLst/>
-          </a:prstGeom>
-        </p:spPr>
-      </p:pic>
-      <p:pic>
-        <p:nvPicPr>
-          <p:cNvPr id="10" name="图片 9">
-            <a:extLst>
-              <a:ext uri="{FF2B5EF4-FFF2-40B4-BE49-F238E27FC236}">
-                <a16:creationId xmlns:a16="http://schemas.microsoft.com/office/drawing/2014/main" id="{E117F73F-6348-4FCA-9575-91ABCF938300}"/>
-              </a:ext>
-            </a:extLst>
-          </p:cNvPr>
-          <p:cNvPicPr>
-            <a:picLocks noChangeAspect="1"/>
-          </p:cNvPicPr>
-          <p:nvPr/>
-        </p:nvPicPr>
-        <p:blipFill>
-          <a:blip r:embed="rId6"/>
-          <a:stretch>
-            <a:fillRect/>
-          </a:stretch>
-        </p:blipFill>
-        <p:spPr>
-          <a:xfrm>
-            <a:off x="7069645" y="417931"/>
-            <a:ext cx="3688400" cy="525826"/>
-          </a:xfrm>
-          <a:prstGeom prst="rect">
-            <a:avLst/>
-          </a:prstGeom>
-        </p:spPr>
-      </p:pic>
-      <p:pic>
-        <p:nvPicPr>
-          <p:cNvPr id="11" name="图片 10">
-            <a:extLst>
-              <a:ext uri="{FF2B5EF4-FFF2-40B4-BE49-F238E27FC236}">
-                <a16:creationId xmlns:a16="http://schemas.microsoft.com/office/drawing/2014/main" id="{ACE1CA47-480D-4520-80CB-5799CD38B813}"/>
-              </a:ext>
-            </a:extLst>
-          </p:cNvPr>
-          <p:cNvPicPr>
-            <a:picLocks noChangeAspect="1"/>
-          </p:cNvPicPr>
-          <p:nvPr/>
-        </p:nvPicPr>
-        <p:blipFill>
-          <a:blip r:embed="rId7"/>
-          <a:stretch>
-            <a:fillRect/>
-          </a:stretch>
-        </p:blipFill>
-        <p:spPr>
-          <a:xfrm>
-            <a:off x="680236" y="1515450"/>
-            <a:ext cx="4580017" cy="586791"/>
+            <a:off x="6491958" y="879496"/>
+            <a:ext cx="4801016" cy="3909399"/>
           </a:xfrm>
           <a:prstGeom prst="rect">
             <a:avLst/>
@@ -5657,7 +5491,7 @@
     </p:spTree>
     <p:extLst>
       <p:ext uri="{BB962C8B-B14F-4D97-AF65-F5344CB8AC3E}">
-        <p14:creationId xmlns:p14="http://schemas.microsoft.com/office/powerpoint/2010/main" val="2955482188"/>
+        <p14:creationId xmlns:p14="http://schemas.microsoft.com/office/powerpoint/2010/main" val="1637944361"/>
       </p:ext>
     </p:extLst>
   </p:cSld>
@@ -5689,7 +5523,7 @@
           <p:cNvPr id="4" name="图片 3">
             <a:extLst>
               <a:ext uri="{FF2B5EF4-FFF2-40B4-BE49-F238E27FC236}">
-                <a16:creationId xmlns:a16="http://schemas.microsoft.com/office/drawing/2014/main" id="{35E14CEE-25F3-44BA-84E9-907D73976424}"/>
+                <a16:creationId xmlns:a16="http://schemas.microsoft.com/office/drawing/2014/main" id="{D301C140-BDBE-4148-A48E-5F74C4514D2B}"/>
               </a:ext>
             </a:extLst>
           </p:cNvPr>
@@ -5706,8 +5540,8 @@
         </p:blipFill>
         <p:spPr>
           <a:xfrm>
-            <a:off x="290006" y="167393"/>
-            <a:ext cx="4054191" cy="327688"/>
+            <a:off x="602532" y="956145"/>
+            <a:ext cx="1600339" cy="373412"/>
           </a:xfrm>
           <a:prstGeom prst="rect">
             <a:avLst/>
@@ -5719,7 +5553,7 @@
           <p:cNvPr id="5" name="图片 4">
             <a:extLst>
               <a:ext uri="{FF2B5EF4-FFF2-40B4-BE49-F238E27FC236}">
-                <a16:creationId xmlns:a16="http://schemas.microsoft.com/office/drawing/2014/main" id="{DC8723F6-77C9-462D-AA3E-E12B8C8632C6}"/>
+                <a16:creationId xmlns:a16="http://schemas.microsoft.com/office/drawing/2014/main" id="{F9BBC734-04D3-4583-8C23-23058072C665}"/>
               </a:ext>
             </a:extLst>
           </p:cNvPr>
@@ -5736,20 +5570,67 @@
         </p:blipFill>
         <p:spPr>
           <a:xfrm>
-            <a:off x="182012" y="753664"/>
-            <a:ext cx="5669771" cy="5761219"/>
+            <a:off x="3321862" y="788490"/>
+            <a:ext cx="3383573" cy="541067"/>
           </a:xfrm>
           <a:prstGeom prst="rect">
             <a:avLst/>
           </a:prstGeom>
         </p:spPr>
       </p:pic>
+      <p:sp>
+        <p:nvSpPr>
+          <p:cNvPr id="6" name="文本框 5">
+            <a:extLst>
+              <a:ext uri="{FF2B5EF4-FFF2-40B4-BE49-F238E27FC236}">
+                <a16:creationId xmlns:a16="http://schemas.microsoft.com/office/drawing/2014/main" id="{A40EE023-2C81-4585-B497-1E86D33C9CFA}"/>
+              </a:ext>
+            </a:extLst>
+          </p:cNvPr>
+          <p:cNvSpPr txBox="1"/>
+          <p:nvPr/>
+        </p:nvSpPr>
+        <p:spPr>
+          <a:xfrm>
+            <a:off x="298580" y="233265"/>
+            <a:ext cx="6503436" cy="369332"/>
+          </a:xfrm>
+          <a:prstGeom prst="rect">
+            <a:avLst/>
+          </a:prstGeom>
+          <a:noFill/>
+        </p:spPr>
+        <p:txBody>
+          <a:bodyPr wrap="square" rtlCol="0">
+            <a:spAutoFit/>
+          </a:bodyPr>
+          <a:lstStyle/>
+          <a:p>
+            <a:r>
+              <a:rPr lang="zh-CN" altLang="en-US"/>
+              <a:t>要查看一个变量的</a:t>
+            </a:r>
+            <a:r>
+              <a:rPr lang="en-US" altLang="zh-CN"/>
+              <a:t>Properties</a:t>
+            </a:r>
+            <a:r>
+              <a:rPr lang="zh-CN" altLang="en-US"/>
+              <a:t>，需将其设置为</a:t>
+            </a:r>
+            <a:r>
+              <a:rPr lang="en-US" altLang="zh-CN"/>
+              <a:t>standard</a:t>
+            </a:r>
+          </a:p>
+        </p:txBody>
+      </p:sp>
       <p:pic>
         <p:nvPicPr>
-          <p:cNvPr id="6" name="图片 5">
-            <a:extLst>
-              <a:ext uri="{FF2B5EF4-FFF2-40B4-BE49-F238E27FC236}">
-                <a16:creationId xmlns:a16="http://schemas.microsoft.com/office/drawing/2014/main" id="{3619A6E3-078C-4664-85E0-A23BA65D44FB}"/>
+          <p:cNvPr id="8" name="图片 7">
+            <a:extLst>
+              <a:ext uri="{FF2B5EF4-FFF2-40B4-BE49-F238E27FC236}">
+                <a16:creationId xmlns:a16="http://schemas.microsoft.com/office/drawing/2014/main" id="{2BDD19EF-4BEB-413E-8891-06BC3215AD80}"/>
               </a:ext>
             </a:extLst>
           </p:cNvPr>
@@ -5766,8 +5647,98 @@
         </p:blipFill>
         <p:spPr>
           <a:xfrm>
-            <a:off x="6269366" y="875876"/>
-            <a:ext cx="4206605" cy="4397121"/>
+            <a:off x="6810619" y="1329557"/>
+            <a:ext cx="4778849" cy="5402736"/>
+          </a:xfrm>
+          <a:prstGeom prst="rect">
+            <a:avLst/>
+          </a:prstGeom>
+        </p:spPr>
+      </p:pic>
+      <p:pic>
+        <p:nvPicPr>
+          <p:cNvPr id="9" name="图片 8">
+            <a:extLst>
+              <a:ext uri="{FF2B5EF4-FFF2-40B4-BE49-F238E27FC236}">
+                <a16:creationId xmlns:a16="http://schemas.microsoft.com/office/drawing/2014/main" id="{F29EF1F7-7E3E-4EC0-9047-16D8D753735A}"/>
+              </a:ext>
+            </a:extLst>
+          </p:cNvPr>
+          <p:cNvPicPr>
+            <a:picLocks noChangeAspect="1"/>
+          </p:cNvPicPr>
+          <p:nvPr/>
+        </p:nvPicPr>
+        <p:blipFill>
+          <a:blip r:embed="rId5"/>
+          <a:stretch>
+            <a:fillRect/>
+          </a:stretch>
+        </p:blipFill>
+        <p:spPr>
+          <a:xfrm>
+            <a:off x="381512" y="2307565"/>
+            <a:ext cx="5880699" cy="4424728"/>
+          </a:xfrm>
+          <a:prstGeom prst="rect">
+            <a:avLst/>
+          </a:prstGeom>
+        </p:spPr>
+      </p:pic>
+      <p:pic>
+        <p:nvPicPr>
+          <p:cNvPr id="10" name="图片 9">
+            <a:extLst>
+              <a:ext uri="{FF2B5EF4-FFF2-40B4-BE49-F238E27FC236}">
+                <a16:creationId xmlns:a16="http://schemas.microsoft.com/office/drawing/2014/main" id="{E117F73F-6348-4FCA-9575-91ABCF938300}"/>
+              </a:ext>
+            </a:extLst>
+          </p:cNvPr>
+          <p:cNvPicPr>
+            <a:picLocks noChangeAspect="1"/>
+          </p:cNvPicPr>
+          <p:nvPr/>
+        </p:nvPicPr>
+        <p:blipFill>
+          <a:blip r:embed="rId6"/>
+          <a:stretch>
+            <a:fillRect/>
+          </a:stretch>
+        </p:blipFill>
+        <p:spPr>
+          <a:xfrm>
+            <a:off x="7069645" y="417931"/>
+            <a:ext cx="3688400" cy="525826"/>
+          </a:xfrm>
+          <a:prstGeom prst="rect">
+            <a:avLst/>
+          </a:prstGeom>
+        </p:spPr>
+      </p:pic>
+      <p:pic>
+        <p:nvPicPr>
+          <p:cNvPr id="11" name="图片 10">
+            <a:extLst>
+              <a:ext uri="{FF2B5EF4-FFF2-40B4-BE49-F238E27FC236}">
+                <a16:creationId xmlns:a16="http://schemas.microsoft.com/office/drawing/2014/main" id="{ACE1CA47-480D-4520-80CB-5799CD38B813}"/>
+              </a:ext>
+            </a:extLst>
+          </p:cNvPr>
+          <p:cNvPicPr>
+            <a:picLocks noChangeAspect="1"/>
+          </p:cNvPicPr>
+          <p:nvPr/>
+        </p:nvPicPr>
+        <p:blipFill>
+          <a:blip r:embed="rId7"/>
+          <a:stretch>
+            <a:fillRect/>
+          </a:stretch>
+        </p:blipFill>
+        <p:spPr>
+          <a:xfrm>
+            <a:off x="680236" y="1515450"/>
+            <a:ext cx="4580017" cy="586791"/>
           </a:xfrm>
           <a:prstGeom prst="rect">
             <a:avLst/>
@@ -5777,7 +5748,7 @@
     </p:spTree>
     <p:extLst>
       <p:ext uri="{BB962C8B-B14F-4D97-AF65-F5344CB8AC3E}">
-        <p14:creationId xmlns:p14="http://schemas.microsoft.com/office/powerpoint/2010/main" val="818967329"/>
+        <p14:creationId xmlns:p14="http://schemas.microsoft.com/office/powerpoint/2010/main" val="2955482188"/>
       </p:ext>
     </p:extLst>
   </p:cSld>
@@ -5809,7 +5780,7 @@
           <p:cNvPr id="4" name="图片 3">
             <a:extLst>
               <a:ext uri="{FF2B5EF4-FFF2-40B4-BE49-F238E27FC236}">
-                <a16:creationId xmlns:a16="http://schemas.microsoft.com/office/drawing/2014/main" id="{951296BE-53E7-4331-8EA2-8D1B24993956}"/>
+                <a16:creationId xmlns:a16="http://schemas.microsoft.com/office/drawing/2014/main" id="{35E14CEE-25F3-44BA-84E9-907D73976424}"/>
               </a:ext>
             </a:extLst>
           </p:cNvPr>
@@ -5826,8 +5797,8 @@
         </p:blipFill>
         <p:spPr>
           <a:xfrm>
-            <a:off x="342444" y="118493"/>
-            <a:ext cx="2842506" cy="548688"/>
+            <a:off x="290006" y="167393"/>
+            <a:ext cx="4054191" cy="327688"/>
           </a:xfrm>
           <a:prstGeom prst="rect">
             <a:avLst/>
@@ -5836,10 +5807,10 @@
       </p:pic>
       <p:pic>
         <p:nvPicPr>
-          <p:cNvPr id="6" name="图片 5">
-            <a:extLst>
-              <a:ext uri="{FF2B5EF4-FFF2-40B4-BE49-F238E27FC236}">
-                <a16:creationId xmlns:a16="http://schemas.microsoft.com/office/drawing/2014/main" id="{8A79DC77-505D-4AB4-AF30-C401A603D843}"/>
+          <p:cNvPr id="5" name="图片 4">
+            <a:extLst>
+              <a:ext uri="{FF2B5EF4-FFF2-40B4-BE49-F238E27FC236}">
+                <a16:creationId xmlns:a16="http://schemas.microsoft.com/office/drawing/2014/main" id="{DC8723F6-77C9-462D-AA3E-E12B8C8632C6}"/>
               </a:ext>
             </a:extLst>
           </p:cNvPr>
@@ -5856,8 +5827,8 @@
         </p:blipFill>
         <p:spPr>
           <a:xfrm>
-            <a:off x="592206" y="878888"/>
-            <a:ext cx="3179377" cy="5689747"/>
+            <a:off x="182012" y="753664"/>
+            <a:ext cx="5669771" cy="5761219"/>
           </a:xfrm>
           <a:prstGeom prst="rect">
             <a:avLst/>
@@ -5866,10 +5837,10 @@
       </p:pic>
       <p:pic>
         <p:nvPicPr>
-          <p:cNvPr id="7" name="图片 6">
-            <a:extLst>
-              <a:ext uri="{FF2B5EF4-FFF2-40B4-BE49-F238E27FC236}">
-                <a16:creationId xmlns:a16="http://schemas.microsoft.com/office/drawing/2014/main" id="{C9B48BCA-9321-46FD-A006-857DF9DF3F6A}"/>
+          <p:cNvPr id="6" name="图片 5">
+            <a:extLst>
+              <a:ext uri="{FF2B5EF4-FFF2-40B4-BE49-F238E27FC236}">
+                <a16:creationId xmlns:a16="http://schemas.microsoft.com/office/drawing/2014/main" id="{3619A6E3-078C-4664-85E0-A23BA65D44FB}"/>
               </a:ext>
             </a:extLst>
           </p:cNvPr>
@@ -5886,96 +5857,18 @@
         </p:blipFill>
         <p:spPr>
           <a:xfrm>
-            <a:off x="4052625" y="855526"/>
-            <a:ext cx="2872102" cy="5146948"/>
+            <a:off x="6269366" y="875876"/>
+            <a:ext cx="4206605" cy="4397121"/>
           </a:xfrm>
           <a:prstGeom prst="rect">
             <a:avLst/>
           </a:prstGeom>
         </p:spPr>
       </p:pic>
-      <p:sp>
-        <p:nvSpPr>
-          <p:cNvPr id="8" name="文本框 7">
-            <a:extLst>
-              <a:ext uri="{FF2B5EF4-FFF2-40B4-BE49-F238E27FC236}">
-                <a16:creationId xmlns:a16="http://schemas.microsoft.com/office/drawing/2014/main" id="{D385EB79-1701-48AD-BE64-119771FDB137}"/>
-              </a:ext>
-            </a:extLst>
-          </p:cNvPr>
-          <p:cNvSpPr txBox="1"/>
-          <p:nvPr/>
-        </p:nvSpPr>
-        <p:spPr>
-          <a:xfrm>
-            <a:off x="7205769" y="855526"/>
-            <a:ext cx="4048217" cy="2308324"/>
-          </a:xfrm>
-          <a:prstGeom prst="rect">
-            <a:avLst/>
-          </a:prstGeom>
-          <a:noFill/>
-        </p:spPr>
-        <p:txBody>
-          <a:bodyPr wrap="square" rtlCol="0">
-            <a:spAutoFit/>
-          </a:bodyPr>
-          <a:lstStyle/>
-          <a:p>
-            <a:r>
-              <a:rPr lang="en-US" altLang="zh-CN" b="1"/>
-              <a:t>Node</a:t>
-            </a:r>
-            <a:r>
-              <a:rPr lang="zh-CN" altLang="en-US" b="1"/>
-              <a:t>和</a:t>
-            </a:r>
-            <a:r>
-              <a:rPr lang="en-US" altLang="zh-CN" b="1"/>
-              <a:t>function</a:t>
-            </a:r>
-            <a:r>
-              <a:rPr lang="zh-CN" altLang="en-US" b="1"/>
-              <a:t>操作符区别</a:t>
-            </a:r>
-            <a:r>
-              <a:rPr lang="zh-CN" altLang="en-US"/>
-              <a:t>：</a:t>
-            </a:r>
-            <a:endParaRPr lang="en-US" altLang="zh-CN"/>
-          </a:p>
-          <a:p>
-            <a:r>
-              <a:rPr lang="en-US" altLang="zh-CN"/>
-              <a:t>Node</a:t>
-            </a:r>
-            <a:r>
-              <a:rPr lang="zh-CN" altLang="en-US"/>
-              <a:t>类型操作符会自动生成额外的上下文环境，以保存时序相关信息。例如当用到时间操作符，状态机，变量的延时设置等建模单元时就需要把自定义操作符的属性设置为</a:t>
-            </a:r>
-            <a:r>
-              <a:rPr lang="en-US" altLang="zh-CN"/>
-              <a:t>Node</a:t>
-            </a:r>
-            <a:r>
-              <a:rPr lang="zh-CN" altLang="en-US"/>
-              <a:t>类型，而</a:t>
-            </a:r>
-            <a:r>
-              <a:rPr lang="en-US" altLang="zh-CN"/>
-              <a:t>function</a:t>
-            </a:r>
-            <a:r>
-              <a:rPr lang="zh-CN" altLang="en-US"/>
-              <a:t>类型是不需要生成额外的上下文环境的。</a:t>
-            </a:r>
-          </a:p>
-        </p:txBody>
-      </p:sp>
     </p:spTree>
     <p:extLst>
       <p:ext uri="{BB962C8B-B14F-4D97-AF65-F5344CB8AC3E}">
-        <p14:creationId xmlns:p14="http://schemas.microsoft.com/office/powerpoint/2010/main" val="1017257588"/>
+        <p14:creationId xmlns:p14="http://schemas.microsoft.com/office/powerpoint/2010/main" val="818967329"/>
       </p:ext>
     </p:extLst>
   </p:cSld>
@@ -6046,6 +5939,204 @@
 </file>
 
 <file path=ppt/slides/slide20.xml><?xml version="1.0" encoding="utf-8"?>
+<p:sld xmlns:a="http://schemas.openxmlformats.org/drawingml/2006/main" xmlns:r="http://schemas.openxmlformats.org/officeDocument/2006/relationships" xmlns:p="http://schemas.openxmlformats.org/presentationml/2006/main">
+  <p:cSld>
+    <p:spTree>
+      <p:nvGrpSpPr>
+        <p:cNvPr id="1" name=""/>
+        <p:cNvGrpSpPr/>
+        <p:nvPr/>
+      </p:nvGrpSpPr>
+      <p:grpSpPr>
+        <a:xfrm>
+          <a:off x="0" y="0"/>
+          <a:ext cx="0" cy="0"/>
+          <a:chOff x="0" y="0"/>
+          <a:chExt cx="0" cy="0"/>
+        </a:xfrm>
+      </p:grpSpPr>
+      <p:pic>
+        <p:nvPicPr>
+          <p:cNvPr id="4" name="图片 3">
+            <a:extLst>
+              <a:ext uri="{FF2B5EF4-FFF2-40B4-BE49-F238E27FC236}">
+                <a16:creationId xmlns:a16="http://schemas.microsoft.com/office/drawing/2014/main" id="{951296BE-53E7-4331-8EA2-8D1B24993956}"/>
+              </a:ext>
+            </a:extLst>
+          </p:cNvPr>
+          <p:cNvPicPr>
+            <a:picLocks noChangeAspect="1"/>
+          </p:cNvPicPr>
+          <p:nvPr/>
+        </p:nvPicPr>
+        <p:blipFill>
+          <a:blip r:embed="rId2"/>
+          <a:stretch>
+            <a:fillRect/>
+          </a:stretch>
+        </p:blipFill>
+        <p:spPr>
+          <a:xfrm>
+            <a:off x="342444" y="118493"/>
+            <a:ext cx="2842506" cy="548688"/>
+          </a:xfrm>
+          <a:prstGeom prst="rect">
+            <a:avLst/>
+          </a:prstGeom>
+        </p:spPr>
+      </p:pic>
+      <p:pic>
+        <p:nvPicPr>
+          <p:cNvPr id="6" name="图片 5">
+            <a:extLst>
+              <a:ext uri="{FF2B5EF4-FFF2-40B4-BE49-F238E27FC236}">
+                <a16:creationId xmlns:a16="http://schemas.microsoft.com/office/drawing/2014/main" id="{8A79DC77-505D-4AB4-AF30-C401A603D843}"/>
+              </a:ext>
+            </a:extLst>
+          </p:cNvPr>
+          <p:cNvPicPr>
+            <a:picLocks noChangeAspect="1"/>
+          </p:cNvPicPr>
+          <p:nvPr/>
+        </p:nvPicPr>
+        <p:blipFill>
+          <a:blip r:embed="rId3"/>
+          <a:stretch>
+            <a:fillRect/>
+          </a:stretch>
+        </p:blipFill>
+        <p:spPr>
+          <a:xfrm>
+            <a:off x="592206" y="878888"/>
+            <a:ext cx="3179377" cy="5689747"/>
+          </a:xfrm>
+          <a:prstGeom prst="rect">
+            <a:avLst/>
+          </a:prstGeom>
+        </p:spPr>
+      </p:pic>
+      <p:pic>
+        <p:nvPicPr>
+          <p:cNvPr id="7" name="图片 6">
+            <a:extLst>
+              <a:ext uri="{FF2B5EF4-FFF2-40B4-BE49-F238E27FC236}">
+                <a16:creationId xmlns:a16="http://schemas.microsoft.com/office/drawing/2014/main" id="{C9B48BCA-9321-46FD-A006-857DF9DF3F6A}"/>
+              </a:ext>
+            </a:extLst>
+          </p:cNvPr>
+          <p:cNvPicPr>
+            <a:picLocks noChangeAspect="1"/>
+          </p:cNvPicPr>
+          <p:nvPr/>
+        </p:nvPicPr>
+        <p:blipFill>
+          <a:blip r:embed="rId4"/>
+          <a:stretch>
+            <a:fillRect/>
+          </a:stretch>
+        </p:blipFill>
+        <p:spPr>
+          <a:xfrm>
+            <a:off x="4052625" y="855526"/>
+            <a:ext cx="2872102" cy="5146948"/>
+          </a:xfrm>
+          <a:prstGeom prst="rect">
+            <a:avLst/>
+          </a:prstGeom>
+        </p:spPr>
+      </p:pic>
+      <p:sp>
+        <p:nvSpPr>
+          <p:cNvPr id="8" name="文本框 7">
+            <a:extLst>
+              <a:ext uri="{FF2B5EF4-FFF2-40B4-BE49-F238E27FC236}">
+                <a16:creationId xmlns:a16="http://schemas.microsoft.com/office/drawing/2014/main" id="{D385EB79-1701-48AD-BE64-119771FDB137}"/>
+              </a:ext>
+            </a:extLst>
+          </p:cNvPr>
+          <p:cNvSpPr txBox="1"/>
+          <p:nvPr/>
+        </p:nvSpPr>
+        <p:spPr>
+          <a:xfrm>
+            <a:off x="7205769" y="855526"/>
+            <a:ext cx="4048217" cy="2308324"/>
+          </a:xfrm>
+          <a:prstGeom prst="rect">
+            <a:avLst/>
+          </a:prstGeom>
+          <a:noFill/>
+        </p:spPr>
+        <p:txBody>
+          <a:bodyPr wrap="square" rtlCol="0">
+            <a:spAutoFit/>
+          </a:bodyPr>
+          <a:lstStyle/>
+          <a:p>
+            <a:r>
+              <a:rPr lang="en-US" altLang="zh-CN" b="1"/>
+              <a:t>Node</a:t>
+            </a:r>
+            <a:r>
+              <a:rPr lang="zh-CN" altLang="en-US" b="1"/>
+              <a:t>和</a:t>
+            </a:r>
+            <a:r>
+              <a:rPr lang="en-US" altLang="zh-CN" b="1"/>
+              <a:t>function</a:t>
+            </a:r>
+            <a:r>
+              <a:rPr lang="zh-CN" altLang="en-US" b="1"/>
+              <a:t>操作符区别</a:t>
+            </a:r>
+            <a:r>
+              <a:rPr lang="zh-CN" altLang="en-US"/>
+              <a:t>：</a:t>
+            </a:r>
+            <a:endParaRPr lang="en-US" altLang="zh-CN"/>
+          </a:p>
+          <a:p>
+            <a:r>
+              <a:rPr lang="en-US" altLang="zh-CN"/>
+              <a:t>Node</a:t>
+            </a:r>
+            <a:r>
+              <a:rPr lang="zh-CN" altLang="en-US"/>
+              <a:t>类型操作符会自动生成额外的上下文环境，以保存时序相关信息。例如当用到时间操作符，状态机，变量的延时设置等建模单元时就需要把自定义操作符的属性设置为</a:t>
+            </a:r>
+            <a:r>
+              <a:rPr lang="en-US" altLang="zh-CN"/>
+              <a:t>Node</a:t>
+            </a:r>
+            <a:r>
+              <a:rPr lang="zh-CN" altLang="en-US"/>
+              <a:t>类型，而</a:t>
+            </a:r>
+            <a:r>
+              <a:rPr lang="en-US" altLang="zh-CN"/>
+              <a:t>function</a:t>
+            </a:r>
+            <a:r>
+              <a:rPr lang="zh-CN" altLang="en-US"/>
+              <a:t>类型是不需要生成额外的上下文环境的。</a:t>
+            </a:r>
+          </a:p>
+        </p:txBody>
+      </p:sp>
+    </p:spTree>
+    <p:extLst>
+      <p:ext uri="{BB962C8B-B14F-4D97-AF65-F5344CB8AC3E}">
+        <p14:creationId xmlns:p14="http://schemas.microsoft.com/office/powerpoint/2010/main" val="1017257588"/>
+      </p:ext>
+    </p:extLst>
+  </p:cSld>
+  <p:clrMapOvr>
+    <a:masterClrMapping/>
+  </p:clrMapOvr>
+</p:sld>
+</file>
+
+<file path=ppt/slides/slide21.xml><?xml version="1.0" encoding="utf-8"?>
 <p:sld xmlns:a="http://schemas.openxmlformats.org/drawingml/2006/main" xmlns:r="http://schemas.openxmlformats.org/officeDocument/2006/relationships" xmlns:p="http://schemas.openxmlformats.org/presentationml/2006/main">
   <p:cSld>
     <p:spTree>
@@ -6868,42 +6959,12 @@
           <a:p>
             <a:r>
               <a:rPr lang="en-US" altLang="zh-CN"/>
-              <a:t>Pre -&gt;</a:t>
+              <a:t>Pre </a:t>
             </a:r>
             <a:endParaRPr lang="zh-CN" altLang="en-US"/>
           </a:p>
         </p:txBody>
       </p:sp>
-      <p:pic>
-        <p:nvPicPr>
-          <p:cNvPr id="3" name="图片 2">
-            <a:extLst>
-              <a:ext uri="{FF2B5EF4-FFF2-40B4-BE49-F238E27FC236}">
-                <a16:creationId xmlns:a16="http://schemas.microsoft.com/office/drawing/2014/main" id="{96065FC7-AA9A-40A2-9E1A-0F5E75ED793B}"/>
-              </a:ext>
-            </a:extLst>
-          </p:cNvPr>
-          <p:cNvPicPr>
-            <a:picLocks noChangeAspect="1"/>
-          </p:cNvPicPr>
-          <p:nvPr/>
-        </p:nvPicPr>
-        <p:blipFill>
-          <a:blip r:embed="rId3"/>
-          <a:stretch>
-            <a:fillRect/>
-          </a:stretch>
-        </p:blipFill>
-        <p:spPr>
-          <a:xfrm>
-            <a:off x="742040" y="2481940"/>
-            <a:ext cx="5674683" cy="3163079"/>
-          </a:xfrm>
-          <a:prstGeom prst="rect">
-            <a:avLst/>
-          </a:prstGeom>
-        </p:spPr>
-      </p:pic>
       <p:sp>
         <p:nvSpPr>
           <p:cNvPr id="5" name="文本框 4">
@@ -6975,10 +7036,10 @@
       </p:grpSpPr>
       <p:pic>
         <p:nvPicPr>
-          <p:cNvPr id="4" name="图片 3">
-            <a:extLst>
-              <a:ext uri="{FF2B5EF4-FFF2-40B4-BE49-F238E27FC236}">
-                <a16:creationId xmlns:a16="http://schemas.microsoft.com/office/drawing/2014/main" id="{E90D756C-EADC-4CF6-9F68-0DA27F6EAA42}"/>
+          <p:cNvPr id="6" name="图片 5">
+            <a:extLst>
+              <a:ext uri="{FF2B5EF4-FFF2-40B4-BE49-F238E27FC236}">
+                <a16:creationId xmlns:a16="http://schemas.microsoft.com/office/drawing/2014/main" id="{502AD4F9-06F7-4A23-B398-F680AF685099}"/>
               </a:ext>
             </a:extLst>
           </p:cNvPr>
@@ -6995,8 +7056,8 @@
         </p:blipFill>
         <p:spPr>
           <a:xfrm>
-            <a:off x="329201" y="198591"/>
-            <a:ext cx="5692633" cy="3475021"/>
+            <a:off x="529390" y="329255"/>
+            <a:ext cx="4702559" cy="6336240"/>
           </a:xfrm>
           <a:prstGeom prst="rect">
             <a:avLst/>
@@ -7005,10 +7066,10 @@
       </p:pic>
       <p:pic>
         <p:nvPicPr>
-          <p:cNvPr id="5" name="图片 4">
-            <a:extLst>
-              <a:ext uri="{FF2B5EF4-FFF2-40B4-BE49-F238E27FC236}">
-                <a16:creationId xmlns:a16="http://schemas.microsoft.com/office/drawing/2014/main" id="{A696FAED-6993-4363-8EBC-CFE5A5C089E4}"/>
+          <p:cNvPr id="3" name="图片 2">
+            <a:extLst>
+              <a:ext uri="{FF2B5EF4-FFF2-40B4-BE49-F238E27FC236}">
+                <a16:creationId xmlns:a16="http://schemas.microsoft.com/office/drawing/2014/main" id="{7D3B7480-4DF3-4DA5-8086-13CE6645D0FB}"/>
               </a:ext>
             </a:extLst>
           </p:cNvPr>
@@ -7025,8 +7086,8 @@
         </p:blipFill>
         <p:spPr>
           <a:xfrm>
-            <a:off x="6598931" y="198591"/>
-            <a:ext cx="4699845" cy="6306338"/>
+            <a:off x="6320589" y="146227"/>
+            <a:ext cx="5020209" cy="6565546"/>
           </a:xfrm>
           <a:prstGeom prst="rect">
             <a:avLst/>
@@ -7065,10 +7126,40 @@
       </p:grpSpPr>
       <p:pic>
         <p:nvPicPr>
-          <p:cNvPr id="4" name="图片 3">
-            <a:extLst>
-              <a:ext uri="{FF2B5EF4-FFF2-40B4-BE49-F238E27FC236}">
-                <a16:creationId xmlns:a16="http://schemas.microsoft.com/office/drawing/2014/main" id="{9689FC1C-D87D-4689-AE37-E48C61D49906}"/>
+          <p:cNvPr id="5" name="图片 4">
+            <a:extLst>
+              <a:ext uri="{FF2B5EF4-FFF2-40B4-BE49-F238E27FC236}">
+                <a16:creationId xmlns:a16="http://schemas.microsoft.com/office/drawing/2014/main" id="{04345807-13C6-4BC4-B91D-280049F4CB90}"/>
+              </a:ext>
+            </a:extLst>
+          </p:cNvPr>
+          <p:cNvPicPr>
+            <a:picLocks noChangeAspect="1"/>
+          </p:cNvPicPr>
+          <p:nvPr/>
+        </p:nvPicPr>
+        <p:blipFill>
+          <a:blip r:embed="rId2"/>
+          <a:stretch>
+            <a:fillRect/>
+          </a:stretch>
+        </p:blipFill>
+        <p:spPr>
+          <a:xfrm>
+            <a:off x="507531" y="200525"/>
+            <a:ext cx="4987146" cy="6288505"/>
+          </a:xfrm>
+          <a:prstGeom prst="rect">
+            <a:avLst/>
+          </a:prstGeom>
+        </p:spPr>
+      </p:pic>
+      <p:pic>
+        <p:nvPicPr>
+          <p:cNvPr id="7" name="图片 6">
+            <a:extLst>
+              <a:ext uri="{FF2B5EF4-FFF2-40B4-BE49-F238E27FC236}">
+                <a16:creationId xmlns:a16="http://schemas.microsoft.com/office/drawing/2014/main" id="{9CD88478-3D6C-4077-84A6-6D803F0F5BCE}"/>
               </a:ext>
             </a:extLst>
           </p:cNvPr>
@@ -7085,74 +7176,8 @@
         </p:blipFill>
         <p:spPr>
           <a:xfrm>
-            <a:off x="548679" y="273019"/>
-            <a:ext cx="4488569" cy="1310754"/>
-          </a:xfrm>
-          <a:prstGeom prst="rect">
-            <a:avLst/>
-          </a:prstGeom>
-        </p:spPr>
-      </p:pic>
-      <p:sp>
-        <p:nvSpPr>
-          <p:cNvPr id="2" name="文本框 1">
-            <a:extLst>
-              <a:ext uri="{FF2B5EF4-FFF2-40B4-BE49-F238E27FC236}">
-                <a16:creationId xmlns:a16="http://schemas.microsoft.com/office/drawing/2014/main" id="{AD69C2AF-66DF-4FF7-A09D-D079402A313E}"/>
-              </a:ext>
-            </a:extLst>
-          </p:cNvPr>
-          <p:cNvSpPr txBox="1"/>
-          <p:nvPr/>
-        </p:nvSpPr>
-        <p:spPr>
-          <a:xfrm>
-            <a:off x="130629" y="130629"/>
-            <a:ext cx="1446244" cy="369332"/>
-          </a:xfrm>
-          <a:prstGeom prst="rect">
-            <a:avLst/>
-          </a:prstGeom>
-          <a:noFill/>
-        </p:spPr>
-        <p:txBody>
-          <a:bodyPr wrap="square" rtlCol="0">
-            <a:spAutoFit/>
-          </a:bodyPr>
-          <a:lstStyle/>
-          <a:p>
-            <a:r>
-              <a:rPr lang="en-US" altLang="zh-CN"/>
-              <a:t>times</a:t>
-            </a:r>
-            <a:endParaRPr lang="zh-CN" altLang="en-US"/>
-          </a:p>
-        </p:txBody>
-      </p:sp>
-      <p:pic>
-        <p:nvPicPr>
-          <p:cNvPr id="3" name="图片 2">
-            <a:extLst>
-              <a:ext uri="{FF2B5EF4-FFF2-40B4-BE49-F238E27FC236}">
-                <a16:creationId xmlns:a16="http://schemas.microsoft.com/office/drawing/2014/main" id="{D0551829-9E65-4F3D-8A24-AF90A43D59EA}"/>
-              </a:ext>
-            </a:extLst>
-          </p:cNvPr>
-          <p:cNvPicPr>
-            <a:picLocks noChangeAspect="1"/>
-          </p:cNvPicPr>
-          <p:nvPr/>
-        </p:nvPicPr>
-        <p:blipFill>
-          <a:blip r:embed="rId4"/>
-          <a:stretch>
-            <a:fillRect/>
-          </a:stretch>
-        </p:blipFill>
-        <p:spPr>
-          <a:xfrm>
-            <a:off x="548679" y="1940767"/>
-            <a:ext cx="6992785" cy="2976465"/>
+            <a:off x="6096000" y="372977"/>
+            <a:ext cx="4711485" cy="5943600"/>
           </a:xfrm>
           <a:prstGeom prst="rect">
             <a:avLst/>
@@ -7162,7 +7187,7 @@
     </p:spTree>
     <p:extLst>
       <p:ext uri="{BB962C8B-B14F-4D97-AF65-F5344CB8AC3E}">
-        <p14:creationId xmlns:p14="http://schemas.microsoft.com/office/powerpoint/2010/main" val="4203107974"/>
+        <p14:creationId xmlns:p14="http://schemas.microsoft.com/office/powerpoint/2010/main" val="3764076849"/>
       </p:ext>
     </p:extLst>
   </p:cSld>
@@ -7194,37 +7219,7 @@
           <p:cNvPr id="4" name="图片 3">
             <a:extLst>
               <a:ext uri="{FF2B5EF4-FFF2-40B4-BE49-F238E27FC236}">
-                <a16:creationId xmlns:a16="http://schemas.microsoft.com/office/drawing/2014/main" id="{A42FC0EB-7890-4F87-8FEC-262A37139D76}"/>
-              </a:ext>
-            </a:extLst>
-          </p:cNvPr>
-          <p:cNvPicPr>
-            <a:picLocks noChangeAspect="1"/>
-          </p:cNvPicPr>
-          <p:nvPr/>
-        </p:nvPicPr>
-        <p:blipFill>
-          <a:blip r:embed="rId2"/>
-          <a:stretch>
-            <a:fillRect/>
-          </a:stretch>
-        </p:blipFill>
-        <p:spPr>
-          <a:xfrm>
-            <a:off x="288809" y="260338"/>
-            <a:ext cx="6538527" cy="3276884"/>
-          </a:xfrm>
-          <a:prstGeom prst="rect">
-            <a:avLst/>
-          </a:prstGeom>
-        </p:spPr>
-      </p:pic>
-      <p:pic>
-        <p:nvPicPr>
-          <p:cNvPr id="5" name="图片 4">
-            <a:extLst>
-              <a:ext uri="{FF2B5EF4-FFF2-40B4-BE49-F238E27FC236}">
-                <a16:creationId xmlns:a16="http://schemas.microsoft.com/office/drawing/2014/main" id="{6EC9F0D5-F754-47F8-92B5-709B0433253E}"/>
+                <a16:creationId xmlns:a16="http://schemas.microsoft.com/office/drawing/2014/main" id="{9689FC1C-D87D-4689-AE37-E48C61D49906}"/>
               </a:ext>
             </a:extLst>
           </p:cNvPr>
@@ -7241,8 +7236,74 @@
         </p:blipFill>
         <p:spPr>
           <a:xfrm>
-            <a:off x="6026301" y="1270820"/>
-            <a:ext cx="6073666" cy="5326842"/>
+            <a:off x="548679" y="273019"/>
+            <a:ext cx="4488569" cy="1310754"/>
+          </a:xfrm>
+          <a:prstGeom prst="rect">
+            <a:avLst/>
+          </a:prstGeom>
+        </p:spPr>
+      </p:pic>
+      <p:sp>
+        <p:nvSpPr>
+          <p:cNvPr id="2" name="文本框 1">
+            <a:extLst>
+              <a:ext uri="{FF2B5EF4-FFF2-40B4-BE49-F238E27FC236}">
+                <a16:creationId xmlns:a16="http://schemas.microsoft.com/office/drawing/2014/main" id="{AD69C2AF-66DF-4FF7-A09D-D079402A313E}"/>
+              </a:ext>
+            </a:extLst>
+          </p:cNvPr>
+          <p:cNvSpPr txBox="1"/>
+          <p:nvPr/>
+        </p:nvSpPr>
+        <p:spPr>
+          <a:xfrm>
+            <a:off x="130629" y="130629"/>
+            <a:ext cx="1446244" cy="369332"/>
+          </a:xfrm>
+          <a:prstGeom prst="rect">
+            <a:avLst/>
+          </a:prstGeom>
+          <a:noFill/>
+        </p:spPr>
+        <p:txBody>
+          <a:bodyPr wrap="square" rtlCol="0">
+            <a:spAutoFit/>
+          </a:bodyPr>
+          <a:lstStyle/>
+          <a:p>
+            <a:r>
+              <a:rPr lang="en-US" altLang="zh-CN"/>
+              <a:t>times</a:t>
+            </a:r>
+            <a:endParaRPr lang="zh-CN" altLang="en-US"/>
+          </a:p>
+        </p:txBody>
+      </p:sp>
+      <p:pic>
+        <p:nvPicPr>
+          <p:cNvPr id="3" name="图片 2">
+            <a:extLst>
+              <a:ext uri="{FF2B5EF4-FFF2-40B4-BE49-F238E27FC236}">
+                <a16:creationId xmlns:a16="http://schemas.microsoft.com/office/drawing/2014/main" id="{D0551829-9E65-4F3D-8A24-AF90A43D59EA}"/>
+              </a:ext>
+            </a:extLst>
+          </p:cNvPr>
+          <p:cNvPicPr>
+            <a:picLocks noChangeAspect="1"/>
+          </p:cNvPicPr>
+          <p:nvPr/>
+        </p:nvPicPr>
+        <p:blipFill>
+          <a:blip r:embed="rId4"/>
+          <a:stretch>
+            <a:fillRect/>
+          </a:stretch>
+        </p:blipFill>
+        <p:spPr>
+          <a:xfrm>
+            <a:off x="548679" y="1940767"/>
+            <a:ext cx="6992785" cy="2976465"/>
           </a:xfrm>
           <a:prstGeom prst="rect">
             <a:avLst/>
@@ -7252,7 +7313,7 @@
     </p:spTree>
     <p:extLst>
       <p:ext uri="{BB962C8B-B14F-4D97-AF65-F5344CB8AC3E}">
-        <p14:creationId xmlns:p14="http://schemas.microsoft.com/office/powerpoint/2010/main" val="278895512"/>
+        <p14:creationId xmlns:p14="http://schemas.microsoft.com/office/powerpoint/2010/main" val="4203107974"/>
       </p:ext>
     </p:extLst>
   </p:cSld>

--- a/docs/scade.pptx
+++ b/docs/scade.pptx
@@ -5,7 +5,7 @@
     <p:sldMasterId id="2147483648" r:id="rId1"/>
   </p:sldMasterIdLst>
   <p:notesMasterIdLst>
-    <p:notesMasterId r:id="rId23"/>
+    <p:notesMasterId r:id="rId24"/>
   </p:notesMasterIdLst>
   <p:sldIdLst>
     <p:sldId id="256" r:id="rId2"/>
@@ -29,6 +29,7 @@
     <p:sldId id="271" r:id="rId20"/>
     <p:sldId id="273" r:id="rId21"/>
     <p:sldId id="272" r:id="rId22"/>
+    <p:sldId id="277" r:id="rId23"/>
   </p:sldIdLst>
   <p:sldSz cx="12192000" cy="6858000"/>
   <p:notesSz cx="6858000" cy="9144000"/>
@@ -217,7 +218,7 @@
           <a:p>
             <a:fld id="{3744C8BF-56B8-46D4-ADA5-A0AF811348DF}" type="datetimeFigureOut">
               <a:rPr lang="zh-CN" altLang="en-US" smtClean="0"/>
-              <a:t>2023/10/7</a:t>
+              <a:t>2023/10/23</a:t>
             </a:fld>
             <a:endParaRPr lang="zh-CN" altLang="en-US"/>
           </a:p>
@@ -715,7 +716,7 @@
           <a:p>
             <a:fld id="{C61D74A4-027F-4A2B-8B92-D0C194C50910}" type="datetimeFigureOut">
               <a:rPr lang="zh-CN" altLang="en-US" smtClean="0"/>
-              <a:t>2023/10/7</a:t>
+              <a:t>2023/10/23</a:t>
             </a:fld>
             <a:endParaRPr lang="zh-CN" altLang="en-US"/>
           </a:p>
@@ -913,7 +914,7 @@
           <a:p>
             <a:fld id="{C61D74A4-027F-4A2B-8B92-D0C194C50910}" type="datetimeFigureOut">
               <a:rPr lang="zh-CN" altLang="en-US" smtClean="0"/>
-              <a:t>2023/10/7</a:t>
+              <a:t>2023/10/23</a:t>
             </a:fld>
             <a:endParaRPr lang="zh-CN" altLang="en-US"/>
           </a:p>
@@ -1121,7 +1122,7 @@
           <a:p>
             <a:fld id="{C61D74A4-027F-4A2B-8B92-D0C194C50910}" type="datetimeFigureOut">
               <a:rPr lang="zh-CN" altLang="en-US" smtClean="0"/>
-              <a:t>2023/10/7</a:t>
+              <a:t>2023/10/23</a:t>
             </a:fld>
             <a:endParaRPr lang="zh-CN" altLang="en-US"/>
           </a:p>
@@ -1319,7 +1320,7 @@
           <a:p>
             <a:fld id="{C61D74A4-027F-4A2B-8B92-D0C194C50910}" type="datetimeFigureOut">
               <a:rPr lang="zh-CN" altLang="en-US" smtClean="0"/>
-              <a:t>2023/10/7</a:t>
+              <a:t>2023/10/23</a:t>
             </a:fld>
             <a:endParaRPr lang="zh-CN" altLang="en-US"/>
           </a:p>
@@ -1594,7 +1595,7 @@
           <a:p>
             <a:fld id="{C61D74A4-027F-4A2B-8B92-D0C194C50910}" type="datetimeFigureOut">
               <a:rPr lang="zh-CN" altLang="en-US" smtClean="0"/>
-              <a:t>2023/10/7</a:t>
+              <a:t>2023/10/23</a:t>
             </a:fld>
             <a:endParaRPr lang="zh-CN" altLang="en-US"/>
           </a:p>
@@ -1859,7 +1860,7 @@
           <a:p>
             <a:fld id="{C61D74A4-027F-4A2B-8B92-D0C194C50910}" type="datetimeFigureOut">
               <a:rPr lang="zh-CN" altLang="en-US" smtClean="0"/>
-              <a:t>2023/10/7</a:t>
+              <a:t>2023/10/23</a:t>
             </a:fld>
             <a:endParaRPr lang="zh-CN" altLang="en-US"/>
           </a:p>
@@ -2271,7 +2272,7 @@
           <a:p>
             <a:fld id="{C61D74A4-027F-4A2B-8B92-D0C194C50910}" type="datetimeFigureOut">
               <a:rPr lang="zh-CN" altLang="en-US" smtClean="0"/>
-              <a:t>2023/10/7</a:t>
+              <a:t>2023/10/23</a:t>
             </a:fld>
             <a:endParaRPr lang="zh-CN" altLang="en-US"/>
           </a:p>
@@ -2412,7 +2413,7 @@
           <a:p>
             <a:fld id="{C61D74A4-027F-4A2B-8B92-D0C194C50910}" type="datetimeFigureOut">
               <a:rPr lang="zh-CN" altLang="en-US" smtClean="0"/>
-              <a:t>2023/10/7</a:t>
+              <a:t>2023/10/23</a:t>
             </a:fld>
             <a:endParaRPr lang="zh-CN" altLang="en-US"/>
           </a:p>
@@ -2525,7 +2526,7 @@
           <a:p>
             <a:fld id="{C61D74A4-027F-4A2B-8B92-D0C194C50910}" type="datetimeFigureOut">
               <a:rPr lang="zh-CN" altLang="en-US" smtClean="0"/>
-              <a:t>2023/10/7</a:t>
+              <a:t>2023/10/23</a:t>
             </a:fld>
             <a:endParaRPr lang="zh-CN" altLang="en-US"/>
           </a:p>
@@ -2836,7 +2837,7 @@
           <a:p>
             <a:fld id="{C61D74A4-027F-4A2B-8B92-D0C194C50910}" type="datetimeFigureOut">
               <a:rPr lang="zh-CN" altLang="en-US" smtClean="0"/>
-              <a:t>2023/10/7</a:t>
+              <a:t>2023/10/23</a:t>
             </a:fld>
             <a:endParaRPr lang="zh-CN" altLang="en-US"/>
           </a:p>
@@ -3124,7 +3125,7 @@
           <a:p>
             <a:fld id="{C61D74A4-027F-4A2B-8B92-D0C194C50910}" type="datetimeFigureOut">
               <a:rPr lang="zh-CN" altLang="en-US" smtClean="0"/>
-              <a:t>2023/10/7</a:t>
+              <a:t>2023/10/23</a:t>
             </a:fld>
             <a:endParaRPr lang="zh-CN" altLang="en-US"/>
           </a:p>
@@ -3365,7 +3366,7 @@
           <a:p>
             <a:fld id="{C61D74A4-027F-4A2B-8B92-D0C194C50910}" type="datetimeFigureOut">
               <a:rPr lang="zh-CN" altLang="en-US" smtClean="0"/>
-              <a:t>2023/10/7</a:t>
+              <a:t>2023/10/23</a:t>
             </a:fld>
             <a:endParaRPr lang="zh-CN" altLang="en-US"/>
           </a:p>
@@ -6331,6 +6332,300 @@
     <p:extLst>
       <p:ext uri="{BB962C8B-B14F-4D97-AF65-F5344CB8AC3E}">
         <p14:creationId xmlns:p14="http://schemas.microsoft.com/office/powerpoint/2010/main" val="1204162928"/>
+      </p:ext>
+    </p:extLst>
+  </p:cSld>
+  <p:clrMapOvr>
+    <a:masterClrMapping/>
+  </p:clrMapOvr>
+</p:sld>
+</file>
+
+<file path=ppt/slides/slide22.xml><?xml version="1.0" encoding="utf-8"?>
+<p:sld xmlns:a="http://schemas.openxmlformats.org/drawingml/2006/main" xmlns:r="http://schemas.openxmlformats.org/officeDocument/2006/relationships" xmlns:p="http://schemas.openxmlformats.org/presentationml/2006/main">
+  <p:cSld>
+    <p:spTree>
+      <p:nvGrpSpPr>
+        <p:cNvPr id="1" name=""/>
+        <p:cNvGrpSpPr/>
+        <p:nvPr/>
+      </p:nvGrpSpPr>
+      <p:grpSpPr>
+        <a:xfrm>
+          <a:off x="0" y="0"/>
+          <a:ext cx="0" cy="0"/>
+          <a:chOff x="0" y="0"/>
+          <a:chExt cx="0" cy="0"/>
+        </a:xfrm>
+      </p:grpSpPr>
+      <p:sp>
+        <p:nvSpPr>
+          <p:cNvPr id="4" name="文本框 3">
+            <a:extLst>
+              <a:ext uri="{FF2B5EF4-FFF2-40B4-BE49-F238E27FC236}">
+                <a16:creationId xmlns:a16="http://schemas.microsoft.com/office/drawing/2014/main" id="{64541A31-07F7-4610-85EC-258C25D40BB6}"/>
+              </a:ext>
+            </a:extLst>
+          </p:cNvPr>
+          <p:cNvSpPr txBox="1"/>
+          <p:nvPr/>
+        </p:nvSpPr>
+        <p:spPr>
+          <a:xfrm>
+            <a:off x="390617" y="266330"/>
+            <a:ext cx="2228295" cy="369332"/>
+          </a:xfrm>
+          <a:prstGeom prst="rect">
+            <a:avLst/>
+          </a:prstGeom>
+          <a:noFill/>
+        </p:spPr>
+        <p:txBody>
+          <a:bodyPr wrap="square" rtlCol="0">
+            <a:spAutoFit/>
+          </a:bodyPr>
+          <a:lstStyle/>
+          <a:p>
+            <a:r>
+              <a:rPr lang="zh-CN" altLang="en-US" b="1"/>
+              <a:t>代码生成算法</a:t>
+            </a:r>
+          </a:p>
+        </p:txBody>
+      </p:sp>
+      <p:sp>
+        <p:nvSpPr>
+          <p:cNvPr id="6" name="文本框 5">
+            <a:extLst>
+              <a:ext uri="{FF2B5EF4-FFF2-40B4-BE49-F238E27FC236}">
+                <a16:creationId xmlns:a16="http://schemas.microsoft.com/office/drawing/2014/main" id="{2938006C-EFC8-477A-8885-B67A358874E9}"/>
+              </a:ext>
+            </a:extLst>
+          </p:cNvPr>
+          <p:cNvSpPr txBox="1"/>
+          <p:nvPr/>
+        </p:nvSpPr>
+        <p:spPr>
+          <a:xfrm>
+            <a:off x="292963" y="798990"/>
+            <a:ext cx="10440140" cy="5078313"/>
+          </a:xfrm>
+          <a:prstGeom prst="rect">
+            <a:avLst/>
+          </a:prstGeom>
+          <a:ln w="19050"/>
+        </p:spPr>
+        <p:style>
+          <a:lnRef idx="2">
+            <a:schemeClr val="dk1"/>
+          </a:lnRef>
+          <a:fillRef idx="1">
+            <a:schemeClr val="lt1"/>
+          </a:fillRef>
+          <a:effectRef idx="0">
+            <a:schemeClr val="dk1"/>
+          </a:effectRef>
+          <a:fontRef idx="minor">
+            <a:schemeClr val="dk1"/>
+          </a:fontRef>
+        </p:style>
+        <p:txBody>
+          <a:bodyPr wrap="square" rtlCol="0">
+            <a:spAutoFit/>
+          </a:bodyPr>
+          <a:lstStyle/>
+          <a:p>
+            <a:r>
+              <a:rPr lang="en-US" altLang="zh-CN" b="1"/>
+              <a:t>Algorithm Code Generation</a:t>
+            </a:r>
+          </a:p>
+          <a:p>
+            <a:r>
+              <a:rPr lang="en-US" altLang="zh-CN"/>
+              <a:t>Input:grammerList,nodeId,nodeDict,cModel</a:t>
+            </a:r>
+          </a:p>
+          <a:p>
+            <a:r>
+              <a:rPr lang="en-US" altLang="zh-CN"/>
+              <a:t>Output:C Code</a:t>
+            </a:r>
+          </a:p>
+          <a:p>
+            <a:r>
+              <a:rPr lang="en-US" altLang="zh-CN"/>
+              <a:t>function codeGeneration(grammerList,nodeId,nodeDict,cModel)</a:t>
+            </a:r>
+          </a:p>
+          <a:p>
+            <a:r>
+              <a:rPr lang="en-US" altLang="zh-CN"/>
+              <a:t>	code = “”</a:t>
+            </a:r>
+          </a:p>
+          <a:p>
+            <a:r>
+              <a:rPr lang="en-US" altLang="zh-CN"/>
+              <a:t>	symbolTable = getSymbolTable(nodeId,nodeDict)</a:t>
+            </a:r>
+          </a:p>
+          <a:p>
+            <a:r>
+              <a:rPr lang="en-US" altLang="zh-CN"/>
+              <a:t>	for elem in symbolTable do</a:t>
+            </a:r>
+          </a:p>
+          <a:p>
+            <a:r>
+              <a:rPr lang="en-US" altLang="zh-CN"/>
+              <a:t>	      if elem.Kind ==“Const” do</a:t>
+            </a:r>
+          </a:p>
+          <a:p>
+            <a:r>
+              <a:rPr lang="en-US" altLang="zh-CN"/>
+              <a:t>		add_variable_const_def_code(code,elem,symbolTable,cModel)</a:t>
+            </a:r>
+          </a:p>
+          <a:p>
+            <a:r>
+              <a:rPr lang="en-US" altLang="zh-CN"/>
+              <a:t>	      end if</a:t>
+            </a:r>
+          </a:p>
+          <a:p>
+            <a:r>
+              <a:rPr lang="en-US" altLang="zh-CN"/>
+              <a:t>               end for</a:t>
+            </a:r>
+          </a:p>
+          <a:p>
+            <a:r>
+              <a:rPr lang="en-US" altLang="zh-CN"/>
+              <a:t>	for elem in symbolTable do</a:t>
+            </a:r>
+          </a:p>
+          <a:p>
+            <a:r>
+              <a:rPr lang="en-US" altLang="zh-CN"/>
+              <a:t>	      if elem.Kind ==“Sensor” do</a:t>
+            </a:r>
+          </a:p>
+          <a:p>
+            <a:r>
+              <a:rPr lang="en-US" altLang="zh-CN"/>
+              <a:t>		add_variable_sensor_def_code(code,elem,symbolTable,cModel)</a:t>
+            </a:r>
+          </a:p>
+          <a:p>
+            <a:r>
+              <a:rPr lang="en-US" altLang="zh-CN"/>
+              <a:t>	      end if</a:t>
+            </a:r>
+          </a:p>
+          <a:p>
+            <a:r>
+              <a:rPr lang="en-US" altLang="zh-CN"/>
+              <a:t>	end for</a:t>
+            </a:r>
+          </a:p>
+          <a:p>
+            <a:r>
+              <a:rPr lang="en-US" altLang="zh-CN"/>
+              <a:t>	add_node_def_code(code,nodeId,symbolTable,nodeDict,cModel)</a:t>
+            </a:r>
+          </a:p>
+          <a:p>
+            <a:r>
+              <a:rPr lang="en-US" altLang="zh-CN"/>
+              <a:t>end function</a:t>
+            </a:r>
+          </a:p>
+        </p:txBody>
+      </p:sp>
+      <p:cxnSp>
+        <p:nvCxnSpPr>
+          <p:cNvPr id="8" name="直接连接符 7">
+            <a:extLst>
+              <a:ext uri="{FF2B5EF4-FFF2-40B4-BE49-F238E27FC236}">
+                <a16:creationId xmlns:a16="http://schemas.microsoft.com/office/drawing/2014/main" id="{1FF409D5-AFAE-4A0E-B7F3-D5BD3545A415}"/>
+              </a:ext>
+            </a:extLst>
+          </p:cNvPr>
+          <p:cNvCxnSpPr>
+            <a:cxnSpLocks/>
+          </p:cNvCxnSpPr>
+          <p:nvPr/>
+        </p:nvCxnSpPr>
+        <p:spPr>
+          <a:xfrm>
+            <a:off x="292963" y="1136343"/>
+            <a:ext cx="10440140" cy="0"/>
+          </a:xfrm>
+          <a:prstGeom prst="line">
+            <a:avLst/>
+          </a:prstGeom>
+          <a:ln w="19050"/>
+        </p:spPr>
+        <p:style>
+          <a:lnRef idx="1">
+            <a:schemeClr val="dk1"/>
+          </a:lnRef>
+          <a:fillRef idx="0">
+            <a:schemeClr val="dk1"/>
+          </a:fillRef>
+          <a:effectRef idx="0">
+            <a:schemeClr val="dk1"/>
+          </a:effectRef>
+          <a:fontRef idx="minor">
+            <a:schemeClr val="tx1"/>
+          </a:fontRef>
+        </p:style>
+      </p:cxnSp>
+      <p:cxnSp>
+        <p:nvCxnSpPr>
+          <p:cNvPr id="11" name="直接连接符 10">
+            <a:extLst>
+              <a:ext uri="{FF2B5EF4-FFF2-40B4-BE49-F238E27FC236}">
+                <a16:creationId xmlns:a16="http://schemas.microsoft.com/office/drawing/2014/main" id="{EA663690-7781-4717-9779-26038ED7B144}"/>
+              </a:ext>
+            </a:extLst>
+          </p:cNvPr>
+          <p:cNvCxnSpPr>
+            <a:cxnSpLocks/>
+          </p:cNvCxnSpPr>
+          <p:nvPr/>
+        </p:nvCxnSpPr>
+        <p:spPr>
+          <a:xfrm>
+            <a:off x="292963" y="1679360"/>
+            <a:ext cx="10440140" cy="0"/>
+          </a:xfrm>
+          <a:prstGeom prst="line">
+            <a:avLst/>
+          </a:prstGeom>
+          <a:ln w="19050"/>
+        </p:spPr>
+        <p:style>
+          <a:lnRef idx="1">
+            <a:schemeClr val="dk1"/>
+          </a:lnRef>
+          <a:fillRef idx="0">
+            <a:schemeClr val="dk1"/>
+          </a:fillRef>
+          <a:effectRef idx="0">
+            <a:schemeClr val="dk1"/>
+          </a:effectRef>
+          <a:fontRef idx="minor">
+            <a:schemeClr val="tx1"/>
+          </a:fontRef>
+        </p:style>
+      </p:cxnSp>
+    </p:spTree>
+    <p:extLst>
+      <p:ext uri="{BB962C8B-B14F-4D97-AF65-F5344CB8AC3E}">
+        <p14:creationId xmlns:p14="http://schemas.microsoft.com/office/powerpoint/2010/main" val="3400313318"/>
       </p:ext>
     </p:extLst>
   </p:cSld>

--- a/docs/scade.pptx
+++ b/docs/scade.pptx
@@ -5,7 +5,7 @@
     <p:sldMasterId id="2147483648" r:id="rId1"/>
   </p:sldMasterIdLst>
   <p:notesMasterIdLst>
-    <p:notesMasterId r:id="rId24"/>
+    <p:notesMasterId r:id="rId29"/>
   </p:notesMasterIdLst>
   <p:sldIdLst>
     <p:sldId id="256" r:id="rId2"/>
@@ -30,6 +30,11 @@
     <p:sldId id="273" r:id="rId21"/>
     <p:sldId id="272" r:id="rId22"/>
     <p:sldId id="277" r:id="rId23"/>
+    <p:sldId id="281" r:id="rId24"/>
+    <p:sldId id="280" r:id="rId25"/>
+    <p:sldId id="278" r:id="rId26"/>
+    <p:sldId id="279" r:id="rId27"/>
+    <p:sldId id="282" r:id="rId28"/>
   </p:sldIdLst>
   <p:sldSz cx="12192000" cy="6858000"/>
   <p:notesSz cx="6858000" cy="9144000"/>
@@ -218,7 +223,7 @@
           <a:p>
             <a:fld id="{3744C8BF-56B8-46D4-ADA5-A0AF811348DF}" type="datetimeFigureOut">
               <a:rPr lang="zh-CN" altLang="en-US" smtClean="0"/>
-              <a:t>2023/10/23</a:t>
+              <a:t>2023/10/30</a:t>
             </a:fld>
             <a:endParaRPr lang="zh-CN" altLang="en-US"/>
           </a:p>
@@ -716,7 +721,7 @@
           <a:p>
             <a:fld id="{C61D74A4-027F-4A2B-8B92-D0C194C50910}" type="datetimeFigureOut">
               <a:rPr lang="zh-CN" altLang="en-US" smtClean="0"/>
-              <a:t>2023/10/23</a:t>
+              <a:t>2023/10/30</a:t>
             </a:fld>
             <a:endParaRPr lang="zh-CN" altLang="en-US"/>
           </a:p>
@@ -914,7 +919,7 @@
           <a:p>
             <a:fld id="{C61D74A4-027F-4A2B-8B92-D0C194C50910}" type="datetimeFigureOut">
               <a:rPr lang="zh-CN" altLang="en-US" smtClean="0"/>
-              <a:t>2023/10/23</a:t>
+              <a:t>2023/10/30</a:t>
             </a:fld>
             <a:endParaRPr lang="zh-CN" altLang="en-US"/>
           </a:p>
@@ -1122,7 +1127,7 @@
           <a:p>
             <a:fld id="{C61D74A4-027F-4A2B-8B92-D0C194C50910}" type="datetimeFigureOut">
               <a:rPr lang="zh-CN" altLang="en-US" smtClean="0"/>
-              <a:t>2023/10/23</a:t>
+              <a:t>2023/10/30</a:t>
             </a:fld>
             <a:endParaRPr lang="zh-CN" altLang="en-US"/>
           </a:p>
@@ -1320,7 +1325,7 @@
           <a:p>
             <a:fld id="{C61D74A4-027F-4A2B-8B92-D0C194C50910}" type="datetimeFigureOut">
               <a:rPr lang="zh-CN" altLang="en-US" smtClean="0"/>
-              <a:t>2023/10/23</a:t>
+              <a:t>2023/10/30</a:t>
             </a:fld>
             <a:endParaRPr lang="zh-CN" altLang="en-US"/>
           </a:p>
@@ -1595,7 +1600,7 @@
           <a:p>
             <a:fld id="{C61D74A4-027F-4A2B-8B92-D0C194C50910}" type="datetimeFigureOut">
               <a:rPr lang="zh-CN" altLang="en-US" smtClean="0"/>
-              <a:t>2023/10/23</a:t>
+              <a:t>2023/10/30</a:t>
             </a:fld>
             <a:endParaRPr lang="zh-CN" altLang="en-US"/>
           </a:p>
@@ -1860,7 +1865,7 @@
           <a:p>
             <a:fld id="{C61D74A4-027F-4A2B-8B92-D0C194C50910}" type="datetimeFigureOut">
               <a:rPr lang="zh-CN" altLang="en-US" smtClean="0"/>
-              <a:t>2023/10/23</a:t>
+              <a:t>2023/10/30</a:t>
             </a:fld>
             <a:endParaRPr lang="zh-CN" altLang="en-US"/>
           </a:p>
@@ -2272,7 +2277,7 @@
           <a:p>
             <a:fld id="{C61D74A4-027F-4A2B-8B92-D0C194C50910}" type="datetimeFigureOut">
               <a:rPr lang="zh-CN" altLang="en-US" smtClean="0"/>
-              <a:t>2023/10/23</a:t>
+              <a:t>2023/10/30</a:t>
             </a:fld>
             <a:endParaRPr lang="zh-CN" altLang="en-US"/>
           </a:p>
@@ -2413,7 +2418,7 @@
           <a:p>
             <a:fld id="{C61D74A4-027F-4A2B-8B92-D0C194C50910}" type="datetimeFigureOut">
               <a:rPr lang="zh-CN" altLang="en-US" smtClean="0"/>
-              <a:t>2023/10/23</a:t>
+              <a:t>2023/10/30</a:t>
             </a:fld>
             <a:endParaRPr lang="zh-CN" altLang="en-US"/>
           </a:p>
@@ -2526,7 +2531,7 @@
           <a:p>
             <a:fld id="{C61D74A4-027F-4A2B-8B92-D0C194C50910}" type="datetimeFigureOut">
               <a:rPr lang="zh-CN" altLang="en-US" smtClean="0"/>
-              <a:t>2023/10/23</a:t>
+              <a:t>2023/10/30</a:t>
             </a:fld>
             <a:endParaRPr lang="zh-CN" altLang="en-US"/>
           </a:p>
@@ -2837,7 +2842,7 @@
           <a:p>
             <a:fld id="{C61D74A4-027F-4A2B-8B92-D0C194C50910}" type="datetimeFigureOut">
               <a:rPr lang="zh-CN" altLang="en-US" smtClean="0"/>
-              <a:t>2023/10/23</a:t>
+              <a:t>2023/10/30</a:t>
             </a:fld>
             <a:endParaRPr lang="zh-CN" altLang="en-US"/>
           </a:p>
@@ -3125,7 +3130,7 @@
           <a:p>
             <a:fld id="{C61D74A4-027F-4A2B-8B92-D0C194C50910}" type="datetimeFigureOut">
               <a:rPr lang="zh-CN" altLang="en-US" smtClean="0"/>
-              <a:t>2023/10/23</a:t>
+              <a:t>2023/10/30</a:t>
             </a:fld>
             <a:endParaRPr lang="zh-CN" altLang="en-US"/>
           </a:p>
@@ -3366,7 +3371,7 @@
           <a:p>
             <a:fld id="{C61D74A4-027F-4A2B-8B92-D0C194C50910}" type="datetimeFigureOut">
               <a:rPr lang="zh-CN" altLang="en-US" smtClean="0"/>
-              <a:t>2023/10/23</a:t>
+              <a:t>2023/10/30</a:t>
             </a:fld>
             <a:endParaRPr lang="zh-CN" altLang="en-US"/>
           </a:p>
@@ -6626,6 +6631,1459 @@
     <p:extLst>
       <p:ext uri="{BB962C8B-B14F-4D97-AF65-F5344CB8AC3E}">
         <p14:creationId xmlns:p14="http://schemas.microsoft.com/office/powerpoint/2010/main" val="3400313318"/>
+      </p:ext>
+    </p:extLst>
+  </p:cSld>
+  <p:clrMapOvr>
+    <a:masterClrMapping/>
+  </p:clrMapOvr>
+</p:sld>
+</file>
+
+<file path=ppt/slides/slide23.xml><?xml version="1.0" encoding="utf-8"?>
+<p:sld xmlns:a="http://schemas.openxmlformats.org/drawingml/2006/main" xmlns:r="http://schemas.openxmlformats.org/officeDocument/2006/relationships" xmlns:p="http://schemas.openxmlformats.org/presentationml/2006/main">
+  <p:cSld>
+    <p:spTree>
+      <p:nvGrpSpPr>
+        <p:cNvPr id="1" name=""/>
+        <p:cNvGrpSpPr/>
+        <p:nvPr/>
+      </p:nvGrpSpPr>
+      <p:grpSpPr>
+        <a:xfrm>
+          <a:off x="0" y="0"/>
+          <a:ext cx="0" cy="0"/>
+          <a:chOff x="0" y="0"/>
+          <a:chExt cx="0" cy="0"/>
+        </a:xfrm>
+      </p:grpSpPr>
+      <p:sp>
+        <p:nvSpPr>
+          <p:cNvPr id="4" name="文本框 3">
+            <a:extLst>
+              <a:ext uri="{FF2B5EF4-FFF2-40B4-BE49-F238E27FC236}">
+                <a16:creationId xmlns:a16="http://schemas.microsoft.com/office/drawing/2014/main" id="{D3D99C5A-735E-4265-8670-576E51425CB8}"/>
+              </a:ext>
+            </a:extLst>
+          </p:cNvPr>
+          <p:cNvSpPr txBox="1"/>
+          <p:nvPr/>
+        </p:nvSpPr>
+        <p:spPr>
+          <a:xfrm>
+            <a:off x="195308" y="248575"/>
+            <a:ext cx="5672831" cy="6186309"/>
+          </a:xfrm>
+          <a:prstGeom prst="rect">
+            <a:avLst/>
+          </a:prstGeom>
+          <a:noFill/>
+        </p:spPr>
+        <p:txBody>
+          <a:bodyPr wrap="square" rtlCol="0">
+            <a:spAutoFit/>
+          </a:bodyPr>
+          <a:lstStyle/>
+          <a:p>
+            <a:r>
+              <a:rPr lang="en-US" altLang="zh-CN"/>
+              <a:t>Expr ::= Switch_expr </a:t>
+            </a:r>
+          </a:p>
+          <a:p>
+            <a:endParaRPr lang="en-US" altLang="zh-CN"/>
+          </a:p>
+          <a:p>
+            <a:r>
+              <a:rPr lang="en-US" altLang="zh-CN"/>
+              <a:t>Switch_expr ::= if Expr then Expr else Expr </a:t>
+            </a:r>
+          </a:p>
+          <a:p>
+            <a:r>
+              <a:rPr lang="en-US" altLang="zh-CN"/>
+              <a:t>                    ::= </a:t>
+            </a:r>
+            <a:r>
+              <a:rPr lang="en-US" altLang="zh-CN" b="1"/>
+              <a:t>( case Expr of Switch_expr_1 )</a:t>
+            </a:r>
+          </a:p>
+          <a:p>
+            <a:endParaRPr lang="en-US" altLang="zh-CN"/>
+          </a:p>
+          <a:p>
+            <a:r>
+              <a:rPr lang="en-US" altLang="zh-CN" b="1"/>
+              <a:t>Switch_expr_1 ::= Case_expr Switch_expr_2</a:t>
+            </a:r>
+            <a:br>
+              <a:rPr lang="en-US" altLang="zh-CN" b="1"/>
+            </a:br>
+            <a:endParaRPr lang="en-US" altLang="zh-CN" b="1"/>
+          </a:p>
+          <a:p>
+            <a:r>
+              <a:rPr lang="en-US" altLang="zh-CN" b="1"/>
+              <a:t>Switch_expr_2 ::= Case_expr Switch_expr_2</a:t>
+            </a:r>
+            <a:br>
+              <a:rPr lang="en-US" altLang="zh-CN" b="1"/>
+            </a:br>
+            <a:r>
+              <a:rPr lang="en-US" altLang="zh-CN" b="1"/>
+              <a:t>               ::= $</a:t>
+            </a:r>
+          </a:p>
+          <a:p>
+            <a:endParaRPr lang="en-US" altLang="zh-CN" b="1"/>
+          </a:p>
+          <a:p>
+            <a:r>
+              <a:rPr lang="en-US" altLang="zh-CN" b="1"/>
+              <a:t>Case_expr ::= | Pattern : Expr</a:t>
+            </a:r>
+            <a:br>
+              <a:rPr lang="en-US" altLang="zh-CN" b="1"/>
+            </a:br>
+            <a:br>
+              <a:rPr lang="en-US" altLang="zh-CN" b="1"/>
+            </a:br>
+            <a:r>
+              <a:rPr lang="en-US" altLang="zh-CN" b="1"/>
+              <a:t>Pattern ::= Path_id</a:t>
+            </a:r>
+            <a:br>
+              <a:rPr lang="en-US" altLang="zh-CN" b="1"/>
+            </a:br>
+            <a:r>
+              <a:rPr lang="en-US" altLang="zh-CN" b="1"/>
+              <a:t>         ::= character</a:t>
+            </a:r>
+            <a:br>
+              <a:rPr lang="en-US" altLang="zh-CN" b="1"/>
+            </a:br>
+            <a:r>
+              <a:rPr lang="en-US" altLang="zh-CN" b="1"/>
+              <a:t>         ::= Pattern_1 integernum</a:t>
+            </a:r>
+            <a:br>
+              <a:rPr lang="en-US" altLang="zh-CN" b="1"/>
+            </a:br>
+            <a:r>
+              <a:rPr lang="en-US" altLang="zh-CN" b="1"/>
+              <a:t>         ::= Pattern_1 typed_integer</a:t>
+            </a:r>
+            <a:br>
+              <a:rPr lang="en-US" altLang="zh-CN" b="1"/>
+            </a:br>
+            <a:r>
+              <a:rPr lang="en-US" altLang="zh-CN" b="1"/>
+              <a:t>         ::= Bool_atom</a:t>
+            </a:r>
+            <a:br>
+              <a:rPr lang="en-US" altLang="zh-CN" b="1"/>
+            </a:br>
+            <a:r>
+              <a:rPr lang="en-US" altLang="zh-CN" b="1"/>
+              <a:t>         ::= _</a:t>
+            </a:r>
+            <a:br>
+              <a:rPr lang="en-US" altLang="zh-CN" b="1"/>
+            </a:br>
+            <a:br>
+              <a:rPr lang="en-US" altLang="zh-CN" b="1"/>
+            </a:br>
+            <a:r>
+              <a:rPr lang="en-US" altLang="zh-CN" b="1"/>
+              <a:t>Pattern_1 ::= -</a:t>
+            </a:r>
+            <a:br>
+              <a:rPr lang="en-US" altLang="zh-CN" b="1"/>
+            </a:br>
+            <a:r>
+              <a:rPr lang="en-US" altLang="zh-CN" b="1"/>
+              <a:t>           ::= $</a:t>
+            </a:r>
+          </a:p>
+          <a:p>
+            <a:endParaRPr lang="zh-CN" altLang="en-US"/>
+          </a:p>
+        </p:txBody>
+      </p:sp>
+      <p:pic>
+        <p:nvPicPr>
+          <p:cNvPr id="6" name="图片 5">
+            <a:extLst>
+              <a:ext uri="{FF2B5EF4-FFF2-40B4-BE49-F238E27FC236}">
+                <a16:creationId xmlns:a16="http://schemas.microsoft.com/office/drawing/2014/main" id="{E6A5D5AB-5B77-4960-9BCB-829F8B265A12}"/>
+              </a:ext>
+            </a:extLst>
+          </p:cNvPr>
+          <p:cNvPicPr>
+            <a:picLocks noChangeAspect="1"/>
+          </p:cNvPicPr>
+          <p:nvPr/>
+        </p:nvPicPr>
+        <p:blipFill>
+          <a:blip r:embed="rId2"/>
+          <a:stretch>
+            <a:fillRect/>
+          </a:stretch>
+        </p:blipFill>
+        <p:spPr>
+          <a:xfrm>
+            <a:off x="5199353" y="248575"/>
+            <a:ext cx="6350495" cy="6078866"/>
+          </a:xfrm>
+          <a:prstGeom prst="rect">
+            <a:avLst/>
+          </a:prstGeom>
+        </p:spPr>
+      </p:pic>
+    </p:spTree>
+    <p:extLst>
+      <p:ext uri="{BB962C8B-B14F-4D97-AF65-F5344CB8AC3E}">
+        <p14:creationId xmlns:p14="http://schemas.microsoft.com/office/powerpoint/2010/main" val="4145541185"/>
+      </p:ext>
+    </p:extLst>
+  </p:cSld>
+  <p:clrMapOvr>
+    <a:masterClrMapping/>
+  </p:clrMapOvr>
+</p:sld>
+</file>
+
+<file path=ppt/slides/slide24.xml><?xml version="1.0" encoding="utf-8"?>
+<p:sld xmlns:a="http://schemas.openxmlformats.org/drawingml/2006/main" xmlns:r="http://schemas.openxmlformats.org/officeDocument/2006/relationships" xmlns:p="http://schemas.openxmlformats.org/presentationml/2006/main">
+  <p:cSld>
+    <p:spTree>
+      <p:nvGrpSpPr>
+        <p:cNvPr id="1" name=""/>
+        <p:cNvGrpSpPr/>
+        <p:nvPr/>
+      </p:nvGrpSpPr>
+      <p:grpSpPr>
+        <a:xfrm>
+          <a:off x="0" y="0"/>
+          <a:ext cx="0" cy="0"/>
+          <a:chOff x="0" y="0"/>
+          <a:chExt cx="0" cy="0"/>
+        </a:xfrm>
+      </p:grpSpPr>
+      <p:sp>
+        <p:nvSpPr>
+          <p:cNvPr id="4" name="文本框 3">
+            <a:extLst>
+              <a:ext uri="{FF2B5EF4-FFF2-40B4-BE49-F238E27FC236}">
+                <a16:creationId xmlns:a16="http://schemas.microsoft.com/office/drawing/2014/main" id="{98737559-8144-46B8-93EC-F4E61B915A7E}"/>
+              </a:ext>
+            </a:extLst>
+          </p:cNvPr>
+          <p:cNvSpPr txBox="1"/>
+          <p:nvPr/>
+        </p:nvSpPr>
+        <p:spPr>
+          <a:xfrm>
+            <a:off x="301841" y="381740"/>
+            <a:ext cx="4456590" cy="1754326"/>
+          </a:xfrm>
+          <a:prstGeom prst="rect">
+            <a:avLst/>
+          </a:prstGeom>
+          <a:noFill/>
+        </p:spPr>
+        <p:txBody>
+          <a:bodyPr wrap="square" rtlCol="0">
+            <a:spAutoFit/>
+          </a:bodyPr>
+          <a:lstStyle/>
+          <a:p>
+            <a:r>
+              <a:rPr lang="en-US" altLang="zh-CN"/>
+              <a:t>Bool_expr ::= not Expr</a:t>
+            </a:r>
+            <a:br>
+              <a:rPr lang="en-US" altLang="zh-CN"/>
+            </a:br>
+            <a:r>
+              <a:rPr lang="en-US" altLang="zh-CN"/>
+              <a:t>           ::= Expr Bin_bool_op Expr</a:t>
+            </a:r>
+            <a:br>
+              <a:rPr lang="en-US" altLang="zh-CN"/>
+            </a:br>
+            <a:r>
+              <a:rPr lang="en-US" altLang="zh-CN"/>
+              <a:t>           ::= </a:t>
+            </a:r>
+            <a:r>
+              <a:rPr lang="en-US" altLang="zh-CN">
+                <a:solidFill>
+                  <a:srgbClr val="FF0000"/>
+                </a:solidFill>
+              </a:rPr>
+              <a:t># ( List )</a:t>
+            </a:r>
+          </a:p>
+          <a:p>
+            <a:r>
+              <a:rPr lang="en-US" altLang="zh-CN"/>
+              <a:t>Bin_bool_op ::= and</a:t>
+            </a:r>
+            <a:br>
+              <a:rPr lang="en-US" altLang="zh-CN"/>
+            </a:br>
+            <a:r>
+              <a:rPr lang="en-US" altLang="zh-CN"/>
+              <a:t>             ::= or</a:t>
+            </a:r>
+            <a:br>
+              <a:rPr lang="en-US" altLang="zh-CN"/>
+            </a:br>
+            <a:r>
+              <a:rPr lang="en-US" altLang="zh-CN"/>
+              <a:t>             ::= xor</a:t>
+            </a:r>
+          </a:p>
+        </p:txBody>
+      </p:sp>
+      <p:sp>
+        <p:nvSpPr>
+          <p:cNvPr id="5" name="文本框 4">
+            <a:extLst>
+              <a:ext uri="{FF2B5EF4-FFF2-40B4-BE49-F238E27FC236}">
+                <a16:creationId xmlns:a16="http://schemas.microsoft.com/office/drawing/2014/main" id="{47DA4FFE-1F1A-4686-B364-259B58267F40}"/>
+              </a:ext>
+            </a:extLst>
+          </p:cNvPr>
+          <p:cNvSpPr txBox="1"/>
+          <p:nvPr/>
+        </p:nvSpPr>
+        <p:spPr>
+          <a:xfrm>
+            <a:off x="301841" y="2551837"/>
+            <a:ext cx="9223899" cy="2031325"/>
+          </a:xfrm>
+          <a:prstGeom prst="rect">
+            <a:avLst/>
+          </a:prstGeom>
+          <a:noFill/>
+        </p:spPr>
+        <p:txBody>
+          <a:bodyPr wrap="square" rtlCol="0">
+            <a:spAutoFit/>
+          </a:bodyPr>
+          <a:lstStyle/>
+          <a:p>
+            <a:r>
+              <a:rPr lang="zh-CN" altLang="en-US" b="1"/>
+              <a:t>例</a:t>
+            </a:r>
+            <a:r>
+              <a:rPr lang="zh-CN" altLang="en-US"/>
+              <a:t>：</a:t>
+            </a:r>
+            <a:endParaRPr lang="en-US" altLang="zh-CN"/>
+          </a:p>
+          <a:p>
+            <a:r>
+              <a:rPr lang="en-US" altLang="zh-CN"/>
+              <a:t>function bool_expr(in1,in2,in3:bool;in4,in5,in6:int8) returns (out1,out2,out3:bool)</a:t>
+            </a:r>
+          </a:p>
+          <a:p>
+            <a:r>
+              <a:rPr lang="en-US" altLang="zh-CN"/>
+              <a:t>let</a:t>
+            </a:r>
+          </a:p>
+          <a:p>
+            <a:r>
+              <a:rPr lang="en-US" altLang="zh-CN"/>
+              <a:t>	out1=not in1;</a:t>
+            </a:r>
+          </a:p>
+          <a:p>
+            <a:r>
+              <a:rPr lang="en-US" altLang="zh-CN"/>
+              <a:t>	out2=in1 or in2;</a:t>
+            </a:r>
+          </a:p>
+          <a:p>
+            <a:r>
+              <a:rPr lang="en-US" altLang="zh-CN"/>
+              <a:t>	out3= #(in1,in2,in3);</a:t>
+            </a:r>
+          </a:p>
+          <a:p>
+            <a:r>
+              <a:rPr lang="en-US" altLang="zh-CN"/>
+              <a:t>tel</a:t>
+            </a:r>
+            <a:endParaRPr lang="zh-CN" altLang="en-US"/>
+          </a:p>
+        </p:txBody>
+      </p:sp>
+      <p:sp>
+        <p:nvSpPr>
+          <p:cNvPr id="6" name="文本框 5">
+            <a:extLst>
+              <a:ext uri="{FF2B5EF4-FFF2-40B4-BE49-F238E27FC236}">
+                <a16:creationId xmlns:a16="http://schemas.microsoft.com/office/drawing/2014/main" id="{E8E6F3CF-A6BC-42D6-ADAA-6518EDDCE211}"/>
+              </a:ext>
+            </a:extLst>
+          </p:cNvPr>
+          <p:cNvSpPr txBox="1"/>
+          <p:nvPr/>
+        </p:nvSpPr>
+        <p:spPr>
+          <a:xfrm>
+            <a:off x="514905" y="4725205"/>
+            <a:ext cx="9783192" cy="2308324"/>
+          </a:xfrm>
+          <a:prstGeom prst="rect">
+            <a:avLst/>
+          </a:prstGeom>
+          <a:noFill/>
+        </p:spPr>
+        <p:txBody>
+          <a:bodyPr wrap="square" rtlCol="0">
+            <a:spAutoFit/>
+          </a:bodyPr>
+          <a:lstStyle/>
+          <a:p>
+            <a:r>
+              <a:rPr lang="zh-CN" altLang="en-US" b="1"/>
+              <a:t>转化后程序</a:t>
+            </a:r>
+            <a:endParaRPr lang="en-US" altLang="zh-CN" b="1"/>
+          </a:p>
+          <a:p>
+            <a:r>
+              <a:rPr lang="en-US" altLang="zh-CN"/>
+              <a:t>void bool_expr(inC_bool_expr *inC, outC_bool_expr *outC)</a:t>
+            </a:r>
+          </a:p>
+          <a:p>
+            <a:r>
+              <a:rPr lang="en-US" altLang="zh-CN"/>
+              <a:t>{</a:t>
+            </a:r>
+          </a:p>
+          <a:p>
+            <a:r>
+              <a:rPr lang="en-US" altLang="zh-CN"/>
+              <a:t>  outC-&gt;out3 = inC-&gt;in1 + inC-&gt;in2 + inC-&gt;in3 &lt;= 1;</a:t>
+            </a:r>
+          </a:p>
+          <a:p>
+            <a:r>
+              <a:rPr lang="en-US" altLang="zh-CN"/>
+              <a:t>  outC-&gt;out2 = inC-&gt;in1 | inC-&gt;in2;</a:t>
+            </a:r>
+          </a:p>
+          <a:p>
+            <a:r>
+              <a:rPr lang="en-US" altLang="zh-CN"/>
+              <a:t>  outC-&gt;out1 = !inC-&gt;in1;</a:t>
+            </a:r>
+          </a:p>
+          <a:p>
+            <a:r>
+              <a:rPr lang="en-US" altLang="zh-CN"/>
+              <a:t>}</a:t>
+            </a:r>
+          </a:p>
+          <a:p>
+            <a:endParaRPr lang="zh-CN" altLang="en-US"/>
+          </a:p>
+        </p:txBody>
+      </p:sp>
+      <p:graphicFrame>
+        <p:nvGraphicFramePr>
+          <p:cNvPr id="9" name="表格 8">
+            <a:extLst>
+              <a:ext uri="{FF2B5EF4-FFF2-40B4-BE49-F238E27FC236}">
+                <a16:creationId xmlns:a16="http://schemas.microsoft.com/office/drawing/2014/main" id="{5EC63727-14DF-421F-83DF-A61F6B6F4AED}"/>
+              </a:ext>
+            </a:extLst>
+          </p:cNvPr>
+          <p:cNvGraphicFramePr>
+            <a:graphicFrameLocks noGrp="1"/>
+          </p:cNvGraphicFramePr>
+          <p:nvPr>
+            <p:extLst>
+              <p:ext uri="{D42A27DB-BD31-4B8C-83A1-F6EECF244321}">
+                <p14:modId xmlns:p14="http://schemas.microsoft.com/office/powerpoint/2010/main" val="609977474"/>
+              </p:ext>
+            </p:extLst>
+          </p:nvPr>
+        </p:nvGraphicFramePr>
+        <p:xfrm>
+          <a:off x="3762159" y="381740"/>
+          <a:ext cx="8128000" cy="1930400"/>
+        </p:xfrm>
+        <a:graphic>
+          <a:graphicData uri="http://schemas.openxmlformats.org/drawingml/2006/table">
+            <a:tbl>
+              <a:tblPr firstRow="1" bandRow="1">
+                <a:tableStyleId>{5C22544A-7EE6-4342-B048-85BDC9FD1C3A}</a:tableStyleId>
+              </a:tblPr>
+              <a:tblGrid>
+                <a:gridCol w="4064000">
+                  <a:extLst>
+                    <a:ext uri="{9D8B030D-6E8A-4147-A177-3AD203B41FA5}">
+                      <a16:colId xmlns:a16="http://schemas.microsoft.com/office/drawing/2014/main" val="1824040589"/>
+                    </a:ext>
+                  </a:extLst>
+                </a:gridCol>
+                <a:gridCol w="4064000">
+                  <a:extLst>
+                    <a:ext uri="{9D8B030D-6E8A-4147-A177-3AD203B41FA5}">
+                      <a16:colId xmlns:a16="http://schemas.microsoft.com/office/drawing/2014/main" val="3633570796"/>
+                    </a:ext>
+                  </a:extLst>
+                </a:gridCol>
+              </a:tblGrid>
+              <a:tr h="370840">
+                <a:tc>
+                  <a:txBody>
+                    <a:bodyPr/>
+                    <a:lstStyle/>
+                    <a:p>
+                      <a:r>
+                        <a:rPr lang="en-US" altLang="zh-CN"/>
+                        <a:t>Bool_expr ::= not Expr</a:t>
+                      </a:r>
+                      <a:endParaRPr lang="zh-CN" altLang="en-US"/>
+                    </a:p>
+                  </a:txBody>
+                  <a:tcPr/>
+                </a:tc>
+                <a:tc>
+                  <a:txBody>
+                    <a:bodyPr/>
+                    <a:lstStyle/>
+                    <a:p>
+                      <a:r>
+                        <a:rPr lang="en-US" altLang="zh-CN"/>
+                        <a:t>Bool_expr = !Expr</a:t>
+                      </a:r>
+                      <a:endParaRPr lang="zh-CN" altLang="en-US"/>
+                    </a:p>
+                  </a:txBody>
+                  <a:tcPr/>
+                </a:tc>
+                <a:extLst>
+                  <a:ext uri="{0D108BD9-81ED-4DB2-BD59-A6C34878D82A}">
+                    <a16:rowId xmlns:a16="http://schemas.microsoft.com/office/drawing/2014/main" val="1987622088"/>
+                  </a:ext>
+                </a:extLst>
+              </a:tr>
+              <a:tr h="370840">
+                <a:tc>
+                  <a:txBody>
+                    <a:bodyPr/>
+                    <a:lstStyle/>
+                    <a:p>
+                      <a:r>
+                        <a:rPr lang="en-US" altLang="zh-CN"/>
+                        <a:t>Bool_expr ::= Expr1 Bin_bool_op Expr2</a:t>
+                      </a:r>
+                    </a:p>
+                    <a:p>
+                      <a:r>
+                        <a:rPr lang="en-US" altLang="zh-CN"/>
+                        <a:t>Bin_bool_op ::= and</a:t>
+                      </a:r>
+                    </a:p>
+                    <a:p>
+                      <a:r>
+                        <a:rPr lang="en-US" altLang="zh-CN"/>
+                        <a:t>                     ::= or</a:t>
+                      </a:r>
+                    </a:p>
+                    <a:p>
+                      <a:r>
+                        <a:rPr lang="en-US" altLang="zh-CN"/>
+                        <a:t>                     ::= xor</a:t>
+                      </a:r>
+                      <a:endParaRPr lang="zh-CN" altLang="en-US"/>
+                    </a:p>
+                  </a:txBody>
+                  <a:tcPr/>
+                </a:tc>
+                <a:tc>
+                  <a:txBody>
+                    <a:bodyPr/>
+                    <a:lstStyle/>
+                    <a:p>
+                      <a:r>
+                        <a:rPr lang="en-US" altLang="zh-CN"/>
+                        <a:t>Bool_expr = Expr1 &amp; Expr2</a:t>
+                      </a:r>
+                    </a:p>
+                    <a:p>
+                      <a:r>
+                        <a:rPr lang="en-US" altLang="zh-CN"/>
+                        <a:t>Bool_expr =Expr1 | Expr2</a:t>
+                      </a:r>
+                    </a:p>
+                    <a:p>
+                      <a:r>
+                        <a:rPr lang="en-US" altLang="zh-CN"/>
+                        <a:t>Bool_expr =Expr1 ^ Expr2</a:t>
+                      </a:r>
+                      <a:endParaRPr lang="zh-CN" altLang="en-US"/>
+                    </a:p>
+                  </a:txBody>
+                  <a:tcPr/>
+                </a:tc>
+                <a:extLst>
+                  <a:ext uri="{0D108BD9-81ED-4DB2-BD59-A6C34878D82A}">
+                    <a16:rowId xmlns:a16="http://schemas.microsoft.com/office/drawing/2014/main" val="2007257606"/>
+                  </a:ext>
+                </a:extLst>
+              </a:tr>
+              <a:tr h="370840">
+                <a:tc>
+                  <a:txBody>
+                    <a:bodyPr/>
+                    <a:lstStyle/>
+                    <a:p>
+                      <a:r>
+                        <a:rPr lang="en-US" altLang="zh-CN"/>
+                        <a:t>Bool_expr ::= #(List)</a:t>
+                      </a:r>
+                      <a:endParaRPr lang="zh-CN" altLang="en-US"/>
+                    </a:p>
+                  </a:txBody>
+                  <a:tcPr/>
+                </a:tc>
+                <a:tc>
+                  <a:txBody>
+                    <a:bodyPr/>
+                    <a:lstStyle/>
+                    <a:p>
+                      <a:r>
+                        <a:rPr lang="en-US" altLang="zh-CN"/>
+                        <a:t>Bool_expr = list1 + list2 + list3 &lt;=1</a:t>
+                      </a:r>
+                      <a:endParaRPr lang="zh-CN" altLang="en-US"/>
+                    </a:p>
+                  </a:txBody>
+                  <a:tcPr/>
+                </a:tc>
+                <a:extLst>
+                  <a:ext uri="{0D108BD9-81ED-4DB2-BD59-A6C34878D82A}">
+                    <a16:rowId xmlns:a16="http://schemas.microsoft.com/office/drawing/2014/main" val="2654699128"/>
+                  </a:ext>
+                </a:extLst>
+              </a:tr>
+            </a:tbl>
+          </a:graphicData>
+        </a:graphic>
+      </p:graphicFrame>
+    </p:spTree>
+    <p:extLst>
+      <p:ext uri="{BB962C8B-B14F-4D97-AF65-F5344CB8AC3E}">
+        <p14:creationId xmlns:p14="http://schemas.microsoft.com/office/powerpoint/2010/main" val="2419142941"/>
+      </p:ext>
+    </p:extLst>
+  </p:cSld>
+  <p:clrMapOvr>
+    <a:masterClrMapping/>
+  </p:clrMapOvr>
+</p:sld>
+</file>
+
+<file path=ppt/slides/slide25.xml><?xml version="1.0" encoding="utf-8"?>
+<p:sld xmlns:a="http://schemas.openxmlformats.org/drawingml/2006/main" xmlns:r="http://schemas.openxmlformats.org/officeDocument/2006/relationships" xmlns:p="http://schemas.openxmlformats.org/presentationml/2006/main">
+  <p:cSld>
+    <p:spTree>
+      <p:nvGrpSpPr>
+        <p:cNvPr id="1" name=""/>
+        <p:cNvGrpSpPr/>
+        <p:nvPr/>
+      </p:nvGrpSpPr>
+      <p:grpSpPr>
+        <a:xfrm>
+          <a:off x="0" y="0"/>
+          <a:ext cx="0" cy="0"/>
+          <a:chOff x="0" y="0"/>
+          <a:chExt cx="0" cy="0"/>
+        </a:xfrm>
+      </p:grpSpPr>
+      <p:sp>
+        <p:nvSpPr>
+          <p:cNvPr id="4" name="文本框 3">
+            <a:extLst>
+              <a:ext uri="{FF2B5EF4-FFF2-40B4-BE49-F238E27FC236}">
+                <a16:creationId xmlns:a16="http://schemas.microsoft.com/office/drawing/2014/main" id="{04283695-8E42-4B77-9A35-2B607CF9F2C8}"/>
+              </a:ext>
+            </a:extLst>
+          </p:cNvPr>
+          <p:cNvSpPr txBox="1"/>
+          <p:nvPr/>
+        </p:nvSpPr>
+        <p:spPr>
+          <a:xfrm>
+            <a:off x="239698" y="239697"/>
+            <a:ext cx="3018408" cy="2862322"/>
+          </a:xfrm>
+          <a:prstGeom prst="rect">
+            <a:avLst/>
+          </a:prstGeom>
+          <a:noFill/>
+        </p:spPr>
+        <p:txBody>
+          <a:bodyPr wrap="square" rtlCol="0">
+            <a:spAutoFit/>
+          </a:bodyPr>
+          <a:lstStyle/>
+          <a:p>
+            <a:r>
+              <a:rPr lang="en-US" altLang="zh-CN"/>
+              <a:t>List_expr ::= ( List )</a:t>
+            </a:r>
+            <a:br>
+              <a:rPr lang="en-US" altLang="zh-CN"/>
+            </a:br>
+            <a:br>
+              <a:rPr lang="en-US" altLang="zh-CN"/>
+            </a:br>
+            <a:r>
+              <a:rPr lang="en-US" altLang="zh-CN"/>
+              <a:t>List ::= List_1</a:t>
+            </a:r>
+            <a:br>
+              <a:rPr lang="en-US" altLang="zh-CN"/>
+            </a:br>
+            <a:r>
+              <a:rPr lang="en-US" altLang="zh-CN"/>
+              <a:t>      ::= $</a:t>
+            </a:r>
+            <a:br>
+              <a:rPr lang="en-US" altLang="zh-CN"/>
+            </a:br>
+            <a:br>
+              <a:rPr lang="en-US" altLang="zh-CN"/>
+            </a:br>
+            <a:r>
+              <a:rPr lang="en-US" altLang="zh-CN"/>
+              <a:t>List_1 ::= Expr List_2</a:t>
+            </a:r>
+            <a:br>
+              <a:rPr lang="en-US" altLang="zh-CN"/>
+            </a:br>
+            <a:br>
+              <a:rPr lang="en-US" altLang="zh-CN"/>
+            </a:br>
+            <a:r>
+              <a:rPr lang="en-US" altLang="zh-CN"/>
+              <a:t>List_2 ::= , Expr List_2</a:t>
+            </a:r>
+            <a:br>
+              <a:rPr lang="en-US" altLang="zh-CN"/>
+            </a:br>
+            <a:r>
+              <a:rPr lang="en-US" altLang="zh-CN"/>
+              <a:t>        ::= $</a:t>
+            </a:r>
+          </a:p>
+          <a:p>
+            <a:endParaRPr lang="zh-CN" altLang="en-US"/>
+          </a:p>
+        </p:txBody>
+      </p:sp>
+      <p:sp>
+        <p:nvSpPr>
+          <p:cNvPr id="5" name="文本框 4">
+            <a:extLst>
+              <a:ext uri="{FF2B5EF4-FFF2-40B4-BE49-F238E27FC236}">
+                <a16:creationId xmlns:a16="http://schemas.microsoft.com/office/drawing/2014/main" id="{828B268F-54BA-453D-8B59-690A30B7AD14}"/>
+              </a:ext>
+            </a:extLst>
+          </p:cNvPr>
+          <p:cNvSpPr txBox="1"/>
+          <p:nvPr/>
+        </p:nvSpPr>
+        <p:spPr>
+          <a:xfrm>
+            <a:off x="3409025" y="239697"/>
+            <a:ext cx="7457243" cy="3416320"/>
+          </a:xfrm>
+          <a:prstGeom prst="rect">
+            <a:avLst/>
+          </a:prstGeom>
+          <a:noFill/>
+        </p:spPr>
+        <p:txBody>
+          <a:bodyPr wrap="square" rtlCol="0">
+            <a:spAutoFit/>
+          </a:bodyPr>
+          <a:lstStyle/>
+          <a:p>
+            <a:r>
+              <a:rPr lang="zh-CN" altLang="en-US" b="1"/>
+              <a:t>例</a:t>
+            </a:r>
+            <a:r>
+              <a:rPr lang="zh-CN" altLang="en-US"/>
+              <a:t>：</a:t>
+            </a:r>
+            <a:endParaRPr lang="en-US" altLang="zh-CN"/>
+          </a:p>
+          <a:p>
+            <a:r>
+              <a:rPr lang="en-US" altLang="zh-CN"/>
+              <a:t>node pre_operator(input1,input2:float64) returns(output1,output2:float64)</a:t>
+            </a:r>
+          </a:p>
+          <a:p>
+            <a:r>
+              <a:rPr lang="en-US" altLang="zh-CN"/>
+              <a:t>var</a:t>
+            </a:r>
+          </a:p>
+          <a:p>
+            <a:r>
+              <a:rPr lang="en-US" altLang="zh-CN"/>
+              <a:t>tmp1:float64;</a:t>
+            </a:r>
+          </a:p>
+          <a:p>
+            <a:r>
+              <a:rPr lang="en-US" altLang="zh-CN"/>
+              <a:t>let</a:t>
+            </a:r>
+          </a:p>
+          <a:p>
+            <a:r>
+              <a:rPr lang="en-US" altLang="zh-CN"/>
+              <a:t>	tmp1=fby(output1;2;output2);</a:t>
+            </a:r>
+          </a:p>
+          <a:p>
+            <a:r>
+              <a:rPr lang="en-US" altLang="zh-CN"/>
+              <a:t>	output1,output2=(1,2)-&gt;pre(tmp1+input1,input2);</a:t>
+            </a:r>
+          </a:p>
+          <a:p>
+            <a:r>
+              <a:rPr lang="en-US" altLang="zh-CN"/>
+              <a:t>tel</a:t>
+            </a:r>
+          </a:p>
+          <a:p>
+            <a:endParaRPr lang="en-US" altLang="zh-CN"/>
+          </a:p>
+          <a:p>
+            <a:r>
+              <a:rPr lang="zh-CN" altLang="en-US"/>
+              <a:t>可以看成</a:t>
+            </a:r>
+            <a:endParaRPr lang="en-US" altLang="zh-CN"/>
+          </a:p>
+          <a:p>
+            <a:r>
+              <a:rPr lang="en-US" altLang="zh-CN"/>
+              <a:t>output1=1-&gt;pre(tmp1+input1);</a:t>
+            </a:r>
+          </a:p>
+          <a:p>
+            <a:r>
+              <a:rPr lang="en-US" altLang="zh-CN"/>
+              <a:t>Output2=2-&gt;pre(input2);</a:t>
+            </a:r>
+            <a:endParaRPr lang="zh-CN" altLang="en-US"/>
+          </a:p>
+        </p:txBody>
+      </p:sp>
+    </p:spTree>
+    <p:extLst>
+      <p:ext uri="{BB962C8B-B14F-4D97-AF65-F5344CB8AC3E}">
+        <p14:creationId xmlns:p14="http://schemas.microsoft.com/office/powerpoint/2010/main" val="1807055511"/>
+      </p:ext>
+    </p:extLst>
+  </p:cSld>
+  <p:clrMapOvr>
+    <a:masterClrMapping/>
+  </p:clrMapOvr>
+</p:sld>
+</file>
+
+<file path=ppt/slides/slide26.xml><?xml version="1.0" encoding="utf-8"?>
+<p:sld xmlns:a="http://schemas.openxmlformats.org/drawingml/2006/main" xmlns:r="http://schemas.openxmlformats.org/officeDocument/2006/relationships" xmlns:p="http://schemas.openxmlformats.org/presentationml/2006/main">
+  <p:cSld>
+    <p:spTree>
+      <p:nvGrpSpPr>
+        <p:cNvPr id="1" name=""/>
+        <p:cNvGrpSpPr/>
+        <p:nvPr/>
+      </p:nvGrpSpPr>
+      <p:grpSpPr>
+        <a:xfrm>
+          <a:off x="0" y="0"/>
+          <a:ext cx="0" cy="0"/>
+          <a:chOff x="0" y="0"/>
+          <a:chExt cx="0" cy="0"/>
+        </a:xfrm>
+      </p:grpSpPr>
+      <p:sp>
+        <p:nvSpPr>
+          <p:cNvPr id="5" name="文本框 4">
+            <a:extLst>
+              <a:ext uri="{FF2B5EF4-FFF2-40B4-BE49-F238E27FC236}">
+                <a16:creationId xmlns:a16="http://schemas.microsoft.com/office/drawing/2014/main" id="{7B98ECB6-C4E1-4214-A89F-56CA2E1117AC}"/>
+              </a:ext>
+            </a:extLst>
+          </p:cNvPr>
+          <p:cNvSpPr txBox="1"/>
+          <p:nvPr/>
+        </p:nvSpPr>
+        <p:spPr>
+          <a:xfrm>
+            <a:off x="106531" y="346638"/>
+            <a:ext cx="6276513" cy="4247317"/>
+          </a:xfrm>
+          <a:prstGeom prst="rect">
+            <a:avLst/>
+          </a:prstGeom>
+          <a:noFill/>
+        </p:spPr>
+        <p:txBody>
+          <a:bodyPr wrap="square" rtlCol="0">
+            <a:spAutoFit/>
+          </a:bodyPr>
+          <a:lstStyle/>
+          <a:p>
+            <a:r>
+              <a:rPr lang="en-US" altLang="zh-CN"/>
+              <a:t>Clocked_block ::= activate Id_zero_or_one If_block</a:t>
+            </a:r>
+            <a:br>
+              <a:rPr lang="en-US" altLang="zh-CN"/>
+            </a:br>
+            <a:r>
+              <a:rPr lang="en-US" altLang="zh-CN"/>
+              <a:t>               ::= activate Id_zero_or_one Match_block</a:t>
+            </a:r>
+            <a:br>
+              <a:rPr lang="en-US" altLang="zh-CN"/>
+            </a:br>
+            <a:br>
+              <a:rPr lang="en-US" altLang="zh-CN"/>
+            </a:br>
+            <a:r>
+              <a:rPr lang="en-US" altLang="zh-CN" b="1"/>
+              <a:t>If_block ::= if Expr then If_block_1 else If_block_1</a:t>
+            </a:r>
+            <a:br>
+              <a:rPr lang="en-US" altLang="zh-CN" b="1"/>
+            </a:br>
+            <a:br>
+              <a:rPr lang="en-US" altLang="zh-CN" b="1"/>
+            </a:br>
+            <a:r>
+              <a:rPr lang="en-US" altLang="zh-CN" b="1"/>
+              <a:t>If_block_1 ::= Data_def</a:t>
+            </a:r>
+            <a:br>
+              <a:rPr lang="en-US" altLang="zh-CN" b="1"/>
+            </a:br>
+            <a:r>
+              <a:rPr lang="en-US" altLang="zh-CN" b="1"/>
+              <a:t>            ::= If_block</a:t>
+            </a:r>
+            <a:br>
+              <a:rPr lang="en-US" altLang="zh-CN"/>
+            </a:br>
+            <a:br>
+              <a:rPr lang="en-US" altLang="zh-CN"/>
+            </a:br>
+            <a:r>
+              <a:rPr lang="en-US" altLang="zh-CN"/>
+              <a:t>Match_block ::= when Expr match Match_block_1</a:t>
+            </a:r>
+            <a:br>
+              <a:rPr lang="en-US" altLang="zh-CN"/>
+            </a:br>
+            <a:br>
+              <a:rPr lang="en-US" altLang="zh-CN"/>
+            </a:br>
+            <a:r>
+              <a:rPr lang="en-US" altLang="zh-CN"/>
+              <a:t>Match_block_1 ::= | Pattern : Data_def Match_block_2</a:t>
+            </a:r>
+            <a:br>
+              <a:rPr lang="en-US" altLang="zh-CN"/>
+            </a:br>
+            <a:br>
+              <a:rPr lang="en-US" altLang="zh-CN"/>
+            </a:br>
+            <a:r>
+              <a:rPr lang="en-US" altLang="zh-CN"/>
+              <a:t>Match_block_2 ::= | Pattern : Data_def Match_block_2</a:t>
+            </a:r>
+            <a:br>
+              <a:rPr lang="en-US" altLang="zh-CN"/>
+            </a:br>
+            <a:r>
+              <a:rPr lang="en-US" altLang="zh-CN"/>
+              <a:t>              ::= $</a:t>
+            </a:r>
+          </a:p>
+          <a:p>
+            <a:endParaRPr lang="zh-CN" altLang="en-US"/>
+          </a:p>
+        </p:txBody>
+      </p:sp>
+      <p:pic>
+        <p:nvPicPr>
+          <p:cNvPr id="9" name="图片 8">
+            <a:extLst>
+              <a:ext uri="{FF2B5EF4-FFF2-40B4-BE49-F238E27FC236}">
+                <a16:creationId xmlns:a16="http://schemas.microsoft.com/office/drawing/2014/main" id="{A37D8CBB-E5BC-49C7-9C67-2E946B6AB92B}"/>
+              </a:ext>
+            </a:extLst>
+          </p:cNvPr>
+          <p:cNvPicPr>
+            <a:picLocks noChangeAspect="1"/>
+          </p:cNvPicPr>
+          <p:nvPr/>
+        </p:nvPicPr>
+        <p:blipFill>
+          <a:blip r:embed="rId2"/>
+          <a:stretch>
+            <a:fillRect/>
+          </a:stretch>
+        </p:blipFill>
+        <p:spPr>
+          <a:xfrm>
+            <a:off x="219123" y="4649561"/>
+            <a:ext cx="5321618" cy="1458275"/>
+          </a:xfrm>
+          <a:prstGeom prst="rect">
+            <a:avLst/>
+          </a:prstGeom>
+        </p:spPr>
+      </p:pic>
+      <p:pic>
+        <p:nvPicPr>
+          <p:cNvPr id="11" name="图片 10">
+            <a:extLst>
+              <a:ext uri="{FF2B5EF4-FFF2-40B4-BE49-F238E27FC236}">
+                <a16:creationId xmlns:a16="http://schemas.microsoft.com/office/drawing/2014/main" id="{1414A8AF-0C97-4163-AFB8-6A15E3D06F9D}"/>
+              </a:ext>
+            </a:extLst>
+          </p:cNvPr>
+          <p:cNvPicPr>
+            <a:picLocks noChangeAspect="1"/>
+          </p:cNvPicPr>
+          <p:nvPr/>
+        </p:nvPicPr>
+        <p:blipFill>
+          <a:blip r:embed="rId3"/>
+          <a:stretch>
+            <a:fillRect/>
+          </a:stretch>
+        </p:blipFill>
+        <p:spPr>
+          <a:xfrm>
+            <a:off x="5795934" y="951948"/>
+            <a:ext cx="5975639" cy="1430189"/>
+          </a:xfrm>
+          <a:prstGeom prst="rect">
+            <a:avLst/>
+          </a:prstGeom>
+        </p:spPr>
+      </p:pic>
+      <p:pic>
+        <p:nvPicPr>
+          <p:cNvPr id="12" name="图片 11">
+            <a:extLst>
+              <a:ext uri="{FF2B5EF4-FFF2-40B4-BE49-F238E27FC236}">
+                <a16:creationId xmlns:a16="http://schemas.microsoft.com/office/drawing/2014/main" id="{FA3703F9-C18C-44BF-A8FA-2B69752C04F5}"/>
+              </a:ext>
+            </a:extLst>
+          </p:cNvPr>
+          <p:cNvPicPr>
+            <a:picLocks noChangeAspect="1"/>
+          </p:cNvPicPr>
+          <p:nvPr/>
+        </p:nvPicPr>
+        <p:blipFill>
+          <a:blip r:embed="rId4"/>
+          <a:stretch>
+            <a:fillRect/>
+          </a:stretch>
+        </p:blipFill>
+        <p:spPr>
+          <a:xfrm>
+            <a:off x="5754852" y="2721070"/>
+            <a:ext cx="6016721" cy="3745769"/>
+          </a:xfrm>
+          <a:prstGeom prst="rect">
+            <a:avLst/>
+          </a:prstGeom>
+        </p:spPr>
+      </p:pic>
+      <p:sp>
+        <p:nvSpPr>
+          <p:cNvPr id="13" name="文本框 12">
+            <a:extLst>
+              <a:ext uri="{FF2B5EF4-FFF2-40B4-BE49-F238E27FC236}">
+                <a16:creationId xmlns:a16="http://schemas.microsoft.com/office/drawing/2014/main" id="{5BF76EB8-026F-4510-8012-1244713BFC76}"/>
+              </a:ext>
+            </a:extLst>
+          </p:cNvPr>
+          <p:cNvSpPr txBox="1"/>
+          <p:nvPr/>
+        </p:nvSpPr>
+        <p:spPr>
+          <a:xfrm>
+            <a:off x="106531" y="79899"/>
+            <a:ext cx="2346524" cy="369332"/>
+          </a:xfrm>
+          <a:prstGeom prst="rect">
+            <a:avLst/>
+          </a:prstGeom>
+          <a:noFill/>
+        </p:spPr>
+        <p:txBody>
+          <a:bodyPr wrap="square" rtlCol="0">
+            <a:spAutoFit/>
+          </a:bodyPr>
+          <a:lstStyle/>
+          <a:p>
+            <a:r>
+              <a:rPr lang="zh-CN" altLang="en-US" b="1"/>
+              <a:t>文法</a:t>
+            </a:r>
+          </a:p>
+        </p:txBody>
+      </p:sp>
+      <p:sp>
+        <p:nvSpPr>
+          <p:cNvPr id="14" name="文本框 13">
+            <a:extLst>
+              <a:ext uri="{FF2B5EF4-FFF2-40B4-BE49-F238E27FC236}">
+                <a16:creationId xmlns:a16="http://schemas.microsoft.com/office/drawing/2014/main" id="{A3397947-2890-4A97-B41B-2B9B7CA2581C}"/>
+              </a:ext>
+            </a:extLst>
+          </p:cNvPr>
+          <p:cNvSpPr txBox="1"/>
+          <p:nvPr/>
+        </p:nvSpPr>
+        <p:spPr>
+          <a:xfrm>
+            <a:off x="219123" y="4279039"/>
+            <a:ext cx="2346524" cy="369332"/>
+          </a:xfrm>
+          <a:prstGeom prst="rect">
+            <a:avLst/>
+          </a:prstGeom>
+          <a:noFill/>
+        </p:spPr>
+        <p:txBody>
+          <a:bodyPr wrap="square" rtlCol="0">
+            <a:spAutoFit/>
+          </a:bodyPr>
+          <a:lstStyle/>
+          <a:p>
+            <a:r>
+              <a:rPr lang="en-US" altLang="zh-CN" b="1"/>
+              <a:t>Scade</a:t>
+            </a:r>
+            <a:r>
+              <a:rPr lang="zh-CN" altLang="en-US" b="1"/>
+              <a:t>程序</a:t>
+            </a:r>
+          </a:p>
+        </p:txBody>
+      </p:sp>
+      <p:sp>
+        <p:nvSpPr>
+          <p:cNvPr id="15" name="文本框 14">
+            <a:extLst>
+              <a:ext uri="{FF2B5EF4-FFF2-40B4-BE49-F238E27FC236}">
+                <a16:creationId xmlns:a16="http://schemas.microsoft.com/office/drawing/2014/main" id="{FBC90992-2446-4F50-B188-6E0447159C31}"/>
+              </a:ext>
+            </a:extLst>
+          </p:cNvPr>
+          <p:cNvSpPr txBox="1"/>
+          <p:nvPr/>
+        </p:nvSpPr>
+        <p:spPr>
+          <a:xfrm>
+            <a:off x="5795934" y="449247"/>
+            <a:ext cx="2346524" cy="369332"/>
+          </a:xfrm>
+          <a:prstGeom prst="rect">
+            <a:avLst/>
+          </a:prstGeom>
+          <a:noFill/>
+        </p:spPr>
+        <p:txBody>
+          <a:bodyPr wrap="square" rtlCol="0">
+            <a:spAutoFit/>
+          </a:bodyPr>
+          <a:lstStyle/>
+          <a:p>
+            <a:r>
+              <a:rPr lang="zh-CN" altLang="en-US" b="1"/>
+              <a:t>转化后的</a:t>
+            </a:r>
+            <a:r>
+              <a:rPr lang="en-US" altLang="zh-CN" b="1"/>
+              <a:t>C</a:t>
+            </a:r>
+            <a:r>
+              <a:rPr lang="zh-CN" altLang="en-US" b="1"/>
+              <a:t>程序</a:t>
+            </a:r>
+          </a:p>
+        </p:txBody>
+      </p:sp>
+    </p:spTree>
+    <p:extLst>
+      <p:ext uri="{BB962C8B-B14F-4D97-AF65-F5344CB8AC3E}">
+        <p14:creationId xmlns:p14="http://schemas.microsoft.com/office/powerpoint/2010/main" val="2485094055"/>
+      </p:ext>
+    </p:extLst>
+  </p:cSld>
+  <p:clrMapOvr>
+    <a:masterClrMapping/>
+  </p:clrMapOvr>
+</p:sld>
+</file>
+
+<file path=ppt/slides/slide27.xml><?xml version="1.0" encoding="utf-8"?>
+<p:sld xmlns:a="http://schemas.openxmlformats.org/drawingml/2006/main" xmlns:r="http://schemas.openxmlformats.org/officeDocument/2006/relationships" xmlns:p="http://schemas.openxmlformats.org/presentationml/2006/main">
+  <p:cSld>
+    <p:spTree>
+      <p:nvGrpSpPr>
+        <p:cNvPr id="1" name=""/>
+        <p:cNvGrpSpPr/>
+        <p:nvPr/>
+      </p:nvGrpSpPr>
+      <p:grpSpPr>
+        <a:xfrm>
+          <a:off x="0" y="0"/>
+          <a:ext cx="0" cy="0"/>
+          <a:chOff x="0" y="0"/>
+          <a:chExt cx="0" cy="0"/>
+        </a:xfrm>
+      </p:grpSpPr>
+      <p:pic>
+        <p:nvPicPr>
+          <p:cNvPr id="4" name="图片 3">
+            <a:extLst>
+              <a:ext uri="{FF2B5EF4-FFF2-40B4-BE49-F238E27FC236}">
+                <a16:creationId xmlns:a16="http://schemas.microsoft.com/office/drawing/2014/main" id="{A5991437-D9A9-4826-815A-624F2451FED5}"/>
+              </a:ext>
+            </a:extLst>
+          </p:cNvPr>
+          <p:cNvPicPr>
+            <a:picLocks noChangeAspect="1"/>
+          </p:cNvPicPr>
+          <p:nvPr/>
+        </p:nvPicPr>
+        <p:blipFill>
+          <a:blip r:embed="rId2"/>
+          <a:stretch>
+            <a:fillRect/>
+          </a:stretch>
+        </p:blipFill>
+        <p:spPr>
+          <a:xfrm>
+            <a:off x="182487" y="428336"/>
+            <a:ext cx="4197914" cy="261716"/>
+          </a:xfrm>
+          <a:prstGeom prst="rect">
+            <a:avLst/>
+          </a:prstGeom>
+        </p:spPr>
+      </p:pic>
+      <p:pic>
+        <p:nvPicPr>
+          <p:cNvPr id="5" name="图片 4">
+            <a:extLst>
+              <a:ext uri="{FF2B5EF4-FFF2-40B4-BE49-F238E27FC236}">
+                <a16:creationId xmlns:a16="http://schemas.microsoft.com/office/drawing/2014/main" id="{9945B90D-1525-4DC1-AC6B-A5D449FDD185}"/>
+              </a:ext>
+            </a:extLst>
+          </p:cNvPr>
+          <p:cNvPicPr>
+            <a:picLocks noChangeAspect="1"/>
+          </p:cNvPicPr>
+          <p:nvPr/>
+        </p:nvPicPr>
+        <p:blipFill>
+          <a:blip r:embed="rId3"/>
+          <a:stretch>
+            <a:fillRect/>
+          </a:stretch>
+        </p:blipFill>
+        <p:spPr>
+          <a:xfrm>
+            <a:off x="182487" y="820811"/>
+            <a:ext cx="6235562" cy="2277496"/>
+          </a:xfrm>
+          <a:prstGeom prst="rect">
+            <a:avLst/>
+          </a:prstGeom>
+        </p:spPr>
+      </p:pic>
+      <p:pic>
+        <p:nvPicPr>
+          <p:cNvPr id="6" name="图片 5">
+            <a:extLst>
+              <a:ext uri="{FF2B5EF4-FFF2-40B4-BE49-F238E27FC236}">
+                <a16:creationId xmlns:a16="http://schemas.microsoft.com/office/drawing/2014/main" id="{E3087A95-3BEE-4981-B8A7-6B103C34DFB1}"/>
+              </a:ext>
+            </a:extLst>
+          </p:cNvPr>
+          <p:cNvPicPr>
+            <a:picLocks noChangeAspect="1"/>
+          </p:cNvPicPr>
+          <p:nvPr/>
+        </p:nvPicPr>
+        <p:blipFill>
+          <a:blip r:embed="rId4"/>
+          <a:stretch>
+            <a:fillRect/>
+          </a:stretch>
+        </p:blipFill>
+        <p:spPr>
+          <a:xfrm>
+            <a:off x="6380086" y="297577"/>
+            <a:ext cx="5174428" cy="5782509"/>
+          </a:xfrm>
+          <a:prstGeom prst="rect">
+            <a:avLst/>
+          </a:prstGeom>
+        </p:spPr>
+      </p:pic>
+      <p:pic>
+        <p:nvPicPr>
+          <p:cNvPr id="7" name="图片 6">
+            <a:extLst>
+              <a:ext uri="{FF2B5EF4-FFF2-40B4-BE49-F238E27FC236}">
+                <a16:creationId xmlns:a16="http://schemas.microsoft.com/office/drawing/2014/main" id="{7AE7753A-7A4A-4331-8CC9-F4B640F9B695}"/>
+              </a:ext>
+            </a:extLst>
+          </p:cNvPr>
+          <p:cNvPicPr>
+            <a:picLocks noChangeAspect="1"/>
+          </p:cNvPicPr>
+          <p:nvPr/>
+        </p:nvPicPr>
+        <p:blipFill>
+          <a:blip r:embed="rId5"/>
+          <a:stretch>
+            <a:fillRect/>
+          </a:stretch>
+        </p:blipFill>
+        <p:spPr>
+          <a:xfrm>
+            <a:off x="871648" y="3379495"/>
+            <a:ext cx="3796107" cy="3180928"/>
+          </a:xfrm>
+          <a:prstGeom prst="rect">
+            <a:avLst/>
+          </a:prstGeom>
+        </p:spPr>
+      </p:pic>
+      <p:sp>
+        <p:nvSpPr>
+          <p:cNvPr id="8" name="文本框 7">
+            <a:extLst>
+              <a:ext uri="{FF2B5EF4-FFF2-40B4-BE49-F238E27FC236}">
+                <a16:creationId xmlns:a16="http://schemas.microsoft.com/office/drawing/2014/main" id="{E6E23527-0701-4497-B88C-451987BF1C0D}"/>
+              </a:ext>
+            </a:extLst>
+          </p:cNvPr>
+          <p:cNvSpPr txBox="1"/>
+          <p:nvPr/>
+        </p:nvSpPr>
+        <p:spPr>
+          <a:xfrm>
+            <a:off x="677662" y="2972254"/>
+            <a:ext cx="2752078" cy="369332"/>
+          </a:xfrm>
+          <a:prstGeom prst="rect">
+            <a:avLst/>
+          </a:prstGeom>
+          <a:noFill/>
+        </p:spPr>
+        <p:txBody>
+          <a:bodyPr wrap="square" rtlCol="0">
+            <a:spAutoFit/>
+          </a:bodyPr>
+          <a:lstStyle/>
+          <a:p>
+            <a:r>
+              <a:rPr lang="zh-CN" altLang="en-US" b="1"/>
+              <a:t>转化后的</a:t>
+            </a:r>
+            <a:r>
+              <a:rPr lang="en-US" altLang="zh-CN" b="1"/>
+              <a:t>C</a:t>
+            </a:r>
+            <a:r>
+              <a:rPr lang="zh-CN" altLang="en-US" b="1"/>
+              <a:t>程序</a:t>
+            </a:r>
+          </a:p>
+        </p:txBody>
+      </p:sp>
+      <p:sp>
+        <p:nvSpPr>
+          <p:cNvPr id="9" name="文本框 8">
+            <a:extLst>
+              <a:ext uri="{FF2B5EF4-FFF2-40B4-BE49-F238E27FC236}">
+                <a16:creationId xmlns:a16="http://schemas.microsoft.com/office/drawing/2014/main" id="{09308443-9B7D-4DED-B8AA-CAAE01BB4610}"/>
+              </a:ext>
+            </a:extLst>
+          </p:cNvPr>
+          <p:cNvSpPr txBox="1"/>
+          <p:nvPr/>
+        </p:nvSpPr>
+        <p:spPr>
+          <a:xfrm>
+            <a:off x="182487" y="112911"/>
+            <a:ext cx="2596224" cy="369332"/>
+          </a:xfrm>
+          <a:prstGeom prst="rect">
+            <a:avLst/>
+          </a:prstGeom>
+          <a:noFill/>
+        </p:spPr>
+        <p:txBody>
+          <a:bodyPr wrap="square" rtlCol="0">
+            <a:spAutoFit/>
+          </a:bodyPr>
+          <a:lstStyle/>
+          <a:p>
+            <a:r>
+              <a:rPr lang="en-US" altLang="zh-CN" b="1"/>
+              <a:t>Scade</a:t>
+            </a:r>
+            <a:r>
+              <a:rPr lang="zh-CN" altLang="en-US" b="1"/>
+              <a:t>程序</a:t>
+            </a:r>
+          </a:p>
+        </p:txBody>
+      </p:sp>
+    </p:spTree>
+    <p:extLst>
+      <p:ext uri="{BB962C8B-B14F-4D97-AF65-F5344CB8AC3E}">
+        <p14:creationId xmlns:p14="http://schemas.microsoft.com/office/powerpoint/2010/main" val="1280610318"/>
       </p:ext>
     </p:extLst>
   </p:cSld>

--- a/docs/scade.pptx
+++ b/docs/scade.pptx
@@ -5,7 +5,7 @@
     <p:sldMasterId id="2147483648" r:id="rId1"/>
   </p:sldMasterIdLst>
   <p:notesMasterIdLst>
-    <p:notesMasterId r:id="rId29"/>
+    <p:notesMasterId r:id="rId30"/>
   </p:notesMasterIdLst>
   <p:sldIdLst>
     <p:sldId id="256" r:id="rId2"/>
@@ -33,8 +33,9 @@
     <p:sldId id="281" r:id="rId24"/>
     <p:sldId id="280" r:id="rId25"/>
     <p:sldId id="278" r:id="rId26"/>
-    <p:sldId id="279" r:id="rId27"/>
-    <p:sldId id="282" r:id="rId28"/>
+    <p:sldId id="284" r:id="rId27"/>
+    <p:sldId id="279" r:id="rId28"/>
+    <p:sldId id="282" r:id="rId29"/>
   </p:sldIdLst>
   <p:sldSz cx="12192000" cy="6858000"/>
   <p:notesSz cx="6858000" cy="9144000"/>
@@ -223,7 +224,7 @@
           <a:p>
             <a:fld id="{3744C8BF-56B8-46D4-ADA5-A0AF811348DF}" type="datetimeFigureOut">
               <a:rPr lang="zh-CN" altLang="en-US" smtClean="0"/>
-              <a:t>2023/10/30</a:t>
+              <a:t>2023/11/6</a:t>
             </a:fld>
             <a:endParaRPr lang="zh-CN" altLang="en-US"/>
           </a:p>
@@ -721,7 +722,7 @@
           <a:p>
             <a:fld id="{C61D74A4-027F-4A2B-8B92-D0C194C50910}" type="datetimeFigureOut">
               <a:rPr lang="zh-CN" altLang="en-US" smtClean="0"/>
-              <a:t>2023/10/30</a:t>
+              <a:t>2023/11/6</a:t>
             </a:fld>
             <a:endParaRPr lang="zh-CN" altLang="en-US"/>
           </a:p>
@@ -919,7 +920,7 @@
           <a:p>
             <a:fld id="{C61D74A4-027F-4A2B-8B92-D0C194C50910}" type="datetimeFigureOut">
               <a:rPr lang="zh-CN" altLang="en-US" smtClean="0"/>
-              <a:t>2023/10/30</a:t>
+              <a:t>2023/11/6</a:t>
             </a:fld>
             <a:endParaRPr lang="zh-CN" altLang="en-US"/>
           </a:p>
@@ -1127,7 +1128,7 @@
           <a:p>
             <a:fld id="{C61D74A4-027F-4A2B-8B92-D0C194C50910}" type="datetimeFigureOut">
               <a:rPr lang="zh-CN" altLang="en-US" smtClean="0"/>
-              <a:t>2023/10/30</a:t>
+              <a:t>2023/11/6</a:t>
             </a:fld>
             <a:endParaRPr lang="zh-CN" altLang="en-US"/>
           </a:p>
@@ -1325,7 +1326,7 @@
           <a:p>
             <a:fld id="{C61D74A4-027F-4A2B-8B92-D0C194C50910}" type="datetimeFigureOut">
               <a:rPr lang="zh-CN" altLang="en-US" smtClean="0"/>
-              <a:t>2023/10/30</a:t>
+              <a:t>2023/11/6</a:t>
             </a:fld>
             <a:endParaRPr lang="zh-CN" altLang="en-US"/>
           </a:p>
@@ -1600,7 +1601,7 @@
           <a:p>
             <a:fld id="{C61D74A4-027F-4A2B-8B92-D0C194C50910}" type="datetimeFigureOut">
               <a:rPr lang="zh-CN" altLang="en-US" smtClean="0"/>
-              <a:t>2023/10/30</a:t>
+              <a:t>2023/11/6</a:t>
             </a:fld>
             <a:endParaRPr lang="zh-CN" altLang="en-US"/>
           </a:p>
@@ -1865,7 +1866,7 @@
           <a:p>
             <a:fld id="{C61D74A4-027F-4A2B-8B92-D0C194C50910}" type="datetimeFigureOut">
               <a:rPr lang="zh-CN" altLang="en-US" smtClean="0"/>
-              <a:t>2023/10/30</a:t>
+              <a:t>2023/11/6</a:t>
             </a:fld>
             <a:endParaRPr lang="zh-CN" altLang="en-US"/>
           </a:p>
@@ -2277,7 +2278,7 @@
           <a:p>
             <a:fld id="{C61D74A4-027F-4A2B-8B92-D0C194C50910}" type="datetimeFigureOut">
               <a:rPr lang="zh-CN" altLang="en-US" smtClean="0"/>
-              <a:t>2023/10/30</a:t>
+              <a:t>2023/11/6</a:t>
             </a:fld>
             <a:endParaRPr lang="zh-CN" altLang="en-US"/>
           </a:p>
@@ -2418,7 +2419,7 @@
           <a:p>
             <a:fld id="{C61D74A4-027F-4A2B-8B92-D0C194C50910}" type="datetimeFigureOut">
               <a:rPr lang="zh-CN" altLang="en-US" smtClean="0"/>
-              <a:t>2023/10/30</a:t>
+              <a:t>2023/11/6</a:t>
             </a:fld>
             <a:endParaRPr lang="zh-CN" altLang="en-US"/>
           </a:p>
@@ -2531,7 +2532,7 @@
           <a:p>
             <a:fld id="{C61D74A4-027F-4A2B-8B92-D0C194C50910}" type="datetimeFigureOut">
               <a:rPr lang="zh-CN" altLang="en-US" smtClean="0"/>
-              <a:t>2023/10/30</a:t>
+              <a:t>2023/11/6</a:t>
             </a:fld>
             <a:endParaRPr lang="zh-CN" altLang="en-US"/>
           </a:p>
@@ -2842,7 +2843,7 @@
           <a:p>
             <a:fld id="{C61D74A4-027F-4A2B-8B92-D0C194C50910}" type="datetimeFigureOut">
               <a:rPr lang="zh-CN" altLang="en-US" smtClean="0"/>
-              <a:t>2023/10/30</a:t>
+              <a:t>2023/11/6</a:t>
             </a:fld>
             <a:endParaRPr lang="zh-CN" altLang="en-US"/>
           </a:p>
@@ -3130,7 +3131,7 @@
           <a:p>
             <a:fld id="{C61D74A4-027F-4A2B-8B92-D0C194C50910}" type="datetimeFigureOut">
               <a:rPr lang="zh-CN" altLang="en-US" smtClean="0"/>
-              <a:t>2023/10/30</a:t>
+              <a:t>2023/11/6</a:t>
             </a:fld>
             <a:endParaRPr lang="zh-CN" altLang="en-US"/>
           </a:p>
@@ -3371,7 +3372,7 @@
           <a:p>
             <a:fld id="{C61D74A4-027F-4A2B-8B92-D0C194C50910}" type="datetimeFigureOut">
               <a:rPr lang="zh-CN" altLang="en-US" smtClean="0"/>
-              <a:t>2023/10/30</a:t>
+              <a:t>2023/11/6</a:t>
             </a:fld>
             <a:endParaRPr lang="zh-CN" altLang="en-US"/>
           </a:p>
@@ -7397,111 +7398,36 @@
           </a:p>
         </p:txBody>
       </p:sp>
-      <p:sp>
-        <p:nvSpPr>
-          <p:cNvPr id="5" name="文本框 4">
-            <a:extLst>
-              <a:ext uri="{FF2B5EF4-FFF2-40B4-BE49-F238E27FC236}">
-                <a16:creationId xmlns:a16="http://schemas.microsoft.com/office/drawing/2014/main" id="{828B268F-54BA-453D-8B59-690A30B7AD14}"/>
-              </a:ext>
-            </a:extLst>
-          </p:cNvPr>
-          <p:cNvSpPr txBox="1"/>
+      <p:pic>
+        <p:nvPicPr>
+          <p:cNvPr id="6" name="图片 5">
+            <a:extLst>
+              <a:ext uri="{FF2B5EF4-FFF2-40B4-BE49-F238E27FC236}">
+                <a16:creationId xmlns:a16="http://schemas.microsoft.com/office/drawing/2014/main" id="{3B2F2369-DAF1-482A-B17D-5CE0D7AD33F6}"/>
+              </a:ext>
+            </a:extLst>
+          </p:cNvPr>
+          <p:cNvPicPr>
+            <a:picLocks noChangeAspect="1"/>
+          </p:cNvPicPr>
           <p:nvPr/>
-        </p:nvSpPr>
-        <p:spPr>
-          <a:xfrm>
-            <a:off x="3409025" y="239697"/>
-            <a:ext cx="7457243" cy="3416320"/>
-          </a:xfrm>
-          <a:prstGeom prst="rect">
-            <a:avLst/>
-          </a:prstGeom>
-          <a:noFill/>
-        </p:spPr>
-        <p:txBody>
-          <a:bodyPr wrap="square" rtlCol="0">
-            <a:spAutoFit/>
-          </a:bodyPr>
-          <a:lstStyle/>
-          <a:p>
-            <a:r>
-              <a:rPr lang="zh-CN" altLang="en-US" b="1"/>
-              <a:t>例</a:t>
-            </a:r>
-            <a:r>
-              <a:rPr lang="zh-CN" altLang="en-US"/>
-              <a:t>：</a:t>
-            </a:r>
-            <a:endParaRPr lang="en-US" altLang="zh-CN"/>
-          </a:p>
-          <a:p>
-            <a:r>
-              <a:rPr lang="en-US" altLang="zh-CN"/>
-              <a:t>node pre_operator(input1,input2:float64) returns(output1,output2:float64)</a:t>
-            </a:r>
-          </a:p>
-          <a:p>
-            <a:r>
-              <a:rPr lang="en-US" altLang="zh-CN"/>
-              <a:t>var</a:t>
-            </a:r>
-          </a:p>
-          <a:p>
-            <a:r>
-              <a:rPr lang="en-US" altLang="zh-CN"/>
-              <a:t>tmp1:float64;</a:t>
-            </a:r>
-          </a:p>
-          <a:p>
-            <a:r>
-              <a:rPr lang="en-US" altLang="zh-CN"/>
-              <a:t>let</a:t>
-            </a:r>
-          </a:p>
-          <a:p>
-            <a:r>
-              <a:rPr lang="en-US" altLang="zh-CN"/>
-              <a:t>	tmp1=fby(output1;2;output2);</a:t>
-            </a:r>
-          </a:p>
-          <a:p>
-            <a:r>
-              <a:rPr lang="en-US" altLang="zh-CN"/>
-              <a:t>	output1,output2=(1,2)-&gt;pre(tmp1+input1,input2);</a:t>
-            </a:r>
-          </a:p>
-          <a:p>
-            <a:r>
-              <a:rPr lang="en-US" altLang="zh-CN"/>
-              <a:t>tel</a:t>
-            </a:r>
-          </a:p>
-          <a:p>
-            <a:endParaRPr lang="en-US" altLang="zh-CN"/>
-          </a:p>
-          <a:p>
-            <a:r>
-              <a:rPr lang="zh-CN" altLang="en-US"/>
-              <a:t>可以看成</a:t>
-            </a:r>
-            <a:endParaRPr lang="en-US" altLang="zh-CN"/>
-          </a:p>
-          <a:p>
-            <a:r>
-              <a:rPr lang="en-US" altLang="zh-CN"/>
-              <a:t>output1=1-&gt;pre(tmp1+input1);</a:t>
-            </a:r>
-          </a:p>
-          <a:p>
-            <a:r>
-              <a:rPr lang="en-US" altLang="zh-CN"/>
-              <a:t>Output2=2-&gt;pre(input2);</a:t>
-            </a:r>
-            <a:endParaRPr lang="zh-CN" altLang="en-US"/>
-          </a:p>
-        </p:txBody>
-      </p:sp>
+        </p:nvPicPr>
+        <p:blipFill>
+          <a:blip r:embed="rId2"/>
+          <a:stretch>
+            <a:fillRect/>
+          </a:stretch>
+        </p:blipFill>
+        <p:spPr>
+          <a:xfrm>
+            <a:off x="3149946" y="239697"/>
+            <a:ext cx="6797629" cy="4313294"/>
+          </a:xfrm>
+          <a:prstGeom prst="rect">
+            <a:avLst/>
+          </a:prstGeom>
+        </p:spPr>
+      </p:pic>
     </p:spTree>
     <p:extLst>
       <p:ext uri="{BB962C8B-B14F-4D97-AF65-F5344CB8AC3E}">
@@ -7532,6 +7458,126 @@
           <a:chExt cx="0" cy="0"/>
         </a:xfrm>
       </p:grpSpPr>
+      <p:pic>
+        <p:nvPicPr>
+          <p:cNvPr id="5" name="图片 4">
+            <a:extLst>
+              <a:ext uri="{FF2B5EF4-FFF2-40B4-BE49-F238E27FC236}">
+                <a16:creationId xmlns:a16="http://schemas.microsoft.com/office/drawing/2014/main" id="{7E5F6958-CD0E-4E05-AE3D-0AF48C6BD7E3}"/>
+              </a:ext>
+            </a:extLst>
+          </p:cNvPr>
+          <p:cNvPicPr>
+            <a:picLocks noChangeAspect="1"/>
+          </p:cNvPicPr>
+          <p:nvPr/>
+        </p:nvPicPr>
+        <p:blipFill>
+          <a:blip r:embed="rId2"/>
+          <a:stretch>
+            <a:fillRect/>
+          </a:stretch>
+        </p:blipFill>
+        <p:spPr>
+          <a:xfrm>
+            <a:off x="381741" y="1889924"/>
+            <a:ext cx="3897296" cy="4647213"/>
+          </a:xfrm>
+          <a:prstGeom prst="rect">
+            <a:avLst/>
+          </a:prstGeom>
+        </p:spPr>
+      </p:pic>
+      <p:pic>
+        <p:nvPicPr>
+          <p:cNvPr id="6" name="图片 5">
+            <a:extLst>
+              <a:ext uri="{FF2B5EF4-FFF2-40B4-BE49-F238E27FC236}">
+                <a16:creationId xmlns:a16="http://schemas.microsoft.com/office/drawing/2014/main" id="{06A0416E-7053-4823-85F4-F9576CE4C4C6}"/>
+              </a:ext>
+            </a:extLst>
+          </p:cNvPr>
+          <p:cNvPicPr>
+            <a:picLocks noChangeAspect="1"/>
+          </p:cNvPicPr>
+          <p:nvPr/>
+        </p:nvPicPr>
+        <p:blipFill>
+          <a:blip r:embed="rId3"/>
+          <a:stretch>
+            <a:fillRect/>
+          </a:stretch>
+        </p:blipFill>
+        <p:spPr>
+          <a:xfrm>
+            <a:off x="6945705" y="1675818"/>
+            <a:ext cx="5135211" cy="5075423"/>
+          </a:xfrm>
+          <a:prstGeom prst="rect">
+            <a:avLst/>
+          </a:prstGeom>
+        </p:spPr>
+      </p:pic>
+      <p:pic>
+        <p:nvPicPr>
+          <p:cNvPr id="7" name="图片 6">
+            <a:extLst>
+              <a:ext uri="{FF2B5EF4-FFF2-40B4-BE49-F238E27FC236}">
+                <a16:creationId xmlns:a16="http://schemas.microsoft.com/office/drawing/2014/main" id="{8A8A1714-EEA3-441F-B546-1D25285CFB8C}"/>
+              </a:ext>
+            </a:extLst>
+          </p:cNvPr>
+          <p:cNvPicPr>
+            <a:picLocks noChangeAspect="1"/>
+          </p:cNvPicPr>
+          <p:nvPr/>
+        </p:nvPicPr>
+        <p:blipFill>
+          <a:blip r:embed="rId4"/>
+          <a:stretch>
+            <a:fillRect/>
+          </a:stretch>
+        </p:blipFill>
+        <p:spPr>
+          <a:xfrm>
+            <a:off x="79490" y="0"/>
+            <a:ext cx="6866215" cy="1889924"/>
+          </a:xfrm>
+          <a:prstGeom prst="rect">
+            <a:avLst/>
+          </a:prstGeom>
+        </p:spPr>
+      </p:pic>
+    </p:spTree>
+    <p:extLst>
+      <p:ext uri="{BB962C8B-B14F-4D97-AF65-F5344CB8AC3E}">
+        <p14:creationId xmlns:p14="http://schemas.microsoft.com/office/powerpoint/2010/main" val="977785921"/>
+      </p:ext>
+    </p:extLst>
+  </p:cSld>
+  <p:clrMapOvr>
+    <a:masterClrMapping/>
+  </p:clrMapOvr>
+</p:sld>
+</file>
+
+<file path=ppt/slides/slide27.xml><?xml version="1.0" encoding="utf-8"?>
+<p:sld xmlns:a="http://schemas.openxmlformats.org/drawingml/2006/main" xmlns:r="http://schemas.openxmlformats.org/officeDocument/2006/relationships" xmlns:p="http://schemas.openxmlformats.org/presentationml/2006/main">
+  <p:cSld>
+    <p:spTree>
+      <p:nvGrpSpPr>
+        <p:cNvPr id="1" name=""/>
+        <p:cNvGrpSpPr/>
+        <p:nvPr/>
+      </p:nvGrpSpPr>
+      <p:grpSpPr>
+        <a:xfrm>
+          <a:off x="0" y="0"/>
+          <a:ext cx="0" cy="0"/>
+          <a:chOff x="0" y="0"/>
+          <a:chExt cx="0" cy="0"/>
+        </a:xfrm>
+      </p:grpSpPr>
       <p:sp>
         <p:nvSpPr>
           <p:cNvPr id="5" name="文本框 4">
@@ -7861,7 +7907,7 @@
 </p:sld>
 </file>
 
-<file path=ppt/slides/slide27.xml><?xml version="1.0" encoding="utf-8"?>
+<file path=ppt/slides/slide28.xml><?xml version="1.0" encoding="utf-8"?>
 <p:sld xmlns:a="http://schemas.openxmlformats.org/drawingml/2006/main" xmlns:r="http://schemas.openxmlformats.org/officeDocument/2006/relationships" xmlns:p="http://schemas.openxmlformats.org/presentationml/2006/main">
   <p:cSld>
     <p:spTree>

--- a/docs/scade.pptx
+++ b/docs/scade.pptx
@@ -224,7 +224,7 @@
           <a:p>
             <a:fld id="{3744C8BF-56B8-46D4-ADA5-A0AF811348DF}" type="datetimeFigureOut">
               <a:rPr lang="zh-CN" altLang="en-US" smtClean="0"/>
-              <a:t>2023/11/6</a:t>
+              <a:t>2023/11/20</a:t>
             </a:fld>
             <a:endParaRPr lang="zh-CN" altLang="en-US"/>
           </a:p>
@@ -722,7 +722,7 @@
           <a:p>
             <a:fld id="{C61D74A4-027F-4A2B-8B92-D0C194C50910}" type="datetimeFigureOut">
               <a:rPr lang="zh-CN" altLang="en-US" smtClean="0"/>
-              <a:t>2023/11/6</a:t>
+              <a:t>2023/11/20</a:t>
             </a:fld>
             <a:endParaRPr lang="zh-CN" altLang="en-US"/>
           </a:p>
@@ -920,7 +920,7 @@
           <a:p>
             <a:fld id="{C61D74A4-027F-4A2B-8B92-D0C194C50910}" type="datetimeFigureOut">
               <a:rPr lang="zh-CN" altLang="en-US" smtClean="0"/>
-              <a:t>2023/11/6</a:t>
+              <a:t>2023/11/20</a:t>
             </a:fld>
             <a:endParaRPr lang="zh-CN" altLang="en-US"/>
           </a:p>
@@ -1128,7 +1128,7 @@
           <a:p>
             <a:fld id="{C61D74A4-027F-4A2B-8B92-D0C194C50910}" type="datetimeFigureOut">
               <a:rPr lang="zh-CN" altLang="en-US" smtClean="0"/>
-              <a:t>2023/11/6</a:t>
+              <a:t>2023/11/20</a:t>
             </a:fld>
             <a:endParaRPr lang="zh-CN" altLang="en-US"/>
           </a:p>
@@ -1326,7 +1326,7 @@
           <a:p>
             <a:fld id="{C61D74A4-027F-4A2B-8B92-D0C194C50910}" type="datetimeFigureOut">
               <a:rPr lang="zh-CN" altLang="en-US" smtClean="0"/>
-              <a:t>2023/11/6</a:t>
+              <a:t>2023/11/20</a:t>
             </a:fld>
             <a:endParaRPr lang="zh-CN" altLang="en-US"/>
           </a:p>
@@ -1601,7 +1601,7 @@
           <a:p>
             <a:fld id="{C61D74A4-027F-4A2B-8B92-D0C194C50910}" type="datetimeFigureOut">
               <a:rPr lang="zh-CN" altLang="en-US" smtClean="0"/>
-              <a:t>2023/11/6</a:t>
+              <a:t>2023/11/20</a:t>
             </a:fld>
             <a:endParaRPr lang="zh-CN" altLang="en-US"/>
           </a:p>
@@ -1866,7 +1866,7 @@
           <a:p>
             <a:fld id="{C61D74A4-027F-4A2B-8B92-D0C194C50910}" type="datetimeFigureOut">
               <a:rPr lang="zh-CN" altLang="en-US" smtClean="0"/>
-              <a:t>2023/11/6</a:t>
+              <a:t>2023/11/20</a:t>
             </a:fld>
             <a:endParaRPr lang="zh-CN" altLang="en-US"/>
           </a:p>
@@ -2278,7 +2278,7 @@
           <a:p>
             <a:fld id="{C61D74A4-027F-4A2B-8B92-D0C194C50910}" type="datetimeFigureOut">
               <a:rPr lang="zh-CN" altLang="en-US" smtClean="0"/>
-              <a:t>2023/11/6</a:t>
+              <a:t>2023/11/20</a:t>
             </a:fld>
             <a:endParaRPr lang="zh-CN" altLang="en-US"/>
           </a:p>
@@ -2419,7 +2419,7 @@
           <a:p>
             <a:fld id="{C61D74A4-027F-4A2B-8B92-D0C194C50910}" type="datetimeFigureOut">
               <a:rPr lang="zh-CN" altLang="en-US" smtClean="0"/>
-              <a:t>2023/11/6</a:t>
+              <a:t>2023/11/20</a:t>
             </a:fld>
             <a:endParaRPr lang="zh-CN" altLang="en-US"/>
           </a:p>
@@ -2532,7 +2532,7 @@
           <a:p>
             <a:fld id="{C61D74A4-027F-4A2B-8B92-D0C194C50910}" type="datetimeFigureOut">
               <a:rPr lang="zh-CN" altLang="en-US" smtClean="0"/>
-              <a:t>2023/11/6</a:t>
+              <a:t>2023/11/20</a:t>
             </a:fld>
             <a:endParaRPr lang="zh-CN" altLang="en-US"/>
           </a:p>
@@ -2843,7 +2843,7 @@
           <a:p>
             <a:fld id="{C61D74A4-027F-4A2B-8B92-D0C194C50910}" type="datetimeFigureOut">
               <a:rPr lang="zh-CN" altLang="en-US" smtClean="0"/>
-              <a:t>2023/11/6</a:t>
+              <a:t>2023/11/20</a:t>
             </a:fld>
             <a:endParaRPr lang="zh-CN" altLang="en-US"/>
           </a:p>
@@ -3131,7 +3131,7 @@
           <a:p>
             <a:fld id="{C61D74A4-027F-4A2B-8B92-D0C194C50910}" type="datetimeFigureOut">
               <a:rPr lang="zh-CN" altLang="en-US" smtClean="0"/>
-              <a:t>2023/11/6</a:t>
+              <a:t>2023/11/20</a:t>
             </a:fld>
             <a:endParaRPr lang="zh-CN" altLang="en-US"/>
           </a:p>
@@ -3372,7 +3372,7 @@
           <a:p>
             <a:fld id="{C61D74A4-027F-4A2B-8B92-D0C194C50910}" type="datetimeFigureOut">
               <a:rPr lang="zh-CN" altLang="en-US" smtClean="0"/>
-              <a:t>2023/11/6</a:t>
+              <a:t>2023/11/20</a:t>
             </a:fld>
             <a:endParaRPr lang="zh-CN" altLang="en-US"/>
           </a:p>
@@ -7625,7 +7625,39 @@
             </a:br>
             <a:r>
               <a:rPr lang="en-US" altLang="zh-CN" b="1"/>
-              <a:t>If_block ::= if Expr then If_block_1 else If_block_1</a:t>
+              <a:t>If_block ::= if</a:t>
+            </a:r>
+            <a:r>
+              <a:rPr lang="en-US" altLang="zh-CN" b="1">
+                <a:solidFill>
+                  <a:srgbClr val="FF0000"/>
+                </a:solidFill>
+              </a:rPr>
+              <a:t> Expr </a:t>
+            </a:r>
+            <a:r>
+              <a:rPr lang="en-US" altLang="zh-CN" b="1"/>
+              <a:t>then </a:t>
+            </a:r>
+            <a:r>
+              <a:rPr lang="en-US" altLang="zh-CN" b="1">
+                <a:solidFill>
+                  <a:srgbClr val="FF0000"/>
+                </a:solidFill>
+              </a:rPr>
+              <a:t>If_block_1 </a:t>
+            </a:r>
+            <a:r>
+              <a:rPr lang="en-US" altLang="zh-CN" b="1"/>
+              <a:t>else </a:t>
+            </a:r>
+            <a:r>
+              <a:rPr lang="en-US" altLang="zh-CN" b="1">
+                <a:solidFill>
+                  <a:srgbClr val="FF0000"/>
+                </a:solidFill>
+              </a:rPr>
+              <a:t>If_block_1</a:t>
             </a:r>
             <a:br>
               <a:rPr lang="en-US" altLang="zh-CN" b="1"/>
@@ -7652,7 +7684,15 @@
             </a:br>
             <a:r>
               <a:rPr lang="en-US" altLang="zh-CN"/>
-              <a:t>Match_block ::= when Expr match Match_block_1</a:t>
+              <a:t>Match_block ::= when </a:t>
+            </a:r>
+            <a:r>
+              <a:rPr lang="en-US" altLang="zh-CN" b="1"/>
+              <a:t>Expr</a:t>
+            </a:r>
+            <a:r>
+              <a:rPr lang="en-US" altLang="zh-CN"/>
+              <a:t> match Match_block_1</a:t>
             </a:r>
             <a:br>
               <a:rPr lang="en-US" altLang="zh-CN"/>

--- a/docs/scade.pptx
+++ b/docs/scade.pptx
@@ -5,7 +5,7 @@
     <p:sldMasterId id="2147483648" r:id="rId1"/>
   </p:sldMasterIdLst>
   <p:notesMasterIdLst>
-    <p:notesMasterId r:id="rId30"/>
+    <p:notesMasterId r:id="rId33"/>
   </p:notesMasterIdLst>
   <p:sldIdLst>
     <p:sldId id="256" r:id="rId2"/>
@@ -36,6 +36,9 @@
     <p:sldId id="284" r:id="rId27"/>
     <p:sldId id="279" r:id="rId28"/>
     <p:sldId id="282" r:id="rId29"/>
+    <p:sldId id="285" r:id="rId30"/>
+    <p:sldId id="287" r:id="rId31"/>
+    <p:sldId id="286" r:id="rId32"/>
   </p:sldIdLst>
   <p:sldSz cx="12192000" cy="6858000"/>
   <p:notesSz cx="6858000" cy="9144000"/>
@@ -224,7 +227,7 @@
           <a:p>
             <a:fld id="{3744C8BF-56B8-46D4-ADA5-A0AF811348DF}" type="datetimeFigureOut">
               <a:rPr lang="zh-CN" altLang="en-US" smtClean="0"/>
-              <a:t>2023/11/20</a:t>
+              <a:t>2023/12/11</a:t>
             </a:fld>
             <a:endParaRPr lang="zh-CN" altLang="en-US"/>
           </a:p>
@@ -722,7 +725,7 @@
           <a:p>
             <a:fld id="{C61D74A4-027F-4A2B-8B92-D0C194C50910}" type="datetimeFigureOut">
               <a:rPr lang="zh-CN" altLang="en-US" smtClean="0"/>
-              <a:t>2023/11/20</a:t>
+              <a:t>2023/12/11</a:t>
             </a:fld>
             <a:endParaRPr lang="zh-CN" altLang="en-US"/>
           </a:p>
@@ -920,7 +923,7 @@
           <a:p>
             <a:fld id="{C61D74A4-027F-4A2B-8B92-D0C194C50910}" type="datetimeFigureOut">
               <a:rPr lang="zh-CN" altLang="en-US" smtClean="0"/>
-              <a:t>2023/11/20</a:t>
+              <a:t>2023/12/11</a:t>
             </a:fld>
             <a:endParaRPr lang="zh-CN" altLang="en-US"/>
           </a:p>
@@ -1128,7 +1131,7 @@
           <a:p>
             <a:fld id="{C61D74A4-027F-4A2B-8B92-D0C194C50910}" type="datetimeFigureOut">
               <a:rPr lang="zh-CN" altLang="en-US" smtClean="0"/>
-              <a:t>2023/11/20</a:t>
+              <a:t>2023/12/11</a:t>
             </a:fld>
             <a:endParaRPr lang="zh-CN" altLang="en-US"/>
           </a:p>
@@ -1326,7 +1329,7 @@
           <a:p>
             <a:fld id="{C61D74A4-027F-4A2B-8B92-D0C194C50910}" type="datetimeFigureOut">
               <a:rPr lang="zh-CN" altLang="en-US" smtClean="0"/>
-              <a:t>2023/11/20</a:t>
+              <a:t>2023/12/11</a:t>
             </a:fld>
             <a:endParaRPr lang="zh-CN" altLang="en-US"/>
           </a:p>
@@ -1601,7 +1604,7 @@
           <a:p>
             <a:fld id="{C61D74A4-027F-4A2B-8B92-D0C194C50910}" type="datetimeFigureOut">
               <a:rPr lang="zh-CN" altLang="en-US" smtClean="0"/>
-              <a:t>2023/11/20</a:t>
+              <a:t>2023/12/11</a:t>
             </a:fld>
             <a:endParaRPr lang="zh-CN" altLang="en-US"/>
           </a:p>
@@ -1866,7 +1869,7 @@
           <a:p>
             <a:fld id="{C61D74A4-027F-4A2B-8B92-D0C194C50910}" type="datetimeFigureOut">
               <a:rPr lang="zh-CN" altLang="en-US" smtClean="0"/>
-              <a:t>2023/11/20</a:t>
+              <a:t>2023/12/11</a:t>
             </a:fld>
             <a:endParaRPr lang="zh-CN" altLang="en-US"/>
           </a:p>
@@ -2278,7 +2281,7 @@
           <a:p>
             <a:fld id="{C61D74A4-027F-4A2B-8B92-D0C194C50910}" type="datetimeFigureOut">
               <a:rPr lang="zh-CN" altLang="en-US" smtClean="0"/>
-              <a:t>2023/11/20</a:t>
+              <a:t>2023/12/11</a:t>
             </a:fld>
             <a:endParaRPr lang="zh-CN" altLang="en-US"/>
           </a:p>
@@ -2419,7 +2422,7 @@
           <a:p>
             <a:fld id="{C61D74A4-027F-4A2B-8B92-D0C194C50910}" type="datetimeFigureOut">
               <a:rPr lang="zh-CN" altLang="en-US" smtClean="0"/>
-              <a:t>2023/11/20</a:t>
+              <a:t>2023/12/11</a:t>
             </a:fld>
             <a:endParaRPr lang="zh-CN" altLang="en-US"/>
           </a:p>
@@ -2532,7 +2535,7 @@
           <a:p>
             <a:fld id="{C61D74A4-027F-4A2B-8B92-D0C194C50910}" type="datetimeFigureOut">
               <a:rPr lang="zh-CN" altLang="en-US" smtClean="0"/>
-              <a:t>2023/11/20</a:t>
+              <a:t>2023/12/11</a:t>
             </a:fld>
             <a:endParaRPr lang="zh-CN" altLang="en-US"/>
           </a:p>
@@ -2843,7 +2846,7 @@
           <a:p>
             <a:fld id="{C61D74A4-027F-4A2B-8B92-D0C194C50910}" type="datetimeFigureOut">
               <a:rPr lang="zh-CN" altLang="en-US" smtClean="0"/>
-              <a:t>2023/11/20</a:t>
+              <a:t>2023/12/11</a:t>
             </a:fld>
             <a:endParaRPr lang="zh-CN" altLang="en-US"/>
           </a:p>
@@ -3131,7 +3134,7 @@
           <a:p>
             <a:fld id="{C61D74A4-027F-4A2B-8B92-D0C194C50910}" type="datetimeFigureOut">
               <a:rPr lang="zh-CN" altLang="en-US" smtClean="0"/>
-              <a:t>2023/11/20</a:t>
+              <a:t>2023/12/11</a:t>
             </a:fld>
             <a:endParaRPr lang="zh-CN" altLang="en-US"/>
           </a:p>
@@ -3372,7 +3375,7 @@
           <a:p>
             <a:fld id="{C61D74A4-027F-4A2B-8B92-D0C194C50910}" type="datetimeFigureOut">
               <a:rPr lang="zh-CN" altLang="en-US" smtClean="0"/>
-              <a:t>2023/11/20</a:t>
+              <a:t>2023/12/11</a:t>
             </a:fld>
             <a:endParaRPr lang="zh-CN" altLang="en-US"/>
           </a:p>
@@ -8179,6 +8182,209 @@
 </p:sld>
 </file>
 
+<file path=ppt/slides/slide29.xml><?xml version="1.0" encoding="utf-8"?>
+<p:sld xmlns:a="http://schemas.openxmlformats.org/drawingml/2006/main" xmlns:r="http://schemas.openxmlformats.org/officeDocument/2006/relationships" xmlns:p="http://schemas.openxmlformats.org/presentationml/2006/main">
+  <p:cSld>
+    <p:spTree>
+      <p:nvGrpSpPr>
+        <p:cNvPr id="1" name=""/>
+        <p:cNvGrpSpPr/>
+        <p:nvPr/>
+      </p:nvGrpSpPr>
+      <p:grpSpPr>
+        <a:xfrm>
+          <a:off x="0" y="0"/>
+          <a:ext cx="0" cy="0"/>
+          <a:chOff x="0" y="0"/>
+          <a:chExt cx="0" cy="0"/>
+        </a:xfrm>
+      </p:grpSpPr>
+      <p:sp>
+        <p:nvSpPr>
+          <p:cNvPr id="4" name="文本框 3">
+            <a:extLst>
+              <a:ext uri="{FF2B5EF4-FFF2-40B4-BE49-F238E27FC236}">
+                <a16:creationId xmlns:a16="http://schemas.microsoft.com/office/drawing/2014/main" id="{4DA41EFE-7A63-66FC-C34B-F629D51084A7}"/>
+              </a:ext>
+            </a:extLst>
+          </p:cNvPr>
+          <p:cNvSpPr txBox="1"/>
+          <p:nvPr/>
+        </p:nvSpPr>
+        <p:spPr>
+          <a:xfrm>
+            <a:off x="242371" y="187287"/>
+            <a:ext cx="3966072" cy="369332"/>
+          </a:xfrm>
+          <a:prstGeom prst="rect">
+            <a:avLst/>
+          </a:prstGeom>
+          <a:noFill/>
+        </p:spPr>
+        <p:txBody>
+          <a:bodyPr wrap="square" rtlCol="0">
+            <a:spAutoFit/>
+          </a:bodyPr>
+          <a:lstStyle/>
+          <a:p>
+            <a:r>
+              <a:rPr kumimoji="1" lang="zh-CN" altLang="en-US" dirty="0"/>
+              <a:t>结构体</a:t>
+            </a:r>
+          </a:p>
+        </p:txBody>
+      </p:sp>
+      <p:sp>
+        <p:nvSpPr>
+          <p:cNvPr id="5" name="文本框 4">
+            <a:extLst>
+              <a:ext uri="{FF2B5EF4-FFF2-40B4-BE49-F238E27FC236}">
+                <a16:creationId xmlns:a16="http://schemas.microsoft.com/office/drawing/2014/main" id="{2AB61C85-5A42-AD67-8D48-6CFC04F97B58}"/>
+              </a:ext>
+            </a:extLst>
+          </p:cNvPr>
+          <p:cNvSpPr txBox="1"/>
+          <p:nvPr/>
+        </p:nvSpPr>
+        <p:spPr>
+          <a:xfrm>
+            <a:off x="242371" y="749147"/>
+            <a:ext cx="6455884" cy="1754326"/>
+          </a:xfrm>
+          <a:prstGeom prst="rect">
+            <a:avLst/>
+          </a:prstGeom>
+          <a:noFill/>
+        </p:spPr>
+        <p:txBody>
+          <a:bodyPr wrap="square" rtlCol="0">
+            <a:spAutoFit/>
+          </a:bodyPr>
+          <a:lstStyle/>
+          <a:p>
+            <a:r>
+              <a:rPr kumimoji="1" lang="en" altLang="zh-CN" dirty="0" err="1"/>
+              <a:t>Type_expr</a:t>
+            </a:r>
+            <a:r>
+              <a:rPr kumimoji="1" lang="en" altLang="zh-CN" dirty="0"/>
+              <a:t> :: = {  </a:t>
+            </a:r>
+            <a:r>
+              <a:rPr kumimoji="1" lang="en" altLang="zh-CN" dirty="0" err="1"/>
+              <a:t>Field_decl</a:t>
+            </a:r>
+            <a:r>
+              <a:rPr kumimoji="1" lang="en" altLang="zh-CN" dirty="0"/>
+              <a:t> Type_expr_1 } Type_expr_2</a:t>
+            </a:r>
+          </a:p>
+          <a:p>
+            <a:r>
+              <a:rPr kumimoji="1" lang="en" altLang="zh-CN" dirty="0"/>
+              <a:t>Type_expr_1 ::= , </a:t>
+            </a:r>
+            <a:r>
+              <a:rPr kumimoji="1" lang="en" altLang="zh-CN" dirty="0" err="1"/>
+              <a:t>Field_decl</a:t>
+            </a:r>
+            <a:r>
+              <a:rPr kumimoji="1" lang="en" altLang="zh-CN" dirty="0"/>
+              <a:t> Type_expr_1</a:t>
+            </a:r>
+          </a:p>
+          <a:p>
+            <a:r>
+              <a:rPr kumimoji="1" lang="en" altLang="zh-CN" dirty="0"/>
+              <a:t>             ::= $</a:t>
+            </a:r>
+          </a:p>
+          <a:p>
+            <a:r>
+              <a:rPr kumimoji="1" lang="en" altLang="zh-CN" dirty="0"/>
+              <a:t>Type_expr_2 ::= ^ Expr Type_expr_2</a:t>
+            </a:r>
+          </a:p>
+          <a:p>
+            <a:r>
+              <a:rPr kumimoji="1" lang="en" altLang="zh-CN" dirty="0"/>
+              <a:t>             ::= $</a:t>
+            </a:r>
+          </a:p>
+          <a:p>
+            <a:r>
+              <a:rPr kumimoji="1" lang="en" altLang="zh-CN" dirty="0" err="1"/>
+              <a:t>Field_decl</a:t>
+            </a:r>
+            <a:r>
+              <a:rPr kumimoji="1" lang="en" altLang="zh-CN" dirty="0"/>
+              <a:t> ::= id : </a:t>
+            </a:r>
+            <a:r>
+              <a:rPr kumimoji="1" lang="en" altLang="zh-CN" dirty="0" err="1"/>
+              <a:t>Type_expr</a:t>
+            </a:r>
+            <a:endParaRPr kumimoji="1" lang="en" altLang="zh-CN" dirty="0"/>
+          </a:p>
+        </p:txBody>
+      </p:sp>
+      <p:sp>
+        <p:nvSpPr>
+          <p:cNvPr id="6" name="文本框 5">
+            <a:extLst>
+              <a:ext uri="{FF2B5EF4-FFF2-40B4-BE49-F238E27FC236}">
+                <a16:creationId xmlns:a16="http://schemas.microsoft.com/office/drawing/2014/main" id="{B8012144-4CF0-9E72-035C-4015FA19F786}"/>
+              </a:ext>
+            </a:extLst>
+          </p:cNvPr>
+          <p:cNvSpPr txBox="1"/>
+          <p:nvPr/>
+        </p:nvSpPr>
+        <p:spPr>
+          <a:xfrm>
+            <a:off x="374573" y="2776251"/>
+            <a:ext cx="8108415" cy="369332"/>
+          </a:xfrm>
+          <a:prstGeom prst="rect">
+            <a:avLst/>
+          </a:prstGeom>
+          <a:noFill/>
+        </p:spPr>
+        <p:txBody>
+          <a:bodyPr wrap="square" rtlCol="0">
+            <a:spAutoFit/>
+          </a:bodyPr>
+          <a:lstStyle/>
+          <a:p>
+            <a:r>
+              <a:rPr kumimoji="1" lang="zh-CN" altLang="en-US" dirty="0"/>
+              <a:t>使用</a:t>
+            </a:r>
+            <a:r>
+              <a:rPr kumimoji="1" lang="en-US" altLang="zh-CN" dirty="0"/>
+              <a:t>type</a:t>
+            </a:r>
+            <a:r>
+              <a:rPr kumimoji="1" lang="zh-CN" altLang="en-US" dirty="0"/>
+              <a:t>定义结构体</a:t>
+            </a:r>
+            <a:endParaRPr kumimoji="1" lang="en-US" altLang="zh-CN" dirty="0"/>
+          </a:p>
+        </p:txBody>
+      </p:sp>
+    </p:spTree>
+    <p:extLst>
+      <p:ext uri="{BB962C8B-B14F-4D97-AF65-F5344CB8AC3E}">
+        <p14:creationId xmlns:p14="http://schemas.microsoft.com/office/powerpoint/2010/main" val="2628688210"/>
+      </p:ext>
+    </p:extLst>
+  </p:cSld>
+  <p:clrMapOvr>
+    <a:masterClrMapping/>
+  </p:clrMapOvr>
+</p:sld>
+</file>
+
 <file path=ppt/slides/slide3.xml><?xml version="1.0" encoding="utf-8"?>
 <p:sld xmlns:a="http://schemas.openxmlformats.org/drawingml/2006/main" xmlns:r="http://schemas.openxmlformats.org/officeDocument/2006/relationships" xmlns:p="http://schemas.openxmlformats.org/presentationml/2006/main">
   <p:cSld>
@@ -8362,6 +8568,236 @@
     <p:extLst>
       <p:ext uri="{BB962C8B-B14F-4D97-AF65-F5344CB8AC3E}">
         <p14:creationId xmlns:p14="http://schemas.microsoft.com/office/powerpoint/2010/main" val="1525841761"/>
+      </p:ext>
+    </p:extLst>
+  </p:cSld>
+  <p:clrMapOvr>
+    <a:masterClrMapping/>
+  </p:clrMapOvr>
+</p:sld>
+</file>
+
+<file path=ppt/slides/slide30.xml><?xml version="1.0" encoding="utf-8"?>
+<p:sld xmlns:a="http://schemas.openxmlformats.org/drawingml/2006/main" xmlns:r="http://schemas.openxmlformats.org/officeDocument/2006/relationships" xmlns:p="http://schemas.openxmlformats.org/presentationml/2006/main">
+  <p:cSld>
+    <p:spTree>
+      <p:nvGrpSpPr>
+        <p:cNvPr id="1" name=""/>
+        <p:cNvGrpSpPr/>
+        <p:nvPr/>
+      </p:nvGrpSpPr>
+      <p:grpSpPr>
+        <a:xfrm>
+          <a:off x="0" y="0"/>
+          <a:ext cx="0" cy="0"/>
+          <a:chOff x="0" y="0"/>
+          <a:chExt cx="0" cy="0"/>
+        </a:xfrm>
+      </p:grpSpPr>
+      <p:sp>
+        <p:nvSpPr>
+          <p:cNvPr id="4" name="文本框 3">
+            <a:extLst>
+              <a:ext uri="{FF2B5EF4-FFF2-40B4-BE49-F238E27FC236}">
+                <a16:creationId xmlns:a16="http://schemas.microsoft.com/office/drawing/2014/main" id="{1AAD0F7B-395D-3A94-88BA-A8C377ECFC8A}"/>
+              </a:ext>
+            </a:extLst>
+          </p:cNvPr>
+          <p:cNvSpPr txBox="1"/>
+          <p:nvPr/>
+        </p:nvSpPr>
+        <p:spPr>
+          <a:xfrm>
+            <a:off x="198304" y="209320"/>
+            <a:ext cx="6566053" cy="369332"/>
+          </a:xfrm>
+          <a:prstGeom prst="rect">
+            <a:avLst/>
+          </a:prstGeom>
+          <a:noFill/>
+        </p:spPr>
+        <p:txBody>
+          <a:bodyPr wrap="square" rtlCol="0">
+            <a:spAutoFit/>
+          </a:bodyPr>
+          <a:lstStyle/>
+          <a:p>
+            <a:r>
+              <a:rPr kumimoji="1" lang="zh-CN" altLang="en-US" dirty="0"/>
+              <a:t>使用</a:t>
+            </a:r>
+            <a:r>
+              <a:rPr kumimoji="1" lang="en-US" altLang="zh-CN" dirty="0"/>
+              <a:t>const</a:t>
+            </a:r>
+            <a:r>
+              <a:rPr kumimoji="1" lang="zh-CN" altLang="en-US" dirty="0"/>
+              <a:t>定义并初始化</a:t>
+            </a:r>
+          </a:p>
+        </p:txBody>
+      </p:sp>
+      <p:sp>
+        <p:nvSpPr>
+          <p:cNvPr id="5" name="文本框 4">
+            <a:extLst>
+              <a:ext uri="{FF2B5EF4-FFF2-40B4-BE49-F238E27FC236}">
+                <a16:creationId xmlns:a16="http://schemas.microsoft.com/office/drawing/2014/main" id="{F269A5F3-23AD-7B2A-DAC6-20DBA1E08409}"/>
+              </a:ext>
+            </a:extLst>
+          </p:cNvPr>
+          <p:cNvSpPr txBox="1"/>
+          <p:nvPr/>
+        </p:nvSpPr>
+        <p:spPr>
+          <a:xfrm>
+            <a:off x="198304" y="3429000"/>
+            <a:ext cx="2492990" cy="369332"/>
+          </a:xfrm>
+          <a:prstGeom prst="rect">
+            <a:avLst/>
+          </a:prstGeom>
+          <a:noFill/>
+        </p:spPr>
+        <p:txBody>
+          <a:bodyPr wrap="none" rtlCol="0">
+            <a:spAutoFit/>
+          </a:bodyPr>
+          <a:lstStyle/>
+          <a:p>
+            <a:r>
+              <a:rPr kumimoji="1" lang="zh-CN" altLang="en-US" dirty="0"/>
+              <a:t>直接用于输入输出参数</a:t>
+            </a:r>
+          </a:p>
+        </p:txBody>
+      </p:sp>
+    </p:spTree>
+    <p:extLst>
+      <p:ext uri="{BB962C8B-B14F-4D97-AF65-F5344CB8AC3E}">
+        <p14:creationId xmlns:p14="http://schemas.microsoft.com/office/powerpoint/2010/main" val="2575251222"/>
+      </p:ext>
+    </p:extLst>
+  </p:cSld>
+  <p:clrMapOvr>
+    <a:masterClrMapping/>
+  </p:clrMapOvr>
+</p:sld>
+</file>
+
+<file path=ppt/slides/slide31.xml><?xml version="1.0" encoding="utf-8"?>
+<p:sld xmlns:a="http://schemas.openxmlformats.org/drawingml/2006/main" xmlns:r="http://schemas.openxmlformats.org/officeDocument/2006/relationships" xmlns:p="http://schemas.openxmlformats.org/presentationml/2006/main">
+  <p:cSld>
+    <p:spTree>
+      <p:nvGrpSpPr>
+        <p:cNvPr id="1" name=""/>
+        <p:cNvGrpSpPr/>
+        <p:nvPr/>
+      </p:nvGrpSpPr>
+      <p:grpSpPr>
+        <a:xfrm>
+          <a:off x="0" y="0"/>
+          <a:ext cx="0" cy="0"/>
+          <a:chOff x="0" y="0"/>
+          <a:chExt cx="0" cy="0"/>
+        </a:xfrm>
+      </p:grpSpPr>
+      <p:sp>
+        <p:nvSpPr>
+          <p:cNvPr id="4" name="文本框 3">
+            <a:extLst>
+              <a:ext uri="{FF2B5EF4-FFF2-40B4-BE49-F238E27FC236}">
+                <a16:creationId xmlns:a16="http://schemas.microsoft.com/office/drawing/2014/main" id="{B8712464-D556-0B07-34F4-E20AC57645CD}"/>
+              </a:ext>
+            </a:extLst>
+          </p:cNvPr>
+          <p:cNvSpPr txBox="1"/>
+          <p:nvPr/>
+        </p:nvSpPr>
+        <p:spPr>
+          <a:xfrm>
+            <a:off x="308472" y="176270"/>
+            <a:ext cx="4682169" cy="1477328"/>
+          </a:xfrm>
+          <a:prstGeom prst="rect">
+            <a:avLst/>
+          </a:prstGeom>
+          <a:noFill/>
+        </p:spPr>
+        <p:txBody>
+          <a:bodyPr wrap="square" rtlCol="0">
+            <a:spAutoFit/>
+          </a:bodyPr>
+          <a:lstStyle/>
+          <a:p>
+            <a:r>
+              <a:rPr kumimoji="1" lang="en" altLang="zh-CN" dirty="0" err="1"/>
+              <a:t>Struct_expr</a:t>
+            </a:r>
+            <a:r>
+              <a:rPr kumimoji="1" lang="en" altLang="zh-CN" dirty="0"/>
+              <a:t> ::= </a:t>
+            </a:r>
+            <a:r>
+              <a:rPr kumimoji="1" lang="en" altLang="zh-CN" dirty="0" err="1"/>
+              <a:t>Epxr</a:t>
+            </a:r>
+            <a:r>
+              <a:rPr kumimoji="1" lang="en" altLang="zh-CN" dirty="0"/>
+              <a:t> . id</a:t>
+            </a:r>
+          </a:p>
+          <a:p>
+            <a:r>
+              <a:rPr kumimoji="1" lang="en" altLang="zh-CN" dirty="0"/>
+              <a:t>                   ::= { </a:t>
+            </a:r>
+            <a:r>
+              <a:rPr kumimoji="1" lang="en" altLang="zh-CN" dirty="0" err="1"/>
+              <a:t>Label_expr</a:t>
+            </a:r>
+            <a:r>
+              <a:rPr kumimoji="1" lang="en" altLang="zh-CN" dirty="0"/>
+              <a:t> Struct_expr_1 }</a:t>
+            </a:r>
+          </a:p>
+          <a:p>
+            <a:r>
+              <a:rPr kumimoji="1" lang="en" altLang="zh-CN" dirty="0"/>
+              <a:t>Struct_expr_1 ::= , </a:t>
+            </a:r>
+            <a:r>
+              <a:rPr kumimoji="1" lang="en" altLang="zh-CN" dirty="0" err="1"/>
+              <a:t>Label_expr</a:t>
+            </a:r>
+            <a:r>
+              <a:rPr kumimoji="1" lang="en" altLang="zh-CN" dirty="0"/>
+              <a:t> Struct_expr_1</a:t>
+            </a:r>
+          </a:p>
+          <a:p>
+            <a:r>
+              <a:rPr kumimoji="1" lang="en" altLang="zh-CN" dirty="0"/>
+              <a:t>                      ::= $</a:t>
+            </a:r>
+          </a:p>
+          <a:p>
+            <a:r>
+              <a:rPr kumimoji="1" lang="en" altLang="zh-CN" dirty="0" err="1"/>
+              <a:t>Label_expr</a:t>
+            </a:r>
+            <a:r>
+              <a:rPr kumimoji="1" lang="en" altLang="zh-CN" dirty="0"/>
+              <a:t> ::= id : Expr</a:t>
+            </a:r>
+            <a:endParaRPr kumimoji="1" lang="zh-CN" altLang="en-US" dirty="0"/>
+          </a:p>
+        </p:txBody>
+      </p:sp>
+    </p:spTree>
+    <p:extLst>
+      <p:ext uri="{BB962C8B-B14F-4D97-AF65-F5344CB8AC3E}">
+        <p14:creationId xmlns:p14="http://schemas.microsoft.com/office/powerpoint/2010/main" val="3818820110"/>
       </p:ext>
     </p:extLst>
   </p:cSld>

--- a/docs/scade.pptx
+++ b/docs/scade.pptx
@@ -5,7 +5,7 @@
     <p:sldMasterId id="2147483648" r:id="rId1"/>
   </p:sldMasterIdLst>
   <p:notesMasterIdLst>
-    <p:notesMasterId r:id="rId30"/>
+    <p:notesMasterId r:id="rId32"/>
   </p:notesMasterIdLst>
   <p:sldIdLst>
     <p:sldId id="256" r:id="rId2"/>
@@ -36,6 +36,8 @@
     <p:sldId id="284" r:id="rId27"/>
     <p:sldId id="279" r:id="rId28"/>
     <p:sldId id="282" r:id="rId29"/>
+    <p:sldId id="285" r:id="rId30"/>
+    <p:sldId id="286" r:id="rId31"/>
   </p:sldIdLst>
   <p:sldSz cx="12192000" cy="6858000"/>
   <p:notesSz cx="6858000" cy="9144000"/>
@@ -224,7 +226,7 @@
           <a:p>
             <a:fld id="{3744C8BF-56B8-46D4-ADA5-A0AF811348DF}" type="datetimeFigureOut">
               <a:rPr lang="zh-CN" altLang="en-US" smtClean="0"/>
-              <a:t>2023/11/20</a:t>
+              <a:t>2023/12/4</a:t>
             </a:fld>
             <a:endParaRPr lang="zh-CN" altLang="en-US"/>
           </a:p>
@@ -722,7 +724,7 @@
           <a:p>
             <a:fld id="{C61D74A4-027F-4A2B-8B92-D0C194C50910}" type="datetimeFigureOut">
               <a:rPr lang="zh-CN" altLang="en-US" smtClean="0"/>
-              <a:t>2023/11/20</a:t>
+              <a:t>2023/12/4</a:t>
             </a:fld>
             <a:endParaRPr lang="zh-CN" altLang="en-US"/>
           </a:p>
@@ -920,7 +922,7 @@
           <a:p>
             <a:fld id="{C61D74A4-027F-4A2B-8B92-D0C194C50910}" type="datetimeFigureOut">
               <a:rPr lang="zh-CN" altLang="en-US" smtClean="0"/>
-              <a:t>2023/11/20</a:t>
+              <a:t>2023/12/4</a:t>
             </a:fld>
             <a:endParaRPr lang="zh-CN" altLang="en-US"/>
           </a:p>
@@ -1128,7 +1130,7 @@
           <a:p>
             <a:fld id="{C61D74A4-027F-4A2B-8B92-D0C194C50910}" type="datetimeFigureOut">
               <a:rPr lang="zh-CN" altLang="en-US" smtClean="0"/>
-              <a:t>2023/11/20</a:t>
+              <a:t>2023/12/4</a:t>
             </a:fld>
             <a:endParaRPr lang="zh-CN" altLang="en-US"/>
           </a:p>
@@ -1326,7 +1328,7 @@
           <a:p>
             <a:fld id="{C61D74A4-027F-4A2B-8B92-D0C194C50910}" type="datetimeFigureOut">
               <a:rPr lang="zh-CN" altLang="en-US" smtClean="0"/>
-              <a:t>2023/11/20</a:t>
+              <a:t>2023/12/4</a:t>
             </a:fld>
             <a:endParaRPr lang="zh-CN" altLang="en-US"/>
           </a:p>
@@ -1601,7 +1603,7 @@
           <a:p>
             <a:fld id="{C61D74A4-027F-4A2B-8B92-D0C194C50910}" type="datetimeFigureOut">
               <a:rPr lang="zh-CN" altLang="en-US" smtClean="0"/>
-              <a:t>2023/11/20</a:t>
+              <a:t>2023/12/4</a:t>
             </a:fld>
             <a:endParaRPr lang="zh-CN" altLang="en-US"/>
           </a:p>
@@ -1866,7 +1868,7 @@
           <a:p>
             <a:fld id="{C61D74A4-027F-4A2B-8B92-D0C194C50910}" type="datetimeFigureOut">
               <a:rPr lang="zh-CN" altLang="en-US" smtClean="0"/>
-              <a:t>2023/11/20</a:t>
+              <a:t>2023/12/4</a:t>
             </a:fld>
             <a:endParaRPr lang="zh-CN" altLang="en-US"/>
           </a:p>
@@ -2278,7 +2280,7 @@
           <a:p>
             <a:fld id="{C61D74A4-027F-4A2B-8B92-D0C194C50910}" type="datetimeFigureOut">
               <a:rPr lang="zh-CN" altLang="en-US" smtClean="0"/>
-              <a:t>2023/11/20</a:t>
+              <a:t>2023/12/4</a:t>
             </a:fld>
             <a:endParaRPr lang="zh-CN" altLang="en-US"/>
           </a:p>
@@ -2419,7 +2421,7 @@
           <a:p>
             <a:fld id="{C61D74A4-027F-4A2B-8B92-D0C194C50910}" type="datetimeFigureOut">
               <a:rPr lang="zh-CN" altLang="en-US" smtClean="0"/>
-              <a:t>2023/11/20</a:t>
+              <a:t>2023/12/4</a:t>
             </a:fld>
             <a:endParaRPr lang="zh-CN" altLang="en-US"/>
           </a:p>
@@ -2532,7 +2534,7 @@
           <a:p>
             <a:fld id="{C61D74A4-027F-4A2B-8B92-D0C194C50910}" type="datetimeFigureOut">
               <a:rPr lang="zh-CN" altLang="en-US" smtClean="0"/>
-              <a:t>2023/11/20</a:t>
+              <a:t>2023/12/4</a:t>
             </a:fld>
             <a:endParaRPr lang="zh-CN" altLang="en-US"/>
           </a:p>
@@ -2843,7 +2845,7 @@
           <a:p>
             <a:fld id="{C61D74A4-027F-4A2B-8B92-D0C194C50910}" type="datetimeFigureOut">
               <a:rPr lang="zh-CN" altLang="en-US" smtClean="0"/>
-              <a:t>2023/11/20</a:t>
+              <a:t>2023/12/4</a:t>
             </a:fld>
             <a:endParaRPr lang="zh-CN" altLang="en-US"/>
           </a:p>
@@ -3131,7 +3133,7 @@
           <a:p>
             <a:fld id="{C61D74A4-027F-4A2B-8B92-D0C194C50910}" type="datetimeFigureOut">
               <a:rPr lang="zh-CN" altLang="en-US" smtClean="0"/>
-              <a:t>2023/11/20</a:t>
+              <a:t>2023/12/4</a:t>
             </a:fld>
             <a:endParaRPr lang="zh-CN" altLang="en-US"/>
           </a:p>
@@ -3372,7 +3374,7 @@
           <a:p>
             <a:fld id="{C61D74A4-027F-4A2B-8B92-D0C194C50910}" type="datetimeFigureOut">
               <a:rPr lang="zh-CN" altLang="en-US" smtClean="0"/>
-              <a:t>2023/11/20</a:t>
+              <a:t>2023/12/4</a:t>
             </a:fld>
             <a:endParaRPr lang="zh-CN" altLang="en-US"/>
           </a:p>
@@ -8179,6 +8181,66 @@
 </p:sld>
 </file>
 
+<file path=ppt/slides/slide29.xml><?xml version="1.0" encoding="utf-8"?>
+<p:sld xmlns:a="http://schemas.openxmlformats.org/drawingml/2006/main" xmlns:r="http://schemas.openxmlformats.org/officeDocument/2006/relationships" xmlns:p="http://schemas.openxmlformats.org/presentationml/2006/main">
+  <p:cSld>
+    <p:spTree>
+      <p:nvGrpSpPr>
+        <p:cNvPr id="1" name=""/>
+        <p:cNvGrpSpPr/>
+        <p:nvPr/>
+      </p:nvGrpSpPr>
+      <p:grpSpPr>
+        <a:xfrm>
+          <a:off x="0" y="0"/>
+          <a:ext cx="0" cy="0"/>
+          <a:chOff x="0" y="0"/>
+          <a:chExt cx="0" cy="0"/>
+        </a:xfrm>
+      </p:grpSpPr>
+      <p:pic>
+        <p:nvPicPr>
+          <p:cNvPr id="4" name="图片 3">
+            <a:extLst>
+              <a:ext uri="{FF2B5EF4-FFF2-40B4-BE49-F238E27FC236}">
+                <a16:creationId xmlns:a16="http://schemas.microsoft.com/office/drawing/2014/main" id="{86A6D91B-C8A7-4CB4-8282-F0EF9B7C9BB1}"/>
+              </a:ext>
+            </a:extLst>
+          </p:cNvPr>
+          <p:cNvPicPr>
+            <a:picLocks noChangeAspect="1"/>
+          </p:cNvPicPr>
+          <p:nvPr/>
+        </p:nvPicPr>
+        <p:blipFill>
+          <a:blip r:embed="rId2"/>
+          <a:stretch>
+            <a:fillRect/>
+          </a:stretch>
+        </p:blipFill>
+        <p:spPr>
+          <a:xfrm>
+            <a:off x="683880" y="443587"/>
+            <a:ext cx="5906012" cy="3414056"/>
+          </a:xfrm>
+          <a:prstGeom prst="rect">
+            <a:avLst/>
+          </a:prstGeom>
+        </p:spPr>
+      </p:pic>
+    </p:spTree>
+    <p:extLst>
+      <p:ext uri="{BB962C8B-B14F-4D97-AF65-F5344CB8AC3E}">
+        <p14:creationId xmlns:p14="http://schemas.microsoft.com/office/powerpoint/2010/main" val="2852107379"/>
+      </p:ext>
+    </p:extLst>
+  </p:cSld>
+  <p:clrMapOvr>
+    <a:masterClrMapping/>
+  </p:clrMapOvr>
+</p:sld>
+</file>
+
 <file path=ppt/slides/slide3.xml><?xml version="1.0" encoding="utf-8"?>
 <p:sld xmlns:a="http://schemas.openxmlformats.org/drawingml/2006/main" xmlns:r="http://schemas.openxmlformats.org/officeDocument/2006/relationships" xmlns:p="http://schemas.openxmlformats.org/presentationml/2006/main">
   <p:cSld>
@@ -8362,6 +8424,96 @@
     <p:extLst>
       <p:ext uri="{BB962C8B-B14F-4D97-AF65-F5344CB8AC3E}">
         <p14:creationId xmlns:p14="http://schemas.microsoft.com/office/powerpoint/2010/main" val="1525841761"/>
+      </p:ext>
+    </p:extLst>
+  </p:cSld>
+  <p:clrMapOvr>
+    <a:masterClrMapping/>
+  </p:clrMapOvr>
+</p:sld>
+</file>
+
+<file path=ppt/slides/slide30.xml><?xml version="1.0" encoding="utf-8"?>
+<p:sld xmlns:a="http://schemas.openxmlformats.org/drawingml/2006/main" xmlns:r="http://schemas.openxmlformats.org/officeDocument/2006/relationships" xmlns:p="http://schemas.openxmlformats.org/presentationml/2006/main">
+  <p:cSld>
+    <p:spTree>
+      <p:nvGrpSpPr>
+        <p:cNvPr id="1" name=""/>
+        <p:cNvGrpSpPr/>
+        <p:nvPr/>
+      </p:nvGrpSpPr>
+      <p:grpSpPr>
+        <a:xfrm>
+          <a:off x="0" y="0"/>
+          <a:ext cx="0" cy="0"/>
+          <a:chOff x="0" y="0"/>
+          <a:chExt cx="0" cy="0"/>
+        </a:xfrm>
+      </p:grpSpPr>
+      <p:pic>
+        <p:nvPicPr>
+          <p:cNvPr id="4" name="图片 3">
+            <a:extLst>
+              <a:ext uri="{FF2B5EF4-FFF2-40B4-BE49-F238E27FC236}">
+                <a16:creationId xmlns:a16="http://schemas.microsoft.com/office/drawing/2014/main" id="{615242F5-0EAE-4DB8-B29E-B2AB2941BD50}"/>
+              </a:ext>
+            </a:extLst>
+          </p:cNvPr>
+          <p:cNvPicPr>
+            <a:picLocks noChangeAspect="1"/>
+          </p:cNvPicPr>
+          <p:nvPr/>
+        </p:nvPicPr>
+        <p:blipFill>
+          <a:blip r:embed="rId2"/>
+          <a:stretch>
+            <a:fillRect/>
+          </a:stretch>
+        </p:blipFill>
+        <p:spPr>
+          <a:xfrm>
+            <a:off x="204721" y="273379"/>
+            <a:ext cx="5585944" cy="3772227"/>
+          </a:xfrm>
+          <a:prstGeom prst="rect">
+            <a:avLst/>
+          </a:prstGeom>
+        </p:spPr>
+      </p:pic>
+      <p:pic>
+        <p:nvPicPr>
+          <p:cNvPr id="5" name="图片 4">
+            <a:extLst>
+              <a:ext uri="{FF2B5EF4-FFF2-40B4-BE49-F238E27FC236}">
+                <a16:creationId xmlns:a16="http://schemas.microsoft.com/office/drawing/2014/main" id="{765CBF09-7F91-425D-AFC5-6DA3E2E5ABF8}"/>
+              </a:ext>
+            </a:extLst>
+          </p:cNvPr>
+          <p:cNvPicPr>
+            <a:picLocks noChangeAspect="1"/>
+          </p:cNvPicPr>
+          <p:nvPr/>
+        </p:nvPicPr>
+        <p:blipFill>
+          <a:blip r:embed="rId3"/>
+          <a:stretch>
+            <a:fillRect/>
+          </a:stretch>
+        </p:blipFill>
+        <p:spPr>
+          <a:xfrm>
+            <a:off x="6096000" y="143474"/>
+            <a:ext cx="5502117" cy="6233700"/>
+          </a:xfrm>
+          <a:prstGeom prst="rect">
+            <a:avLst/>
+          </a:prstGeom>
+        </p:spPr>
+      </p:pic>
+    </p:spTree>
+    <p:extLst>
+      <p:ext uri="{BB962C8B-B14F-4D97-AF65-F5344CB8AC3E}">
+        <p14:creationId xmlns:p14="http://schemas.microsoft.com/office/powerpoint/2010/main" val="963582803"/>
       </p:ext>
     </p:extLst>
   </p:cSld>

--- a/docs/scade.pptx
+++ b/docs/scade.pptx
@@ -5,7 +5,7 @@
     <p:sldMasterId id="2147483648" r:id="rId1"/>
   </p:sldMasterIdLst>
   <p:notesMasterIdLst>
-    <p:notesMasterId r:id="rId32"/>
+    <p:notesMasterId r:id="rId36"/>
   </p:notesMasterIdLst>
   <p:sldIdLst>
     <p:sldId id="256" r:id="rId2"/>
@@ -37,7 +37,11 @@
     <p:sldId id="279" r:id="rId28"/>
     <p:sldId id="282" r:id="rId29"/>
     <p:sldId id="285" r:id="rId30"/>
-    <p:sldId id="286" r:id="rId31"/>
+    <p:sldId id="287" r:id="rId31"/>
+    <p:sldId id="286" r:id="rId32"/>
+    <p:sldId id="288" r:id="rId33"/>
+    <p:sldId id="289" r:id="rId34"/>
+    <p:sldId id="290" r:id="rId35"/>
   </p:sldIdLst>
   <p:sldSz cx="12192000" cy="6858000"/>
   <p:notesSz cx="6858000" cy="9144000"/>
@@ -226,7 +230,7 @@
           <a:p>
             <a:fld id="{3744C8BF-56B8-46D4-ADA5-A0AF811348DF}" type="datetimeFigureOut">
               <a:rPr lang="zh-CN" altLang="en-US" smtClean="0"/>
-              <a:t>2023/12/4</a:t>
+              <a:t>2023/12/18</a:t>
             </a:fld>
             <a:endParaRPr lang="zh-CN" altLang="en-US"/>
           </a:p>
@@ -724,7 +728,7 @@
           <a:p>
             <a:fld id="{C61D74A4-027F-4A2B-8B92-D0C194C50910}" type="datetimeFigureOut">
               <a:rPr lang="zh-CN" altLang="en-US" smtClean="0"/>
-              <a:t>2023/12/4</a:t>
+              <a:t>2023/12/18</a:t>
             </a:fld>
             <a:endParaRPr lang="zh-CN" altLang="en-US"/>
           </a:p>
@@ -922,7 +926,7 @@
           <a:p>
             <a:fld id="{C61D74A4-027F-4A2B-8B92-D0C194C50910}" type="datetimeFigureOut">
               <a:rPr lang="zh-CN" altLang="en-US" smtClean="0"/>
-              <a:t>2023/12/4</a:t>
+              <a:t>2023/12/18</a:t>
             </a:fld>
             <a:endParaRPr lang="zh-CN" altLang="en-US"/>
           </a:p>
@@ -1130,7 +1134,7 @@
           <a:p>
             <a:fld id="{C61D74A4-027F-4A2B-8B92-D0C194C50910}" type="datetimeFigureOut">
               <a:rPr lang="zh-CN" altLang="en-US" smtClean="0"/>
-              <a:t>2023/12/4</a:t>
+              <a:t>2023/12/18</a:t>
             </a:fld>
             <a:endParaRPr lang="zh-CN" altLang="en-US"/>
           </a:p>
@@ -1328,7 +1332,7 @@
           <a:p>
             <a:fld id="{C61D74A4-027F-4A2B-8B92-D0C194C50910}" type="datetimeFigureOut">
               <a:rPr lang="zh-CN" altLang="en-US" smtClean="0"/>
-              <a:t>2023/12/4</a:t>
+              <a:t>2023/12/18</a:t>
             </a:fld>
             <a:endParaRPr lang="zh-CN" altLang="en-US"/>
           </a:p>
@@ -1603,7 +1607,7 @@
           <a:p>
             <a:fld id="{C61D74A4-027F-4A2B-8B92-D0C194C50910}" type="datetimeFigureOut">
               <a:rPr lang="zh-CN" altLang="en-US" smtClean="0"/>
-              <a:t>2023/12/4</a:t>
+              <a:t>2023/12/18</a:t>
             </a:fld>
             <a:endParaRPr lang="zh-CN" altLang="en-US"/>
           </a:p>
@@ -1868,7 +1872,7 @@
           <a:p>
             <a:fld id="{C61D74A4-027F-4A2B-8B92-D0C194C50910}" type="datetimeFigureOut">
               <a:rPr lang="zh-CN" altLang="en-US" smtClean="0"/>
-              <a:t>2023/12/4</a:t>
+              <a:t>2023/12/18</a:t>
             </a:fld>
             <a:endParaRPr lang="zh-CN" altLang="en-US"/>
           </a:p>
@@ -2280,7 +2284,7 @@
           <a:p>
             <a:fld id="{C61D74A4-027F-4A2B-8B92-D0C194C50910}" type="datetimeFigureOut">
               <a:rPr lang="zh-CN" altLang="en-US" smtClean="0"/>
-              <a:t>2023/12/4</a:t>
+              <a:t>2023/12/18</a:t>
             </a:fld>
             <a:endParaRPr lang="zh-CN" altLang="en-US"/>
           </a:p>
@@ -2421,7 +2425,7 @@
           <a:p>
             <a:fld id="{C61D74A4-027F-4A2B-8B92-D0C194C50910}" type="datetimeFigureOut">
               <a:rPr lang="zh-CN" altLang="en-US" smtClean="0"/>
-              <a:t>2023/12/4</a:t>
+              <a:t>2023/12/18</a:t>
             </a:fld>
             <a:endParaRPr lang="zh-CN" altLang="en-US"/>
           </a:p>
@@ -2534,7 +2538,7 @@
           <a:p>
             <a:fld id="{C61D74A4-027F-4A2B-8B92-D0C194C50910}" type="datetimeFigureOut">
               <a:rPr lang="zh-CN" altLang="en-US" smtClean="0"/>
-              <a:t>2023/12/4</a:t>
+              <a:t>2023/12/18</a:t>
             </a:fld>
             <a:endParaRPr lang="zh-CN" altLang="en-US"/>
           </a:p>
@@ -2845,7 +2849,7 @@
           <a:p>
             <a:fld id="{C61D74A4-027F-4A2B-8B92-D0C194C50910}" type="datetimeFigureOut">
               <a:rPr lang="zh-CN" altLang="en-US" smtClean="0"/>
-              <a:t>2023/12/4</a:t>
+              <a:t>2023/12/18</a:t>
             </a:fld>
             <a:endParaRPr lang="zh-CN" altLang="en-US"/>
           </a:p>
@@ -3133,7 +3137,7 @@
           <a:p>
             <a:fld id="{C61D74A4-027F-4A2B-8B92-D0C194C50910}" type="datetimeFigureOut">
               <a:rPr lang="zh-CN" altLang="en-US" smtClean="0"/>
-              <a:t>2023/12/4</a:t>
+              <a:t>2023/12/18</a:t>
             </a:fld>
             <a:endParaRPr lang="zh-CN" altLang="en-US"/>
           </a:p>
@@ -3374,7 +3378,7 @@
           <a:p>
             <a:fld id="{C61D74A4-027F-4A2B-8B92-D0C194C50910}" type="datetimeFigureOut">
               <a:rPr lang="zh-CN" altLang="en-US" smtClean="0"/>
-              <a:t>2023/12/4</a:t>
+              <a:t>2023/12/18</a:t>
             </a:fld>
             <a:endParaRPr lang="zh-CN" altLang="en-US"/>
           </a:p>
@@ -8198,40 +8202,398 @@
           <a:chExt cx="0" cy="0"/>
         </a:xfrm>
       </p:grpSpPr>
-      <p:pic>
-        <p:nvPicPr>
-          <p:cNvPr id="4" name="图片 3">
-            <a:extLst>
-              <a:ext uri="{FF2B5EF4-FFF2-40B4-BE49-F238E27FC236}">
-                <a16:creationId xmlns:a16="http://schemas.microsoft.com/office/drawing/2014/main" id="{86A6D91B-C8A7-4CB4-8282-F0EF9B7C9BB1}"/>
-              </a:ext>
-            </a:extLst>
-          </p:cNvPr>
-          <p:cNvPicPr>
-            <a:picLocks noChangeAspect="1"/>
-          </p:cNvPicPr>
-          <p:nvPr/>
-        </p:nvPicPr>
-        <p:blipFill>
-          <a:blip r:embed="rId2"/>
-          <a:stretch>
-            <a:fillRect/>
-          </a:stretch>
-        </p:blipFill>
-        <p:spPr>
-          <a:xfrm>
-            <a:off x="683880" y="443587"/>
-            <a:ext cx="5906012" cy="3414056"/>
-          </a:xfrm>
-          <a:prstGeom prst="rect">
-            <a:avLst/>
-          </a:prstGeom>
-        </p:spPr>
-      </p:pic>
+      <p:sp>
+        <p:nvSpPr>
+          <p:cNvPr id="4" name="文本框 3">
+            <a:extLst>
+              <a:ext uri="{FF2B5EF4-FFF2-40B4-BE49-F238E27FC236}">
+                <a16:creationId xmlns:a16="http://schemas.microsoft.com/office/drawing/2014/main" id="{4DA41EFE-7A63-66FC-C34B-F629D51084A7}"/>
+              </a:ext>
+            </a:extLst>
+          </p:cNvPr>
+          <p:cNvSpPr txBox="1"/>
+          <p:nvPr/>
+        </p:nvSpPr>
+        <p:spPr>
+          <a:xfrm>
+            <a:off x="242371" y="187287"/>
+            <a:ext cx="3966072" cy="369332"/>
+          </a:xfrm>
+          <a:prstGeom prst="rect">
+            <a:avLst/>
+          </a:prstGeom>
+          <a:noFill/>
+        </p:spPr>
+        <p:txBody>
+          <a:bodyPr wrap="square" rtlCol="0">
+            <a:spAutoFit/>
+          </a:bodyPr>
+          <a:lstStyle/>
+          <a:p>
+            <a:r>
+              <a:rPr kumimoji="1" lang="zh-CN" altLang="en-US" dirty="0"/>
+              <a:t>结构体</a:t>
+            </a:r>
+          </a:p>
+        </p:txBody>
+      </p:sp>
+      <p:sp>
+        <p:nvSpPr>
+          <p:cNvPr id="5" name="文本框 4">
+            <a:extLst>
+              <a:ext uri="{FF2B5EF4-FFF2-40B4-BE49-F238E27FC236}">
+                <a16:creationId xmlns:a16="http://schemas.microsoft.com/office/drawing/2014/main" id="{2AB61C85-5A42-AD67-8D48-6CFC04F97B58}"/>
+              </a:ext>
+            </a:extLst>
+          </p:cNvPr>
+          <p:cNvSpPr txBox="1"/>
+          <p:nvPr/>
+        </p:nvSpPr>
+        <p:spPr>
+          <a:xfrm>
+            <a:off x="242371" y="749147"/>
+            <a:ext cx="6455884" cy="1754326"/>
+          </a:xfrm>
+          <a:prstGeom prst="rect">
+            <a:avLst/>
+          </a:prstGeom>
+          <a:noFill/>
+        </p:spPr>
+        <p:txBody>
+          <a:bodyPr wrap="square" rtlCol="0">
+            <a:spAutoFit/>
+          </a:bodyPr>
+          <a:lstStyle/>
+          <a:p>
+            <a:r>
+              <a:rPr kumimoji="1" lang="en" altLang="zh-CN" dirty="0" err="1"/>
+              <a:t>Type_expr</a:t>
+            </a:r>
+            <a:r>
+              <a:rPr kumimoji="1" lang="en" altLang="zh-CN" dirty="0"/>
+              <a:t> :: = {  </a:t>
+            </a:r>
+            <a:r>
+              <a:rPr kumimoji="1" lang="en" altLang="zh-CN" dirty="0" err="1"/>
+              <a:t>Field_decl</a:t>
+            </a:r>
+            <a:r>
+              <a:rPr kumimoji="1" lang="en" altLang="zh-CN" dirty="0"/>
+              <a:t> Type_expr_1 } Type_expr_2</a:t>
+            </a:r>
+          </a:p>
+          <a:p>
+            <a:r>
+              <a:rPr kumimoji="1" lang="en" altLang="zh-CN" dirty="0"/>
+              <a:t>Type_expr_1 ::= , </a:t>
+            </a:r>
+            <a:r>
+              <a:rPr kumimoji="1" lang="en" altLang="zh-CN" dirty="0" err="1"/>
+              <a:t>Field_decl</a:t>
+            </a:r>
+            <a:r>
+              <a:rPr kumimoji="1" lang="en" altLang="zh-CN" dirty="0"/>
+              <a:t> Type_expr_1</a:t>
+            </a:r>
+          </a:p>
+          <a:p>
+            <a:r>
+              <a:rPr kumimoji="1" lang="en" altLang="zh-CN" dirty="0"/>
+              <a:t>             ::= $</a:t>
+            </a:r>
+          </a:p>
+          <a:p>
+            <a:r>
+              <a:rPr kumimoji="1" lang="en" altLang="zh-CN" dirty="0"/>
+              <a:t>Type_expr_2 ::= ^ Expr Type_expr_2</a:t>
+            </a:r>
+          </a:p>
+          <a:p>
+            <a:r>
+              <a:rPr kumimoji="1" lang="en" altLang="zh-CN" dirty="0"/>
+              <a:t>             ::= $</a:t>
+            </a:r>
+          </a:p>
+          <a:p>
+            <a:r>
+              <a:rPr kumimoji="1" lang="en" altLang="zh-CN" dirty="0" err="1"/>
+              <a:t>Field_decl</a:t>
+            </a:r>
+            <a:r>
+              <a:rPr kumimoji="1" lang="en" altLang="zh-CN" dirty="0"/>
+              <a:t> ::= id : </a:t>
+            </a:r>
+            <a:r>
+              <a:rPr kumimoji="1" lang="en" altLang="zh-CN" dirty="0" err="1"/>
+              <a:t>Type_expr</a:t>
+            </a:r>
+            <a:endParaRPr kumimoji="1" lang="en" altLang="zh-CN" dirty="0"/>
+          </a:p>
+        </p:txBody>
+      </p:sp>
+      <p:sp>
+        <p:nvSpPr>
+          <p:cNvPr id="6" name="文本框 5">
+            <a:extLst>
+              <a:ext uri="{FF2B5EF4-FFF2-40B4-BE49-F238E27FC236}">
+                <a16:creationId xmlns:a16="http://schemas.microsoft.com/office/drawing/2014/main" id="{B8012144-4CF0-9E72-035C-4015FA19F786}"/>
+              </a:ext>
+            </a:extLst>
+          </p:cNvPr>
+          <p:cNvSpPr txBox="1"/>
+          <p:nvPr/>
+        </p:nvSpPr>
+        <p:spPr>
+          <a:xfrm>
+            <a:off x="374573" y="2776251"/>
+            <a:ext cx="8108415" cy="369332"/>
+          </a:xfrm>
+          <a:prstGeom prst="rect">
+            <a:avLst/>
+          </a:prstGeom>
+          <a:noFill/>
+        </p:spPr>
+        <p:txBody>
+          <a:bodyPr wrap="square" rtlCol="0">
+            <a:spAutoFit/>
+          </a:bodyPr>
+          <a:lstStyle/>
+          <a:p>
+            <a:r>
+              <a:rPr kumimoji="1" lang="zh-CN" altLang="en-US" b="1" dirty="0"/>
+              <a:t>使用</a:t>
+            </a:r>
+            <a:r>
+              <a:rPr kumimoji="1" lang="en-US" altLang="zh-CN" b="1" dirty="0"/>
+              <a:t>type</a:t>
+            </a:r>
+            <a:r>
+              <a:rPr kumimoji="1" lang="zh-CN" altLang="en-US" b="1" dirty="0"/>
+              <a:t>定义结构体</a:t>
+            </a:r>
+            <a:endParaRPr kumimoji="1" lang="en-US" altLang="zh-CN" b="1" dirty="0"/>
+          </a:p>
+        </p:txBody>
+      </p:sp>
+      <p:sp>
+        <p:nvSpPr>
+          <p:cNvPr id="2" name="文本框 1">
+            <a:extLst>
+              <a:ext uri="{FF2B5EF4-FFF2-40B4-BE49-F238E27FC236}">
+                <a16:creationId xmlns:a16="http://schemas.microsoft.com/office/drawing/2014/main" id="{04CBF17A-84B8-4CF2-77FF-21AA33163087}"/>
+              </a:ext>
+            </a:extLst>
+          </p:cNvPr>
+          <p:cNvSpPr txBox="1"/>
+          <p:nvPr/>
+        </p:nvSpPr>
+        <p:spPr>
+          <a:xfrm>
+            <a:off x="506776" y="3272010"/>
+            <a:ext cx="5871990" cy="2585323"/>
+          </a:xfrm>
+          <a:prstGeom prst="rect">
+            <a:avLst/>
+          </a:prstGeom>
+          <a:noFill/>
+        </p:spPr>
+        <p:txBody>
+          <a:bodyPr wrap="square" rtlCol="0">
+            <a:spAutoFit/>
+          </a:bodyPr>
+          <a:lstStyle/>
+          <a:p>
+            <a:r>
+              <a:rPr lang="en" altLang="zh-CN" dirty="0" err="1"/>
+              <a:t>Scade</a:t>
+            </a:r>
+            <a:r>
+              <a:rPr lang="zh-CN" altLang="en" dirty="0"/>
+              <a:t>程序</a:t>
+            </a:r>
+            <a:endParaRPr lang="en-US" altLang="zh-CN" dirty="0"/>
+          </a:p>
+          <a:p>
+            <a:r>
+              <a:rPr lang="en" altLang="zh-CN" dirty="0"/>
+              <a:t>type t2={tt1:bool,tt2:int32,tt3:float32};</a:t>
+            </a:r>
+          </a:p>
+          <a:p>
+            <a:endParaRPr kumimoji="1" lang="en" altLang="zh-CN" dirty="0"/>
+          </a:p>
+          <a:p>
+            <a:r>
+              <a:rPr kumimoji="1" lang="zh-CN" altLang="en" dirty="0"/>
+              <a:t>转化后</a:t>
+            </a:r>
+            <a:r>
+              <a:rPr kumimoji="1" lang="en-US" altLang="zh-CN" dirty="0"/>
+              <a:t>C</a:t>
+            </a:r>
+            <a:r>
+              <a:rPr kumimoji="1" lang="zh-CN" altLang="en-US" dirty="0"/>
+              <a:t>程序</a:t>
+            </a:r>
+            <a:endParaRPr kumimoji="1" lang="en-US" altLang="zh-CN" dirty="0"/>
+          </a:p>
+          <a:p>
+            <a:r>
+              <a:rPr lang="en" altLang="zh-CN" dirty="0"/>
+              <a:t>typedef struct { </a:t>
+            </a:r>
+          </a:p>
+          <a:p>
+            <a:r>
+              <a:rPr lang="zh-CN" altLang="en-US" dirty="0"/>
+              <a:t>     </a:t>
+            </a:r>
+            <a:r>
+              <a:rPr lang="en" altLang="zh-CN" dirty="0"/>
+              <a:t>bool tt1; </a:t>
+            </a:r>
+          </a:p>
+          <a:p>
+            <a:r>
+              <a:rPr lang="zh-CN" altLang="en-US" dirty="0"/>
+              <a:t>     </a:t>
+            </a:r>
+            <a:r>
+              <a:rPr lang="en" altLang="zh-CN" dirty="0"/>
+              <a:t>int tt2; </a:t>
+            </a:r>
+          </a:p>
+          <a:p>
+            <a:r>
+              <a:rPr lang="zh-CN" altLang="en-US" dirty="0"/>
+              <a:t>     </a:t>
+            </a:r>
+            <a:r>
+              <a:rPr lang="en" altLang="zh-CN" dirty="0"/>
+              <a:t>float tt3; </a:t>
+            </a:r>
+          </a:p>
+          <a:p>
+            <a:r>
+              <a:rPr lang="en" altLang="zh-CN" dirty="0"/>
+              <a:t>}t2;</a:t>
+            </a:r>
+            <a:endParaRPr kumimoji="1" lang="zh-CN" altLang="en-US" dirty="0"/>
+          </a:p>
+        </p:txBody>
+      </p:sp>
+      <p:sp>
+        <p:nvSpPr>
+          <p:cNvPr id="7" name="文本框 6">
+            <a:extLst>
+              <a:ext uri="{FF2B5EF4-FFF2-40B4-BE49-F238E27FC236}">
+                <a16:creationId xmlns:a16="http://schemas.microsoft.com/office/drawing/2014/main" id="{47540211-1E29-EE43-C91B-D5F08304F497}"/>
+              </a:ext>
+            </a:extLst>
+          </p:cNvPr>
+          <p:cNvSpPr txBox="1"/>
+          <p:nvPr/>
+        </p:nvSpPr>
+        <p:spPr>
+          <a:xfrm>
+            <a:off x="5464366" y="3241094"/>
+            <a:ext cx="4627085" cy="2585323"/>
+          </a:xfrm>
+          <a:prstGeom prst="rect">
+            <a:avLst/>
+          </a:prstGeom>
+          <a:noFill/>
+        </p:spPr>
+        <p:txBody>
+          <a:bodyPr wrap="square" rtlCol="0">
+            <a:spAutoFit/>
+          </a:bodyPr>
+          <a:lstStyle/>
+          <a:p>
+            <a:r>
+              <a:rPr kumimoji="1" lang="en-US" altLang="zh-CN" dirty="0" err="1"/>
+              <a:t>Scade</a:t>
+            </a:r>
+            <a:r>
+              <a:rPr kumimoji="1" lang="zh-CN" altLang="en-US" dirty="0"/>
+              <a:t>程序</a:t>
+            </a:r>
+            <a:endParaRPr kumimoji="1" lang="en-US" altLang="zh-CN" dirty="0"/>
+          </a:p>
+          <a:p>
+            <a:r>
+              <a:rPr lang="en" altLang="zh-CN" dirty="0"/>
+              <a:t>type t3={tt1:bool,tt2:int32,tt3:float32}^2;</a:t>
+            </a:r>
+            <a:endParaRPr kumimoji="1" lang="en-US" altLang="zh-CN" dirty="0"/>
+          </a:p>
+          <a:p>
+            <a:endParaRPr kumimoji="1" lang="en-US" altLang="zh-CN" dirty="0"/>
+          </a:p>
+          <a:p>
+            <a:r>
+              <a:rPr kumimoji="1" lang="zh-CN" altLang="en-US" dirty="0"/>
+              <a:t>转化后</a:t>
+            </a:r>
+            <a:r>
+              <a:rPr kumimoji="1" lang="en-US" altLang="zh-CN" dirty="0"/>
+              <a:t>C</a:t>
+            </a:r>
+            <a:r>
+              <a:rPr kumimoji="1" lang="zh-CN" altLang="en-US" dirty="0"/>
+              <a:t>程序</a:t>
+            </a:r>
+            <a:endParaRPr kumimoji="1" lang="en-US" altLang="zh-CN" dirty="0"/>
+          </a:p>
+          <a:p>
+            <a:r>
+              <a:rPr lang="en" altLang="zh-CN" dirty="0"/>
+              <a:t>typedef struct { </a:t>
+            </a:r>
+          </a:p>
+          <a:p>
+            <a:r>
+              <a:rPr lang="zh-CN" altLang="en-US" dirty="0"/>
+              <a:t>    </a:t>
+            </a:r>
+            <a:r>
+              <a:rPr lang="en" altLang="zh-CN" dirty="0"/>
+              <a:t>bool tt1; </a:t>
+            </a:r>
+          </a:p>
+          <a:p>
+            <a:r>
+              <a:rPr lang="zh-CN" altLang="en-US" dirty="0"/>
+              <a:t>    </a:t>
+            </a:r>
+            <a:r>
+              <a:rPr lang="en" altLang="zh-CN" dirty="0"/>
+              <a:t>int tt2; </a:t>
+            </a:r>
+          </a:p>
+          <a:p>
+            <a:r>
+              <a:rPr lang="zh-CN" altLang="en-US" dirty="0"/>
+              <a:t>    </a:t>
+            </a:r>
+            <a:r>
+              <a:rPr lang="en" altLang="zh-CN" dirty="0"/>
+              <a:t>float tt3; </a:t>
+            </a:r>
+          </a:p>
+          <a:p>
+            <a:r>
+              <a:rPr lang="en" altLang="zh-CN" dirty="0"/>
+              <a:t>}t3[2];</a:t>
+            </a:r>
+            <a:endParaRPr kumimoji="1" lang="en-US" altLang="zh-CN" dirty="0"/>
+          </a:p>
+        </p:txBody>
+      </p:sp>
     </p:spTree>
     <p:extLst>
       <p:ext uri="{BB962C8B-B14F-4D97-AF65-F5344CB8AC3E}">
-        <p14:creationId xmlns:p14="http://schemas.microsoft.com/office/powerpoint/2010/main" val="2852107379"/>
+        <p14:creationId xmlns:p14="http://schemas.microsoft.com/office/powerpoint/2010/main" val="2628688210"/>
       </p:ext>
     </p:extLst>
   </p:cSld>
@@ -8450,12 +8812,822 @@
           <a:chExt cx="0" cy="0"/>
         </a:xfrm>
       </p:grpSpPr>
+      <p:sp>
+        <p:nvSpPr>
+          <p:cNvPr id="4" name="文本框 3">
+            <a:extLst>
+              <a:ext uri="{FF2B5EF4-FFF2-40B4-BE49-F238E27FC236}">
+                <a16:creationId xmlns:a16="http://schemas.microsoft.com/office/drawing/2014/main" id="{1AAD0F7B-395D-3A94-88BA-A8C377ECFC8A}"/>
+              </a:ext>
+            </a:extLst>
+          </p:cNvPr>
+          <p:cNvSpPr txBox="1"/>
+          <p:nvPr/>
+        </p:nvSpPr>
+        <p:spPr>
+          <a:xfrm>
+            <a:off x="198304" y="209320"/>
+            <a:ext cx="6566053" cy="369332"/>
+          </a:xfrm>
+          <a:prstGeom prst="rect">
+            <a:avLst/>
+          </a:prstGeom>
+          <a:noFill/>
+        </p:spPr>
+        <p:txBody>
+          <a:bodyPr wrap="square" rtlCol="0">
+            <a:spAutoFit/>
+          </a:bodyPr>
+          <a:lstStyle/>
+          <a:p>
+            <a:r>
+              <a:rPr kumimoji="1" lang="zh-CN" altLang="en-US" b="1" dirty="0"/>
+              <a:t>使用</a:t>
+            </a:r>
+            <a:r>
+              <a:rPr kumimoji="1" lang="en-US" altLang="zh-CN" b="1" dirty="0"/>
+              <a:t>const</a:t>
+            </a:r>
+            <a:r>
+              <a:rPr kumimoji="1" lang="zh-CN" altLang="en-US" b="1" dirty="0"/>
+              <a:t>定义并初始化</a:t>
+            </a:r>
+          </a:p>
+        </p:txBody>
+      </p:sp>
+      <p:sp>
+        <p:nvSpPr>
+          <p:cNvPr id="5" name="文本框 4">
+            <a:extLst>
+              <a:ext uri="{FF2B5EF4-FFF2-40B4-BE49-F238E27FC236}">
+                <a16:creationId xmlns:a16="http://schemas.microsoft.com/office/drawing/2014/main" id="{F269A5F3-23AD-7B2A-DAC6-20DBA1E08409}"/>
+              </a:ext>
+            </a:extLst>
+          </p:cNvPr>
+          <p:cNvSpPr txBox="1"/>
+          <p:nvPr/>
+        </p:nvSpPr>
+        <p:spPr>
+          <a:xfrm>
+            <a:off x="198304" y="3526999"/>
+            <a:ext cx="2492990" cy="369332"/>
+          </a:xfrm>
+          <a:prstGeom prst="rect">
+            <a:avLst/>
+          </a:prstGeom>
+          <a:noFill/>
+        </p:spPr>
+        <p:txBody>
+          <a:bodyPr wrap="none" rtlCol="0">
+            <a:spAutoFit/>
+          </a:bodyPr>
+          <a:lstStyle/>
+          <a:p>
+            <a:r>
+              <a:rPr kumimoji="1" lang="zh-CN" altLang="en-US" b="1" dirty="0"/>
+              <a:t>直接用于输入输出参数</a:t>
+            </a:r>
+          </a:p>
+        </p:txBody>
+      </p:sp>
+      <p:sp>
+        <p:nvSpPr>
+          <p:cNvPr id="2" name="文本框 1">
+            <a:extLst>
+              <a:ext uri="{FF2B5EF4-FFF2-40B4-BE49-F238E27FC236}">
+                <a16:creationId xmlns:a16="http://schemas.microsoft.com/office/drawing/2014/main" id="{C29A989B-1342-875B-830D-2D32D37381E3}"/>
+              </a:ext>
+            </a:extLst>
+          </p:cNvPr>
+          <p:cNvSpPr txBox="1"/>
+          <p:nvPr/>
+        </p:nvSpPr>
+        <p:spPr>
+          <a:xfrm>
+            <a:off x="198304" y="760164"/>
+            <a:ext cx="6037243" cy="2585323"/>
+          </a:xfrm>
+          <a:prstGeom prst="rect">
+            <a:avLst/>
+          </a:prstGeom>
+          <a:noFill/>
+        </p:spPr>
+        <p:txBody>
+          <a:bodyPr wrap="square" rtlCol="0">
+            <a:spAutoFit/>
+          </a:bodyPr>
+          <a:lstStyle/>
+          <a:p>
+            <a:r>
+              <a:rPr lang="en" altLang="zh-CN" dirty="0"/>
+              <a:t>type t2={tt1:bool,tt2:int32,tt3:float32}; </a:t>
+            </a:r>
+          </a:p>
+          <a:p>
+            <a:endParaRPr lang="en-US" altLang="zh-CN" dirty="0"/>
+          </a:p>
+          <a:p>
+            <a:r>
+              <a:rPr lang="en" altLang="zh-CN" dirty="0"/>
+              <a:t>const c7:t2={tt1:false,tt2:8,tt3:0.2}; </a:t>
+            </a:r>
+          </a:p>
+          <a:p>
+            <a:endParaRPr lang="en" altLang="zh-CN" dirty="0"/>
+          </a:p>
+          <a:p>
+            <a:r>
+              <a:rPr lang="en" altLang="zh-CN" dirty="0"/>
+              <a:t>type t3={tt1:bool,tt2:int32,tt3:float32}^2; </a:t>
+            </a:r>
+          </a:p>
+          <a:p>
+            <a:endParaRPr lang="en" altLang="zh-CN" dirty="0"/>
+          </a:p>
+          <a:p>
+            <a:r>
+              <a:rPr lang="en" altLang="zh-CN" dirty="0"/>
+              <a:t>const c8:t3=[{tt1:false,tt2:3,tt3:0.1},{tt1:true,tt2:2,tt3:0.2}];</a:t>
+            </a:r>
+          </a:p>
+          <a:p>
+            <a:endParaRPr kumimoji="1" lang="en" altLang="zh-CN" dirty="0"/>
+          </a:p>
+          <a:p>
+            <a:r>
+              <a:rPr lang="en" altLang="zh-CN" dirty="0"/>
+              <a:t>const c9:{tt1:bool,tt2:int8}={tt1:false,tt2:8};</a:t>
+            </a:r>
+            <a:endParaRPr kumimoji="1" lang="zh-CN" altLang="en-US" dirty="0"/>
+          </a:p>
+        </p:txBody>
+      </p:sp>
+      <p:sp>
+        <p:nvSpPr>
+          <p:cNvPr id="3" name="文本框 2">
+            <a:extLst>
+              <a:ext uri="{FF2B5EF4-FFF2-40B4-BE49-F238E27FC236}">
+                <a16:creationId xmlns:a16="http://schemas.microsoft.com/office/drawing/2014/main" id="{641B304B-640A-D613-97E1-122CCD2E428B}"/>
+              </a:ext>
+            </a:extLst>
+          </p:cNvPr>
+          <p:cNvSpPr txBox="1"/>
+          <p:nvPr/>
+        </p:nvSpPr>
+        <p:spPr>
+          <a:xfrm>
+            <a:off x="6096000" y="578652"/>
+            <a:ext cx="5482728" cy="2862322"/>
+          </a:xfrm>
+          <a:prstGeom prst="rect">
+            <a:avLst/>
+          </a:prstGeom>
+          <a:noFill/>
+        </p:spPr>
+        <p:txBody>
+          <a:bodyPr wrap="square" rtlCol="0">
+            <a:spAutoFit/>
+          </a:bodyPr>
+          <a:lstStyle/>
+          <a:p>
+            <a:r>
+              <a:rPr kumimoji="1" lang="zh-CN" altLang="en-US" dirty="0"/>
+              <a:t>转化后</a:t>
+            </a:r>
+            <a:r>
+              <a:rPr kumimoji="1" lang="en-US" altLang="zh-CN" dirty="0"/>
+              <a:t>C</a:t>
+            </a:r>
+            <a:r>
+              <a:rPr kumimoji="1" lang="zh-CN" altLang="en-US" dirty="0"/>
+              <a:t>程序</a:t>
+            </a:r>
+            <a:endParaRPr kumimoji="1" lang="en-US" altLang="zh-CN" dirty="0"/>
+          </a:p>
+          <a:p>
+            <a:r>
+              <a:rPr lang="en" altLang="zh-CN" dirty="0"/>
+              <a:t>extern const t2 c7 = {false,8,0.2};</a:t>
+            </a:r>
+            <a:endParaRPr kumimoji="1" lang="en-US" altLang="zh-CN" dirty="0"/>
+          </a:p>
+          <a:p>
+            <a:endParaRPr kumimoji="1" lang="en-US" altLang="zh-CN" dirty="0"/>
+          </a:p>
+          <a:p>
+            <a:r>
+              <a:rPr lang="en" altLang="zh-CN" dirty="0"/>
+              <a:t>extern const t3 c8 = { {false,</a:t>
+            </a:r>
+            <a:r>
+              <a:rPr lang="en-US" altLang="zh-CN" dirty="0"/>
+              <a:t>3,</a:t>
+            </a:r>
+            <a:r>
+              <a:rPr lang="en" altLang="zh-CN" dirty="0"/>
+              <a:t>0.1},{true,2,0.2} };</a:t>
+            </a:r>
+          </a:p>
+          <a:p>
+            <a:endParaRPr kumimoji="1" lang="en-US" altLang="zh-CN" dirty="0"/>
+          </a:p>
+          <a:p>
+            <a:r>
+              <a:rPr lang="en" altLang="zh-CN" dirty="0"/>
+              <a:t>typedef struct { </a:t>
+            </a:r>
+          </a:p>
+          <a:p>
+            <a:r>
+              <a:rPr lang="en" altLang="zh-CN" dirty="0"/>
+              <a:t>    bool tt1; </a:t>
+            </a:r>
+          </a:p>
+          <a:p>
+            <a:r>
+              <a:rPr lang="en" altLang="zh-CN" dirty="0"/>
+              <a:t>    int tt2; </a:t>
+            </a:r>
+          </a:p>
+          <a:p>
+            <a:r>
+              <a:rPr lang="en" altLang="zh-CN" dirty="0"/>
+              <a:t>}</a:t>
+            </a:r>
+            <a:r>
+              <a:rPr lang="en" altLang="zh-CN" dirty="0" err="1"/>
+              <a:t>tmp</a:t>
+            </a:r>
+            <a:r>
+              <a:rPr lang="en" altLang="zh-CN" dirty="0"/>
+              <a:t>;</a:t>
+            </a:r>
+            <a:endParaRPr kumimoji="1" lang="en-US" altLang="zh-CN" dirty="0"/>
+          </a:p>
+          <a:p>
+            <a:r>
+              <a:rPr lang="en" altLang="zh-CN" dirty="0"/>
+              <a:t>extern const </a:t>
+            </a:r>
+            <a:r>
+              <a:rPr lang="en" altLang="zh-CN" dirty="0" err="1"/>
+              <a:t>tmp</a:t>
+            </a:r>
+            <a:r>
+              <a:rPr lang="en" altLang="zh-CN" dirty="0"/>
+              <a:t> c9 = { false,8 };</a:t>
+            </a:r>
+            <a:endParaRPr kumimoji="1" lang="en" altLang="zh-CN" dirty="0"/>
+          </a:p>
+        </p:txBody>
+      </p:sp>
+      <p:sp>
+        <p:nvSpPr>
+          <p:cNvPr id="6" name="文本框 5">
+            <a:extLst>
+              <a:ext uri="{FF2B5EF4-FFF2-40B4-BE49-F238E27FC236}">
+                <a16:creationId xmlns:a16="http://schemas.microsoft.com/office/drawing/2014/main" id="{7B425160-48CA-BC6A-145B-C892A627DC0D}"/>
+              </a:ext>
+            </a:extLst>
+          </p:cNvPr>
+          <p:cNvSpPr txBox="1"/>
+          <p:nvPr/>
+        </p:nvSpPr>
+        <p:spPr>
+          <a:xfrm>
+            <a:off x="198304" y="4087258"/>
+            <a:ext cx="6367749" cy="1200329"/>
+          </a:xfrm>
+          <a:prstGeom prst="rect">
+            <a:avLst/>
+          </a:prstGeom>
+          <a:noFill/>
+        </p:spPr>
+        <p:txBody>
+          <a:bodyPr wrap="square" rtlCol="0">
+            <a:spAutoFit/>
+          </a:bodyPr>
+          <a:lstStyle/>
+          <a:p>
+            <a:r>
+              <a:rPr lang="en" altLang="zh-CN" dirty="0"/>
+              <a:t>function </a:t>
+            </a:r>
+            <a:r>
+              <a:rPr lang="en" altLang="zh-CN" dirty="0" err="1"/>
+              <a:t>structTest</a:t>
+            </a:r>
+            <a:r>
+              <a:rPr lang="en" altLang="zh-CN" dirty="0"/>
+              <a:t>(in1:{t1:int32}) returns(o1:int32) </a:t>
+            </a:r>
+          </a:p>
+          <a:p>
+            <a:r>
+              <a:rPr lang="en" altLang="zh-CN" dirty="0"/>
+              <a:t>let </a:t>
+            </a:r>
+          </a:p>
+          <a:p>
+            <a:r>
+              <a:rPr lang="en" altLang="zh-CN" dirty="0"/>
+              <a:t>    o1=in1.t1+3; </a:t>
+            </a:r>
+          </a:p>
+          <a:p>
+            <a:r>
+              <a:rPr lang="en" altLang="zh-CN" dirty="0" err="1"/>
+              <a:t>tel</a:t>
+            </a:r>
+            <a:endParaRPr kumimoji="1" lang="zh-CN" altLang="en-US" dirty="0"/>
+          </a:p>
+        </p:txBody>
+      </p:sp>
+      <p:sp>
+        <p:nvSpPr>
+          <p:cNvPr id="7" name="文本框 6">
+            <a:extLst>
+              <a:ext uri="{FF2B5EF4-FFF2-40B4-BE49-F238E27FC236}">
+                <a16:creationId xmlns:a16="http://schemas.microsoft.com/office/drawing/2014/main" id="{6F0CD1F6-6926-493C-9A6A-2D674456FFF7}"/>
+              </a:ext>
+            </a:extLst>
+          </p:cNvPr>
+          <p:cNvSpPr txBox="1"/>
+          <p:nvPr/>
+        </p:nvSpPr>
+        <p:spPr>
+          <a:xfrm>
+            <a:off x="5716471" y="4739850"/>
+            <a:ext cx="6323860" cy="1477328"/>
+          </a:xfrm>
+          <a:prstGeom prst="rect">
+            <a:avLst/>
+          </a:prstGeom>
+          <a:noFill/>
+        </p:spPr>
+        <p:txBody>
+          <a:bodyPr wrap="square" rtlCol="0">
+            <a:spAutoFit/>
+          </a:bodyPr>
+          <a:lstStyle/>
+          <a:p>
+            <a:r>
+              <a:rPr lang="en-US" altLang="zh-CN"/>
+              <a:t>void structTest(inC_structTest *inC, outC_structTest *outC)</a:t>
+            </a:r>
+          </a:p>
+          <a:p>
+            <a:r>
+              <a:rPr lang="en-US" altLang="zh-CN"/>
+              <a:t>{</a:t>
+            </a:r>
+          </a:p>
+          <a:p>
+            <a:r>
+              <a:rPr lang="en-US" altLang="zh-CN"/>
+              <a:t>  outC-&gt;o1 = inC-&gt;in1.t1 + kcg_lit_int32(3);</a:t>
+            </a:r>
+          </a:p>
+          <a:p>
+            <a:r>
+              <a:rPr lang="en-US" altLang="zh-CN"/>
+              <a:t>}</a:t>
+            </a:r>
+          </a:p>
+          <a:p>
+            <a:endParaRPr lang="zh-CN" altLang="en-US"/>
+          </a:p>
+        </p:txBody>
+      </p:sp>
+      <p:sp>
+        <p:nvSpPr>
+          <p:cNvPr id="8" name="文本框 7">
+            <a:extLst>
+              <a:ext uri="{FF2B5EF4-FFF2-40B4-BE49-F238E27FC236}">
+                <a16:creationId xmlns:a16="http://schemas.microsoft.com/office/drawing/2014/main" id="{642F8D1B-2C49-41BE-BC91-86B0CD34C4C8}"/>
+              </a:ext>
+            </a:extLst>
+          </p:cNvPr>
+          <p:cNvSpPr txBox="1"/>
+          <p:nvPr/>
+        </p:nvSpPr>
+        <p:spPr>
+          <a:xfrm>
+            <a:off x="9240294" y="3711665"/>
+            <a:ext cx="2672178" cy="1200329"/>
+          </a:xfrm>
+          <a:prstGeom prst="rect">
+            <a:avLst/>
+          </a:prstGeom>
+          <a:noFill/>
+        </p:spPr>
+        <p:txBody>
+          <a:bodyPr wrap="square" rtlCol="0">
+            <a:spAutoFit/>
+          </a:bodyPr>
+          <a:lstStyle/>
+          <a:p>
+            <a:r>
+              <a:rPr lang="en-US" altLang="zh-CN"/>
+              <a:t>typedef struct { </a:t>
+            </a:r>
+          </a:p>
+          <a:p>
+            <a:r>
+              <a:rPr lang="en-US" altLang="zh-CN"/>
+              <a:t>tmp2 in1; </a:t>
+            </a:r>
+          </a:p>
+          <a:p>
+            <a:r>
+              <a:rPr lang="en-US" altLang="zh-CN"/>
+              <a:t>} inC_structTest;</a:t>
+            </a:r>
+          </a:p>
+          <a:p>
+            <a:endParaRPr lang="zh-CN" altLang="en-US"/>
+          </a:p>
+        </p:txBody>
+      </p:sp>
+      <p:sp>
+        <p:nvSpPr>
+          <p:cNvPr id="9" name="文本框 8">
+            <a:extLst>
+              <a:ext uri="{FF2B5EF4-FFF2-40B4-BE49-F238E27FC236}">
+                <a16:creationId xmlns:a16="http://schemas.microsoft.com/office/drawing/2014/main" id="{D1C60878-2AE5-468A-B519-123A0F8E3A4A}"/>
+              </a:ext>
+            </a:extLst>
+          </p:cNvPr>
+          <p:cNvSpPr txBox="1"/>
+          <p:nvPr/>
+        </p:nvSpPr>
+        <p:spPr>
+          <a:xfrm>
+            <a:off x="6235547" y="3737603"/>
+            <a:ext cx="3604334" cy="1200329"/>
+          </a:xfrm>
+          <a:prstGeom prst="rect">
+            <a:avLst/>
+          </a:prstGeom>
+          <a:noFill/>
+        </p:spPr>
+        <p:txBody>
+          <a:bodyPr wrap="square" rtlCol="0">
+            <a:spAutoFit/>
+          </a:bodyPr>
+          <a:lstStyle/>
+          <a:p>
+            <a:r>
+              <a:rPr lang="en-US" altLang="zh-CN"/>
+              <a:t>typedef struct { </a:t>
+            </a:r>
+          </a:p>
+          <a:p>
+            <a:r>
+              <a:rPr lang="en-US" altLang="zh-CN"/>
+              <a:t>kcg_int32 t1; </a:t>
+            </a:r>
+          </a:p>
+          <a:p>
+            <a:r>
+              <a:rPr lang="en-US" altLang="zh-CN"/>
+              <a:t>} tmp2;</a:t>
+            </a:r>
+          </a:p>
+          <a:p>
+            <a:endParaRPr lang="zh-CN" altLang="en-US"/>
+          </a:p>
+        </p:txBody>
+      </p:sp>
+    </p:spTree>
+    <p:extLst>
+      <p:ext uri="{BB962C8B-B14F-4D97-AF65-F5344CB8AC3E}">
+        <p14:creationId xmlns:p14="http://schemas.microsoft.com/office/powerpoint/2010/main" val="2575251222"/>
+      </p:ext>
+    </p:extLst>
+  </p:cSld>
+  <p:clrMapOvr>
+    <a:masterClrMapping/>
+  </p:clrMapOvr>
+</p:sld>
+</file>
+
+<file path=ppt/slides/slide31.xml><?xml version="1.0" encoding="utf-8"?>
+<p:sld xmlns:a="http://schemas.openxmlformats.org/drawingml/2006/main" xmlns:r="http://schemas.openxmlformats.org/officeDocument/2006/relationships" xmlns:p="http://schemas.openxmlformats.org/presentationml/2006/main">
+  <p:cSld>
+    <p:spTree>
+      <p:nvGrpSpPr>
+        <p:cNvPr id="1" name=""/>
+        <p:cNvGrpSpPr/>
+        <p:nvPr/>
+      </p:nvGrpSpPr>
+      <p:grpSpPr>
+        <a:xfrm>
+          <a:off x="0" y="0"/>
+          <a:ext cx="0" cy="0"/>
+          <a:chOff x="0" y="0"/>
+          <a:chExt cx="0" cy="0"/>
+        </a:xfrm>
+      </p:grpSpPr>
+      <p:sp>
+        <p:nvSpPr>
+          <p:cNvPr id="4" name="文本框 3">
+            <a:extLst>
+              <a:ext uri="{FF2B5EF4-FFF2-40B4-BE49-F238E27FC236}">
+                <a16:creationId xmlns:a16="http://schemas.microsoft.com/office/drawing/2014/main" id="{B8712464-D556-0B07-34F4-E20AC57645CD}"/>
+              </a:ext>
+            </a:extLst>
+          </p:cNvPr>
+          <p:cNvSpPr txBox="1"/>
+          <p:nvPr/>
+        </p:nvSpPr>
+        <p:spPr>
+          <a:xfrm>
+            <a:off x="308472" y="176270"/>
+            <a:ext cx="4682169" cy="1477328"/>
+          </a:xfrm>
+          <a:prstGeom prst="rect">
+            <a:avLst/>
+          </a:prstGeom>
+          <a:noFill/>
+        </p:spPr>
+        <p:txBody>
+          <a:bodyPr wrap="square" rtlCol="0">
+            <a:spAutoFit/>
+          </a:bodyPr>
+          <a:lstStyle/>
+          <a:p>
+            <a:r>
+              <a:rPr kumimoji="1" lang="en" altLang="zh-CN" dirty="0" err="1"/>
+              <a:t>Struct_expr</a:t>
+            </a:r>
+            <a:r>
+              <a:rPr kumimoji="1" lang="en" altLang="zh-CN" dirty="0"/>
+              <a:t> ::= </a:t>
+            </a:r>
+            <a:r>
+              <a:rPr kumimoji="1" lang="en" altLang="zh-CN" dirty="0" err="1"/>
+              <a:t>Epxr</a:t>
+            </a:r>
+            <a:r>
+              <a:rPr kumimoji="1" lang="en" altLang="zh-CN" dirty="0"/>
+              <a:t> . id</a:t>
+            </a:r>
+          </a:p>
+          <a:p>
+            <a:r>
+              <a:rPr kumimoji="1" lang="en" altLang="zh-CN" dirty="0"/>
+              <a:t>                   ::= { </a:t>
+            </a:r>
+            <a:r>
+              <a:rPr kumimoji="1" lang="en" altLang="zh-CN" dirty="0" err="1"/>
+              <a:t>Label_expr</a:t>
+            </a:r>
+            <a:r>
+              <a:rPr kumimoji="1" lang="en" altLang="zh-CN" dirty="0"/>
+              <a:t> Struct_expr_1 }</a:t>
+            </a:r>
+          </a:p>
+          <a:p>
+            <a:r>
+              <a:rPr kumimoji="1" lang="en" altLang="zh-CN" dirty="0"/>
+              <a:t>Struct_expr_1 ::= , </a:t>
+            </a:r>
+            <a:r>
+              <a:rPr kumimoji="1" lang="en" altLang="zh-CN" dirty="0" err="1"/>
+              <a:t>Label_expr</a:t>
+            </a:r>
+            <a:r>
+              <a:rPr kumimoji="1" lang="en" altLang="zh-CN" dirty="0"/>
+              <a:t> Struct_expr_1</a:t>
+            </a:r>
+          </a:p>
+          <a:p>
+            <a:r>
+              <a:rPr kumimoji="1" lang="en" altLang="zh-CN" dirty="0"/>
+              <a:t>                      ::= $</a:t>
+            </a:r>
+          </a:p>
+          <a:p>
+            <a:r>
+              <a:rPr kumimoji="1" lang="en" altLang="zh-CN" dirty="0" err="1"/>
+              <a:t>Label_expr</a:t>
+            </a:r>
+            <a:r>
+              <a:rPr kumimoji="1" lang="en" altLang="zh-CN" dirty="0"/>
+              <a:t> ::= id : Expr</a:t>
+            </a:r>
+            <a:endParaRPr kumimoji="1" lang="zh-CN" altLang="en-US" dirty="0"/>
+          </a:p>
+        </p:txBody>
+      </p:sp>
+      <p:sp>
+        <p:nvSpPr>
+          <p:cNvPr id="2" name="文本框 1">
+            <a:extLst>
+              <a:ext uri="{FF2B5EF4-FFF2-40B4-BE49-F238E27FC236}">
+                <a16:creationId xmlns:a16="http://schemas.microsoft.com/office/drawing/2014/main" id="{9677685D-F885-4F12-BF43-DDE8CF0D1C0E}"/>
+              </a:ext>
+            </a:extLst>
+          </p:cNvPr>
+          <p:cNvSpPr txBox="1"/>
+          <p:nvPr/>
+        </p:nvSpPr>
+        <p:spPr>
+          <a:xfrm>
+            <a:off x="308472" y="2510642"/>
+            <a:ext cx="5930284" cy="369332"/>
+          </a:xfrm>
+          <a:prstGeom prst="rect">
+            <a:avLst/>
+          </a:prstGeom>
+          <a:noFill/>
+        </p:spPr>
+        <p:txBody>
+          <a:bodyPr wrap="square" rtlCol="0">
+            <a:spAutoFit/>
+          </a:bodyPr>
+          <a:lstStyle/>
+          <a:p>
+            <a:r>
+              <a:rPr lang="en" altLang="zh-CN"/>
+              <a:t>const c7:t2={tt1:false,tt2:8,tt3:0.2}; </a:t>
+            </a:r>
+          </a:p>
+        </p:txBody>
+      </p:sp>
+      <p:sp>
+        <p:nvSpPr>
+          <p:cNvPr id="3" name="文本框 2">
+            <a:extLst>
+              <a:ext uri="{FF2B5EF4-FFF2-40B4-BE49-F238E27FC236}">
+                <a16:creationId xmlns:a16="http://schemas.microsoft.com/office/drawing/2014/main" id="{0EDC0587-5B7C-42E2-B2EA-7E6AF9FFF17F}"/>
+              </a:ext>
+            </a:extLst>
+          </p:cNvPr>
+          <p:cNvSpPr txBox="1"/>
+          <p:nvPr/>
+        </p:nvSpPr>
+        <p:spPr>
+          <a:xfrm>
+            <a:off x="399495" y="1864311"/>
+            <a:ext cx="3773010" cy="646331"/>
+          </a:xfrm>
+          <a:prstGeom prst="rect">
+            <a:avLst/>
+          </a:prstGeom>
+          <a:noFill/>
+        </p:spPr>
+        <p:txBody>
+          <a:bodyPr wrap="square" rtlCol="0">
+            <a:spAutoFit/>
+          </a:bodyPr>
+          <a:lstStyle/>
+          <a:p>
+            <a:r>
+              <a:rPr lang="en-US" altLang="zh-CN" b="1"/>
+              <a:t>const</a:t>
+            </a:r>
+            <a:r>
+              <a:rPr lang="zh-CN" altLang="en-US" b="1"/>
+              <a:t>初始化</a:t>
+            </a:r>
+            <a:endParaRPr lang="en-US" altLang="zh-CN" b="1"/>
+          </a:p>
+          <a:p>
+            <a:r>
+              <a:rPr lang="en-US" altLang="zh-CN"/>
+              <a:t>Scade</a:t>
+            </a:r>
+            <a:r>
+              <a:rPr lang="zh-CN" altLang="en-US"/>
+              <a:t>程序</a:t>
+            </a:r>
+          </a:p>
+        </p:txBody>
+      </p:sp>
+      <p:sp>
+        <p:nvSpPr>
+          <p:cNvPr id="5" name="文本框 4">
+            <a:extLst>
+              <a:ext uri="{FF2B5EF4-FFF2-40B4-BE49-F238E27FC236}">
+                <a16:creationId xmlns:a16="http://schemas.microsoft.com/office/drawing/2014/main" id="{5E00975D-BC29-478A-8EE4-7A8B5B1DDAAD}"/>
+              </a:ext>
+            </a:extLst>
+          </p:cNvPr>
+          <p:cNvSpPr txBox="1"/>
+          <p:nvPr/>
+        </p:nvSpPr>
+        <p:spPr>
+          <a:xfrm>
+            <a:off x="399495" y="2947387"/>
+            <a:ext cx="4154750" cy="646331"/>
+          </a:xfrm>
+          <a:prstGeom prst="rect">
+            <a:avLst/>
+          </a:prstGeom>
+          <a:noFill/>
+        </p:spPr>
+        <p:txBody>
+          <a:bodyPr wrap="square" rtlCol="0">
+            <a:spAutoFit/>
+          </a:bodyPr>
+          <a:lstStyle/>
+          <a:p>
+            <a:r>
+              <a:rPr lang="zh-CN" altLang="en-US"/>
+              <a:t>转化后</a:t>
+            </a:r>
+            <a:r>
+              <a:rPr lang="en-US" altLang="zh-CN"/>
+              <a:t>C</a:t>
+            </a:r>
+            <a:r>
+              <a:rPr lang="zh-CN" altLang="en-US"/>
+              <a:t>程序</a:t>
+            </a:r>
+            <a:endParaRPr lang="en" altLang="zh-CN"/>
+          </a:p>
+          <a:p>
+            <a:r>
+              <a:rPr lang="en" altLang="zh-CN"/>
+              <a:t>extern const t2 c7 = {false,8,0.2};</a:t>
+            </a:r>
+            <a:endParaRPr kumimoji="1" lang="en-US" altLang="zh-CN"/>
+          </a:p>
+        </p:txBody>
+      </p:sp>
+    </p:spTree>
+    <p:extLst>
+      <p:ext uri="{BB962C8B-B14F-4D97-AF65-F5344CB8AC3E}">
+        <p14:creationId xmlns:p14="http://schemas.microsoft.com/office/powerpoint/2010/main" val="3818820110"/>
+      </p:ext>
+    </p:extLst>
+  </p:cSld>
+  <p:clrMapOvr>
+    <a:masterClrMapping/>
+  </p:clrMapOvr>
+</p:sld>
+</file>
+
+<file path=ppt/slides/slide32.xml><?xml version="1.0" encoding="utf-8"?>
+<p:sld xmlns:a="http://schemas.openxmlformats.org/drawingml/2006/main" xmlns:r="http://schemas.openxmlformats.org/officeDocument/2006/relationships" xmlns:p="http://schemas.openxmlformats.org/presentationml/2006/main">
+  <p:cSld>
+    <p:spTree>
+      <p:nvGrpSpPr>
+        <p:cNvPr id="1" name=""/>
+        <p:cNvGrpSpPr/>
+        <p:nvPr/>
+      </p:nvGrpSpPr>
+      <p:grpSpPr>
+        <a:xfrm>
+          <a:off x="0" y="0"/>
+          <a:ext cx="0" cy="0"/>
+          <a:chOff x="0" y="0"/>
+          <a:chExt cx="0" cy="0"/>
+        </a:xfrm>
+      </p:grpSpPr>
+      <p:sp>
+        <p:nvSpPr>
+          <p:cNvPr id="4" name="文本框 3">
+            <a:extLst>
+              <a:ext uri="{FF2B5EF4-FFF2-40B4-BE49-F238E27FC236}">
+                <a16:creationId xmlns:a16="http://schemas.microsoft.com/office/drawing/2014/main" id="{DBFFF9E3-BC37-4E28-8C8B-8277630EC54A}"/>
+              </a:ext>
+            </a:extLst>
+          </p:cNvPr>
+          <p:cNvSpPr txBox="1"/>
+          <p:nvPr/>
+        </p:nvSpPr>
+        <p:spPr>
+          <a:xfrm>
+            <a:off x="0" y="7820"/>
+            <a:ext cx="4296792" cy="369332"/>
+          </a:xfrm>
+          <a:prstGeom prst="rect">
+            <a:avLst/>
+          </a:prstGeom>
+          <a:noFill/>
+        </p:spPr>
+        <p:txBody>
+          <a:bodyPr wrap="square" rtlCol="0">
+            <a:spAutoFit/>
+          </a:bodyPr>
+          <a:lstStyle/>
+          <a:p>
+            <a:r>
+              <a:rPr lang="zh-CN" altLang="en-US" b="1"/>
+              <a:t>未添加的文法</a:t>
+            </a:r>
+          </a:p>
+        </p:txBody>
+      </p:sp>
       <p:pic>
         <p:nvPicPr>
-          <p:cNvPr id="4" name="图片 3">
-            <a:extLst>
-              <a:ext uri="{FF2B5EF4-FFF2-40B4-BE49-F238E27FC236}">
-                <a16:creationId xmlns:a16="http://schemas.microsoft.com/office/drawing/2014/main" id="{615242F5-0EAE-4DB8-B29E-B2AB2941BD50}"/>
+          <p:cNvPr id="5" name="图片 4">
+            <a:extLst>
+              <a:ext uri="{FF2B5EF4-FFF2-40B4-BE49-F238E27FC236}">
+                <a16:creationId xmlns:a16="http://schemas.microsoft.com/office/drawing/2014/main" id="{56F0CC9D-E49A-41E7-B339-CCE8F7D9AD1F}"/>
               </a:ext>
             </a:extLst>
           </p:cNvPr>
@@ -8472,20 +9644,170 @@
         </p:blipFill>
         <p:spPr>
           <a:xfrm>
-            <a:off x="204721" y="273379"/>
-            <a:ext cx="5585944" cy="3772227"/>
+            <a:off x="266330" y="703099"/>
+            <a:ext cx="5410669" cy="1265030"/>
           </a:xfrm>
           <a:prstGeom prst="rect">
             <a:avLst/>
           </a:prstGeom>
         </p:spPr>
       </p:pic>
+      <p:sp>
+        <p:nvSpPr>
+          <p:cNvPr id="9" name="文本框 8">
+            <a:extLst>
+              <a:ext uri="{FF2B5EF4-FFF2-40B4-BE49-F238E27FC236}">
+                <a16:creationId xmlns:a16="http://schemas.microsoft.com/office/drawing/2014/main" id="{BAD52B07-C55C-4753-B484-99D9AE259239}"/>
+              </a:ext>
+            </a:extLst>
+          </p:cNvPr>
+          <p:cNvSpPr txBox="1"/>
+          <p:nvPr/>
+        </p:nvSpPr>
+        <p:spPr>
+          <a:xfrm>
+            <a:off x="159799" y="2254928"/>
+            <a:ext cx="9401452" cy="5355312"/>
+          </a:xfrm>
+          <a:prstGeom prst="rect">
+            <a:avLst/>
+          </a:prstGeom>
+          <a:noFill/>
+        </p:spPr>
+        <p:txBody>
+          <a:bodyPr wrap="square" rtlCol="0">
+            <a:spAutoFit/>
+          </a:bodyPr>
+          <a:lstStyle/>
+          <a:p>
+            <a:r>
+              <a:rPr lang="en-US" altLang="zh-CN"/>
+              <a:t>Params ::= ( Params_1 )</a:t>
+            </a:r>
+            <a:br>
+              <a:rPr lang="en-US" altLang="zh-CN"/>
+            </a:br>
+            <a:r>
+              <a:rPr lang="en-US" altLang="zh-CN"/>
+              <a:t>Params_1 ::= Var_decls Params_2</a:t>
+            </a:r>
+            <a:br>
+              <a:rPr lang="en-US" altLang="zh-CN"/>
+            </a:br>
+            <a:r>
+              <a:rPr lang="en-US" altLang="zh-CN"/>
+              <a:t>          	::= $</a:t>
+            </a:r>
+            <a:br>
+              <a:rPr lang="en-US" altLang="zh-CN"/>
+            </a:br>
+            <a:r>
+              <a:rPr lang="en-US" altLang="zh-CN"/>
+              <a:t>Params_2 ::= ; Var_decls Params_2</a:t>
+            </a:r>
+            <a:br>
+              <a:rPr lang="en-US" altLang="zh-CN"/>
+            </a:br>
+            <a:r>
+              <a:rPr lang="en-US" altLang="zh-CN"/>
+              <a:t>          	::= $</a:t>
+            </a:r>
+          </a:p>
+          <a:p>
+            <a:r>
+              <a:rPr lang="en-US" altLang="zh-CN"/>
+              <a:t>Var_decls ::= Var_id Var_decls_1 : Type_expr Var_decls_2 </a:t>
+            </a:r>
+          </a:p>
+          <a:p>
+            <a:r>
+              <a:rPr lang="en-US" altLang="zh-CN"/>
+              <a:t>	       Var_decls_3 Var_decls_4</a:t>
+            </a:r>
+            <a:br>
+              <a:rPr lang="en-US" altLang="zh-CN"/>
+            </a:br>
+            <a:r>
+              <a:rPr lang="en-US" altLang="zh-CN"/>
+              <a:t>Var_decls_1 ::= , Var_id Var_decls_1</a:t>
+            </a:r>
+            <a:br>
+              <a:rPr lang="en-US" altLang="zh-CN"/>
+            </a:br>
+            <a:r>
+              <a:rPr lang="en-US" altLang="zh-CN"/>
+              <a:t>             ::= $</a:t>
+            </a:r>
+            <a:br>
+              <a:rPr lang="en-US" altLang="zh-CN"/>
+            </a:br>
+            <a:r>
+              <a:rPr lang="en-US" altLang="zh-CN"/>
+              <a:t>Var_decls_2 ::= When_decl</a:t>
+            </a:r>
+            <a:br>
+              <a:rPr lang="en-US" altLang="zh-CN"/>
+            </a:br>
+            <a:r>
+              <a:rPr lang="en-US" altLang="zh-CN"/>
+              <a:t>             ::= $</a:t>
+            </a:r>
+            <a:br>
+              <a:rPr lang="en-US" altLang="zh-CN"/>
+            </a:br>
+            <a:r>
+              <a:rPr lang="en-US" altLang="zh-CN"/>
+              <a:t>Var_decls_3 ::= Default_decl</a:t>
+            </a:r>
+            <a:br>
+              <a:rPr lang="en-US" altLang="zh-CN"/>
+            </a:br>
+            <a:r>
+              <a:rPr lang="en-US" altLang="zh-CN"/>
+              <a:t>             ::= $</a:t>
+            </a:r>
+            <a:br>
+              <a:rPr lang="en-US" altLang="zh-CN"/>
+            </a:br>
+            <a:r>
+              <a:rPr lang="en-US" altLang="zh-CN"/>
+              <a:t>Var_decls_4 ::= Last_decl</a:t>
+            </a:r>
+            <a:br>
+              <a:rPr lang="en-US" altLang="zh-CN"/>
+            </a:br>
+            <a:r>
+              <a:rPr lang="en-US" altLang="zh-CN"/>
+              <a:t>             ::= $</a:t>
+            </a:r>
+          </a:p>
+          <a:p>
+            <a:r>
+              <a:rPr lang="en-US" altLang="zh-CN" b="1">
+                <a:solidFill>
+                  <a:srgbClr val="FF0000"/>
+                </a:solidFill>
+              </a:rPr>
+              <a:t>Last_decl ::= last = Expr</a:t>
+            </a:r>
+          </a:p>
+          <a:p>
+            <a:endParaRPr lang="en-US" altLang="zh-CN"/>
+          </a:p>
+          <a:p>
+            <a:endParaRPr lang="en-US" altLang="zh-CN"/>
+          </a:p>
+          <a:p>
+            <a:endParaRPr lang="zh-CN" altLang="en-US"/>
+          </a:p>
+        </p:txBody>
+      </p:sp>
       <p:pic>
         <p:nvPicPr>
-          <p:cNvPr id="5" name="图片 4">
-            <a:extLst>
-              <a:ext uri="{FF2B5EF4-FFF2-40B4-BE49-F238E27FC236}">
-                <a16:creationId xmlns:a16="http://schemas.microsoft.com/office/drawing/2014/main" id="{765CBF09-7F91-425D-AFC5-6DA3E2E5ABF8}"/>
+          <p:cNvPr id="10" name="图片 9">
+            <a:extLst>
+              <a:ext uri="{FF2B5EF4-FFF2-40B4-BE49-F238E27FC236}">
+                <a16:creationId xmlns:a16="http://schemas.microsoft.com/office/drawing/2014/main" id="{49819853-7079-4370-BA2D-6FAF3799EF7F}"/>
               </a:ext>
             </a:extLst>
           </p:cNvPr>
@@ -8502,18 +9824,677 @@
         </p:blipFill>
         <p:spPr>
           <a:xfrm>
-            <a:off x="6096000" y="143474"/>
-            <a:ext cx="5502117" cy="6233700"/>
+            <a:off x="6810321" y="880707"/>
+            <a:ext cx="4671465" cy="5639289"/>
           </a:xfrm>
           <a:prstGeom prst="rect">
             <a:avLst/>
           </a:prstGeom>
         </p:spPr>
       </p:pic>
+      <p:sp>
+        <p:nvSpPr>
+          <p:cNvPr id="11" name="文本框 10">
+            <a:extLst>
+              <a:ext uri="{FF2B5EF4-FFF2-40B4-BE49-F238E27FC236}">
+                <a16:creationId xmlns:a16="http://schemas.microsoft.com/office/drawing/2014/main" id="{8D493EE6-A6E6-45D0-88BA-FD0458E05BBB}"/>
+              </a:ext>
+            </a:extLst>
+          </p:cNvPr>
+          <p:cNvSpPr txBox="1"/>
+          <p:nvPr/>
+        </p:nvSpPr>
+        <p:spPr>
+          <a:xfrm>
+            <a:off x="266330" y="333767"/>
+            <a:ext cx="2246051" cy="369332"/>
+          </a:xfrm>
+          <a:prstGeom prst="rect">
+            <a:avLst/>
+          </a:prstGeom>
+          <a:noFill/>
+        </p:spPr>
+        <p:txBody>
+          <a:bodyPr wrap="square" rtlCol="0">
+            <a:spAutoFit/>
+          </a:bodyPr>
+          <a:lstStyle/>
+          <a:p>
+            <a:r>
+              <a:rPr lang="en-US" altLang="zh-CN"/>
+              <a:t>Scade</a:t>
+            </a:r>
+            <a:r>
+              <a:rPr lang="zh-CN" altLang="en-US"/>
+              <a:t>程序</a:t>
+            </a:r>
+          </a:p>
+        </p:txBody>
+      </p:sp>
+      <p:sp>
+        <p:nvSpPr>
+          <p:cNvPr id="12" name="文本框 11">
+            <a:extLst>
+              <a:ext uri="{FF2B5EF4-FFF2-40B4-BE49-F238E27FC236}">
+                <a16:creationId xmlns:a16="http://schemas.microsoft.com/office/drawing/2014/main" id="{82F70CD5-5FD4-458F-8FE7-D71A44454A7C}"/>
+              </a:ext>
+            </a:extLst>
+          </p:cNvPr>
+          <p:cNvSpPr txBox="1"/>
+          <p:nvPr/>
+        </p:nvSpPr>
+        <p:spPr>
+          <a:xfrm>
+            <a:off x="6810321" y="338004"/>
+            <a:ext cx="2246051" cy="369332"/>
+          </a:xfrm>
+          <a:prstGeom prst="rect">
+            <a:avLst/>
+          </a:prstGeom>
+          <a:noFill/>
+        </p:spPr>
+        <p:txBody>
+          <a:bodyPr wrap="square" rtlCol="0">
+            <a:spAutoFit/>
+          </a:bodyPr>
+          <a:lstStyle/>
+          <a:p>
+            <a:r>
+              <a:rPr lang="zh-CN" altLang="en-US"/>
+              <a:t>转化后的</a:t>
+            </a:r>
+            <a:r>
+              <a:rPr lang="en-US" altLang="zh-CN"/>
+              <a:t>C</a:t>
+            </a:r>
+            <a:r>
+              <a:rPr lang="zh-CN" altLang="en-US"/>
+              <a:t>程序</a:t>
+            </a:r>
+          </a:p>
+        </p:txBody>
+      </p:sp>
+      <p:sp>
+        <p:nvSpPr>
+          <p:cNvPr id="13" name="文本框 12">
+            <a:extLst>
+              <a:ext uri="{FF2B5EF4-FFF2-40B4-BE49-F238E27FC236}">
+                <a16:creationId xmlns:a16="http://schemas.microsoft.com/office/drawing/2014/main" id="{DB74BDED-88A2-4A9F-9669-25E342E12837}"/>
+              </a:ext>
+            </a:extLst>
+          </p:cNvPr>
+          <p:cNvSpPr txBox="1"/>
+          <p:nvPr/>
+        </p:nvSpPr>
+        <p:spPr>
+          <a:xfrm>
+            <a:off x="159799" y="1968129"/>
+            <a:ext cx="2246051" cy="369332"/>
+          </a:xfrm>
+          <a:prstGeom prst="rect">
+            <a:avLst/>
+          </a:prstGeom>
+          <a:noFill/>
+        </p:spPr>
+        <p:txBody>
+          <a:bodyPr wrap="square" rtlCol="0">
+            <a:spAutoFit/>
+          </a:bodyPr>
+          <a:lstStyle/>
+          <a:p>
+            <a:r>
+              <a:rPr lang="en-US" altLang="zh-CN" b="1"/>
+              <a:t>Scade</a:t>
+            </a:r>
+            <a:r>
+              <a:rPr lang="zh-CN" altLang="en-US" b="1"/>
+              <a:t>对应的文法</a:t>
+            </a:r>
+          </a:p>
+        </p:txBody>
+      </p:sp>
     </p:spTree>
     <p:extLst>
       <p:ext uri="{BB962C8B-B14F-4D97-AF65-F5344CB8AC3E}">
-        <p14:creationId xmlns:p14="http://schemas.microsoft.com/office/powerpoint/2010/main" val="963582803"/>
+        <p14:creationId xmlns:p14="http://schemas.microsoft.com/office/powerpoint/2010/main" val="2412528168"/>
+      </p:ext>
+    </p:extLst>
+  </p:cSld>
+  <p:clrMapOvr>
+    <a:masterClrMapping/>
+  </p:clrMapOvr>
+</p:sld>
+</file>
+
+<file path=ppt/slides/slide33.xml><?xml version="1.0" encoding="utf-8"?>
+<p:sld xmlns:a="http://schemas.openxmlformats.org/drawingml/2006/main" xmlns:r="http://schemas.openxmlformats.org/officeDocument/2006/relationships" xmlns:p="http://schemas.openxmlformats.org/presentationml/2006/main">
+  <p:cSld>
+    <p:spTree>
+      <p:nvGrpSpPr>
+        <p:cNvPr id="1" name=""/>
+        <p:cNvGrpSpPr/>
+        <p:nvPr/>
+      </p:nvGrpSpPr>
+      <p:grpSpPr>
+        <a:xfrm>
+          <a:off x="0" y="0"/>
+          <a:ext cx="0" cy="0"/>
+          <a:chOff x="0" y="0"/>
+          <a:chExt cx="0" cy="0"/>
+        </a:xfrm>
+      </p:grpSpPr>
+      <p:pic>
+        <p:nvPicPr>
+          <p:cNvPr id="4" name="图片 3">
+            <a:extLst>
+              <a:ext uri="{FF2B5EF4-FFF2-40B4-BE49-F238E27FC236}">
+                <a16:creationId xmlns:a16="http://schemas.microsoft.com/office/drawing/2014/main" id="{E8C0155E-3684-4970-BCC2-2179DDF32436}"/>
+              </a:ext>
+            </a:extLst>
+          </p:cNvPr>
+          <p:cNvPicPr>
+            <a:picLocks noChangeAspect="1"/>
+          </p:cNvPicPr>
+          <p:nvPr/>
+        </p:nvPicPr>
+        <p:blipFill>
+          <a:blip r:embed="rId2"/>
+          <a:stretch>
+            <a:fillRect/>
+          </a:stretch>
+        </p:blipFill>
+        <p:spPr>
+          <a:xfrm>
+            <a:off x="204995" y="675097"/>
+            <a:ext cx="5601001" cy="3093988"/>
+          </a:xfrm>
+          <a:prstGeom prst="rect">
+            <a:avLst/>
+          </a:prstGeom>
+        </p:spPr>
+      </p:pic>
+      <p:sp>
+        <p:nvSpPr>
+          <p:cNvPr id="5" name="文本框 4">
+            <a:extLst>
+              <a:ext uri="{FF2B5EF4-FFF2-40B4-BE49-F238E27FC236}">
+                <a16:creationId xmlns:a16="http://schemas.microsoft.com/office/drawing/2014/main" id="{37B711BD-C297-422E-848A-8FB2D0D01837}"/>
+              </a:ext>
+            </a:extLst>
+          </p:cNvPr>
+          <p:cNvSpPr txBox="1"/>
+          <p:nvPr/>
+        </p:nvSpPr>
+        <p:spPr>
+          <a:xfrm>
+            <a:off x="329283" y="4820575"/>
+            <a:ext cx="3381584" cy="1200329"/>
+          </a:xfrm>
+          <a:prstGeom prst="rect">
+            <a:avLst/>
+          </a:prstGeom>
+          <a:noFill/>
+        </p:spPr>
+        <p:txBody>
+          <a:bodyPr wrap="square" rtlCol="0">
+            <a:spAutoFit/>
+          </a:bodyPr>
+          <a:lstStyle/>
+          <a:p>
+            <a:r>
+              <a:rPr lang="en-US" altLang="zh-CN"/>
+              <a:t>Expr ::= Id_expr</a:t>
+            </a:r>
+          </a:p>
+          <a:p>
+            <a:r>
+              <a:rPr lang="en-US" altLang="zh-CN"/>
+              <a:t>Id_expr ::= Path_id</a:t>
+            </a:r>
+            <a:br>
+              <a:rPr lang="en-US" altLang="zh-CN"/>
+            </a:br>
+            <a:r>
+              <a:rPr lang="en-US" altLang="zh-CN"/>
+              <a:t>         ::= name</a:t>
+            </a:r>
+            <a:br>
+              <a:rPr lang="en-US" altLang="zh-CN"/>
+            </a:br>
+            <a:r>
+              <a:rPr lang="en-US" altLang="zh-CN"/>
+              <a:t>         ::= </a:t>
+            </a:r>
+            <a:r>
+              <a:rPr lang="en-US" altLang="zh-CN" b="1">
+                <a:solidFill>
+                  <a:srgbClr val="FF0000"/>
+                </a:solidFill>
+              </a:rPr>
+              <a:t>last name</a:t>
+            </a:r>
+          </a:p>
+        </p:txBody>
+      </p:sp>
+      <p:pic>
+        <p:nvPicPr>
+          <p:cNvPr id="6" name="图片 5">
+            <a:extLst>
+              <a:ext uri="{FF2B5EF4-FFF2-40B4-BE49-F238E27FC236}">
+                <a16:creationId xmlns:a16="http://schemas.microsoft.com/office/drawing/2014/main" id="{FB0C2B3E-589C-4365-9375-C3E6D1C5BC17}"/>
+              </a:ext>
+            </a:extLst>
+          </p:cNvPr>
+          <p:cNvPicPr>
+            <a:picLocks noChangeAspect="1"/>
+          </p:cNvPicPr>
+          <p:nvPr/>
+        </p:nvPicPr>
+        <p:blipFill>
+          <a:blip r:embed="rId3"/>
+          <a:stretch>
+            <a:fillRect/>
+          </a:stretch>
+        </p:blipFill>
+        <p:spPr>
+          <a:xfrm>
+            <a:off x="5894773" y="819889"/>
+            <a:ext cx="6165114" cy="5898391"/>
+          </a:xfrm>
+          <a:prstGeom prst="rect">
+            <a:avLst/>
+          </a:prstGeom>
+        </p:spPr>
+      </p:pic>
+      <p:sp>
+        <p:nvSpPr>
+          <p:cNvPr id="7" name="文本框 6">
+            <a:extLst>
+              <a:ext uri="{FF2B5EF4-FFF2-40B4-BE49-F238E27FC236}">
+                <a16:creationId xmlns:a16="http://schemas.microsoft.com/office/drawing/2014/main" id="{77AD7516-2341-4941-839F-A19A9D3C6C09}"/>
+              </a:ext>
+            </a:extLst>
+          </p:cNvPr>
+          <p:cNvSpPr txBox="1"/>
+          <p:nvPr/>
+        </p:nvSpPr>
+        <p:spPr>
+          <a:xfrm>
+            <a:off x="329283" y="4451243"/>
+            <a:ext cx="2246051" cy="369332"/>
+          </a:xfrm>
+          <a:prstGeom prst="rect">
+            <a:avLst/>
+          </a:prstGeom>
+          <a:noFill/>
+        </p:spPr>
+        <p:txBody>
+          <a:bodyPr wrap="square" rtlCol="0">
+            <a:spAutoFit/>
+          </a:bodyPr>
+          <a:lstStyle/>
+          <a:p>
+            <a:r>
+              <a:rPr lang="en-US" altLang="zh-CN" b="1"/>
+              <a:t>Scade</a:t>
+            </a:r>
+            <a:r>
+              <a:rPr lang="zh-CN" altLang="en-US" b="1"/>
+              <a:t>对应的文法</a:t>
+            </a:r>
+          </a:p>
+        </p:txBody>
+      </p:sp>
+      <p:sp>
+        <p:nvSpPr>
+          <p:cNvPr id="8" name="文本框 7">
+            <a:extLst>
+              <a:ext uri="{FF2B5EF4-FFF2-40B4-BE49-F238E27FC236}">
+                <a16:creationId xmlns:a16="http://schemas.microsoft.com/office/drawing/2014/main" id="{4FAB46DB-2FC9-425B-A11D-FA601EF284B1}"/>
+              </a:ext>
+            </a:extLst>
+          </p:cNvPr>
+          <p:cNvSpPr txBox="1"/>
+          <p:nvPr/>
+        </p:nvSpPr>
+        <p:spPr>
+          <a:xfrm>
+            <a:off x="204995" y="305765"/>
+            <a:ext cx="2246051" cy="369332"/>
+          </a:xfrm>
+          <a:prstGeom prst="rect">
+            <a:avLst/>
+          </a:prstGeom>
+          <a:noFill/>
+        </p:spPr>
+        <p:txBody>
+          <a:bodyPr wrap="square" rtlCol="0">
+            <a:spAutoFit/>
+          </a:bodyPr>
+          <a:lstStyle/>
+          <a:p>
+            <a:r>
+              <a:rPr lang="en-US" altLang="zh-CN" b="1"/>
+              <a:t>Scade</a:t>
+            </a:r>
+            <a:r>
+              <a:rPr lang="zh-CN" altLang="en-US" b="1"/>
+              <a:t>程序</a:t>
+            </a:r>
+          </a:p>
+        </p:txBody>
+      </p:sp>
+      <p:sp>
+        <p:nvSpPr>
+          <p:cNvPr id="9" name="文本框 8">
+            <a:extLst>
+              <a:ext uri="{FF2B5EF4-FFF2-40B4-BE49-F238E27FC236}">
+                <a16:creationId xmlns:a16="http://schemas.microsoft.com/office/drawing/2014/main" id="{33742FEF-16B7-4F2D-A9D6-99DC55FC8153}"/>
+              </a:ext>
+            </a:extLst>
+          </p:cNvPr>
+          <p:cNvSpPr txBox="1"/>
+          <p:nvPr/>
+        </p:nvSpPr>
+        <p:spPr>
+          <a:xfrm>
+            <a:off x="5894773" y="305765"/>
+            <a:ext cx="2246051" cy="369332"/>
+          </a:xfrm>
+          <a:prstGeom prst="rect">
+            <a:avLst/>
+          </a:prstGeom>
+          <a:noFill/>
+        </p:spPr>
+        <p:txBody>
+          <a:bodyPr wrap="square" rtlCol="0">
+            <a:spAutoFit/>
+          </a:bodyPr>
+          <a:lstStyle/>
+          <a:p>
+            <a:r>
+              <a:rPr lang="zh-CN" altLang="en-US" b="1"/>
+              <a:t>转化后的</a:t>
+            </a:r>
+            <a:r>
+              <a:rPr lang="en-US" altLang="zh-CN" b="1"/>
+              <a:t>C</a:t>
+            </a:r>
+            <a:r>
+              <a:rPr lang="zh-CN" altLang="en-US" b="1"/>
+              <a:t>程序</a:t>
+            </a:r>
+          </a:p>
+        </p:txBody>
+      </p:sp>
+    </p:spTree>
+    <p:extLst>
+      <p:ext uri="{BB962C8B-B14F-4D97-AF65-F5344CB8AC3E}">
+        <p14:creationId xmlns:p14="http://schemas.microsoft.com/office/powerpoint/2010/main" val="3772738537"/>
+      </p:ext>
+    </p:extLst>
+  </p:cSld>
+  <p:clrMapOvr>
+    <a:masterClrMapping/>
+  </p:clrMapOvr>
+</p:sld>
+</file>
+
+<file path=ppt/slides/slide34.xml><?xml version="1.0" encoding="utf-8"?>
+<p:sld xmlns:a="http://schemas.openxmlformats.org/drawingml/2006/main" xmlns:r="http://schemas.openxmlformats.org/officeDocument/2006/relationships" xmlns:p="http://schemas.openxmlformats.org/presentationml/2006/main">
+  <p:cSld>
+    <p:spTree>
+      <p:nvGrpSpPr>
+        <p:cNvPr id="1" name=""/>
+        <p:cNvGrpSpPr/>
+        <p:nvPr/>
+      </p:nvGrpSpPr>
+      <p:grpSpPr>
+        <a:xfrm>
+          <a:off x="0" y="0"/>
+          <a:ext cx="0" cy="0"/>
+          <a:chOff x="0" y="0"/>
+          <a:chExt cx="0" cy="0"/>
+        </a:xfrm>
+      </p:grpSpPr>
+      <p:pic>
+        <p:nvPicPr>
+          <p:cNvPr id="4" name="图片 3">
+            <a:extLst>
+              <a:ext uri="{FF2B5EF4-FFF2-40B4-BE49-F238E27FC236}">
+                <a16:creationId xmlns:a16="http://schemas.microsoft.com/office/drawing/2014/main" id="{2AD2EB48-CAE0-45C1-98BC-E5FD1AF535E4}"/>
+              </a:ext>
+            </a:extLst>
+          </p:cNvPr>
+          <p:cNvPicPr>
+            <a:picLocks noChangeAspect="1"/>
+          </p:cNvPicPr>
+          <p:nvPr/>
+        </p:nvPicPr>
+        <p:blipFill>
+          <a:blip r:embed="rId2"/>
+          <a:stretch>
+            <a:fillRect/>
+          </a:stretch>
+        </p:blipFill>
+        <p:spPr>
+          <a:xfrm>
+            <a:off x="319581" y="867534"/>
+            <a:ext cx="4610500" cy="2286198"/>
+          </a:xfrm>
+          <a:prstGeom prst="rect">
+            <a:avLst/>
+          </a:prstGeom>
+        </p:spPr>
+      </p:pic>
+      <p:sp>
+        <p:nvSpPr>
+          <p:cNvPr id="6" name="文本框 5">
+            <a:extLst>
+              <a:ext uri="{FF2B5EF4-FFF2-40B4-BE49-F238E27FC236}">
+                <a16:creationId xmlns:a16="http://schemas.microsoft.com/office/drawing/2014/main" id="{AB557F75-5F2C-4A63-8663-B8434B4D6423}"/>
+              </a:ext>
+            </a:extLst>
+          </p:cNvPr>
+          <p:cNvSpPr txBox="1"/>
+          <p:nvPr/>
+        </p:nvSpPr>
+        <p:spPr>
+          <a:xfrm>
+            <a:off x="319581" y="4455738"/>
+            <a:ext cx="3906190" cy="923330"/>
+          </a:xfrm>
+          <a:prstGeom prst="rect">
+            <a:avLst/>
+          </a:prstGeom>
+          <a:noFill/>
+        </p:spPr>
+        <p:txBody>
+          <a:bodyPr wrap="square" rtlCol="0">
+            <a:spAutoFit/>
+          </a:bodyPr>
+          <a:lstStyle/>
+          <a:p>
+            <a:r>
+              <a:rPr lang="en-US" altLang="zh-CN"/>
+              <a:t>Arith_expr ::= Unary_arith_op Expr</a:t>
+            </a:r>
+            <a:br>
+              <a:rPr lang="en-US" altLang="zh-CN"/>
+            </a:br>
+            <a:r>
+              <a:rPr lang="en-US" altLang="zh-CN"/>
+              <a:t>            ::= Expr Bin_arith_op Expr</a:t>
+            </a:r>
+            <a:br>
+              <a:rPr lang="en-US" altLang="zh-CN"/>
+            </a:br>
+            <a:r>
+              <a:rPr lang="en-US" altLang="zh-CN"/>
+              <a:t>            ::= ( Expr : Type_expr )</a:t>
+            </a:r>
+          </a:p>
+        </p:txBody>
+      </p:sp>
+      <p:pic>
+        <p:nvPicPr>
+          <p:cNvPr id="7" name="图片 6">
+            <a:extLst>
+              <a:ext uri="{FF2B5EF4-FFF2-40B4-BE49-F238E27FC236}">
+                <a16:creationId xmlns:a16="http://schemas.microsoft.com/office/drawing/2014/main" id="{F883907C-6C52-4C57-AA96-7A7E92ACF678}"/>
+              </a:ext>
+            </a:extLst>
+          </p:cNvPr>
+          <p:cNvPicPr>
+            <a:picLocks noChangeAspect="1"/>
+          </p:cNvPicPr>
+          <p:nvPr/>
+        </p:nvPicPr>
+        <p:blipFill>
+          <a:blip r:embed="rId3"/>
+          <a:stretch>
+            <a:fillRect/>
+          </a:stretch>
+        </p:blipFill>
+        <p:spPr>
+          <a:xfrm>
+            <a:off x="5398904" y="867534"/>
+            <a:ext cx="6294665" cy="960203"/>
+          </a:xfrm>
+          <a:prstGeom prst="rect">
+            <a:avLst/>
+          </a:prstGeom>
+        </p:spPr>
+      </p:pic>
+      <p:sp>
+        <p:nvSpPr>
+          <p:cNvPr id="8" name="文本框 7">
+            <a:extLst>
+              <a:ext uri="{FF2B5EF4-FFF2-40B4-BE49-F238E27FC236}">
+                <a16:creationId xmlns:a16="http://schemas.microsoft.com/office/drawing/2014/main" id="{C270135E-E36D-48AC-85C3-63AFB38DF72E}"/>
+              </a:ext>
+            </a:extLst>
+          </p:cNvPr>
+          <p:cNvSpPr txBox="1"/>
+          <p:nvPr/>
+        </p:nvSpPr>
+        <p:spPr>
+          <a:xfrm>
+            <a:off x="231628" y="376787"/>
+            <a:ext cx="2246051" cy="369332"/>
+          </a:xfrm>
+          <a:prstGeom prst="rect">
+            <a:avLst/>
+          </a:prstGeom>
+          <a:noFill/>
+        </p:spPr>
+        <p:txBody>
+          <a:bodyPr wrap="square" rtlCol="0">
+            <a:spAutoFit/>
+          </a:bodyPr>
+          <a:lstStyle/>
+          <a:p>
+            <a:r>
+              <a:rPr lang="en-US" altLang="zh-CN" b="1"/>
+              <a:t>Scade</a:t>
+            </a:r>
+            <a:r>
+              <a:rPr lang="zh-CN" altLang="en-US" b="1"/>
+              <a:t>程序</a:t>
+            </a:r>
+          </a:p>
+        </p:txBody>
+      </p:sp>
+      <p:sp>
+        <p:nvSpPr>
+          <p:cNvPr id="9" name="文本框 8">
+            <a:extLst>
+              <a:ext uri="{FF2B5EF4-FFF2-40B4-BE49-F238E27FC236}">
+                <a16:creationId xmlns:a16="http://schemas.microsoft.com/office/drawing/2014/main" id="{82F779CE-245C-430B-ABD2-076BEEDED188}"/>
+              </a:ext>
+            </a:extLst>
+          </p:cNvPr>
+          <p:cNvSpPr txBox="1"/>
+          <p:nvPr/>
+        </p:nvSpPr>
+        <p:spPr>
+          <a:xfrm>
+            <a:off x="319581" y="3929334"/>
+            <a:ext cx="2246051" cy="369332"/>
+          </a:xfrm>
+          <a:prstGeom prst="rect">
+            <a:avLst/>
+          </a:prstGeom>
+          <a:noFill/>
+        </p:spPr>
+        <p:txBody>
+          <a:bodyPr wrap="square" rtlCol="0">
+            <a:spAutoFit/>
+          </a:bodyPr>
+          <a:lstStyle/>
+          <a:p>
+            <a:r>
+              <a:rPr lang="en-US" altLang="zh-CN" b="1"/>
+              <a:t>Scade</a:t>
+            </a:r>
+            <a:r>
+              <a:rPr lang="zh-CN" altLang="en-US" b="1"/>
+              <a:t>对应的文法</a:t>
+            </a:r>
+          </a:p>
+        </p:txBody>
+      </p:sp>
+      <p:sp>
+        <p:nvSpPr>
+          <p:cNvPr id="10" name="文本框 9">
+            <a:extLst>
+              <a:ext uri="{FF2B5EF4-FFF2-40B4-BE49-F238E27FC236}">
+                <a16:creationId xmlns:a16="http://schemas.microsoft.com/office/drawing/2014/main" id="{5B05CA99-12AE-48CE-A5C0-FF19CAB8918C}"/>
+              </a:ext>
+            </a:extLst>
+          </p:cNvPr>
+          <p:cNvSpPr txBox="1"/>
+          <p:nvPr/>
+        </p:nvSpPr>
+        <p:spPr>
+          <a:xfrm>
+            <a:off x="5514497" y="376787"/>
+            <a:ext cx="2246051" cy="369332"/>
+          </a:xfrm>
+          <a:prstGeom prst="rect">
+            <a:avLst/>
+          </a:prstGeom>
+          <a:noFill/>
+        </p:spPr>
+        <p:txBody>
+          <a:bodyPr wrap="square" rtlCol="0">
+            <a:spAutoFit/>
+          </a:bodyPr>
+          <a:lstStyle/>
+          <a:p>
+            <a:r>
+              <a:rPr lang="en-US" altLang="zh-CN" b="1"/>
+              <a:t>Scade</a:t>
+            </a:r>
+            <a:r>
+              <a:rPr lang="zh-CN" altLang="en-US" b="1"/>
+              <a:t>对应的</a:t>
+            </a:r>
+            <a:r>
+              <a:rPr lang="en-US" altLang="zh-CN" b="1"/>
+              <a:t>C</a:t>
+            </a:r>
+            <a:r>
+              <a:rPr lang="zh-CN" altLang="en-US" b="1"/>
+              <a:t>程序</a:t>
+            </a:r>
+          </a:p>
+        </p:txBody>
+      </p:sp>
+    </p:spTree>
+    <p:extLst>
+      <p:ext uri="{BB962C8B-B14F-4D97-AF65-F5344CB8AC3E}">
+        <p14:creationId xmlns:p14="http://schemas.microsoft.com/office/powerpoint/2010/main" val="2441633697"/>
       </p:ext>
     </p:extLst>
   </p:cSld>

--- a/docs/scade.pptx
+++ b/docs/scade.pptx
@@ -5,7 +5,7 @@
     <p:sldMasterId id="2147483648" r:id="rId1"/>
   </p:sldMasterIdLst>
   <p:notesMasterIdLst>
-    <p:notesMasterId r:id="rId36"/>
+    <p:notesMasterId r:id="rId37"/>
   </p:notesMasterIdLst>
   <p:sldIdLst>
     <p:sldId id="256" r:id="rId2"/>
@@ -42,6 +42,7 @@
     <p:sldId id="288" r:id="rId33"/>
     <p:sldId id="289" r:id="rId34"/>
     <p:sldId id="290" r:id="rId35"/>
+    <p:sldId id="291" r:id="rId36"/>
   </p:sldIdLst>
   <p:sldSz cx="12192000" cy="6858000"/>
   <p:notesSz cx="6858000" cy="9144000"/>
@@ -230,7 +231,7 @@
           <a:p>
             <a:fld id="{3744C8BF-56B8-46D4-ADA5-A0AF811348DF}" type="datetimeFigureOut">
               <a:rPr lang="zh-CN" altLang="en-US" smtClean="0"/>
-              <a:t>2023/12/18</a:t>
+              <a:t>2024/1/15</a:t>
             </a:fld>
             <a:endParaRPr lang="zh-CN" altLang="en-US"/>
           </a:p>
@@ -728,7 +729,7 @@
           <a:p>
             <a:fld id="{C61D74A4-027F-4A2B-8B92-D0C194C50910}" type="datetimeFigureOut">
               <a:rPr lang="zh-CN" altLang="en-US" smtClean="0"/>
-              <a:t>2023/12/18</a:t>
+              <a:t>2024/1/15</a:t>
             </a:fld>
             <a:endParaRPr lang="zh-CN" altLang="en-US"/>
           </a:p>
@@ -926,7 +927,7 @@
           <a:p>
             <a:fld id="{C61D74A4-027F-4A2B-8B92-D0C194C50910}" type="datetimeFigureOut">
               <a:rPr lang="zh-CN" altLang="en-US" smtClean="0"/>
-              <a:t>2023/12/18</a:t>
+              <a:t>2024/1/15</a:t>
             </a:fld>
             <a:endParaRPr lang="zh-CN" altLang="en-US"/>
           </a:p>
@@ -1134,7 +1135,7 @@
           <a:p>
             <a:fld id="{C61D74A4-027F-4A2B-8B92-D0C194C50910}" type="datetimeFigureOut">
               <a:rPr lang="zh-CN" altLang="en-US" smtClean="0"/>
-              <a:t>2023/12/18</a:t>
+              <a:t>2024/1/15</a:t>
             </a:fld>
             <a:endParaRPr lang="zh-CN" altLang="en-US"/>
           </a:p>
@@ -1332,7 +1333,7 @@
           <a:p>
             <a:fld id="{C61D74A4-027F-4A2B-8B92-D0C194C50910}" type="datetimeFigureOut">
               <a:rPr lang="zh-CN" altLang="en-US" smtClean="0"/>
-              <a:t>2023/12/18</a:t>
+              <a:t>2024/1/15</a:t>
             </a:fld>
             <a:endParaRPr lang="zh-CN" altLang="en-US"/>
           </a:p>
@@ -1607,7 +1608,7 @@
           <a:p>
             <a:fld id="{C61D74A4-027F-4A2B-8B92-D0C194C50910}" type="datetimeFigureOut">
               <a:rPr lang="zh-CN" altLang="en-US" smtClean="0"/>
-              <a:t>2023/12/18</a:t>
+              <a:t>2024/1/15</a:t>
             </a:fld>
             <a:endParaRPr lang="zh-CN" altLang="en-US"/>
           </a:p>
@@ -1872,7 +1873,7 @@
           <a:p>
             <a:fld id="{C61D74A4-027F-4A2B-8B92-D0C194C50910}" type="datetimeFigureOut">
               <a:rPr lang="zh-CN" altLang="en-US" smtClean="0"/>
-              <a:t>2023/12/18</a:t>
+              <a:t>2024/1/15</a:t>
             </a:fld>
             <a:endParaRPr lang="zh-CN" altLang="en-US"/>
           </a:p>
@@ -2284,7 +2285,7 @@
           <a:p>
             <a:fld id="{C61D74A4-027F-4A2B-8B92-D0C194C50910}" type="datetimeFigureOut">
               <a:rPr lang="zh-CN" altLang="en-US" smtClean="0"/>
-              <a:t>2023/12/18</a:t>
+              <a:t>2024/1/15</a:t>
             </a:fld>
             <a:endParaRPr lang="zh-CN" altLang="en-US"/>
           </a:p>
@@ -2425,7 +2426,7 @@
           <a:p>
             <a:fld id="{C61D74A4-027F-4A2B-8B92-D0C194C50910}" type="datetimeFigureOut">
               <a:rPr lang="zh-CN" altLang="en-US" smtClean="0"/>
-              <a:t>2023/12/18</a:t>
+              <a:t>2024/1/15</a:t>
             </a:fld>
             <a:endParaRPr lang="zh-CN" altLang="en-US"/>
           </a:p>
@@ -2538,7 +2539,7 @@
           <a:p>
             <a:fld id="{C61D74A4-027F-4A2B-8B92-D0C194C50910}" type="datetimeFigureOut">
               <a:rPr lang="zh-CN" altLang="en-US" smtClean="0"/>
-              <a:t>2023/12/18</a:t>
+              <a:t>2024/1/15</a:t>
             </a:fld>
             <a:endParaRPr lang="zh-CN" altLang="en-US"/>
           </a:p>
@@ -2849,7 +2850,7 @@
           <a:p>
             <a:fld id="{C61D74A4-027F-4A2B-8B92-D0C194C50910}" type="datetimeFigureOut">
               <a:rPr lang="zh-CN" altLang="en-US" smtClean="0"/>
-              <a:t>2023/12/18</a:t>
+              <a:t>2024/1/15</a:t>
             </a:fld>
             <a:endParaRPr lang="zh-CN" altLang="en-US"/>
           </a:p>
@@ -3137,7 +3138,7 @@
           <a:p>
             <a:fld id="{C61D74A4-027F-4A2B-8B92-D0C194C50910}" type="datetimeFigureOut">
               <a:rPr lang="zh-CN" altLang="en-US" smtClean="0"/>
-              <a:t>2023/12/18</a:t>
+              <a:t>2024/1/15</a:t>
             </a:fld>
             <a:endParaRPr lang="zh-CN" altLang="en-US"/>
           </a:p>
@@ -3378,7 +3379,7 @@
           <a:p>
             <a:fld id="{C61D74A4-027F-4A2B-8B92-D0C194C50910}" type="datetimeFigureOut">
               <a:rPr lang="zh-CN" altLang="en-US" smtClean="0"/>
-              <a:t>2023/12/18</a:t>
+              <a:t>2024/1/15</a:t>
             </a:fld>
             <a:endParaRPr lang="zh-CN" altLang="en-US"/>
           </a:p>
@@ -10495,6 +10496,96 @@
     <p:extLst>
       <p:ext uri="{BB962C8B-B14F-4D97-AF65-F5344CB8AC3E}">
         <p14:creationId xmlns:p14="http://schemas.microsoft.com/office/powerpoint/2010/main" val="2441633697"/>
+      </p:ext>
+    </p:extLst>
+  </p:cSld>
+  <p:clrMapOvr>
+    <a:masterClrMapping/>
+  </p:clrMapOvr>
+</p:sld>
+</file>
+
+<file path=ppt/slides/slide35.xml><?xml version="1.0" encoding="utf-8"?>
+<p:sld xmlns:a="http://schemas.openxmlformats.org/drawingml/2006/main" xmlns:r="http://schemas.openxmlformats.org/officeDocument/2006/relationships" xmlns:p="http://schemas.openxmlformats.org/presentationml/2006/main">
+  <p:cSld>
+    <p:spTree>
+      <p:nvGrpSpPr>
+        <p:cNvPr id="1" name=""/>
+        <p:cNvGrpSpPr/>
+        <p:nvPr/>
+      </p:nvGrpSpPr>
+      <p:grpSpPr>
+        <a:xfrm>
+          <a:off x="0" y="0"/>
+          <a:ext cx="0" cy="0"/>
+          <a:chOff x="0" y="0"/>
+          <a:chExt cx="0" cy="0"/>
+        </a:xfrm>
+      </p:grpSpPr>
+      <p:pic>
+        <p:nvPicPr>
+          <p:cNvPr id="4" name="图片 3">
+            <a:extLst>
+              <a:ext uri="{FF2B5EF4-FFF2-40B4-BE49-F238E27FC236}">
+                <a16:creationId xmlns:a16="http://schemas.microsoft.com/office/drawing/2014/main" id="{C72B8382-7568-4D39-AEC7-D8566FE429B6}"/>
+              </a:ext>
+            </a:extLst>
+          </p:cNvPr>
+          <p:cNvPicPr>
+            <a:picLocks noChangeAspect="1"/>
+          </p:cNvPicPr>
+          <p:nvPr/>
+        </p:nvPicPr>
+        <p:blipFill>
+          <a:blip r:embed="rId2"/>
+          <a:stretch>
+            <a:fillRect/>
+          </a:stretch>
+        </p:blipFill>
+        <p:spPr>
+          <a:xfrm>
+            <a:off x="185364" y="387006"/>
+            <a:ext cx="4160134" cy="2255993"/>
+          </a:xfrm>
+          <a:prstGeom prst="rect">
+            <a:avLst/>
+          </a:prstGeom>
+        </p:spPr>
+      </p:pic>
+      <p:pic>
+        <p:nvPicPr>
+          <p:cNvPr id="5" name="图片 4">
+            <a:extLst>
+              <a:ext uri="{FF2B5EF4-FFF2-40B4-BE49-F238E27FC236}">
+                <a16:creationId xmlns:a16="http://schemas.microsoft.com/office/drawing/2014/main" id="{423CC381-FFF4-4720-A9DC-94BBAF5964FA}"/>
+              </a:ext>
+            </a:extLst>
+          </p:cNvPr>
+          <p:cNvPicPr>
+            <a:picLocks noChangeAspect="1"/>
+          </p:cNvPicPr>
+          <p:nvPr/>
+        </p:nvPicPr>
+        <p:blipFill>
+          <a:blip r:embed="rId3"/>
+          <a:stretch>
+            <a:fillRect/>
+          </a:stretch>
+        </p:blipFill>
+        <p:spPr>
+          <a:xfrm>
+            <a:off x="4569590" y="71857"/>
+            <a:ext cx="4780952" cy="6714286"/>
+          </a:xfrm>
+          <a:prstGeom prst="rect">
+            <a:avLst/>
+          </a:prstGeom>
+        </p:spPr>
+      </p:pic>
+    </p:spTree>
+    <p:extLst>
+      <p:ext uri="{BB962C8B-B14F-4D97-AF65-F5344CB8AC3E}">
+        <p14:creationId xmlns:p14="http://schemas.microsoft.com/office/powerpoint/2010/main" val="566686536"/>
       </p:ext>
     </p:extLst>
   </p:cSld>

--- a/docs/scade.pptx
+++ b/docs/scade.pptx
@@ -5,7 +5,7 @@
     <p:sldMasterId id="2147483648" r:id="rId1"/>
   </p:sldMasterIdLst>
   <p:notesMasterIdLst>
-    <p:notesMasterId r:id="rId37"/>
+    <p:notesMasterId r:id="rId41"/>
   </p:notesMasterIdLst>
   <p:sldIdLst>
     <p:sldId id="256" r:id="rId2"/>
@@ -43,6 +43,10 @@
     <p:sldId id="289" r:id="rId34"/>
     <p:sldId id="290" r:id="rId35"/>
     <p:sldId id="291" r:id="rId36"/>
+    <p:sldId id="292" r:id="rId37"/>
+    <p:sldId id="293" r:id="rId38"/>
+    <p:sldId id="294" r:id="rId39"/>
+    <p:sldId id="295" r:id="rId40"/>
   </p:sldIdLst>
   <p:sldSz cx="12192000" cy="6858000"/>
   <p:notesSz cx="6858000" cy="9144000"/>
@@ -231,7 +235,7 @@
           <a:p>
             <a:fld id="{3744C8BF-56B8-46D4-ADA5-A0AF811348DF}" type="datetimeFigureOut">
               <a:rPr lang="zh-CN" altLang="en-US" smtClean="0"/>
-              <a:t>2024/1/15</a:t>
+              <a:t>2024/1/29</a:t>
             </a:fld>
             <a:endParaRPr lang="zh-CN" altLang="en-US"/>
           </a:p>
@@ -729,7 +733,7 @@
           <a:p>
             <a:fld id="{C61D74A4-027F-4A2B-8B92-D0C194C50910}" type="datetimeFigureOut">
               <a:rPr lang="zh-CN" altLang="en-US" smtClean="0"/>
-              <a:t>2024/1/15</a:t>
+              <a:t>2024/1/29</a:t>
             </a:fld>
             <a:endParaRPr lang="zh-CN" altLang="en-US"/>
           </a:p>
@@ -927,7 +931,7 @@
           <a:p>
             <a:fld id="{C61D74A4-027F-4A2B-8B92-D0C194C50910}" type="datetimeFigureOut">
               <a:rPr lang="zh-CN" altLang="en-US" smtClean="0"/>
-              <a:t>2024/1/15</a:t>
+              <a:t>2024/1/29</a:t>
             </a:fld>
             <a:endParaRPr lang="zh-CN" altLang="en-US"/>
           </a:p>
@@ -1135,7 +1139,7 @@
           <a:p>
             <a:fld id="{C61D74A4-027F-4A2B-8B92-D0C194C50910}" type="datetimeFigureOut">
               <a:rPr lang="zh-CN" altLang="en-US" smtClean="0"/>
-              <a:t>2024/1/15</a:t>
+              <a:t>2024/1/29</a:t>
             </a:fld>
             <a:endParaRPr lang="zh-CN" altLang="en-US"/>
           </a:p>
@@ -1333,7 +1337,7 @@
           <a:p>
             <a:fld id="{C61D74A4-027F-4A2B-8B92-D0C194C50910}" type="datetimeFigureOut">
               <a:rPr lang="zh-CN" altLang="en-US" smtClean="0"/>
-              <a:t>2024/1/15</a:t>
+              <a:t>2024/1/29</a:t>
             </a:fld>
             <a:endParaRPr lang="zh-CN" altLang="en-US"/>
           </a:p>
@@ -1608,7 +1612,7 @@
           <a:p>
             <a:fld id="{C61D74A4-027F-4A2B-8B92-D0C194C50910}" type="datetimeFigureOut">
               <a:rPr lang="zh-CN" altLang="en-US" smtClean="0"/>
-              <a:t>2024/1/15</a:t>
+              <a:t>2024/1/29</a:t>
             </a:fld>
             <a:endParaRPr lang="zh-CN" altLang="en-US"/>
           </a:p>
@@ -1873,7 +1877,7 @@
           <a:p>
             <a:fld id="{C61D74A4-027F-4A2B-8B92-D0C194C50910}" type="datetimeFigureOut">
               <a:rPr lang="zh-CN" altLang="en-US" smtClean="0"/>
-              <a:t>2024/1/15</a:t>
+              <a:t>2024/1/29</a:t>
             </a:fld>
             <a:endParaRPr lang="zh-CN" altLang="en-US"/>
           </a:p>
@@ -2285,7 +2289,7 @@
           <a:p>
             <a:fld id="{C61D74A4-027F-4A2B-8B92-D0C194C50910}" type="datetimeFigureOut">
               <a:rPr lang="zh-CN" altLang="en-US" smtClean="0"/>
-              <a:t>2024/1/15</a:t>
+              <a:t>2024/1/29</a:t>
             </a:fld>
             <a:endParaRPr lang="zh-CN" altLang="en-US"/>
           </a:p>
@@ -2426,7 +2430,7 @@
           <a:p>
             <a:fld id="{C61D74A4-027F-4A2B-8B92-D0C194C50910}" type="datetimeFigureOut">
               <a:rPr lang="zh-CN" altLang="en-US" smtClean="0"/>
-              <a:t>2024/1/15</a:t>
+              <a:t>2024/1/29</a:t>
             </a:fld>
             <a:endParaRPr lang="zh-CN" altLang="en-US"/>
           </a:p>
@@ -2539,7 +2543,7 @@
           <a:p>
             <a:fld id="{C61D74A4-027F-4A2B-8B92-D0C194C50910}" type="datetimeFigureOut">
               <a:rPr lang="zh-CN" altLang="en-US" smtClean="0"/>
-              <a:t>2024/1/15</a:t>
+              <a:t>2024/1/29</a:t>
             </a:fld>
             <a:endParaRPr lang="zh-CN" altLang="en-US"/>
           </a:p>
@@ -2850,7 +2854,7 @@
           <a:p>
             <a:fld id="{C61D74A4-027F-4A2B-8B92-D0C194C50910}" type="datetimeFigureOut">
               <a:rPr lang="zh-CN" altLang="en-US" smtClean="0"/>
-              <a:t>2024/1/15</a:t>
+              <a:t>2024/1/29</a:t>
             </a:fld>
             <a:endParaRPr lang="zh-CN" altLang="en-US"/>
           </a:p>
@@ -3138,7 +3142,7 @@
           <a:p>
             <a:fld id="{C61D74A4-027F-4A2B-8B92-D0C194C50910}" type="datetimeFigureOut">
               <a:rPr lang="zh-CN" altLang="en-US" smtClean="0"/>
-              <a:t>2024/1/15</a:t>
+              <a:t>2024/1/29</a:t>
             </a:fld>
             <a:endParaRPr lang="zh-CN" altLang="en-US"/>
           </a:p>
@@ -3379,7 +3383,7 @@
           <a:p>
             <a:fld id="{C61D74A4-027F-4A2B-8B92-D0C194C50910}" type="datetimeFigureOut">
               <a:rPr lang="zh-CN" altLang="en-US" smtClean="0"/>
-              <a:t>2024/1/15</a:t>
+              <a:t>2024/1/29</a:t>
             </a:fld>
             <a:endParaRPr lang="zh-CN" altLang="en-US"/>
           </a:p>
@@ -10524,10 +10528,10 @@
       </p:grpSpPr>
       <p:pic>
         <p:nvPicPr>
-          <p:cNvPr id="4" name="图片 3">
-            <a:extLst>
-              <a:ext uri="{FF2B5EF4-FFF2-40B4-BE49-F238E27FC236}">
-                <a16:creationId xmlns:a16="http://schemas.microsoft.com/office/drawing/2014/main" id="{C72B8382-7568-4D39-AEC7-D8566FE429B6}"/>
+          <p:cNvPr id="2" name="图片 1">
+            <a:extLst>
+              <a:ext uri="{FF2B5EF4-FFF2-40B4-BE49-F238E27FC236}">
+                <a16:creationId xmlns:a16="http://schemas.microsoft.com/office/drawing/2014/main" id="{46CBCF29-2F2C-42E4-9FD7-0CB65F643002}"/>
               </a:ext>
             </a:extLst>
           </p:cNvPr>
@@ -10544,8 +10548,8 @@
         </p:blipFill>
         <p:spPr>
           <a:xfrm>
-            <a:off x="185364" y="387006"/>
-            <a:ext cx="4160134" cy="2255993"/>
+            <a:off x="312937" y="666586"/>
+            <a:ext cx="4019048" cy="2647619"/>
           </a:xfrm>
           <a:prstGeom prst="rect">
             <a:avLst/>
@@ -10554,10 +10558,10 @@
       </p:pic>
       <p:pic>
         <p:nvPicPr>
-          <p:cNvPr id="5" name="图片 4">
-            <a:extLst>
-              <a:ext uri="{FF2B5EF4-FFF2-40B4-BE49-F238E27FC236}">
-                <a16:creationId xmlns:a16="http://schemas.microsoft.com/office/drawing/2014/main" id="{423CC381-FFF4-4720-A9DC-94BBAF5964FA}"/>
+          <p:cNvPr id="3" name="图片 2">
+            <a:extLst>
+              <a:ext uri="{FF2B5EF4-FFF2-40B4-BE49-F238E27FC236}">
+                <a16:creationId xmlns:a16="http://schemas.microsoft.com/office/drawing/2014/main" id="{FD432E60-DE62-44FF-9624-30EF3470115E}"/>
               </a:ext>
             </a:extLst>
           </p:cNvPr>
@@ -10574,8 +10578,767 @@
         </p:blipFill>
         <p:spPr>
           <a:xfrm>
-            <a:off x="4569590" y="71857"/>
-            <a:ext cx="4780952" cy="6714286"/>
+            <a:off x="514165" y="3867097"/>
+            <a:ext cx="3295238" cy="2295238"/>
+          </a:xfrm>
+          <a:prstGeom prst="rect">
+            <a:avLst/>
+          </a:prstGeom>
+        </p:spPr>
+      </p:pic>
+      <p:pic>
+        <p:nvPicPr>
+          <p:cNvPr id="6" name="图片 5">
+            <a:extLst>
+              <a:ext uri="{FF2B5EF4-FFF2-40B4-BE49-F238E27FC236}">
+                <a16:creationId xmlns:a16="http://schemas.microsoft.com/office/drawing/2014/main" id="{EFAD2598-485F-424A-9255-9EC8E9F89C92}"/>
+              </a:ext>
+            </a:extLst>
+          </p:cNvPr>
+          <p:cNvPicPr>
+            <a:picLocks noChangeAspect="1"/>
+          </p:cNvPicPr>
+          <p:nvPr/>
+        </p:nvPicPr>
+        <p:blipFill>
+          <a:blip r:embed="rId4"/>
+          <a:stretch>
+            <a:fillRect/>
+          </a:stretch>
+        </p:blipFill>
+        <p:spPr>
+          <a:xfrm>
+            <a:off x="9887947" y="4052571"/>
+            <a:ext cx="2123810" cy="2628571"/>
+          </a:xfrm>
+          <a:prstGeom prst="rect">
+            <a:avLst/>
+          </a:prstGeom>
+        </p:spPr>
+      </p:pic>
+      <p:pic>
+        <p:nvPicPr>
+          <p:cNvPr id="7" name="图片 6">
+            <a:extLst>
+              <a:ext uri="{FF2B5EF4-FFF2-40B4-BE49-F238E27FC236}">
+                <a16:creationId xmlns:a16="http://schemas.microsoft.com/office/drawing/2014/main" id="{23243A63-54D2-4322-B7F3-5D2052254A7F}"/>
+              </a:ext>
+            </a:extLst>
+          </p:cNvPr>
+          <p:cNvPicPr>
+            <a:picLocks noChangeAspect="1"/>
+          </p:cNvPicPr>
+          <p:nvPr/>
+        </p:nvPicPr>
+        <p:blipFill>
+          <a:blip r:embed="rId5"/>
+          <a:stretch>
+            <a:fillRect/>
+          </a:stretch>
+        </p:blipFill>
+        <p:spPr>
+          <a:xfrm>
+            <a:off x="4854566" y="483026"/>
+            <a:ext cx="4152381" cy="6352381"/>
+          </a:xfrm>
+          <a:prstGeom prst="rect">
+            <a:avLst/>
+          </a:prstGeom>
+        </p:spPr>
+      </p:pic>
+      <p:sp>
+        <p:nvSpPr>
+          <p:cNvPr id="4" name="文本框 3">
+            <a:extLst>
+              <a:ext uri="{FF2B5EF4-FFF2-40B4-BE49-F238E27FC236}">
+                <a16:creationId xmlns:a16="http://schemas.microsoft.com/office/drawing/2014/main" id="{8EABA0DA-1B88-4B35-B927-0616F5B04FD3}"/>
+              </a:ext>
+            </a:extLst>
+          </p:cNvPr>
+          <p:cNvSpPr txBox="1"/>
+          <p:nvPr/>
+        </p:nvSpPr>
+        <p:spPr>
+          <a:xfrm>
+            <a:off x="370154" y="113694"/>
+            <a:ext cx="3045203" cy="369332"/>
+          </a:xfrm>
+          <a:prstGeom prst="rect">
+            <a:avLst/>
+          </a:prstGeom>
+          <a:noFill/>
+        </p:spPr>
+        <p:txBody>
+          <a:bodyPr wrap="square" rtlCol="0">
+            <a:spAutoFit/>
+          </a:bodyPr>
+          <a:lstStyle/>
+          <a:p>
+            <a:r>
+              <a:rPr lang="en-US" altLang="zh-CN" dirty="0" err="1"/>
+              <a:t>Scade</a:t>
+            </a:r>
+            <a:r>
+              <a:rPr lang="zh-CN" altLang="en-US" dirty="0"/>
+              <a:t>程序</a:t>
+            </a:r>
+          </a:p>
+        </p:txBody>
+      </p:sp>
+      <p:sp>
+        <p:nvSpPr>
+          <p:cNvPr id="8" name="文本框 7">
+            <a:extLst>
+              <a:ext uri="{FF2B5EF4-FFF2-40B4-BE49-F238E27FC236}">
+                <a16:creationId xmlns:a16="http://schemas.microsoft.com/office/drawing/2014/main" id="{4D8311AE-24DC-4628-A885-C44FA9042646}"/>
+              </a:ext>
+            </a:extLst>
+          </p:cNvPr>
+          <p:cNvSpPr txBox="1"/>
+          <p:nvPr/>
+        </p:nvSpPr>
+        <p:spPr>
+          <a:xfrm>
+            <a:off x="514165" y="3497765"/>
+            <a:ext cx="3045203" cy="369332"/>
+          </a:xfrm>
+          <a:prstGeom prst="rect">
+            <a:avLst/>
+          </a:prstGeom>
+          <a:noFill/>
+        </p:spPr>
+        <p:txBody>
+          <a:bodyPr wrap="square" rtlCol="0">
+            <a:spAutoFit/>
+          </a:bodyPr>
+          <a:lstStyle/>
+          <a:p>
+            <a:r>
+              <a:rPr lang="en-US" altLang="zh-CN" dirty="0" err="1"/>
+              <a:t>Scade</a:t>
+            </a:r>
+            <a:r>
+              <a:rPr lang="zh-CN" altLang="en-US" dirty="0"/>
+              <a:t>仿真结果</a:t>
+            </a:r>
+          </a:p>
+        </p:txBody>
+      </p:sp>
+      <p:sp>
+        <p:nvSpPr>
+          <p:cNvPr id="9" name="文本框 8">
+            <a:extLst>
+              <a:ext uri="{FF2B5EF4-FFF2-40B4-BE49-F238E27FC236}">
+                <a16:creationId xmlns:a16="http://schemas.microsoft.com/office/drawing/2014/main" id="{7F068BC2-ED93-4DFC-88ED-2255AB8C4253}"/>
+              </a:ext>
+            </a:extLst>
+          </p:cNvPr>
+          <p:cNvSpPr txBox="1"/>
+          <p:nvPr/>
+        </p:nvSpPr>
+        <p:spPr>
+          <a:xfrm>
+            <a:off x="9802075" y="3564877"/>
+            <a:ext cx="1959549" cy="369332"/>
+          </a:xfrm>
+          <a:prstGeom prst="rect">
+            <a:avLst/>
+          </a:prstGeom>
+          <a:noFill/>
+        </p:spPr>
+        <p:txBody>
+          <a:bodyPr wrap="square" rtlCol="0">
+            <a:spAutoFit/>
+          </a:bodyPr>
+          <a:lstStyle/>
+          <a:p>
+            <a:r>
+              <a:rPr lang="zh-CN" altLang="en-US" dirty="0"/>
+              <a:t>编译运行结果</a:t>
+            </a:r>
+          </a:p>
+        </p:txBody>
+      </p:sp>
+      <p:sp>
+        <p:nvSpPr>
+          <p:cNvPr id="10" name="文本框 9">
+            <a:extLst>
+              <a:ext uri="{FF2B5EF4-FFF2-40B4-BE49-F238E27FC236}">
+                <a16:creationId xmlns:a16="http://schemas.microsoft.com/office/drawing/2014/main" id="{F250D852-F1AD-4DCB-8FA7-62680EFB2D87}"/>
+              </a:ext>
+            </a:extLst>
+          </p:cNvPr>
+          <p:cNvSpPr txBox="1"/>
+          <p:nvPr/>
+        </p:nvSpPr>
+        <p:spPr>
+          <a:xfrm>
+            <a:off x="4854566" y="64048"/>
+            <a:ext cx="1959549" cy="369332"/>
+          </a:xfrm>
+          <a:prstGeom prst="rect">
+            <a:avLst/>
+          </a:prstGeom>
+          <a:noFill/>
+        </p:spPr>
+        <p:txBody>
+          <a:bodyPr wrap="square" rtlCol="0">
+            <a:spAutoFit/>
+          </a:bodyPr>
+          <a:lstStyle/>
+          <a:p>
+            <a:r>
+              <a:rPr lang="zh-CN" altLang="en-US" dirty="0"/>
+              <a:t>转换后</a:t>
+            </a:r>
+            <a:r>
+              <a:rPr lang="en-US" altLang="zh-CN" dirty="0"/>
+              <a:t>C</a:t>
+            </a:r>
+            <a:r>
+              <a:rPr lang="zh-CN" altLang="en-US" dirty="0"/>
+              <a:t>程序</a:t>
+            </a:r>
+          </a:p>
+        </p:txBody>
+      </p:sp>
+    </p:spTree>
+    <p:extLst>
+      <p:ext uri="{BB962C8B-B14F-4D97-AF65-F5344CB8AC3E}">
+        <p14:creationId xmlns:p14="http://schemas.microsoft.com/office/powerpoint/2010/main" val="566686536"/>
+      </p:ext>
+    </p:extLst>
+  </p:cSld>
+  <p:clrMapOvr>
+    <a:masterClrMapping/>
+  </p:clrMapOvr>
+</p:sld>
+</file>
+
+<file path=ppt/slides/slide36.xml><?xml version="1.0" encoding="utf-8"?>
+<p:sld xmlns:a="http://schemas.openxmlformats.org/drawingml/2006/main" xmlns:r="http://schemas.openxmlformats.org/officeDocument/2006/relationships" xmlns:p="http://schemas.openxmlformats.org/presentationml/2006/main">
+  <p:cSld>
+    <p:spTree>
+      <p:nvGrpSpPr>
+        <p:cNvPr id="1" name=""/>
+        <p:cNvGrpSpPr/>
+        <p:nvPr/>
+      </p:nvGrpSpPr>
+      <p:grpSpPr>
+        <a:xfrm>
+          <a:off x="0" y="0"/>
+          <a:ext cx="0" cy="0"/>
+          <a:chOff x="0" y="0"/>
+          <a:chExt cx="0" cy="0"/>
+        </a:xfrm>
+      </p:grpSpPr>
+      <p:pic>
+        <p:nvPicPr>
+          <p:cNvPr id="4" name="图片 3">
+            <a:extLst>
+              <a:ext uri="{FF2B5EF4-FFF2-40B4-BE49-F238E27FC236}">
+                <a16:creationId xmlns:a16="http://schemas.microsoft.com/office/drawing/2014/main" id="{382F4CDF-745E-4968-94AA-D3068F21EB18}"/>
+              </a:ext>
+            </a:extLst>
+          </p:cNvPr>
+          <p:cNvPicPr>
+            <a:picLocks noChangeAspect="1"/>
+          </p:cNvPicPr>
+          <p:nvPr/>
+        </p:nvPicPr>
+        <p:blipFill>
+          <a:blip r:embed="rId2"/>
+          <a:stretch>
+            <a:fillRect/>
+          </a:stretch>
+        </p:blipFill>
+        <p:spPr>
+          <a:xfrm>
+            <a:off x="189881" y="109057"/>
+            <a:ext cx="2351049" cy="4664279"/>
+          </a:xfrm>
+          <a:prstGeom prst="rect">
+            <a:avLst/>
+          </a:prstGeom>
+        </p:spPr>
+      </p:pic>
+      <p:pic>
+        <p:nvPicPr>
+          <p:cNvPr id="5" name="图片 4">
+            <a:extLst>
+              <a:ext uri="{FF2B5EF4-FFF2-40B4-BE49-F238E27FC236}">
+                <a16:creationId xmlns:a16="http://schemas.microsoft.com/office/drawing/2014/main" id="{564CD7BA-469E-49D1-AF5F-C2289F314780}"/>
+              </a:ext>
+            </a:extLst>
+          </p:cNvPr>
+          <p:cNvPicPr>
+            <a:picLocks noChangeAspect="1"/>
+          </p:cNvPicPr>
+          <p:nvPr/>
+        </p:nvPicPr>
+        <p:blipFill>
+          <a:blip r:embed="rId3"/>
+          <a:stretch>
+            <a:fillRect/>
+          </a:stretch>
+        </p:blipFill>
+        <p:spPr>
+          <a:xfrm>
+            <a:off x="2672982" y="109057"/>
+            <a:ext cx="1935787" cy="3552738"/>
+          </a:xfrm>
+          <a:prstGeom prst="rect">
+            <a:avLst/>
+          </a:prstGeom>
+        </p:spPr>
+      </p:pic>
+      <p:pic>
+        <p:nvPicPr>
+          <p:cNvPr id="6" name="图片 5">
+            <a:extLst>
+              <a:ext uri="{FF2B5EF4-FFF2-40B4-BE49-F238E27FC236}">
+                <a16:creationId xmlns:a16="http://schemas.microsoft.com/office/drawing/2014/main" id="{8945BEC2-0990-42A2-B81C-ED499EE88734}"/>
+              </a:ext>
+            </a:extLst>
+          </p:cNvPr>
+          <p:cNvPicPr>
+            <a:picLocks noChangeAspect="1"/>
+          </p:cNvPicPr>
+          <p:nvPr/>
+        </p:nvPicPr>
+        <p:blipFill>
+          <a:blip r:embed="rId4"/>
+          <a:stretch>
+            <a:fillRect/>
+          </a:stretch>
+        </p:blipFill>
+        <p:spPr>
+          <a:xfrm>
+            <a:off x="2672982" y="3740490"/>
+            <a:ext cx="2548971" cy="2919612"/>
+          </a:xfrm>
+          <a:prstGeom prst="rect">
+            <a:avLst/>
+          </a:prstGeom>
+        </p:spPr>
+      </p:pic>
+      <p:pic>
+        <p:nvPicPr>
+          <p:cNvPr id="7" name="图片 6">
+            <a:extLst>
+              <a:ext uri="{FF2B5EF4-FFF2-40B4-BE49-F238E27FC236}">
+                <a16:creationId xmlns:a16="http://schemas.microsoft.com/office/drawing/2014/main" id="{1EF4EF50-C34F-412C-80A8-D819ED99279E}"/>
+              </a:ext>
+            </a:extLst>
+          </p:cNvPr>
+          <p:cNvPicPr>
+            <a:picLocks noChangeAspect="1"/>
+          </p:cNvPicPr>
+          <p:nvPr/>
+        </p:nvPicPr>
+        <p:blipFill>
+          <a:blip r:embed="rId5"/>
+          <a:stretch>
+            <a:fillRect/>
+          </a:stretch>
+        </p:blipFill>
+        <p:spPr>
+          <a:xfrm>
+            <a:off x="5221953" y="307284"/>
+            <a:ext cx="6196937" cy="2904762"/>
+          </a:xfrm>
+          <a:prstGeom prst="rect">
+            <a:avLst/>
+          </a:prstGeom>
+        </p:spPr>
+      </p:pic>
+      <p:pic>
+        <p:nvPicPr>
+          <p:cNvPr id="8" name="图片 7">
+            <a:extLst>
+              <a:ext uri="{FF2B5EF4-FFF2-40B4-BE49-F238E27FC236}">
+                <a16:creationId xmlns:a16="http://schemas.microsoft.com/office/drawing/2014/main" id="{0F0F8AC1-2C7E-4224-9FC3-43ADAC4AEE35}"/>
+              </a:ext>
+            </a:extLst>
+          </p:cNvPr>
+          <p:cNvPicPr>
+            <a:picLocks noChangeAspect="1"/>
+          </p:cNvPicPr>
+          <p:nvPr/>
+        </p:nvPicPr>
+        <p:blipFill>
+          <a:blip r:embed="rId6"/>
+          <a:stretch>
+            <a:fillRect/>
+          </a:stretch>
+        </p:blipFill>
+        <p:spPr>
+          <a:xfrm>
+            <a:off x="5212935" y="3740490"/>
+            <a:ext cx="6789184" cy="2572339"/>
+          </a:xfrm>
+          <a:prstGeom prst="rect">
+            <a:avLst/>
+          </a:prstGeom>
+        </p:spPr>
+      </p:pic>
+      <p:sp>
+        <p:nvSpPr>
+          <p:cNvPr id="9" name="文本框 8">
+            <a:extLst>
+              <a:ext uri="{FF2B5EF4-FFF2-40B4-BE49-F238E27FC236}">
+                <a16:creationId xmlns:a16="http://schemas.microsoft.com/office/drawing/2014/main" id="{70248E89-BA80-481F-8703-27AFF0DCD401}"/>
+              </a:ext>
+            </a:extLst>
+          </p:cNvPr>
+          <p:cNvSpPr txBox="1"/>
+          <p:nvPr/>
+        </p:nvSpPr>
+        <p:spPr>
+          <a:xfrm>
+            <a:off x="5212935" y="-39989"/>
+            <a:ext cx="3045203" cy="369332"/>
+          </a:xfrm>
+          <a:prstGeom prst="rect">
+            <a:avLst/>
+          </a:prstGeom>
+          <a:noFill/>
+        </p:spPr>
+        <p:txBody>
+          <a:bodyPr wrap="square" rtlCol="0">
+            <a:spAutoFit/>
+          </a:bodyPr>
+          <a:lstStyle/>
+          <a:p>
+            <a:r>
+              <a:rPr lang="en-US" altLang="zh-CN" dirty="0" err="1"/>
+              <a:t>Scade</a:t>
+            </a:r>
+            <a:r>
+              <a:rPr lang="zh-CN" altLang="en-US" dirty="0"/>
+              <a:t>仿真结果</a:t>
+            </a:r>
+          </a:p>
+        </p:txBody>
+      </p:sp>
+      <p:sp>
+        <p:nvSpPr>
+          <p:cNvPr id="10" name="文本框 9">
+            <a:extLst>
+              <a:ext uri="{FF2B5EF4-FFF2-40B4-BE49-F238E27FC236}">
+                <a16:creationId xmlns:a16="http://schemas.microsoft.com/office/drawing/2014/main" id="{F63C56D4-EF9E-43DE-8AFC-671CCA1CAEBD}"/>
+              </a:ext>
+            </a:extLst>
+          </p:cNvPr>
+          <p:cNvSpPr txBox="1"/>
+          <p:nvPr/>
+        </p:nvSpPr>
+        <p:spPr>
+          <a:xfrm>
+            <a:off x="5212934" y="3276623"/>
+            <a:ext cx="3045203" cy="369332"/>
+          </a:xfrm>
+          <a:prstGeom prst="rect">
+            <a:avLst/>
+          </a:prstGeom>
+          <a:noFill/>
+        </p:spPr>
+        <p:txBody>
+          <a:bodyPr wrap="square" rtlCol="0">
+            <a:spAutoFit/>
+          </a:bodyPr>
+          <a:lstStyle/>
+          <a:p>
+            <a:r>
+              <a:rPr lang="zh-CN" altLang="en-US" dirty="0"/>
+              <a:t>编译运行结果</a:t>
+            </a:r>
+          </a:p>
+        </p:txBody>
+      </p:sp>
+    </p:spTree>
+    <p:extLst>
+      <p:ext uri="{BB962C8B-B14F-4D97-AF65-F5344CB8AC3E}">
+        <p14:creationId xmlns:p14="http://schemas.microsoft.com/office/powerpoint/2010/main" val="223371746"/>
+      </p:ext>
+    </p:extLst>
+  </p:cSld>
+  <p:clrMapOvr>
+    <a:masterClrMapping/>
+  </p:clrMapOvr>
+</p:sld>
+</file>
+
+<file path=ppt/slides/slide37.xml><?xml version="1.0" encoding="utf-8"?>
+<p:sld xmlns:a="http://schemas.openxmlformats.org/drawingml/2006/main" xmlns:r="http://schemas.openxmlformats.org/officeDocument/2006/relationships" xmlns:p="http://schemas.openxmlformats.org/presentationml/2006/main">
+  <p:cSld>
+    <p:spTree>
+      <p:nvGrpSpPr>
+        <p:cNvPr id="1" name=""/>
+        <p:cNvGrpSpPr/>
+        <p:nvPr/>
+      </p:nvGrpSpPr>
+      <p:grpSpPr>
+        <a:xfrm>
+          <a:off x="0" y="0"/>
+          <a:ext cx="0" cy="0"/>
+          <a:chOff x="0" y="0"/>
+          <a:chExt cx="0" cy="0"/>
+        </a:xfrm>
+      </p:grpSpPr>
+      <p:pic>
+        <p:nvPicPr>
+          <p:cNvPr id="5" name="图片 4">
+            <a:extLst>
+              <a:ext uri="{FF2B5EF4-FFF2-40B4-BE49-F238E27FC236}">
+                <a16:creationId xmlns:a16="http://schemas.microsoft.com/office/drawing/2014/main" id="{0B7D2A04-F6C6-421E-B194-66D19CB5900A}"/>
+              </a:ext>
+            </a:extLst>
+          </p:cNvPr>
+          <p:cNvPicPr>
+            <a:picLocks noChangeAspect="1"/>
+          </p:cNvPicPr>
+          <p:nvPr/>
+        </p:nvPicPr>
+        <p:blipFill>
+          <a:blip r:embed="rId2"/>
+          <a:stretch>
+            <a:fillRect/>
+          </a:stretch>
+        </p:blipFill>
+        <p:spPr>
+          <a:xfrm>
+            <a:off x="4634094" y="310609"/>
+            <a:ext cx="1838095" cy="3790476"/>
+          </a:xfrm>
+          <a:prstGeom prst="rect">
+            <a:avLst/>
+          </a:prstGeom>
+        </p:spPr>
+      </p:pic>
+      <p:pic>
+        <p:nvPicPr>
+          <p:cNvPr id="6" name="图片 5">
+            <a:extLst>
+              <a:ext uri="{FF2B5EF4-FFF2-40B4-BE49-F238E27FC236}">
+                <a16:creationId xmlns:a16="http://schemas.microsoft.com/office/drawing/2014/main" id="{56E888F8-552D-48F6-81A9-E11C5D7F80EE}"/>
+              </a:ext>
+            </a:extLst>
+          </p:cNvPr>
+          <p:cNvPicPr>
+            <a:picLocks noChangeAspect="1"/>
+          </p:cNvPicPr>
+          <p:nvPr/>
+        </p:nvPicPr>
+        <p:blipFill>
+          <a:blip r:embed="rId3"/>
+          <a:stretch>
+            <a:fillRect/>
+          </a:stretch>
+        </p:blipFill>
+        <p:spPr>
+          <a:xfrm>
+            <a:off x="771787" y="4007121"/>
+            <a:ext cx="3087370" cy="2497853"/>
+          </a:xfrm>
+          <a:prstGeom prst="rect">
+            <a:avLst/>
+          </a:prstGeom>
+        </p:spPr>
+      </p:pic>
+      <p:sp>
+        <p:nvSpPr>
+          <p:cNvPr id="7" name="文本框 6">
+            <a:extLst>
+              <a:ext uri="{FF2B5EF4-FFF2-40B4-BE49-F238E27FC236}">
+                <a16:creationId xmlns:a16="http://schemas.microsoft.com/office/drawing/2014/main" id="{16ED2B5E-AEB7-4C7F-A765-80D28AB94C5E}"/>
+              </a:ext>
+            </a:extLst>
+          </p:cNvPr>
+          <p:cNvSpPr txBox="1"/>
+          <p:nvPr/>
+        </p:nvSpPr>
+        <p:spPr>
+          <a:xfrm>
+            <a:off x="4446165" y="-58723"/>
+            <a:ext cx="2650921" cy="369332"/>
+          </a:xfrm>
+          <a:prstGeom prst="rect">
+            <a:avLst/>
+          </a:prstGeom>
+          <a:noFill/>
+        </p:spPr>
+        <p:txBody>
+          <a:bodyPr wrap="square" rtlCol="0">
+            <a:spAutoFit/>
+          </a:bodyPr>
+          <a:lstStyle/>
+          <a:p>
+            <a:r>
+              <a:rPr lang="zh-CN" altLang="en-US" dirty="0"/>
+              <a:t>输入数据</a:t>
+            </a:r>
+          </a:p>
+        </p:txBody>
+      </p:sp>
+      <p:sp>
+        <p:nvSpPr>
+          <p:cNvPr id="8" name="文本框 7">
+            <a:extLst>
+              <a:ext uri="{FF2B5EF4-FFF2-40B4-BE49-F238E27FC236}">
+                <a16:creationId xmlns:a16="http://schemas.microsoft.com/office/drawing/2014/main" id="{852B4A9C-ED15-4CA2-BDED-E354AF1FDCAD}"/>
+              </a:ext>
+            </a:extLst>
+          </p:cNvPr>
+          <p:cNvSpPr txBox="1"/>
+          <p:nvPr/>
+        </p:nvSpPr>
+        <p:spPr>
+          <a:xfrm>
+            <a:off x="774545" y="3507072"/>
+            <a:ext cx="2650921" cy="369332"/>
+          </a:xfrm>
+          <a:prstGeom prst="rect">
+            <a:avLst/>
+          </a:prstGeom>
+          <a:noFill/>
+        </p:spPr>
+        <p:txBody>
+          <a:bodyPr wrap="square" rtlCol="0">
+            <a:spAutoFit/>
+          </a:bodyPr>
+          <a:lstStyle/>
+          <a:p>
+            <a:r>
+              <a:rPr lang="en-US" altLang="zh-CN" dirty="0" err="1"/>
+              <a:t>Scade</a:t>
+            </a:r>
+            <a:r>
+              <a:rPr lang="zh-CN" altLang="en-US" dirty="0"/>
+              <a:t>仿真结果</a:t>
+            </a:r>
+          </a:p>
+        </p:txBody>
+      </p:sp>
+      <p:pic>
+        <p:nvPicPr>
+          <p:cNvPr id="11" name="图片 10">
+            <a:extLst>
+              <a:ext uri="{FF2B5EF4-FFF2-40B4-BE49-F238E27FC236}">
+                <a16:creationId xmlns:a16="http://schemas.microsoft.com/office/drawing/2014/main" id="{ABD20B97-118F-438C-B20D-6ECE76A41920}"/>
+              </a:ext>
+            </a:extLst>
+          </p:cNvPr>
+          <p:cNvPicPr>
+            <a:picLocks noChangeAspect="1"/>
+          </p:cNvPicPr>
+          <p:nvPr/>
+        </p:nvPicPr>
+        <p:blipFill>
+          <a:blip r:embed="rId4"/>
+          <a:stretch>
+            <a:fillRect/>
+          </a:stretch>
+        </p:blipFill>
+        <p:spPr>
+          <a:xfrm>
+            <a:off x="5697252" y="2398444"/>
+            <a:ext cx="2171429" cy="4152381"/>
+          </a:xfrm>
+          <a:prstGeom prst="rect">
+            <a:avLst/>
+          </a:prstGeom>
+        </p:spPr>
+      </p:pic>
+      <p:sp>
+        <p:nvSpPr>
+          <p:cNvPr id="12" name="文本框 11">
+            <a:extLst>
+              <a:ext uri="{FF2B5EF4-FFF2-40B4-BE49-F238E27FC236}">
+                <a16:creationId xmlns:a16="http://schemas.microsoft.com/office/drawing/2014/main" id="{0F0FB4F9-AAD0-4153-BD40-BBBA7BBA5F61}"/>
+              </a:ext>
+            </a:extLst>
+          </p:cNvPr>
+          <p:cNvSpPr txBox="1"/>
+          <p:nvPr/>
+        </p:nvSpPr>
+        <p:spPr>
+          <a:xfrm>
+            <a:off x="5654793" y="2021181"/>
+            <a:ext cx="2650921" cy="369332"/>
+          </a:xfrm>
+          <a:prstGeom prst="rect">
+            <a:avLst/>
+          </a:prstGeom>
+          <a:noFill/>
+        </p:spPr>
+        <p:txBody>
+          <a:bodyPr wrap="square" rtlCol="0">
+            <a:spAutoFit/>
+          </a:bodyPr>
+          <a:lstStyle/>
+          <a:p>
+            <a:r>
+              <a:rPr lang="zh-CN" altLang="en-US" dirty="0"/>
+              <a:t>编译输出结果</a:t>
+            </a:r>
+          </a:p>
+        </p:txBody>
+      </p:sp>
+      <p:pic>
+        <p:nvPicPr>
+          <p:cNvPr id="13" name="图片 12">
+            <a:extLst>
+              <a:ext uri="{FF2B5EF4-FFF2-40B4-BE49-F238E27FC236}">
+                <a16:creationId xmlns:a16="http://schemas.microsoft.com/office/drawing/2014/main" id="{258AEA60-41F7-4F45-B692-F7B9F7462A0E}"/>
+              </a:ext>
+            </a:extLst>
+          </p:cNvPr>
+          <p:cNvPicPr>
+            <a:picLocks noChangeAspect="1"/>
+          </p:cNvPicPr>
+          <p:nvPr/>
+        </p:nvPicPr>
+        <p:blipFill>
+          <a:blip r:embed="rId5"/>
+          <a:stretch>
+            <a:fillRect/>
+          </a:stretch>
+        </p:blipFill>
+        <p:spPr>
+          <a:xfrm>
+            <a:off x="310452" y="229405"/>
+            <a:ext cx="4135713" cy="3095238"/>
+          </a:xfrm>
+          <a:prstGeom prst="rect">
+            <a:avLst/>
+          </a:prstGeom>
+        </p:spPr>
+      </p:pic>
+      <p:pic>
+        <p:nvPicPr>
+          <p:cNvPr id="14" name="图片 13">
+            <a:extLst>
+              <a:ext uri="{FF2B5EF4-FFF2-40B4-BE49-F238E27FC236}">
+                <a16:creationId xmlns:a16="http://schemas.microsoft.com/office/drawing/2014/main" id="{3508904D-E60C-4E6A-8261-62CF56F22DCC}"/>
+              </a:ext>
+            </a:extLst>
+          </p:cNvPr>
+          <p:cNvPicPr>
+            <a:picLocks noChangeAspect="1"/>
+          </p:cNvPicPr>
+          <p:nvPr/>
+        </p:nvPicPr>
+        <p:blipFill>
+          <a:blip r:embed="rId6"/>
+          <a:stretch>
+            <a:fillRect/>
+          </a:stretch>
+        </p:blipFill>
+        <p:spPr>
+          <a:xfrm>
+            <a:off x="8403451" y="723835"/>
+            <a:ext cx="3212267" cy="4828459"/>
           </a:xfrm>
           <a:prstGeom prst="rect">
             <a:avLst/>
@@ -10585,7 +11348,312 @@
     </p:spTree>
     <p:extLst>
       <p:ext uri="{BB962C8B-B14F-4D97-AF65-F5344CB8AC3E}">
-        <p14:creationId xmlns:p14="http://schemas.microsoft.com/office/powerpoint/2010/main" val="566686536"/>
+        <p14:creationId xmlns:p14="http://schemas.microsoft.com/office/powerpoint/2010/main" val="3527309612"/>
+      </p:ext>
+    </p:extLst>
+  </p:cSld>
+  <p:clrMapOvr>
+    <a:masterClrMapping/>
+  </p:clrMapOvr>
+</p:sld>
+</file>
+
+<file path=ppt/slides/slide38.xml><?xml version="1.0" encoding="utf-8"?>
+<p:sld xmlns:a="http://schemas.openxmlformats.org/drawingml/2006/main" xmlns:r="http://schemas.openxmlformats.org/officeDocument/2006/relationships" xmlns:p="http://schemas.openxmlformats.org/presentationml/2006/main">
+  <p:cSld>
+    <p:spTree>
+      <p:nvGrpSpPr>
+        <p:cNvPr id="1" name=""/>
+        <p:cNvGrpSpPr/>
+        <p:nvPr/>
+      </p:nvGrpSpPr>
+      <p:grpSpPr>
+        <a:xfrm>
+          <a:off x="0" y="0"/>
+          <a:ext cx="0" cy="0"/>
+          <a:chOff x="0" y="0"/>
+          <a:chExt cx="0" cy="0"/>
+        </a:xfrm>
+      </p:grpSpPr>
+      <p:pic>
+        <p:nvPicPr>
+          <p:cNvPr id="4" name="图片 3">
+            <a:extLst>
+              <a:ext uri="{FF2B5EF4-FFF2-40B4-BE49-F238E27FC236}">
+                <a16:creationId xmlns:a16="http://schemas.microsoft.com/office/drawing/2014/main" id="{66F2F4A4-9411-4394-B6C5-9CD12080EE24}"/>
+              </a:ext>
+            </a:extLst>
+          </p:cNvPr>
+          <p:cNvPicPr>
+            <a:picLocks noChangeAspect="1"/>
+          </p:cNvPicPr>
+          <p:nvPr/>
+        </p:nvPicPr>
+        <p:blipFill>
+          <a:blip r:embed="rId2"/>
+          <a:stretch>
+            <a:fillRect/>
+          </a:stretch>
+        </p:blipFill>
+        <p:spPr>
+          <a:xfrm>
+            <a:off x="176100" y="687946"/>
+            <a:ext cx="5062658" cy="3942777"/>
+          </a:xfrm>
+          <a:prstGeom prst="rect">
+            <a:avLst/>
+          </a:prstGeom>
+        </p:spPr>
+      </p:pic>
+      <p:sp>
+        <p:nvSpPr>
+          <p:cNvPr id="5" name="文本框 4">
+            <a:extLst>
+              <a:ext uri="{FF2B5EF4-FFF2-40B4-BE49-F238E27FC236}">
+                <a16:creationId xmlns:a16="http://schemas.microsoft.com/office/drawing/2014/main" id="{02820B92-8FD4-471C-8BA2-F4C6D29A0E73}"/>
+              </a:ext>
+            </a:extLst>
+          </p:cNvPr>
+          <p:cNvSpPr txBox="1"/>
+          <p:nvPr/>
+        </p:nvSpPr>
+        <p:spPr>
+          <a:xfrm>
+            <a:off x="176100" y="218114"/>
+            <a:ext cx="3565321" cy="369332"/>
+          </a:xfrm>
+          <a:prstGeom prst="rect">
+            <a:avLst/>
+          </a:prstGeom>
+          <a:noFill/>
+        </p:spPr>
+        <p:txBody>
+          <a:bodyPr wrap="square" rtlCol="0">
+            <a:spAutoFit/>
+          </a:bodyPr>
+          <a:lstStyle/>
+          <a:p>
+            <a:r>
+              <a:rPr lang="zh-CN" altLang="en-US" dirty="0"/>
+              <a:t>涉及到但暂未添加的文法</a:t>
+            </a:r>
+          </a:p>
+        </p:txBody>
+      </p:sp>
+      <p:pic>
+        <p:nvPicPr>
+          <p:cNvPr id="6" name="图片 5">
+            <a:extLst>
+              <a:ext uri="{FF2B5EF4-FFF2-40B4-BE49-F238E27FC236}">
+                <a16:creationId xmlns:a16="http://schemas.microsoft.com/office/drawing/2014/main" id="{78CB820D-4F92-4A9F-B8C0-D151A44D91D5}"/>
+              </a:ext>
+            </a:extLst>
+          </p:cNvPr>
+          <p:cNvPicPr>
+            <a:picLocks noChangeAspect="1"/>
+          </p:cNvPicPr>
+          <p:nvPr/>
+        </p:nvPicPr>
+        <p:blipFill>
+          <a:blip r:embed="rId3"/>
+          <a:stretch>
+            <a:fillRect/>
+          </a:stretch>
+        </p:blipFill>
+        <p:spPr>
+          <a:xfrm>
+            <a:off x="5859023" y="660682"/>
+            <a:ext cx="4400000" cy="2114286"/>
+          </a:xfrm>
+          <a:prstGeom prst="rect">
+            <a:avLst/>
+          </a:prstGeom>
+        </p:spPr>
+      </p:pic>
+      <p:pic>
+        <p:nvPicPr>
+          <p:cNvPr id="7" name="图片 6">
+            <a:extLst>
+              <a:ext uri="{FF2B5EF4-FFF2-40B4-BE49-F238E27FC236}">
+                <a16:creationId xmlns:a16="http://schemas.microsoft.com/office/drawing/2014/main" id="{C4A1E801-09B6-4516-8526-F023EE72DB8F}"/>
+              </a:ext>
+            </a:extLst>
+          </p:cNvPr>
+          <p:cNvPicPr>
+            <a:picLocks noChangeAspect="1"/>
+          </p:cNvPicPr>
+          <p:nvPr/>
+        </p:nvPicPr>
+        <p:blipFill>
+          <a:blip r:embed="rId4"/>
+          <a:stretch>
+            <a:fillRect/>
+          </a:stretch>
+        </p:blipFill>
+        <p:spPr>
+          <a:xfrm>
+            <a:off x="5539710" y="3563941"/>
+            <a:ext cx="6476190" cy="3085714"/>
+          </a:xfrm>
+          <a:prstGeom prst="rect">
+            <a:avLst/>
+          </a:prstGeom>
+        </p:spPr>
+      </p:pic>
+    </p:spTree>
+    <p:extLst>
+      <p:ext uri="{BB962C8B-B14F-4D97-AF65-F5344CB8AC3E}">
+        <p14:creationId xmlns:p14="http://schemas.microsoft.com/office/powerpoint/2010/main" val="840806045"/>
+      </p:ext>
+    </p:extLst>
+  </p:cSld>
+  <p:clrMapOvr>
+    <a:masterClrMapping/>
+  </p:clrMapOvr>
+</p:sld>
+</file>
+
+<file path=ppt/slides/slide39.xml><?xml version="1.0" encoding="utf-8"?>
+<p:sld xmlns:a="http://schemas.openxmlformats.org/drawingml/2006/main" xmlns:r="http://schemas.openxmlformats.org/officeDocument/2006/relationships" xmlns:p="http://schemas.openxmlformats.org/presentationml/2006/main">
+  <p:cSld>
+    <p:spTree>
+      <p:nvGrpSpPr>
+        <p:cNvPr id="1" name=""/>
+        <p:cNvGrpSpPr/>
+        <p:nvPr/>
+      </p:nvGrpSpPr>
+      <p:grpSpPr>
+        <a:xfrm>
+          <a:off x="0" y="0"/>
+          <a:ext cx="0" cy="0"/>
+          <a:chOff x="0" y="0"/>
+          <a:chExt cx="0" cy="0"/>
+        </a:xfrm>
+      </p:grpSpPr>
+      <p:pic>
+        <p:nvPicPr>
+          <p:cNvPr id="4" name="图片 3">
+            <a:extLst>
+              <a:ext uri="{FF2B5EF4-FFF2-40B4-BE49-F238E27FC236}">
+                <a16:creationId xmlns:a16="http://schemas.microsoft.com/office/drawing/2014/main" id="{C505C34C-FB33-4F5F-B237-141DFE993022}"/>
+              </a:ext>
+            </a:extLst>
+          </p:cNvPr>
+          <p:cNvPicPr>
+            <a:picLocks noChangeAspect="1"/>
+          </p:cNvPicPr>
+          <p:nvPr/>
+        </p:nvPicPr>
+        <p:blipFill>
+          <a:blip r:embed="rId2"/>
+          <a:stretch>
+            <a:fillRect/>
+          </a:stretch>
+        </p:blipFill>
+        <p:spPr>
+          <a:xfrm>
+            <a:off x="195593" y="193304"/>
+            <a:ext cx="6322653" cy="4323809"/>
+          </a:xfrm>
+          <a:prstGeom prst="rect">
+            <a:avLst/>
+          </a:prstGeom>
+        </p:spPr>
+      </p:pic>
+      <p:pic>
+        <p:nvPicPr>
+          <p:cNvPr id="5" name="图片 4">
+            <a:extLst>
+              <a:ext uri="{FF2B5EF4-FFF2-40B4-BE49-F238E27FC236}">
+                <a16:creationId xmlns:a16="http://schemas.microsoft.com/office/drawing/2014/main" id="{D9DFA317-D3ED-452B-8180-224C1B96466E}"/>
+              </a:ext>
+            </a:extLst>
+          </p:cNvPr>
+          <p:cNvPicPr>
+            <a:picLocks noChangeAspect="1"/>
+          </p:cNvPicPr>
+          <p:nvPr/>
+        </p:nvPicPr>
+        <p:blipFill>
+          <a:blip r:embed="rId3"/>
+          <a:stretch>
+            <a:fillRect/>
+          </a:stretch>
+        </p:blipFill>
+        <p:spPr>
+          <a:xfrm>
+            <a:off x="4164651" y="422955"/>
+            <a:ext cx="4707189" cy="5508747"/>
+          </a:xfrm>
+          <a:prstGeom prst="rect">
+            <a:avLst/>
+          </a:prstGeom>
+        </p:spPr>
+      </p:pic>
+      <p:pic>
+        <p:nvPicPr>
+          <p:cNvPr id="6" name="图片 5">
+            <a:extLst>
+              <a:ext uri="{FF2B5EF4-FFF2-40B4-BE49-F238E27FC236}">
+                <a16:creationId xmlns:a16="http://schemas.microsoft.com/office/drawing/2014/main" id="{878F2329-26EE-4613-B178-EE84063880FE}"/>
+              </a:ext>
+            </a:extLst>
+          </p:cNvPr>
+          <p:cNvPicPr>
+            <a:picLocks noChangeAspect="1"/>
+          </p:cNvPicPr>
+          <p:nvPr/>
+        </p:nvPicPr>
+        <p:blipFill>
+          <a:blip r:embed="rId4"/>
+          <a:stretch>
+            <a:fillRect/>
+          </a:stretch>
+        </p:blipFill>
+        <p:spPr>
+          <a:xfrm>
+            <a:off x="7867496" y="691613"/>
+            <a:ext cx="3905055" cy="4971429"/>
+          </a:xfrm>
+          <a:prstGeom prst="rect">
+            <a:avLst/>
+          </a:prstGeom>
+        </p:spPr>
+      </p:pic>
+      <p:pic>
+        <p:nvPicPr>
+          <p:cNvPr id="7" name="图片 6">
+            <a:extLst>
+              <a:ext uri="{FF2B5EF4-FFF2-40B4-BE49-F238E27FC236}">
+                <a16:creationId xmlns:a16="http://schemas.microsoft.com/office/drawing/2014/main" id="{8B353E04-D7D8-4BF6-930E-64CEFD2ACA20}"/>
+              </a:ext>
+            </a:extLst>
+          </p:cNvPr>
+          <p:cNvPicPr>
+            <a:picLocks noChangeAspect="1"/>
+          </p:cNvPicPr>
+          <p:nvPr/>
+        </p:nvPicPr>
+        <p:blipFill>
+          <a:blip r:embed="rId5"/>
+          <a:stretch>
+            <a:fillRect/>
+          </a:stretch>
+        </p:blipFill>
+        <p:spPr>
+          <a:xfrm>
+            <a:off x="195593" y="6161353"/>
+            <a:ext cx="4447619" cy="485714"/>
+          </a:xfrm>
+          <a:prstGeom prst="rect">
+            <a:avLst/>
+          </a:prstGeom>
+        </p:spPr>
+      </p:pic>
+    </p:spTree>
+    <p:extLst>
+      <p:ext uri="{BB962C8B-B14F-4D97-AF65-F5344CB8AC3E}">
+        <p14:creationId xmlns:p14="http://schemas.microsoft.com/office/powerpoint/2010/main" val="409614361"/>
       </p:ext>
     </p:extLst>
   </p:cSld>

--- a/docs/scade.pptx
+++ b/docs/scade.pptx
@@ -5,7 +5,7 @@
     <p:sldMasterId id="2147483648" r:id="rId1"/>
   </p:sldMasterIdLst>
   <p:notesMasterIdLst>
-    <p:notesMasterId r:id="rId41"/>
+    <p:notesMasterId r:id="rId44"/>
   </p:notesMasterIdLst>
   <p:sldIdLst>
     <p:sldId id="256" r:id="rId2"/>
@@ -47,6 +47,9 @@
     <p:sldId id="293" r:id="rId38"/>
     <p:sldId id="294" r:id="rId39"/>
     <p:sldId id="295" r:id="rId40"/>
+    <p:sldId id="296" r:id="rId41"/>
+    <p:sldId id="297" r:id="rId42"/>
+    <p:sldId id="298" r:id="rId43"/>
   </p:sldIdLst>
   <p:sldSz cx="12192000" cy="6858000"/>
   <p:notesSz cx="6858000" cy="9144000"/>
@@ -235,7 +238,7 @@
           <a:p>
             <a:fld id="{3744C8BF-56B8-46D4-ADA5-A0AF811348DF}" type="datetimeFigureOut">
               <a:rPr lang="zh-CN" altLang="en-US" smtClean="0"/>
-              <a:t>2024/1/29</a:t>
+              <a:t>2024/3/10</a:t>
             </a:fld>
             <a:endParaRPr lang="zh-CN" altLang="en-US"/>
           </a:p>
@@ -733,7 +736,7 @@
           <a:p>
             <a:fld id="{C61D74A4-027F-4A2B-8B92-D0C194C50910}" type="datetimeFigureOut">
               <a:rPr lang="zh-CN" altLang="en-US" smtClean="0"/>
-              <a:t>2024/1/29</a:t>
+              <a:t>2024/3/10</a:t>
             </a:fld>
             <a:endParaRPr lang="zh-CN" altLang="en-US"/>
           </a:p>
@@ -931,7 +934,7 @@
           <a:p>
             <a:fld id="{C61D74A4-027F-4A2B-8B92-D0C194C50910}" type="datetimeFigureOut">
               <a:rPr lang="zh-CN" altLang="en-US" smtClean="0"/>
-              <a:t>2024/1/29</a:t>
+              <a:t>2024/3/10</a:t>
             </a:fld>
             <a:endParaRPr lang="zh-CN" altLang="en-US"/>
           </a:p>
@@ -1139,7 +1142,7 @@
           <a:p>
             <a:fld id="{C61D74A4-027F-4A2B-8B92-D0C194C50910}" type="datetimeFigureOut">
               <a:rPr lang="zh-CN" altLang="en-US" smtClean="0"/>
-              <a:t>2024/1/29</a:t>
+              <a:t>2024/3/10</a:t>
             </a:fld>
             <a:endParaRPr lang="zh-CN" altLang="en-US"/>
           </a:p>
@@ -1337,7 +1340,7 @@
           <a:p>
             <a:fld id="{C61D74A4-027F-4A2B-8B92-D0C194C50910}" type="datetimeFigureOut">
               <a:rPr lang="zh-CN" altLang="en-US" smtClean="0"/>
-              <a:t>2024/1/29</a:t>
+              <a:t>2024/3/10</a:t>
             </a:fld>
             <a:endParaRPr lang="zh-CN" altLang="en-US"/>
           </a:p>
@@ -1612,7 +1615,7 @@
           <a:p>
             <a:fld id="{C61D74A4-027F-4A2B-8B92-D0C194C50910}" type="datetimeFigureOut">
               <a:rPr lang="zh-CN" altLang="en-US" smtClean="0"/>
-              <a:t>2024/1/29</a:t>
+              <a:t>2024/3/10</a:t>
             </a:fld>
             <a:endParaRPr lang="zh-CN" altLang="en-US"/>
           </a:p>
@@ -1877,7 +1880,7 @@
           <a:p>
             <a:fld id="{C61D74A4-027F-4A2B-8B92-D0C194C50910}" type="datetimeFigureOut">
               <a:rPr lang="zh-CN" altLang="en-US" smtClean="0"/>
-              <a:t>2024/1/29</a:t>
+              <a:t>2024/3/10</a:t>
             </a:fld>
             <a:endParaRPr lang="zh-CN" altLang="en-US"/>
           </a:p>
@@ -2289,7 +2292,7 @@
           <a:p>
             <a:fld id="{C61D74A4-027F-4A2B-8B92-D0C194C50910}" type="datetimeFigureOut">
               <a:rPr lang="zh-CN" altLang="en-US" smtClean="0"/>
-              <a:t>2024/1/29</a:t>
+              <a:t>2024/3/10</a:t>
             </a:fld>
             <a:endParaRPr lang="zh-CN" altLang="en-US"/>
           </a:p>
@@ -2430,7 +2433,7 @@
           <a:p>
             <a:fld id="{C61D74A4-027F-4A2B-8B92-D0C194C50910}" type="datetimeFigureOut">
               <a:rPr lang="zh-CN" altLang="en-US" smtClean="0"/>
-              <a:t>2024/1/29</a:t>
+              <a:t>2024/3/10</a:t>
             </a:fld>
             <a:endParaRPr lang="zh-CN" altLang="en-US"/>
           </a:p>
@@ -2543,7 +2546,7 @@
           <a:p>
             <a:fld id="{C61D74A4-027F-4A2B-8B92-D0C194C50910}" type="datetimeFigureOut">
               <a:rPr lang="zh-CN" altLang="en-US" smtClean="0"/>
-              <a:t>2024/1/29</a:t>
+              <a:t>2024/3/10</a:t>
             </a:fld>
             <a:endParaRPr lang="zh-CN" altLang="en-US"/>
           </a:p>
@@ -2854,7 +2857,7 @@
           <a:p>
             <a:fld id="{C61D74A4-027F-4A2B-8B92-D0C194C50910}" type="datetimeFigureOut">
               <a:rPr lang="zh-CN" altLang="en-US" smtClean="0"/>
-              <a:t>2024/1/29</a:t>
+              <a:t>2024/3/10</a:t>
             </a:fld>
             <a:endParaRPr lang="zh-CN" altLang="en-US"/>
           </a:p>
@@ -3142,7 +3145,7 @@
           <a:p>
             <a:fld id="{C61D74A4-027F-4A2B-8B92-D0C194C50910}" type="datetimeFigureOut">
               <a:rPr lang="zh-CN" altLang="en-US" smtClean="0"/>
-              <a:t>2024/1/29</a:t>
+              <a:t>2024/3/10</a:t>
             </a:fld>
             <a:endParaRPr lang="zh-CN" altLang="en-US"/>
           </a:p>
@@ -3383,7 +3386,7 @@
           <a:p>
             <a:fld id="{C61D74A4-027F-4A2B-8B92-D0C194C50910}" type="datetimeFigureOut">
               <a:rPr lang="zh-CN" altLang="en-US" smtClean="0"/>
-              <a:t>2024/1/29</a:t>
+              <a:t>2024/3/10</a:t>
             </a:fld>
             <a:endParaRPr lang="zh-CN" altLang="en-US"/>
           </a:p>
@@ -11884,6 +11887,633 @@
     <p:extLst>
       <p:ext uri="{BB962C8B-B14F-4D97-AF65-F5344CB8AC3E}">
         <p14:creationId xmlns:p14="http://schemas.microsoft.com/office/powerpoint/2010/main" val="3328114629"/>
+      </p:ext>
+    </p:extLst>
+  </p:cSld>
+  <p:clrMapOvr>
+    <a:masterClrMapping/>
+  </p:clrMapOvr>
+</p:sld>
+</file>
+
+<file path=ppt/slides/slide40.xml><?xml version="1.0" encoding="utf-8"?>
+<p:sld xmlns:a="http://schemas.openxmlformats.org/drawingml/2006/main" xmlns:r="http://schemas.openxmlformats.org/officeDocument/2006/relationships" xmlns:p="http://schemas.openxmlformats.org/presentationml/2006/main">
+  <p:cSld>
+    <p:spTree>
+      <p:nvGrpSpPr>
+        <p:cNvPr id="1" name=""/>
+        <p:cNvGrpSpPr/>
+        <p:nvPr/>
+      </p:nvGrpSpPr>
+      <p:grpSpPr>
+        <a:xfrm>
+          <a:off x="0" y="0"/>
+          <a:ext cx="0" cy="0"/>
+          <a:chOff x="0" y="0"/>
+          <a:chExt cx="0" cy="0"/>
+        </a:xfrm>
+      </p:grpSpPr>
+      <p:pic>
+        <p:nvPicPr>
+          <p:cNvPr id="4" name="图片 3">
+            <a:extLst>
+              <a:ext uri="{FF2B5EF4-FFF2-40B4-BE49-F238E27FC236}">
+                <a16:creationId xmlns:a16="http://schemas.microsoft.com/office/drawing/2014/main" id="{31899236-8A3C-4DC3-A99A-5C54F5D98FA6}"/>
+              </a:ext>
+            </a:extLst>
+          </p:cNvPr>
+          <p:cNvPicPr>
+            <a:picLocks noChangeAspect="1"/>
+          </p:cNvPicPr>
+          <p:nvPr/>
+        </p:nvPicPr>
+        <p:blipFill>
+          <a:blip r:embed="rId2"/>
+          <a:stretch>
+            <a:fillRect/>
+          </a:stretch>
+        </p:blipFill>
+        <p:spPr>
+          <a:xfrm>
+            <a:off x="476666" y="689795"/>
+            <a:ext cx="5923809" cy="2847619"/>
+          </a:xfrm>
+          <a:prstGeom prst="rect">
+            <a:avLst/>
+          </a:prstGeom>
+        </p:spPr>
+      </p:pic>
+      <p:pic>
+        <p:nvPicPr>
+          <p:cNvPr id="5" name="图片 4">
+            <a:extLst>
+              <a:ext uri="{FF2B5EF4-FFF2-40B4-BE49-F238E27FC236}">
+                <a16:creationId xmlns:a16="http://schemas.microsoft.com/office/drawing/2014/main" id="{E74D1EF1-1BC6-4695-9F3C-56F9C03C32A5}"/>
+              </a:ext>
+            </a:extLst>
+          </p:cNvPr>
+          <p:cNvPicPr>
+            <a:picLocks noChangeAspect="1"/>
+          </p:cNvPicPr>
+          <p:nvPr/>
+        </p:nvPicPr>
+        <p:blipFill>
+          <a:blip r:embed="rId3"/>
+          <a:stretch>
+            <a:fillRect/>
+          </a:stretch>
+        </p:blipFill>
+        <p:spPr>
+          <a:xfrm>
+            <a:off x="7934976" y="3429000"/>
+            <a:ext cx="4123809" cy="3257143"/>
+          </a:xfrm>
+          <a:prstGeom prst="rect">
+            <a:avLst/>
+          </a:prstGeom>
+        </p:spPr>
+      </p:pic>
+      <p:pic>
+        <p:nvPicPr>
+          <p:cNvPr id="6" name="图片 5">
+            <a:extLst>
+              <a:ext uri="{FF2B5EF4-FFF2-40B4-BE49-F238E27FC236}">
+                <a16:creationId xmlns:a16="http://schemas.microsoft.com/office/drawing/2014/main" id="{1FFCE611-1D4A-4192-826D-8CF96A712CC5}"/>
+              </a:ext>
+            </a:extLst>
+          </p:cNvPr>
+          <p:cNvPicPr>
+            <a:picLocks noChangeAspect="1"/>
+          </p:cNvPicPr>
+          <p:nvPr/>
+        </p:nvPicPr>
+        <p:blipFill>
+          <a:blip r:embed="rId4"/>
+          <a:stretch>
+            <a:fillRect/>
+          </a:stretch>
+        </p:blipFill>
+        <p:spPr>
+          <a:xfrm>
+            <a:off x="7934976" y="461615"/>
+            <a:ext cx="3737579" cy="2738626"/>
+          </a:xfrm>
+          <a:prstGeom prst="rect">
+            <a:avLst/>
+          </a:prstGeom>
+        </p:spPr>
+      </p:pic>
+      <p:pic>
+        <p:nvPicPr>
+          <p:cNvPr id="7" name="图片 6">
+            <a:extLst>
+              <a:ext uri="{FF2B5EF4-FFF2-40B4-BE49-F238E27FC236}">
+                <a16:creationId xmlns:a16="http://schemas.microsoft.com/office/drawing/2014/main" id="{88F84544-97B0-4386-8100-4206C4EA4280}"/>
+              </a:ext>
+            </a:extLst>
+          </p:cNvPr>
+          <p:cNvPicPr>
+            <a:picLocks noChangeAspect="1"/>
+          </p:cNvPicPr>
+          <p:nvPr/>
+        </p:nvPicPr>
+        <p:blipFill>
+          <a:blip r:embed="rId5"/>
+          <a:stretch>
+            <a:fillRect/>
+          </a:stretch>
+        </p:blipFill>
+        <p:spPr>
+          <a:xfrm>
+            <a:off x="133215" y="4284343"/>
+            <a:ext cx="4323809" cy="1542857"/>
+          </a:xfrm>
+          <a:prstGeom prst="rect">
+            <a:avLst/>
+          </a:prstGeom>
+        </p:spPr>
+      </p:pic>
+      <p:pic>
+        <p:nvPicPr>
+          <p:cNvPr id="8" name="图片 7">
+            <a:extLst>
+              <a:ext uri="{FF2B5EF4-FFF2-40B4-BE49-F238E27FC236}">
+                <a16:creationId xmlns:a16="http://schemas.microsoft.com/office/drawing/2014/main" id="{5C821881-F819-4135-A391-EEBE99215C65}"/>
+              </a:ext>
+            </a:extLst>
+          </p:cNvPr>
+          <p:cNvPicPr>
+            <a:picLocks noChangeAspect="1"/>
+          </p:cNvPicPr>
+          <p:nvPr/>
+        </p:nvPicPr>
+        <p:blipFill>
+          <a:blip r:embed="rId6"/>
+          <a:stretch>
+            <a:fillRect/>
+          </a:stretch>
+        </p:blipFill>
+        <p:spPr>
+          <a:xfrm>
+            <a:off x="4680223" y="3612915"/>
+            <a:ext cx="3200000" cy="2885714"/>
+          </a:xfrm>
+          <a:prstGeom prst="rect">
+            <a:avLst/>
+          </a:prstGeom>
+        </p:spPr>
+      </p:pic>
+      <p:sp>
+        <p:nvSpPr>
+          <p:cNvPr id="9" name="文本框 8">
+            <a:extLst>
+              <a:ext uri="{FF2B5EF4-FFF2-40B4-BE49-F238E27FC236}">
+                <a16:creationId xmlns:a16="http://schemas.microsoft.com/office/drawing/2014/main" id="{73E3512C-AB86-4BAE-994C-9608415F8E0B}"/>
+              </a:ext>
+            </a:extLst>
+          </p:cNvPr>
+          <p:cNvSpPr txBox="1"/>
+          <p:nvPr/>
+        </p:nvSpPr>
+        <p:spPr>
+          <a:xfrm>
+            <a:off x="234892" y="167780"/>
+            <a:ext cx="3926047" cy="369332"/>
+          </a:xfrm>
+          <a:prstGeom prst="rect">
+            <a:avLst/>
+          </a:prstGeom>
+          <a:noFill/>
+        </p:spPr>
+        <p:txBody>
+          <a:bodyPr wrap="square" rtlCol="0">
+            <a:spAutoFit/>
+          </a:bodyPr>
+          <a:lstStyle/>
+          <a:p>
+            <a:r>
+              <a:rPr lang="zh-CN" altLang="en-US" b="1" dirty="0"/>
+              <a:t>合并函数调用文法</a:t>
+            </a:r>
+          </a:p>
+        </p:txBody>
+      </p:sp>
+    </p:spTree>
+    <p:extLst>
+      <p:ext uri="{BB962C8B-B14F-4D97-AF65-F5344CB8AC3E}">
+        <p14:creationId xmlns:p14="http://schemas.microsoft.com/office/powerpoint/2010/main" val="2877042869"/>
+      </p:ext>
+    </p:extLst>
+  </p:cSld>
+  <p:clrMapOvr>
+    <a:masterClrMapping/>
+  </p:clrMapOvr>
+</p:sld>
+</file>
+
+<file path=ppt/slides/slide41.xml><?xml version="1.0" encoding="utf-8"?>
+<p:sld xmlns:a="http://schemas.openxmlformats.org/drawingml/2006/main" xmlns:r="http://schemas.openxmlformats.org/officeDocument/2006/relationships" xmlns:p="http://schemas.openxmlformats.org/presentationml/2006/main">
+  <p:cSld>
+    <p:spTree>
+      <p:nvGrpSpPr>
+        <p:cNvPr id="1" name=""/>
+        <p:cNvGrpSpPr/>
+        <p:nvPr/>
+      </p:nvGrpSpPr>
+      <p:grpSpPr>
+        <a:xfrm>
+          <a:off x="0" y="0"/>
+          <a:ext cx="0" cy="0"/>
+          <a:chOff x="0" y="0"/>
+          <a:chExt cx="0" cy="0"/>
+        </a:xfrm>
+      </p:grpSpPr>
+      <p:pic>
+        <p:nvPicPr>
+          <p:cNvPr id="4" name="图片 3">
+            <a:extLst>
+              <a:ext uri="{FF2B5EF4-FFF2-40B4-BE49-F238E27FC236}">
+                <a16:creationId xmlns:a16="http://schemas.microsoft.com/office/drawing/2014/main" id="{CFC4A756-A628-4AC7-9BB0-9ECD92419B5A}"/>
+              </a:ext>
+            </a:extLst>
+          </p:cNvPr>
+          <p:cNvPicPr>
+            <a:picLocks noChangeAspect="1"/>
+          </p:cNvPicPr>
+          <p:nvPr/>
+        </p:nvPicPr>
+        <p:blipFill>
+          <a:blip r:embed="rId2"/>
+          <a:stretch>
+            <a:fillRect/>
+          </a:stretch>
+        </p:blipFill>
+        <p:spPr>
+          <a:xfrm>
+            <a:off x="359185" y="901899"/>
+            <a:ext cx="5400000" cy="3095238"/>
+          </a:xfrm>
+          <a:prstGeom prst="rect">
+            <a:avLst/>
+          </a:prstGeom>
+        </p:spPr>
+      </p:pic>
+      <p:pic>
+        <p:nvPicPr>
+          <p:cNvPr id="5" name="图片 4">
+            <a:extLst>
+              <a:ext uri="{FF2B5EF4-FFF2-40B4-BE49-F238E27FC236}">
+                <a16:creationId xmlns:a16="http://schemas.microsoft.com/office/drawing/2014/main" id="{CB2D1526-D4ED-48FC-8CEC-ED3C31665644}"/>
+              </a:ext>
+            </a:extLst>
+          </p:cNvPr>
+          <p:cNvPicPr>
+            <a:picLocks noChangeAspect="1"/>
+          </p:cNvPicPr>
+          <p:nvPr/>
+        </p:nvPicPr>
+        <p:blipFill>
+          <a:blip r:embed="rId3"/>
+          <a:stretch>
+            <a:fillRect/>
+          </a:stretch>
+        </p:blipFill>
+        <p:spPr>
+          <a:xfrm>
+            <a:off x="750956" y="4131361"/>
+            <a:ext cx="3952381" cy="657143"/>
+          </a:xfrm>
+          <a:prstGeom prst="rect">
+            <a:avLst/>
+          </a:prstGeom>
+        </p:spPr>
+      </p:pic>
+      <p:pic>
+        <p:nvPicPr>
+          <p:cNvPr id="6" name="图片 5">
+            <a:extLst>
+              <a:ext uri="{FF2B5EF4-FFF2-40B4-BE49-F238E27FC236}">
+                <a16:creationId xmlns:a16="http://schemas.microsoft.com/office/drawing/2014/main" id="{535D8495-83B7-451D-8003-6CE1D225B81B}"/>
+              </a:ext>
+            </a:extLst>
+          </p:cNvPr>
+          <p:cNvPicPr>
+            <a:picLocks noChangeAspect="1"/>
+          </p:cNvPicPr>
+          <p:nvPr/>
+        </p:nvPicPr>
+        <p:blipFill>
+          <a:blip r:embed="rId4"/>
+          <a:stretch>
+            <a:fillRect/>
+          </a:stretch>
+        </p:blipFill>
+        <p:spPr>
+          <a:xfrm>
+            <a:off x="684290" y="5064853"/>
+            <a:ext cx="4085714" cy="619048"/>
+          </a:xfrm>
+          <a:prstGeom prst="rect">
+            <a:avLst/>
+          </a:prstGeom>
+        </p:spPr>
+      </p:pic>
+      <p:sp>
+        <p:nvSpPr>
+          <p:cNvPr id="7" name="文本框 6">
+            <a:extLst>
+              <a:ext uri="{FF2B5EF4-FFF2-40B4-BE49-F238E27FC236}">
+                <a16:creationId xmlns:a16="http://schemas.microsoft.com/office/drawing/2014/main" id="{38E92B66-BCA0-4881-8E3A-CCCABBAC2B95}"/>
+              </a:ext>
+            </a:extLst>
+          </p:cNvPr>
+          <p:cNvSpPr txBox="1"/>
+          <p:nvPr/>
+        </p:nvSpPr>
+        <p:spPr>
+          <a:xfrm>
+            <a:off x="285226" y="159391"/>
+            <a:ext cx="4261607" cy="369332"/>
+          </a:xfrm>
+          <a:prstGeom prst="rect">
+            <a:avLst/>
+          </a:prstGeom>
+          <a:noFill/>
+        </p:spPr>
+        <p:txBody>
+          <a:bodyPr wrap="square" rtlCol="0">
+            <a:spAutoFit/>
+          </a:bodyPr>
+          <a:lstStyle/>
+          <a:p>
+            <a:r>
+              <a:rPr lang="zh-CN" altLang="en-US" b="1" dirty="0"/>
+              <a:t>解决文法冲突问题</a:t>
+            </a:r>
+          </a:p>
+        </p:txBody>
+      </p:sp>
+      <p:pic>
+        <p:nvPicPr>
+          <p:cNvPr id="8" name="图片 7">
+            <a:extLst>
+              <a:ext uri="{FF2B5EF4-FFF2-40B4-BE49-F238E27FC236}">
+                <a16:creationId xmlns:a16="http://schemas.microsoft.com/office/drawing/2014/main" id="{149E1B35-B3AA-4A3A-8A20-9A0789A3DAB8}"/>
+              </a:ext>
+            </a:extLst>
+          </p:cNvPr>
+          <p:cNvPicPr>
+            <a:picLocks noChangeAspect="1"/>
+          </p:cNvPicPr>
+          <p:nvPr/>
+        </p:nvPicPr>
+        <p:blipFill>
+          <a:blip r:embed="rId5"/>
+          <a:stretch>
+            <a:fillRect/>
+          </a:stretch>
+        </p:blipFill>
+        <p:spPr>
+          <a:xfrm>
+            <a:off x="6845417" y="988385"/>
+            <a:ext cx="4729287" cy="2788042"/>
+          </a:xfrm>
+          <a:prstGeom prst="rect">
+            <a:avLst/>
+          </a:prstGeom>
+        </p:spPr>
+      </p:pic>
+      <p:sp>
+        <p:nvSpPr>
+          <p:cNvPr id="9" name="文本框 8">
+            <a:extLst>
+              <a:ext uri="{FF2B5EF4-FFF2-40B4-BE49-F238E27FC236}">
+                <a16:creationId xmlns:a16="http://schemas.microsoft.com/office/drawing/2014/main" id="{902895E0-7250-45AA-BD3C-0F8D5743CBA4}"/>
+              </a:ext>
+            </a:extLst>
+          </p:cNvPr>
+          <p:cNvSpPr txBox="1"/>
+          <p:nvPr/>
+        </p:nvSpPr>
+        <p:spPr>
+          <a:xfrm>
+            <a:off x="359185" y="528723"/>
+            <a:ext cx="2342070" cy="369332"/>
+          </a:xfrm>
+          <a:prstGeom prst="rect">
+            <a:avLst/>
+          </a:prstGeom>
+          <a:noFill/>
+        </p:spPr>
+        <p:txBody>
+          <a:bodyPr wrap="square" rtlCol="0">
+            <a:spAutoFit/>
+          </a:bodyPr>
+          <a:lstStyle/>
+          <a:p>
+            <a:r>
+              <a:rPr lang="zh-CN" altLang="en-US" dirty="0"/>
+              <a:t>解决前</a:t>
+            </a:r>
+          </a:p>
+        </p:txBody>
+      </p:sp>
+      <p:sp>
+        <p:nvSpPr>
+          <p:cNvPr id="10" name="文本框 9">
+            <a:extLst>
+              <a:ext uri="{FF2B5EF4-FFF2-40B4-BE49-F238E27FC236}">
+                <a16:creationId xmlns:a16="http://schemas.microsoft.com/office/drawing/2014/main" id="{9FC0EFD5-8378-4728-AE71-7DFDE0930000}"/>
+              </a:ext>
+            </a:extLst>
+          </p:cNvPr>
+          <p:cNvSpPr txBox="1"/>
+          <p:nvPr/>
+        </p:nvSpPr>
+        <p:spPr>
+          <a:xfrm>
+            <a:off x="7004808" y="532567"/>
+            <a:ext cx="2558642" cy="369332"/>
+          </a:xfrm>
+          <a:prstGeom prst="rect">
+            <a:avLst/>
+          </a:prstGeom>
+          <a:noFill/>
+        </p:spPr>
+        <p:txBody>
+          <a:bodyPr wrap="square" rtlCol="0">
+            <a:spAutoFit/>
+          </a:bodyPr>
+          <a:lstStyle/>
+          <a:p>
+            <a:r>
+              <a:rPr lang="zh-CN" altLang="en-US" dirty="0"/>
+              <a:t>解决后</a:t>
+            </a:r>
+            <a:endParaRPr lang="en-US" altLang="zh-CN" dirty="0"/>
+          </a:p>
+        </p:txBody>
+      </p:sp>
+    </p:spTree>
+    <p:extLst>
+      <p:ext uri="{BB962C8B-B14F-4D97-AF65-F5344CB8AC3E}">
+        <p14:creationId xmlns:p14="http://schemas.microsoft.com/office/powerpoint/2010/main" val="2464533081"/>
+      </p:ext>
+    </p:extLst>
+  </p:cSld>
+  <p:clrMapOvr>
+    <a:masterClrMapping/>
+  </p:clrMapOvr>
+</p:sld>
+</file>
+
+<file path=ppt/slides/slide42.xml><?xml version="1.0" encoding="utf-8"?>
+<p:sld xmlns:a="http://schemas.openxmlformats.org/drawingml/2006/main" xmlns:r="http://schemas.openxmlformats.org/officeDocument/2006/relationships" xmlns:p="http://schemas.openxmlformats.org/presentationml/2006/main">
+  <p:cSld>
+    <p:spTree>
+      <p:nvGrpSpPr>
+        <p:cNvPr id="1" name=""/>
+        <p:cNvGrpSpPr/>
+        <p:nvPr/>
+      </p:nvGrpSpPr>
+      <p:grpSpPr>
+        <a:xfrm>
+          <a:off x="0" y="0"/>
+          <a:ext cx="0" cy="0"/>
+          <a:chOff x="0" y="0"/>
+          <a:chExt cx="0" cy="0"/>
+        </a:xfrm>
+      </p:grpSpPr>
+      <p:pic>
+        <p:nvPicPr>
+          <p:cNvPr id="4" name="图片 3">
+            <a:extLst>
+              <a:ext uri="{FF2B5EF4-FFF2-40B4-BE49-F238E27FC236}">
+                <a16:creationId xmlns:a16="http://schemas.microsoft.com/office/drawing/2014/main" id="{F9A1BA08-645C-4CF3-8C68-85A2E7E4868D}"/>
+              </a:ext>
+            </a:extLst>
+          </p:cNvPr>
+          <p:cNvPicPr>
+            <a:picLocks noChangeAspect="1"/>
+          </p:cNvPicPr>
+          <p:nvPr/>
+        </p:nvPicPr>
+        <p:blipFill>
+          <a:blip r:embed="rId2"/>
+          <a:stretch>
+            <a:fillRect/>
+          </a:stretch>
+        </p:blipFill>
+        <p:spPr>
+          <a:xfrm>
+            <a:off x="319157" y="702735"/>
+            <a:ext cx="7409524" cy="1123810"/>
+          </a:xfrm>
+          <a:prstGeom prst="rect">
+            <a:avLst/>
+          </a:prstGeom>
+        </p:spPr>
+      </p:pic>
+      <p:sp>
+        <p:nvSpPr>
+          <p:cNvPr id="5" name="文本框 4">
+            <a:extLst>
+              <a:ext uri="{FF2B5EF4-FFF2-40B4-BE49-F238E27FC236}">
+                <a16:creationId xmlns:a16="http://schemas.microsoft.com/office/drawing/2014/main" id="{A3F62815-A6F4-4162-9089-EC4D8B786E50}"/>
+              </a:ext>
+            </a:extLst>
+          </p:cNvPr>
+          <p:cNvSpPr txBox="1"/>
+          <p:nvPr/>
+        </p:nvSpPr>
+        <p:spPr>
+          <a:xfrm>
+            <a:off x="377505" y="151002"/>
+            <a:ext cx="2952924" cy="369332"/>
+          </a:xfrm>
+          <a:prstGeom prst="rect">
+            <a:avLst/>
+          </a:prstGeom>
+          <a:noFill/>
+        </p:spPr>
+        <p:txBody>
+          <a:bodyPr wrap="square" rtlCol="0">
+            <a:spAutoFit/>
+          </a:bodyPr>
+          <a:lstStyle/>
+          <a:p>
+            <a:r>
+              <a:rPr lang="zh-CN" altLang="en-US" dirty="0"/>
+              <a:t>数组和结构体结合的例子</a:t>
+            </a:r>
+            <a:endParaRPr lang="en-US" altLang="zh-CN" dirty="0"/>
+          </a:p>
+        </p:txBody>
+      </p:sp>
+      <p:pic>
+        <p:nvPicPr>
+          <p:cNvPr id="6" name="图片 5">
+            <a:extLst>
+              <a:ext uri="{FF2B5EF4-FFF2-40B4-BE49-F238E27FC236}">
+                <a16:creationId xmlns:a16="http://schemas.microsoft.com/office/drawing/2014/main" id="{54AAF214-B13F-4D2B-AB87-0BAB631147E0}"/>
+              </a:ext>
+            </a:extLst>
+          </p:cNvPr>
+          <p:cNvPicPr>
+            <a:picLocks noChangeAspect="1"/>
+          </p:cNvPicPr>
+          <p:nvPr/>
+        </p:nvPicPr>
+        <p:blipFill>
+          <a:blip r:embed="rId3"/>
+          <a:stretch>
+            <a:fillRect/>
+          </a:stretch>
+        </p:blipFill>
+        <p:spPr>
+          <a:xfrm>
+            <a:off x="6972577" y="2008946"/>
+            <a:ext cx="4762752" cy="4754541"/>
+          </a:xfrm>
+          <a:prstGeom prst="rect">
+            <a:avLst/>
+          </a:prstGeom>
+        </p:spPr>
+      </p:pic>
+      <p:pic>
+        <p:nvPicPr>
+          <p:cNvPr id="7" name="图片 6">
+            <a:extLst>
+              <a:ext uri="{FF2B5EF4-FFF2-40B4-BE49-F238E27FC236}">
+                <a16:creationId xmlns:a16="http://schemas.microsoft.com/office/drawing/2014/main" id="{0E8F3ABB-32A8-458B-BC26-A574ADC92851}"/>
+              </a:ext>
+            </a:extLst>
+          </p:cNvPr>
+          <p:cNvPicPr>
+            <a:picLocks noChangeAspect="1"/>
+          </p:cNvPicPr>
+          <p:nvPr/>
+        </p:nvPicPr>
+        <p:blipFill>
+          <a:blip r:embed="rId4"/>
+          <a:stretch>
+            <a:fillRect/>
+          </a:stretch>
+        </p:blipFill>
+        <p:spPr>
+          <a:xfrm>
+            <a:off x="523962" y="1946359"/>
+            <a:ext cx="6295238" cy="4609524"/>
+          </a:xfrm>
+          <a:prstGeom prst="rect">
+            <a:avLst/>
+          </a:prstGeom>
+        </p:spPr>
+      </p:pic>
+    </p:spTree>
+    <p:extLst>
+      <p:ext uri="{BB962C8B-B14F-4D97-AF65-F5344CB8AC3E}">
+        <p14:creationId xmlns:p14="http://schemas.microsoft.com/office/powerpoint/2010/main" val="3018066832"/>
       </p:ext>
     </p:extLst>
   </p:cSld>

--- a/docs/scade.pptx
+++ b/docs/scade.pptx
@@ -5,7 +5,7 @@
     <p:sldMasterId id="2147483648" r:id="rId1"/>
   </p:sldMasterIdLst>
   <p:notesMasterIdLst>
-    <p:notesMasterId r:id="rId44"/>
+    <p:notesMasterId r:id="rId46"/>
   </p:notesMasterIdLst>
   <p:sldIdLst>
     <p:sldId id="256" r:id="rId2"/>
@@ -50,6 +50,8 @@
     <p:sldId id="296" r:id="rId41"/>
     <p:sldId id="297" r:id="rId42"/>
     <p:sldId id="298" r:id="rId43"/>
+    <p:sldId id="299" r:id="rId44"/>
+    <p:sldId id="300" r:id="rId45"/>
   </p:sldIdLst>
   <p:sldSz cx="12192000" cy="6858000"/>
   <p:notesSz cx="6858000" cy="9144000"/>
@@ -238,7 +240,7 @@
           <a:p>
             <a:fld id="{3744C8BF-56B8-46D4-ADA5-A0AF811348DF}" type="datetimeFigureOut">
               <a:rPr lang="zh-CN" altLang="en-US" smtClean="0"/>
-              <a:t>2024/3/10</a:t>
+              <a:t>2024/3/17</a:t>
             </a:fld>
             <a:endParaRPr lang="zh-CN" altLang="en-US"/>
           </a:p>
@@ -736,7 +738,7 @@
           <a:p>
             <a:fld id="{C61D74A4-027F-4A2B-8B92-D0C194C50910}" type="datetimeFigureOut">
               <a:rPr lang="zh-CN" altLang="en-US" smtClean="0"/>
-              <a:t>2024/3/10</a:t>
+              <a:t>2024/3/17</a:t>
             </a:fld>
             <a:endParaRPr lang="zh-CN" altLang="en-US"/>
           </a:p>
@@ -934,7 +936,7 @@
           <a:p>
             <a:fld id="{C61D74A4-027F-4A2B-8B92-D0C194C50910}" type="datetimeFigureOut">
               <a:rPr lang="zh-CN" altLang="en-US" smtClean="0"/>
-              <a:t>2024/3/10</a:t>
+              <a:t>2024/3/17</a:t>
             </a:fld>
             <a:endParaRPr lang="zh-CN" altLang="en-US"/>
           </a:p>
@@ -1142,7 +1144,7 @@
           <a:p>
             <a:fld id="{C61D74A4-027F-4A2B-8B92-D0C194C50910}" type="datetimeFigureOut">
               <a:rPr lang="zh-CN" altLang="en-US" smtClean="0"/>
-              <a:t>2024/3/10</a:t>
+              <a:t>2024/3/17</a:t>
             </a:fld>
             <a:endParaRPr lang="zh-CN" altLang="en-US"/>
           </a:p>
@@ -1340,7 +1342,7 @@
           <a:p>
             <a:fld id="{C61D74A4-027F-4A2B-8B92-D0C194C50910}" type="datetimeFigureOut">
               <a:rPr lang="zh-CN" altLang="en-US" smtClean="0"/>
-              <a:t>2024/3/10</a:t>
+              <a:t>2024/3/17</a:t>
             </a:fld>
             <a:endParaRPr lang="zh-CN" altLang="en-US"/>
           </a:p>
@@ -1615,7 +1617,7 @@
           <a:p>
             <a:fld id="{C61D74A4-027F-4A2B-8B92-D0C194C50910}" type="datetimeFigureOut">
               <a:rPr lang="zh-CN" altLang="en-US" smtClean="0"/>
-              <a:t>2024/3/10</a:t>
+              <a:t>2024/3/17</a:t>
             </a:fld>
             <a:endParaRPr lang="zh-CN" altLang="en-US"/>
           </a:p>
@@ -1880,7 +1882,7 @@
           <a:p>
             <a:fld id="{C61D74A4-027F-4A2B-8B92-D0C194C50910}" type="datetimeFigureOut">
               <a:rPr lang="zh-CN" altLang="en-US" smtClean="0"/>
-              <a:t>2024/3/10</a:t>
+              <a:t>2024/3/17</a:t>
             </a:fld>
             <a:endParaRPr lang="zh-CN" altLang="en-US"/>
           </a:p>
@@ -2292,7 +2294,7 @@
           <a:p>
             <a:fld id="{C61D74A4-027F-4A2B-8B92-D0C194C50910}" type="datetimeFigureOut">
               <a:rPr lang="zh-CN" altLang="en-US" smtClean="0"/>
-              <a:t>2024/3/10</a:t>
+              <a:t>2024/3/17</a:t>
             </a:fld>
             <a:endParaRPr lang="zh-CN" altLang="en-US"/>
           </a:p>
@@ -2433,7 +2435,7 @@
           <a:p>
             <a:fld id="{C61D74A4-027F-4A2B-8B92-D0C194C50910}" type="datetimeFigureOut">
               <a:rPr lang="zh-CN" altLang="en-US" smtClean="0"/>
-              <a:t>2024/3/10</a:t>
+              <a:t>2024/3/17</a:t>
             </a:fld>
             <a:endParaRPr lang="zh-CN" altLang="en-US"/>
           </a:p>
@@ -2546,7 +2548,7 @@
           <a:p>
             <a:fld id="{C61D74A4-027F-4A2B-8B92-D0C194C50910}" type="datetimeFigureOut">
               <a:rPr lang="zh-CN" altLang="en-US" smtClean="0"/>
-              <a:t>2024/3/10</a:t>
+              <a:t>2024/3/17</a:t>
             </a:fld>
             <a:endParaRPr lang="zh-CN" altLang="en-US"/>
           </a:p>
@@ -2857,7 +2859,7 @@
           <a:p>
             <a:fld id="{C61D74A4-027F-4A2B-8B92-D0C194C50910}" type="datetimeFigureOut">
               <a:rPr lang="zh-CN" altLang="en-US" smtClean="0"/>
-              <a:t>2024/3/10</a:t>
+              <a:t>2024/3/17</a:t>
             </a:fld>
             <a:endParaRPr lang="zh-CN" altLang="en-US"/>
           </a:p>
@@ -3145,7 +3147,7 @@
           <a:p>
             <a:fld id="{C61D74A4-027F-4A2B-8B92-D0C194C50910}" type="datetimeFigureOut">
               <a:rPr lang="zh-CN" altLang="en-US" smtClean="0"/>
-              <a:t>2024/3/10</a:t>
+              <a:t>2024/3/17</a:t>
             </a:fld>
             <a:endParaRPr lang="zh-CN" altLang="en-US"/>
           </a:p>
@@ -3386,7 +3388,7 @@
           <a:p>
             <a:fld id="{C61D74A4-027F-4A2B-8B92-D0C194C50910}" type="datetimeFigureOut">
               <a:rPr lang="zh-CN" altLang="en-US" smtClean="0"/>
-              <a:t>2024/3/10</a:t>
+              <a:t>2024/3/17</a:t>
             </a:fld>
             <a:endParaRPr lang="zh-CN" altLang="en-US"/>
           </a:p>
@@ -12514,6 +12516,468 @@
     <p:extLst>
       <p:ext uri="{BB962C8B-B14F-4D97-AF65-F5344CB8AC3E}">
         <p14:creationId xmlns:p14="http://schemas.microsoft.com/office/powerpoint/2010/main" val="3018066832"/>
+      </p:ext>
+    </p:extLst>
+  </p:cSld>
+  <p:clrMapOvr>
+    <a:masterClrMapping/>
+  </p:clrMapOvr>
+</p:sld>
+</file>
+
+<file path=ppt/slides/slide43.xml><?xml version="1.0" encoding="utf-8"?>
+<p:sld xmlns:a="http://schemas.openxmlformats.org/drawingml/2006/main" xmlns:r="http://schemas.openxmlformats.org/officeDocument/2006/relationships" xmlns:p="http://schemas.openxmlformats.org/presentationml/2006/main">
+  <p:cSld>
+    <p:spTree>
+      <p:nvGrpSpPr>
+        <p:cNvPr id="1" name=""/>
+        <p:cNvGrpSpPr/>
+        <p:nvPr/>
+      </p:nvGrpSpPr>
+      <p:grpSpPr>
+        <a:xfrm>
+          <a:off x="0" y="0"/>
+          <a:ext cx="0" cy="0"/>
+          <a:chOff x="0" y="0"/>
+          <a:chExt cx="0" cy="0"/>
+        </a:xfrm>
+      </p:grpSpPr>
+      <p:sp>
+        <p:nvSpPr>
+          <p:cNvPr id="4" name="文本框 3">
+            <a:extLst>
+              <a:ext uri="{FF2B5EF4-FFF2-40B4-BE49-F238E27FC236}">
+                <a16:creationId xmlns:a16="http://schemas.microsoft.com/office/drawing/2014/main" id="{8CED6D6A-AAE8-4249-BD8B-BBC09CA5205B}"/>
+              </a:ext>
+            </a:extLst>
+          </p:cNvPr>
+          <p:cNvSpPr txBox="1"/>
+          <p:nvPr/>
+        </p:nvSpPr>
+        <p:spPr>
+          <a:xfrm>
+            <a:off x="226503" y="100668"/>
+            <a:ext cx="3741490" cy="369332"/>
+          </a:xfrm>
+          <a:prstGeom prst="rect">
+            <a:avLst/>
+          </a:prstGeom>
+          <a:noFill/>
+        </p:spPr>
+        <p:txBody>
+          <a:bodyPr wrap="square" rtlCol="0">
+            <a:spAutoFit/>
+          </a:bodyPr>
+          <a:lstStyle/>
+          <a:p>
+            <a:r>
+              <a:rPr lang="zh-CN" altLang="en-US" dirty="0"/>
+              <a:t>函数调用相关，返回值为多个</a:t>
+            </a:r>
+          </a:p>
+        </p:txBody>
+      </p:sp>
+      <p:pic>
+        <p:nvPicPr>
+          <p:cNvPr id="5" name="图片 4">
+            <a:extLst>
+              <a:ext uri="{FF2B5EF4-FFF2-40B4-BE49-F238E27FC236}">
+                <a16:creationId xmlns:a16="http://schemas.microsoft.com/office/drawing/2014/main" id="{86C659B2-26FD-471A-9A75-6F085BB0D4D7}"/>
+              </a:ext>
+            </a:extLst>
+          </p:cNvPr>
+          <p:cNvPicPr>
+            <a:picLocks noChangeAspect="1"/>
+          </p:cNvPicPr>
+          <p:nvPr/>
+        </p:nvPicPr>
+        <p:blipFill>
+          <a:blip r:embed="rId2"/>
+          <a:stretch>
+            <a:fillRect/>
+          </a:stretch>
+        </p:blipFill>
+        <p:spPr>
+          <a:xfrm>
+            <a:off x="328388" y="693858"/>
+            <a:ext cx="4790476" cy="1695238"/>
+          </a:xfrm>
+          <a:prstGeom prst="rect">
+            <a:avLst/>
+          </a:prstGeom>
+        </p:spPr>
+      </p:pic>
+      <p:pic>
+        <p:nvPicPr>
+          <p:cNvPr id="6" name="图片 5">
+            <a:extLst>
+              <a:ext uri="{FF2B5EF4-FFF2-40B4-BE49-F238E27FC236}">
+                <a16:creationId xmlns:a16="http://schemas.microsoft.com/office/drawing/2014/main" id="{1FBC2FC2-9F17-4059-9204-A22848092FD0}"/>
+              </a:ext>
+            </a:extLst>
+          </p:cNvPr>
+          <p:cNvPicPr>
+            <a:picLocks noChangeAspect="1"/>
+          </p:cNvPicPr>
+          <p:nvPr/>
+        </p:nvPicPr>
+        <p:blipFill>
+          <a:blip r:embed="rId3"/>
+          <a:stretch>
+            <a:fillRect/>
+          </a:stretch>
+        </p:blipFill>
+        <p:spPr>
+          <a:xfrm>
+            <a:off x="5978429" y="470000"/>
+            <a:ext cx="5704762" cy="3371429"/>
+          </a:xfrm>
+          <a:prstGeom prst="rect">
+            <a:avLst/>
+          </a:prstGeom>
+        </p:spPr>
+      </p:pic>
+      <p:pic>
+        <p:nvPicPr>
+          <p:cNvPr id="8" name="图片 7">
+            <a:extLst>
+              <a:ext uri="{FF2B5EF4-FFF2-40B4-BE49-F238E27FC236}">
+                <a16:creationId xmlns:a16="http://schemas.microsoft.com/office/drawing/2014/main" id="{645322D5-7C5E-4E02-8352-6D6E1DC1D9A6}"/>
+              </a:ext>
+            </a:extLst>
+          </p:cNvPr>
+          <p:cNvPicPr>
+            <a:picLocks noChangeAspect="1"/>
+          </p:cNvPicPr>
+          <p:nvPr/>
+        </p:nvPicPr>
+        <p:blipFill>
+          <a:blip r:embed="rId4"/>
+          <a:stretch>
+            <a:fillRect/>
+          </a:stretch>
+        </p:blipFill>
+        <p:spPr>
+          <a:xfrm>
+            <a:off x="142612" y="2733316"/>
+            <a:ext cx="5628571" cy="1257143"/>
+          </a:xfrm>
+          <a:prstGeom prst="rect">
+            <a:avLst/>
+          </a:prstGeom>
+        </p:spPr>
+      </p:pic>
+      <p:pic>
+        <p:nvPicPr>
+          <p:cNvPr id="9" name="图片 8">
+            <a:extLst>
+              <a:ext uri="{FF2B5EF4-FFF2-40B4-BE49-F238E27FC236}">
+                <a16:creationId xmlns:a16="http://schemas.microsoft.com/office/drawing/2014/main" id="{0E81C50C-D122-4B19-9440-61F1EF0E7DBE}"/>
+              </a:ext>
+            </a:extLst>
+          </p:cNvPr>
+          <p:cNvPicPr>
+            <a:picLocks noChangeAspect="1"/>
+          </p:cNvPicPr>
+          <p:nvPr/>
+        </p:nvPicPr>
+        <p:blipFill>
+          <a:blip r:embed="rId5"/>
+          <a:stretch>
+            <a:fillRect/>
+          </a:stretch>
+        </p:blipFill>
+        <p:spPr>
+          <a:xfrm>
+            <a:off x="4812289" y="4220867"/>
+            <a:ext cx="3171429" cy="2295238"/>
+          </a:xfrm>
+          <a:prstGeom prst="rect">
+            <a:avLst/>
+          </a:prstGeom>
+        </p:spPr>
+      </p:pic>
+      <p:pic>
+        <p:nvPicPr>
+          <p:cNvPr id="10" name="图片 9">
+            <a:extLst>
+              <a:ext uri="{FF2B5EF4-FFF2-40B4-BE49-F238E27FC236}">
+                <a16:creationId xmlns:a16="http://schemas.microsoft.com/office/drawing/2014/main" id="{66350368-5A3E-4A0F-8BD6-3539C42D9283}"/>
+              </a:ext>
+            </a:extLst>
+          </p:cNvPr>
+          <p:cNvPicPr>
+            <a:picLocks noChangeAspect="1"/>
+          </p:cNvPicPr>
+          <p:nvPr/>
+        </p:nvPicPr>
+        <p:blipFill>
+          <a:blip r:embed="rId6"/>
+          <a:stretch>
+            <a:fillRect/>
+          </a:stretch>
+        </p:blipFill>
+        <p:spPr>
+          <a:xfrm>
+            <a:off x="226503" y="4264909"/>
+            <a:ext cx="4390476" cy="2019048"/>
+          </a:xfrm>
+          <a:prstGeom prst="rect">
+            <a:avLst/>
+          </a:prstGeom>
+        </p:spPr>
+      </p:pic>
+    </p:spTree>
+    <p:extLst>
+      <p:ext uri="{BB962C8B-B14F-4D97-AF65-F5344CB8AC3E}">
+        <p14:creationId xmlns:p14="http://schemas.microsoft.com/office/powerpoint/2010/main" val="266936996"/>
+      </p:ext>
+    </p:extLst>
+  </p:cSld>
+  <p:clrMapOvr>
+    <a:masterClrMapping/>
+  </p:clrMapOvr>
+</p:sld>
+</file>
+
+<file path=ppt/slides/slide44.xml><?xml version="1.0" encoding="utf-8"?>
+<p:sld xmlns:a="http://schemas.openxmlformats.org/drawingml/2006/main" xmlns:r="http://schemas.openxmlformats.org/officeDocument/2006/relationships" xmlns:p="http://schemas.openxmlformats.org/presentationml/2006/main">
+  <p:cSld>
+    <p:spTree>
+      <p:nvGrpSpPr>
+        <p:cNvPr id="1" name=""/>
+        <p:cNvGrpSpPr/>
+        <p:nvPr/>
+      </p:nvGrpSpPr>
+      <p:grpSpPr>
+        <a:xfrm>
+          <a:off x="0" y="0"/>
+          <a:ext cx="0" cy="0"/>
+          <a:chOff x="0" y="0"/>
+          <a:chExt cx="0" cy="0"/>
+        </a:xfrm>
+      </p:grpSpPr>
+      <p:pic>
+        <p:nvPicPr>
+          <p:cNvPr id="4" name="图片 3">
+            <a:extLst>
+              <a:ext uri="{FF2B5EF4-FFF2-40B4-BE49-F238E27FC236}">
+                <a16:creationId xmlns:a16="http://schemas.microsoft.com/office/drawing/2014/main" id="{E244A888-0D58-4A40-B8B6-3E2D1047C72E}"/>
+              </a:ext>
+            </a:extLst>
+          </p:cNvPr>
+          <p:cNvPicPr>
+            <a:picLocks noChangeAspect="1"/>
+          </p:cNvPicPr>
+          <p:nvPr/>
+        </p:nvPicPr>
+        <p:blipFill>
+          <a:blip r:embed="rId2"/>
+          <a:stretch>
+            <a:fillRect/>
+          </a:stretch>
+        </p:blipFill>
+        <p:spPr>
+          <a:xfrm>
+            <a:off x="274427" y="202512"/>
+            <a:ext cx="4929914" cy="2121238"/>
+          </a:xfrm>
+          <a:prstGeom prst="rect">
+            <a:avLst/>
+          </a:prstGeom>
+        </p:spPr>
+      </p:pic>
+      <p:pic>
+        <p:nvPicPr>
+          <p:cNvPr id="5" name="图片 4">
+            <a:extLst>
+              <a:ext uri="{FF2B5EF4-FFF2-40B4-BE49-F238E27FC236}">
+                <a16:creationId xmlns:a16="http://schemas.microsoft.com/office/drawing/2014/main" id="{424F5CA2-4A9D-4808-867B-7926B6702670}"/>
+              </a:ext>
+            </a:extLst>
+          </p:cNvPr>
+          <p:cNvPicPr>
+            <a:picLocks noChangeAspect="1"/>
+          </p:cNvPicPr>
+          <p:nvPr/>
+        </p:nvPicPr>
+        <p:blipFill>
+          <a:blip r:embed="rId3"/>
+          <a:stretch>
+            <a:fillRect/>
+          </a:stretch>
+        </p:blipFill>
+        <p:spPr>
+          <a:xfrm>
+            <a:off x="274427" y="2648694"/>
+            <a:ext cx="6542857" cy="2114286"/>
+          </a:xfrm>
+          <a:prstGeom prst="rect">
+            <a:avLst/>
+          </a:prstGeom>
+        </p:spPr>
+      </p:pic>
+      <p:pic>
+        <p:nvPicPr>
+          <p:cNvPr id="6" name="图片 5">
+            <a:extLst>
+              <a:ext uri="{FF2B5EF4-FFF2-40B4-BE49-F238E27FC236}">
+                <a16:creationId xmlns:a16="http://schemas.microsoft.com/office/drawing/2014/main" id="{330CB6A7-B131-4F35-8945-03B1C36BE99A}"/>
+              </a:ext>
+            </a:extLst>
+          </p:cNvPr>
+          <p:cNvPicPr>
+            <a:picLocks noChangeAspect="1"/>
+          </p:cNvPicPr>
+          <p:nvPr/>
+        </p:nvPicPr>
+        <p:blipFill>
+          <a:blip r:embed="rId4"/>
+          <a:stretch>
+            <a:fillRect/>
+          </a:stretch>
+        </p:blipFill>
+        <p:spPr>
+          <a:xfrm>
+            <a:off x="7318572" y="616712"/>
+            <a:ext cx="2923809" cy="2638095"/>
+          </a:xfrm>
+          <a:prstGeom prst="rect">
+            <a:avLst/>
+          </a:prstGeom>
+        </p:spPr>
+      </p:pic>
+      <p:sp>
+        <p:nvSpPr>
+          <p:cNvPr id="7" name="文本框 6">
+            <a:extLst>
+              <a:ext uri="{FF2B5EF4-FFF2-40B4-BE49-F238E27FC236}">
+                <a16:creationId xmlns:a16="http://schemas.microsoft.com/office/drawing/2014/main" id="{47E0F674-E951-47EF-9D8A-6C8D8CBFF264}"/>
+              </a:ext>
+            </a:extLst>
+          </p:cNvPr>
+          <p:cNvSpPr txBox="1"/>
+          <p:nvPr/>
+        </p:nvSpPr>
+        <p:spPr>
+          <a:xfrm>
+            <a:off x="545284" y="5033394"/>
+            <a:ext cx="8867164" cy="369332"/>
+          </a:xfrm>
+          <a:prstGeom prst="rect">
+            <a:avLst/>
+          </a:prstGeom>
+          <a:noFill/>
+        </p:spPr>
+        <p:txBody>
+          <a:bodyPr wrap="square" rtlCol="0">
+            <a:spAutoFit/>
+          </a:bodyPr>
+          <a:lstStyle/>
+          <a:p>
+            <a:r>
+              <a:rPr lang="zh-CN" altLang="en-US" dirty="0"/>
+              <a:t>目前的想法：被调用函数的输入参数展开，新增一个参数，结构体指针，表示返回值。</a:t>
+            </a:r>
+            <a:endParaRPr lang="en-US" altLang="zh-CN" dirty="0"/>
+          </a:p>
+        </p:txBody>
+      </p:sp>
+      <p:sp>
+        <p:nvSpPr>
+          <p:cNvPr id="8" name="文本框 7">
+            <a:extLst>
+              <a:ext uri="{FF2B5EF4-FFF2-40B4-BE49-F238E27FC236}">
+                <a16:creationId xmlns:a16="http://schemas.microsoft.com/office/drawing/2014/main" id="{30BA94A5-A42C-4C87-BE58-F090F37F6B07}"/>
+              </a:ext>
+            </a:extLst>
+          </p:cNvPr>
+          <p:cNvSpPr txBox="1"/>
+          <p:nvPr/>
+        </p:nvSpPr>
+        <p:spPr>
+          <a:xfrm>
+            <a:off x="545284" y="5486400"/>
+            <a:ext cx="9563450" cy="923330"/>
+          </a:xfrm>
+          <a:prstGeom prst="rect">
+            <a:avLst/>
+          </a:prstGeom>
+          <a:noFill/>
+        </p:spPr>
+        <p:txBody>
+          <a:bodyPr wrap="square" rtlCol="0">
+            <a:spAutoFit/>
+          </a:bodyPr>
+          <a:lstStyle/>
+          <a:p>
+            <a:r>
+              <a:rPr lang="zh-CN" altLang="en-US" dirty="0"/>
+              <a:t>原有的代码需要改进的地方：之前是每遇到一个</a:t>
+            </a:r>
+            <a:r>
+              <a:rPr lang="en-US" altLang="zh-CN" dirty="0"/>
+              <a:t>node</a:t>
+            </a:r>
+            <a:r>
+              <a:rPr lang="zh-CN" altLang="en-US" dirty="0"/>
+              <a:t>都将其转换为对应的</a:t>
+            </a:r>
+            <a:r>
+              <a:rPr lang="en-US" altLang="zh-CN" dirty="0"/>
+              <a:t>h</a:t>
+            </a:r>
+            <a:r>
+              <a:rPr lang="zh-CN" altLang="en-US" dirty="0"/>
+              <a:t>和</a:t>
+            </a:r>
+            <a:r>
+              <a:rPr lang="en-US" altLang="zh-CN" dirty="0"/>
+              <a:t>c</a:t>
+            </a:r>
+            <a:r>
+              <a:rPr lang="zh-CN" altLang="en-US" dirty="0"/>
+              <a:t>文件。</a:t>
+            </a:r>
+            <a:endParaRPr lang="en-US" altLang="zh-CN" dirty="0"/>
+          </a:p>
+          <a:p>
+            <a:r>
+              <a:rPr lang="zh-CN" altLang="en-US" dirty="0"/>
+              <a:t>需要改为扫描整个文件，若存在函数调用，则对该</a:t>
+            </a:r>
+            <a:r>
+              <a:rPr lang="en-US" altLang="zh-CN" dirty="0"/>
+              <a:t>node</a:t>
+            </a:r>
+            <a:r>
+              <a:rPr lang="zh-CN" altLang="en-US" dirty="0"/>
+              <a:t>进行标识，扫描完整个文件，根据符号表转换为对应的</a:t>
+            </a:r>
+            <a:r>
+              <a:rPr lang="en-US" altLang="zh-CN" dirty="0"/>
+              <a:t>.c</a:t>
+            </a:r>
+            <a:r>
+              <a:rPr lang="zh-CN" altLang="en-US" dirty="0"/>
+              <a:t>和</a:t>
+            </a:r>
+            <a:r>
+              <a:rPr lang="en-US" altLang="zh-CN" dirty="0"/>
+              <a:t>.h</a:t>
+            </a:r>
+            <a:r>
+              <a:rPr lang="zh-CN" altLang="en-US"/>
+              <a:t>。（若函数被调用，生成的格式会改变）</a:t>
+            </a:r>
+            <a:endParaRPr lang="zh-CN" altLang="en-US" dirty="0"/>
+          </a:p>
+        </p:txBody>
+      </p:sp>
+    </p:spTree>
+    <p:extLst>
+      <p:ext uri="{BB962C8B-B14F-4D97-AF65-F5344CB8AC3E}">
+        <p14:creationId xmlns:p14="http://schemas.microsoft.com/office/powerpoint/2010/main" val="3553235155"/>
       </p:ext>
     </p:extLst>
   </p:cSld>

--- a/docs/scade.pptx
+++ b/docs/scade.pptx
@@ -5,7 +5,7 @@
     <p:sldMasterId id="2147483648" r:id="rId1"/>
   </p:sldMasterIdLst>
   <p:notesMasterIdLst>
-    <p:notesMasterId r:id="rId46"/>
+    <p:notesMasterId r:id="rId48"/>
   </p:notesMasterIdLst>
   <p:sldIdLst>
     <p:sldId id="256" r:id="rId2"/>
@@ -52,6 +52,8 @@
     <p:sldId id="298" r:id="rId43"/>
     <p:sldId id="299" r:id="rId44"/>
     <p:sldId id="300" r:id="rId45"/>
+    <p:sldId id="301" r:id="rId46"/>
+    <p:sldId id="302" r:id="rId47"/>
   </p:sldIdLst>
   <p:sldSz cx="12192000" cy="6858000"/>
   <p:notesSz cx="6858000" cy="9144000"/>
@@ -240,7 +242,7 @@
           <a:p>
             <a:fld id="{3744C8BF-56B8-46D4-ADA5-A0AF811348DF}" type="datetimeFigureOut">
               <a:rPr lang="zh-CN" altLang="en-US" smtClean="0"/>
-              <a:t>2024/3/17</a:t>
+              <a:t>2024/5/5</a:t>
             </a:fld>
             <a:endParaRPr lang="zh-CN" altLang="en-US"/>
           </a:p>
@@ -738,7 +740,7 @@
           <a:p>
             <a:fld id="{C61D74A4-027F-4A2B-8B92-D0C194C50910}" type="datetimeFigureOut">
               <a:rPr lang="zh-CN" altLang="en-US" smtClean="0"/>
-              <a:t>2024/3/17</a:t>
+              <a:t>2024/5/5</a:t>
             </a:fld>
             <a:endParaRPr lang="zh-CN" altLang="en-US"/>
           </a:p>
@@ -936,7 +938,7 @@
           <a:p>
             <a:fld id="{C61D74A4-027F-4A2B-8B92-D0C194C50910}" type="datetimeFigureOut">
               <a:rPr lang="zh-CN" altLang="en-US" smtClean="0"/>
-              <a:t>2024/3/17</a:t>
+              <a:t>2024/5/5</a:t>
             </a:fld>
             <a:endParaRPr lang="zh-CN" altLang="en-US"/>
           </a:p>
@@ -1144,7 +1146,7 @@
           <a:p>
             <a:fld id="{C61D74A4-027F-4A2B-8B92-D0C194C50910}" type="datetimeFigureOut">
               <a:rPr lang="zh-CN" altLang="en-US" smtClean="0"/>
-              <a:t>2024/3/17</a:t>
+              <a:t>2024/5/5</a:t>
             </a:fld>
             <a:endParaRPr lang="zh-CN" altLang="en-US"/>
           </a:p>
@@ -1342,7 +1344,7 @@
           <a:p>
             <a:fld id="{C61D74A4-027F-4A2B-8B92-D0C194C50910}" type="datetimeFigureOut">
               <a:rPr lang="zh-CN" altLang="en-US" smtClean="0"/>
-              <a:t>2024/3/17</a:t>
+              <a:t>2024/5/5</a:t>
             </a:fld>
             <a:endParaRPr lang="zh-CN" altLang="en-US"/>
           </a:p>
@@ -1617,7 +1619,7 @@
           <a:p>
             <a:fld id="{C61D74A4-027F-4A2B-8B92-D0C194C50910}" type="datetimeFigureOut">
               <a:rPr lang="zh-CN" altLang="en-US" smtClean="0"/>
-              <a:t>2024/3/17</a:t>
+              <a:t>2024/5/5</a:t>
             </a:fld>
             <a:endParaRPr lang="zh-CN" altLang="en-US"/>
           </a:p>
@@ -1882,7 +1884,7 @@
           <a:p>
             <a:fld id="{C61D74A4-027F-4A2B-8B92-D0C194C50910}" type="datetimeFigureOut">
               <a:rPr lang="zh-CN" altLang="en-US" smtClean="0"/>
-              <a:t>2024/3/17</a:t>
+              <a:t>2024/5/5</a:t>
             </a:fld>
             <a:endParaRPr lang="zh-CN" altLang="en-US"/>
           </a:p>
@@ -2294,7 +2296,7 @@
           <a:p>
             <a:fld id="{C61D74A4-027F-4A2B-8B92-D0C194C50910}" type="datetimeFigureOut">
               <a:rPr lang="zh-CN" altLang="en-US" smtClean="0"/>
-              <a:t>2024/3/17</a:t>
+              <a:t>2024/5/5</a:t>
             </a:fld>
             <a:endParaRPr lang="zh-CN" altLang="en-US"/>
           </a:p>
@@ -2435,7 +2437,7 @@
           <a:p>
             <a:fld id="{C61D74A4-027F-4A2B-8B92-D0C194C50910}" type="datetimeFigureOut">
               <a:rPr lang="zh-CN" altLang="en-US" smtClean="0"/>
-              <a:t>2024/3/17</a:t>
+              <a:t>2024/5/5</a:t>
             </a:fld>
             <a:endParaRPr lang="zh-CN" altLang="en-US"/>
           </a:p>
@@ -2548,7 +2550,7 @@
           <a:p>
             <a:fld id="{C61D74A4-027F-4A2B-8B92-D0C194C50910}" type="datetimeFigureOut">
               <a:rPr lang="zh-CN" altLang="en-US" smtClean="0"/>
-              <a:t>2024/3/17</a:t>
+              <a:t>2024/5/5</a:t>
             </a:fld>
             <a:endParaRPr lang="zh-CN" altLang="en-US"/>
           </a:p>
@@ -2859,7 +2861,7 @@
           <a:p>
             <a:fld id="{C61D74A4-027F-4A2B-8B92-D0C194C50910}" type="datetimeFigureOut">
               <a:rPr lang="zh-CN" altLang="en-US" smtClean="0"/>
-              <a:t>2024/3/17</a:t>
+              <a:t>2024/5/5</a:t>
             </a:fld>
             <a:endParaRPr lang="zh-CN" altLang="en-US"/>
           </a:p>
@@ -3147,7 +3149,7 @@
           <a:p>
             <a:fld id="{C61D74A4-027F-4A2B-8B92-D0C194C50910}" type="datetimeFigureOut">
               <a:rPr lang="zh-CN" altLang="en-US" smtClean="0"/>
-              <a:t>2024/3/17</a:t>
+              <a:t>2024/5/5</a:t>
             </a:fld>
             <a:endParaRPr lang="zh-CN" altLang="en-US"/>
           </a:p>
@@ -3388,7 +3390,7 @@
           <a:p>
             <a:fld id="{C61D74A4-027F-4A2B-8B92-D0C194C50910}" type="datetimeFigureOut">
               <a:rPr lang="zh-CN" altLang="en-US" smtClean="0"/>
-              <a:t>2024/3/17</a:t>
+              <a:t>2024/5/5</a:t>
             </a:fld>
             <a:endParaRPr lang="zh-CN" altLang="en-US"/>
           </a:p>
@@ -12978,6 +12980,216 @@
     <p:extLst>
       <p:ext uri="{BB962C8B-B14F-4D97-AF65-F5344CB8AC3E}">
         <p14:creationId xmlns:p14="http://schemas.microsoft.com/office/powerpoint/2010/main" val="3553235155"/>
+      </p:ext>
+    </p:extLst>
+  </p:cSld>
+  <p:clrMapOvr>
+    <a:masterClrMapping/>
+  </p:clrMapOvr>
+</p:sld>
+</file>
+
+<file path=ppt/slides/slide45.xml><?xml version="1.0" encoding="utf-8"?>
+<p:sld xmlns:a="http://schemas.openxmlformats.org/drawingml/2006/main" xmlns:r="http://schemas.openxmlformats.org/officeDocument/2006/relationships" xmlns:p="http://schemas.openxmlformats.org/presentationml/2006/main">
+  <p:cSld>
+    <p:spTree>
+      <p:nvGrpSpPr>
+        <p:cNvPr id="1" name=""/>
+        <p:cNvGrpSpPr/>
+        <p:nvPr/>
+      </p:nvGrpSpPr>
+      <p:grpSpPr>
+        <a:xfrm>
+          <a:off x="0" y="0"/>
+          <a:ext cx="0" cy="0"/>
+          <a:chOff x="0" y="0"/>
+          <a:chExt cx="0" cy="0"/>
+        </a:xfrm>
+      </p:grpSpPr>
+      <p:pic>
+        <p:nvPicPr>
+          <p:cNvPr id="5" name="图片 4">
+            <a:extLst>
+              <a:ext uri="{FF2B5EF4-FFF2-40B4-BE49-F238E27FC236}">
+                <a16:creationId xmlns:a16="http://schemas.microsoft.com/office/drawing/2014/main" id="{F23D4425-CE68-4DB9-92B9-F5866FECA950}"/>
+              </a:ext>
+            </a:extLst>
+          </p:cNvPr>
+          <p:cNvPicPr>
+            <a:picLocks noChangeAspect="1"/>
+          </p:cNvPicPr>
+          <p:nvPr/>
+        </p:nvPicPr>
+        <p:blipFill>
+          <a:blip r:embed="rId2"/>
+          <a:stretch>
+            <a:fillRect/>
+          </a:stretch>
+        </p:blipFill>
+        <p:spPr>
+          <a:xfrm>
+            <a:off x="182708" y="142613"/>
+            <a:ext cx="4100656" cy="6052656"/>
+          </a:xfrm>
+          <a:prstGeom prst="rect">
+            <a:avLst/>
+          </a:prstGeom>
+        </p:spPr>
+      </p:pic>
+      <p:pic>
+        <p:nvPicPr>
+          <p:cNvPr id="6" name="图片 5">
+            <a:extLst>
+              <a:ext uri="{FF2B5EF4-FFF2-40B4-BE49-F238E27FC236}">
+                <a16:creationId xmlns:a16="http://schemas.microsoft.com/office/drawing/2014/main" id="{32271DBF-FF1E-4BCC-97D6-C0A556F1E873}"/>
+              </a:ext>
+            </a:extLst>
+          </p:cNvPr>
+          <p:cNvPicPr>
+            <a:picLocks noChangeAspect="1"/>
+          </p:cNvPicPr>
+          <p:nvPr/>
+        </p:nvPicPr>
+        <p:blipFill>
+          <a:blip r:embed="rId3"/>
+          <a:stretch>
+            <a:fillRect/>
+          </a:stretch>
+        </p:blipFill>
+        <p:spPr>
+          <a:xfrm>
+            <a:off x="4574562" y="377504"/>
+            <a:ext cx="4073174" cy="5817765"/>
+          </a:xfrm>
+          <a:prstGeom prst="rect">
+            <a:avLst/>
+          </a:prstGeom>
+        </p:spPr>
+      </p:pic>
+      <p:pic>
+        <p:nvPicPr>
+          <p:cNvPr id="7" name="图片 6">
+            <a:extLst>
+              <a:ext uri="{FF2B5EF4-FFF2-40B4-BE49-F238E27FC236}">
+                <a16:creationId xmlns:a16="http://schemas.microsoft.com/office/drawing/2014/main" id="{39D3CD82-F549-4749-B303-70A3A20BD04C}"/>
+              </a:ext>
+            </a:extLst>
+          </p:cNvPr>
+          <p:cNvPicPr>
+            <a:picLocks noChangeAspect="1"/>
+          </p:cNvPicPr>
+          <p:nvPr/>
+        </p:nvPicPr>
+        <p:blipFill>
+          <a:blip r:embed="rId4"/>
+          <a:stretch>
+            <a:fillRect/>
+          </a:stretch>
+        </p:blipFill>
+        <p:spPr>
+          <a:xfrm>
+            <a:off x="9056380" y="377504"/>
+            <a:ext cx="2114286" cy="3314286"/>
+          </a:xfrm>
+          <a:prstGeom prst="rect">
+            <a:avLst/>
+          </a:prstGeom>
+        </p:spPr>
+      </p:pic>
+      <p:pic>
+        <p:nvPicPr>
+          <p:cNvPr id="8" name="图片 7">
+            <a:extLst>
+              <a:ext uri="{FF2B5EF4-FFF2-40B4-BE49-F238E27FC236}">
+                <a16:creationId xmlns:a16="http://schemas.microsoft.com/office/drawing/2014/main" id="{B896D79C-9993-4B27-81AF-B4180003427F}"/>
+              </a:ext>
+            </a:extLst>
+          </p:cNvPr>
+          <p:cNvPicPr>
+            <a:picLocks noChangeAspect="1"/>
+          </p:cNvPicPr>
+          <p:nvPr/>
+        </p:nvPicPr>
+        <p:blipFill>
+          <a:blip r:embed="rId5"/>
+          <a:stretch>
+            <a:fillRect/>
+          </a:stretch>
+        </p:blipFill>
+        <p:spPr>
+          <a:xfrm>
+            <a:off x="8884951" y="3877122"/>
+            <a:ext cx="2457143" cy="2000000"/>
+          </a:xfrm>
+          <a:prstGeom prst="rect">
+            <a:avLst/>
+          </a:prstGeom>
+        </p:spPr>
+      </p:pic>
+    </p:spTree>
+    <p:extLst>
+      <p:ext uri="{BB962C8B-B14F-4D97-AF65-F5344CB8AC3E}">
+        <p14:creationId xmlns:p14="http://schemas.microsoft.com/office/powerpoint/2010/main" val="1246224946"/>
+      </p:ext>
+    </p:extLst>
+  </p:cSld>
+  <p:clrMapOvr>
+    <a:masterClrMapping/>
+  </p:clrMapOvr>
+</p:sld>
+</file>
+
+<file path=ppt/slides/slide46.xml><?xml version="1.0" encoding="utf-8"?>
+<p:sld xmlns:a="http://schemas.openxmlformats.org/drawingml/2006/main" xmlns:r="http://schemas.openxmlformats.org/officeDocument/2006/relationships" xmlns:p="http://schemas.openxmlformats.org/presentationml/2006/main">
+  <p:cSld>
+    <p:spTree>
+      <p:nvGrpSpPr>
+        <p:cNvPr id="1" name=""/>
+        <p:cNvGrpSpPr/>
+        <p:nvPr/>
+      </p:nvGrpSpPr>
+      <p:grpSpPr>
+        <a:xfrm>
+          <a:off x="0" y="0"/>
+          <a:ext cx="0" cy="0"/>
+          <a:chOff x="0" y="0"/>
+          <a:chExt cx="0" cy="0"/>
+        </a:xfrm>
+      </p:grpSpPr>
+      <p:pic>
+        <p:nvPicPr>
+          <p:cNvPr id="4" name="图片 3">
+            <a:extLst>
+              <a:ext uri="{FF2B5EF4-FFF2-40B4-BE49-F238E27FC236}">
+                <a16:creationId xmlns:a16="http://schemas.microsoft.com/office/drawing/2014/main" id="{D3CC1A8F-6621-477A-9440-B03F93B3E0D5}"/>
+              </a:ext>
+            </a:extLst>
+          </p:cNvPr>
+          <p:cNvPicPr>
+            <a:picLocks noChangeAspect="1"/>
+          </p:cNvPicPr>
+          <p:nvPr/>
+        </p:nvPicPr>
+        <p:blipFill>
+          <a:blip r:embed="rId2"/>
+          <a:stretch>
+            <a:fillRect/>
+          </a:stretch>
+        </p:blipFill>
+        <p:spPr>
+          <a:xfrm>
+            <a:off x="251669" y="261628"/>
+            <a:ext cx="10572925" cy="2467822"/>
+          </a:xfrm>
+          <a:prstGeom prst="rect">
+            <a:avLst/>
+          </a:prstGeom>
+        </p:spPr>
+      </p:pic>
+    </p:spTree>
+    <p:extLst>
+      <p:ext uri="{BB962C8B-B14F-4D97-AF65-F5344CB8AC3E}">
+        <p14:creationId xmlns:p14="http://schemas.microsoft.com/office/powerpoint/2010/main" val="4255714295"/>
       </p:ext>
     </p:extLst>
   </p:cSld>

--- a/docs/scade.pptx
+++ b/docs/scade.pptx
@@ -5,7 +5,7 @@
     <p:sldMasterId id="2147483648" r:id="rId1"/>
   </p:sldMasterIdLst>
   <p:notesMasterIdLst>
-    <p:notesMasterId r:id="rId48"/>
+    <p:notesMasterId r:id="rId52"/>
   </p:notesMasterIdLst>
   <p:sldIdLst>
     <p:sldId id="256" r:id="rId2"/>
@@ -54,6 +54,10 @@
     <p:sldId id="300" r:id="rId45"/>
     <p:sldId id="301" r:id="rId46"/>
     <p:sldId id="302" r:id="rId47"/>
+    <p:sldId id="303" r:id="rId48"/>
+    <p:sldId id="304" r:id="rId49"/>
+    <p:sldId id="305" r:id="rId50"/>
+    <p:sldId id="306" r:id="rId51"/>
   </p:sldIdLst>
   <p:sldSz cx="12192000" cy="6858000"/>
   <p:notesSz cx="6858000" cy="9144000"/>
@@ -242,7 +246,7 @@
           <a:p>
             <a:fld id="{3744C8BF-56B8-46D4-ADA5-A0AF811348DF}" type="datetimeFigureOut">
               <a:rPr lang="zh-CN" altLang="en-US" smtClean="0"/>
-              <a:t>2024/5/5</a:t>
+              <a:t>2024/5/19</a:t>
             </a:fld>
             <a:endParaRPr lang="zh-CN" altLang="en-US"/>
           </a:p>
@@ -740,7 +744,7 @@
           <a:p>
             <a:fld id="{C61D74A4-027F-4A2B-8B92-D0C194C50910}" type="datetimeFigureOut">
               <a:rPr lang="zh-CN" altLang="en-US" smtClean="0"/>
-              <a:t>2024/5/5</a:t>
+              <a:t>2024/5/19</a:t>
             </a:fld>
             <a:endParaRPr lang="zh-CN" altLang="en-US"/>
           </a:p>
@@ -938,7 +942,7 @@
           <a:p>
             <a:fld id="{C61D74A4-027F-4A2B-8B92-D0C194C50910}" type="datetimeFigureOut">
               <a:rPr lang="zh-CN" altLang="en-US" smtClean="0"/>
-              <a:t>2024/5/5</a:t>
+              <a:t>2024/5/19</a:t>
             </a:fld>
             <a:endParaRPr lang="zh-CN" altLang="en-US"/>
           </a:p>
@@ -1146,7 +1150,7 @@
           <a:p>
             <a:fld id="{C61D74A4-027F-4A2B-8B92-D0C194C50910}" type="datetimeFigureOut">
               <a:rPr lang="zh-CN" altLang="en-US" smtClean="0"/>
-              <a:t>2024/5/5</a:t>
+              <a:t>2024/5/19</a:t>
             </a:fld>
             <a:endParaRPr lang="zh-CN" altLang="en-US"/>
           </a:p>
@@ -1344,7 +1348,7 @@
           <a:p>
             <a:fld id="{C61D74A4-027F-4A2B-8B92-D0C194C50910}" type="datetimeFigureOut">
               <a:rPr lang="zh-CN" altLang="en-US" smtClean="0"/>
-              <a:t>2024/5/5</a:t>
+              <a:t>2024/5/19</a:t>
             </a:fld>
             <a:endParaRPr lang="zh-CN" altLang="en-US"/>
           </a:p>
@@ -1619,7 +1623,7 @@
           <a:p>
             <a:fld id="{C61D74A4-027F-4A2B-8B92-D0C194C50910}" type="datetimeFigureOut">
               <a:rPr lang="zh-CN" altLang="en-US" smtClean="0"/>
-              <a:t>2024/5/5</a:t>
+              <a:t>2024/5/19</a:t>
             </a:fld>
             <a:endParaRPr lang="zh-CN" altLang="en-US"/>
           </a:p>
@@ -1884,7 +1888,7 @@
           <a:p>
             <a:fld id="{C61D74A4-027F-4A2B-8B92-D0C194C50910}" type="datetimeFigureOut">
               <a:rPr lang="zh-CN" altLang="en-US" smtClean="0"/>
-              <a:t>2024/5/5</a:t>
+              <a:t>2024/5/19</a:t>
             </a:fld>
             <a:endParaRPr lang="zh-CN" altLang="en-US"/>
           </a:p>
@@ -2296,7 +2300,7 @@
           <a:p>
             <a:fld id="{C61D74A4-027F-4A2B-8B92-D0C194C50910}" type="datetimeFigureOut">
               <a:rPr lang="zh-CN" altLang="en-US" smtClean="0"/>
-              <a:t>2024/5/5</a:t>
+              <a:t>2024/5/19</a:t>
             </a:fld>
             <a:endParaRPr lang="zh-CN" altLang="en-US"/>
           </a:p>
@@ -2437,7 +2441,7 @@
           <a:p>
             <a:fld id="{C61D74A4-027F-4A2B-8B92-D0C194C50910}" type="datetimeFigureOut">
               <a:rPr lang="zh-CN" altLang="en-US" smtClean="0"/>
-              <a:t>2024/5/5</a:t>
+              <a:t>2024/5/19</a:t>
             </a:fld>
             <a:endParaRPr lang="zh-CN" altLang="en-US"/>
           </a:p>
@@ -2550,7 +2554,7 @@
           <a:p>
             <a:fld id="{C61D74A4-027F-4A2B-8B92-D0C194C50910}" type="datetimeFigureOut">
               <a:rPr lang="zh-CN" altLang="en-US" smtClean="0"/>
-              <a:t>2024/5/5</a:t>
+              <a:t>2024/5/19</a:t>
             </a:fld>
             <a:endParaRPr lang="zh-CN" altLang="en-US"/>
           </a:p>
@@ -2861,7 +2865,7 @@
           <a:p>
             <a:fld id="{C61D74A4-027F-4A2B-8B92-D0C194C50910}" type="datetimeFigureOut">
               <a:rPr lang="zh-CN" altLang="en-US" smtClean="0"/>
-              <a:t>2024/5/5</a:t>
+              <a:t>2024/5/19</a:t>
             </a:fld>
             <a:endParaRPr lang="zh-CN" altLang="en-US"/>
           </a:p>
@@ -3149,7 +3153,7 @@
           <a:p>
             <a:fld id="{C61D74A4-027F-4A2B-8B92-D0C194C50910}" type="datetimeFigureOut">
               <a:rPr lang="zh-CN" altLang="en-US" smtClean="0"/>
-              <a:t>2024/5/5</a:t>
+              <a:t>2024/5/19</a:t>
             </a:fld>
             <a:endParaRPr lang="zh-CN" altLang="en-US"/>
           </a:p>
@@ -3390,7 +3394,7 @@
           <a:p>
             <a:fld id="{C61D74A4-027F-4A2B-8B92-D0C194C50910}" type="datetimeFigureOut">
               <a:rPr lang="zh-CN" altLang="en-US" smtClean="0"/>
-              <a:t>2024/5/5</a:t>
+              <a:t>2024/5/19</a:t>
             </a:fld>
             <a:endParaRPr lang="zh-CN" altLang="en-US"/>
           </a:p>
@@ -13186,10 +13190,520 @@
           </a:prstGeom>
         </p:spPr>
       </p:pic>
+      <p:pic>
+        <p:nvPicPr>
+          <p:cNvPr id="2" name="图片 1">
+            <a:extLst>
+              <a:ext uri="{FF2B5EF4-FFF2-40B4-BE49-F238E27FC236}">
+                <a16:creationId xmlns:a16="http://schemas.microsoft.com/office/drawing/2014/main" id="{C841FFF1-D1F4-411A-90A6-3BA3344CFE1A}"/>
+              </a:ext>
+            </a:extLst>
+          </p:cNvPr>
+          <p:cNvPicPr>
+            <a:picLocks noChangeAspect="1"/>
+          </p:cNvPicPr>
+          <p:nvPr/>
+        </p:nvPicPr>
+        <p:blipFill>
+          <a:blip r:embed="rId3"/>
+          <a:stretch>
+            <a:fillRect/>
+          </a:stretch>
+        </p:blipFill>
+        <p:spPr>
+          <a:xfrm>
+            <a:off x="423734" y="3882086"/>
+            <a:ext cx="2838095" cy="2714286"/>
+          </a:xfrm>
+          <a:prstGeom prst="rect">
+            <a:avLst/>
+          </a:prstGeom>
+        </p:spPr>
+      </p:pic>
+      <p:pic>
+        <p:nvPicPr>
+          <p:cNvPr id="5" name="图片 4">
+            <a:extLst>
+              <a:ext uri="{FF2B5EF4-FFF2-40B4-BE49-F238E27FC236}">
+                <a16:creationId xmlns:a16="http://schemas.microsoft.com/office/drawing/2014/main" id="{188F14D2-7287-4B95-BCDF-28382541F15D}"/>
+              </a:ext>
+            </a:extLst>
+          </p:cNvPr>
+          <p:cNvPicPr>
+            <a:picLocks noChangeAspect="1"/>
+          </p:cNvPicPr>
+          <p:nvPr/>
+        </p:nvPicPr>
+        <p:blipFill>
+          <a:blip r:embed="rId4"/>
+          <a:stretch>
+            <a:fillRect/>
+          </a:stretch>
+        </p:blipFill>
+        <p:spPr>
+          <a:xfrm>
+            <a:off x="3515997" y="3810010"/>
+            <a:ext cx="2457143" cy="2000000"/>
+          </a:xfrm>
+          <a:prstGeom prst="rect">
+            <a:avLst/>
+          </a:prstGeom>
+        </p:spPr>
+      </p:pic>
     </p:spTree>
     <p:extLst>
       <p:ext uri="{BB962C8B-B14F-4D97-AF65-F5344CB8AC3E}">
         <p14:creationId xmlns:p14="http://schemas.microsoft.com/office/powerpoint/2010/main" val="4255714295"/>
+      </p:ext>
+    </p:extLst>
+  </p:cSld>
+  <p:clrMapOvr>
+    <a:masterClrMapping/>
+  </p:clrMapOvr>
+</p:sld>
+</file>
+
+<file path=ppt/slides/slide47.xml><?xml version="1.0" encoding="utf-8"?>
+<p:sld xmlns:a="http://schemas.openxmlformats.org/drawingml/2006/main" xmlns:r="http://schemas.openxmlformats.org/officeDocument/2006/relationships" xmlns:p="http://schemas.openxmlformats.org/presentationml/2006/main">
+  <p:cSld>
+    <p:spTree>
+      <p:nvGrpSpPr>
+        <p:cNvPr id="1" name=""/>
+        <p:cNvGrpSpPr/>
+        <p:nvPr/>
+      </p:nvGrpSpPr>
+      <p:grpSpPr>
+        <a:xfrm>
+          <a:off x="0" y="0"/>
+          <a:ext cx="0" cy="0"/>
+          <a:chOff x="0" y="0"/>
+          <a:chExt cx="0" cy="0"/>
+        </a:xfrm>
+      </p:grpSpPr>
+      <p:pic>
+        <p:nvPicPr>
+          <p:cNvPr id="4" name="图片 3">
+            <a:extLst>
+              <a:ext uri="{FF2B5EF4-FFF2-40B4-BE49-F238E27FC236}">
+                <a16:creationId xmlns:a16="http://schemas.microsoft.com/office/drawing/2014/main" id="{192E6B07-9FDD-4B00-81D1-5926F31D9854}"/>
+              </a:ext>
+            </a:extLst>
+          </p:cNvPr>
+          <p:cNvPicPr>
+            <a:picLocks noChangeAspect="1"/>
+          </p:cNvPicPr>
+          <p:nvPr/>
+        </p:nvPicPr>
+        <p:blipFill>
+          <a:blip r:embed="rId2"/>
+          <a:stretch>
+            <a:fillRect/>
+          </a:stretch>
+        </p:blipFill>
+        <p:spPr>
+          <a:xfrm>
+            <a:off x="461520" y="236851"/>
+            <a:ext cx="4104762" cy="4085714"/>
+          </a:xfrm>
+          <a:prstGeom prst="rect">
+            <a:avLst/>
+          </a:prstGeom>
+        </p:spPr>
+      </p:pic>
+      <p:pic>
+        <p:nvPicPr>
+          <p:cNvPr id="5" name="图片 4">
+            <a:extLst>
+              <a:ext uri="{FF2B5EF4-FFF2-40B4-BE49-F238E27FC236}">
+                <a16:creationId xmlns:a16="http://schemas.microsoft.com/office/drawing/2014/main" id="{09560FFB-D4A2-4AC7-B2EA-B2B28600CC9B}"/>
+              </a:ext>
+            </a:extLst>
+          </p:cNvPr>
+          <p:cNvPicPr>
+            <a:picLocks noChangeAspect="1"/>
+          </p:cNvPicPr>
+          <p:nvPr/>
+        </p:nvPicPr>
+        <p:blipFill>
+          <a:blip r:embed="rId3"/>
+          <a:stretch>
+            <a:fillRect/>
+          </a:stretch>
+        </p:blipFill>
+        <p:spPr>
+          <a:xfrm>
+            <a:off x="9119713" y="236851"/>
+            <a:ext cx="2895238" cy="1638095"/>
+          </a:xfrm>
+          <a:prstGeom prst="rect">
+            <a:avLst/>
+          </a:prstGeom>
+        </p:spPr>
+      </p:pic>
+      <p:pic>
+        <p:nvPicPr>
+          <p:cNvPr id="6" name="图片 5">
+            <a:extLst>
+              <a:ext uri="{FF2B5EF4-FFF2-40B4-BE49-F238E27FC236}">
+                <a16:creationId xmlns:a16="http://schemas.microsoft.com/office/drawing/2014/main" id="{FBEA5FEA-73CA-46CC-8EB3-8818C69284DB}"/>
+              </a:ext>
+            </a:extLst>
+          </p:cNvPr>
+          <p:cNvPicPr>
+            <a:picLocks noChangeAspect="1"/>
+          </p:cNvPicPr>
+          <p:nvPr/>
+        </p:nvPicPr>
+        <p:blipFill>
+          <a:blip r:embed="rId4"/>
+          <a:stretch>
+            <a:fillRect/>
+          </a:stretch>
+        </p:blipFill>
+        <p:spPr>
+          <a:xfrm>
+            <a:off x="5090684" y="193993"/>
+            <a:ext cx="3638095" cy="1723810"/>
+          </a:xfrm>
+          <a:prstGeom prst="rect">
+            <a:avLst/>
+          </a:prstGeom>
+        </p:spPr>
+      </p:pic>
+      <p:pic>
+        <p:nvPicPr>
+          <p:cNvPr id="7" name="图片 6">
+            <a:extLst>
+              <a:ext uri="{FF2B5EF4-FFF2-40B4-BE49-F238E27FC236}">
+                <a16:creationId xmlns:a16="http://schemas.microsoft.com/office/drawing/2014/main" id="{4A2FA8C4-1CC2-4B23-AE94-EBD839AD3CC4}"/>
+              </a:ext>
+            </a:extLst>
+          </p:cNvPr>
+          <p:cNvPicPr>
+            <a:picLocks noChangeAspect="1"/>
+          </p:cNvPicPr>
+          <p:nvPr/>
+        </p:nvPicPr>
+        <p:blipFill>
+          <a:blip r:embed="rId5"/>
+          <a:stretch>
+            <a:fillRect/>
+          </a:stretch>
+        </p:blipFill>
+        <p:spPr>
+          <a:xfrm>
+            <a:off x="4644992" y="2406015"/>
+            <a:ext cx="4337019" cy="4085715"/>
+          </a:xfrm>
+          <a:prstGeom prst="rect">
+            <a:avLst/>
+          </a:prstGeom>
+        </p:spPr>
+      </p:pic>
+      <p:pic>
+        <p:nvPicPr>
+          <p:cNvPr id="8" name="图片 7">
+            <a:extLst>
+              <a:ext uri="{FF2B5EF4-FFF2-40B4-BE49-F238E27FC236}">
+                <a16:creationId xmlns:a16="http://schemas.microsoft.com/office/drawing/2014/main" id="{111FA692-1F64-418A-8EDD-128E77F13548}"/>
+              </a:ext>
+            </a:extLst>
+          </p:cNvPr>
+          <p:cNvPicPr>
+            <a:picLocks noChangeAspect="1"/>
+          </p:cNvPicPr>
+          <p:nvPr/>
+        </p:nvPicPr>
+        <p:blipFill>
+          <a:blip r:embed="rId6"/>
+          <a:stretch>
+            <a:fillRect/>
+          </a:stretch>
+        </p:blipFill>
+        <p:spPr>
+          <a:xfrm>
+            <a:off x="8219512" y="2394617"/>
+            <a:ext cx="4276190" cy="3171429"/>
+          </a:xfrm>
+          <a:prstGeom prst="rect">
+            <a:avLst/>
+          </a:prstGeom>
+        </p:spPr>
+      </p:pic>
+    </p:spTree>
+    <p:extLst>
+      <p:ext uri="{BB962C8B-B14F-4D97-AF65-F5344CB8AC3E}">
+        <p14:creationId xmlns:p14="http://schemas.microsoft.com/office/powerpoint/2010/main" val="3178842135"/>
+      </p:ext>
+    </p:extLst>
+  </p:cSld>
+  <p:clrMapOvr>
+    <a:masterClrMapping/>
+  </p:clrMapOvr>
+</p:sld>
+</file>
+
+<file path=ppt/slides/slide48.xml><?xml version="1.0" encoding="utf-8"?>
+<p:sld xmlns:a="http://schemas.openxmlformats.org/drawingml/2006/main" xmlns:r="http://schemas.openxmlformats.org/officeDocument/2006/relationships" xmlns:p="http://schemas.openxmlformats.org/presentationml/2006/main">
+  <p:cSld>
+    <p:spTree>
+      <p:nvGrpSpPr>
+        <p:cNvPr id="1" name=""/>
+        <p:cNvGrpSpPr/>
+        <p:nvPr/>
+      </p:nvGrpSpPr>
+      <p:grpSpPr>
+        <a:xfrm>
+          <a:off x="0" y="0"/>
+          <a:ext cx="0" cy="0"/>
+          <a:chOff x="0" y="0"/>
+          <a:chExt cx="0" cy="0"/>
+        </a:xfrm>
+      </p:grpSpPr>
+      <p:pic>
+        <p:nvPicPr>
+          <p:cNvPr id="4" name="图片 3">
+            <a:extLst>
+              <a:ext uri="{FF2B5EF4-FFF2-40B4-BE49-F238E27FC236}">
+                <a16:creationId xmlns:a16="http://schemas.microsoft.com/office/drawing/2014/main" id="{93DCAFD7-D895-4640-9A6B-AEEE01B8999D}"/>
+              </a:ext>
+            </a:extLst>
+          </p:cNvPr>
+          <p:cNvPicPr>
+            <a:picLocks noChangeAspect="1"/>
+          </p:cNvPicPr>
+          <p:nvPr/>
+        </p:nvPicPr>
+        <p:blipFill>
+          <a:blip r:embed="rId2"/>
+          <a:stretch>
+            <a:fillRect/>
+          </a:stretch>
+        </p:blipFill>
+        <p:spPr>
+          <a:xfrm>
+            <a:off x="4701430" y="146303"/>
+            <a:ext cx="2990476" cy="1733333"/>
+          </a:xfrm>
+          <a:prstGeom prst="rect">
+            <a:avLst/>
+          </a:prstGeom>
+        </p:spPr>
+      </p:pic>
+      <p:pic>
+        <p:nvPicPr>
+          <p:cNvPr id="5" name="图片 4">
+            <a:extLst>
+              <a:ext uri="{FF2B5EF4-FFF2-40B4-BE49-F238E27FC236}">
+                <a16:creationId xmlns:a16="http://schemas.microsoft.com/office/drawing/2014/main" id="{AC6D9499-B27F-40BB-AAA6-9C0DD74FF9DF}"/>
+              </a:ext>
+            </a:extLst>
+          </p:cNvPr>
+          <p:cNvPicPr>
+            <a:picLocks noChangeAspect="1"/>
+          </p:cNvPicPr>
+          <p:nvPr/>
+        </p:nvPicPr>
+        <p:blipFill>
+          <a:blip r:embed="rId3"/>
+          <a:stretch>
+            <a:fillRect/>
+          </a:stretch>
+        </p:blipFill>
+        <p:spPr>
+          <a:xfrm>
+            <a:off x="334571" y="93872"/>
+            <a:ext cx="3771429" cy="1542857"/>
+          </a:xfrm>
+          <a:prstGeom prst="rect">
+            <a:avLst/>
+          </a:prstGeom>
+        </p:spPr>
+      </p:pic>
+      <p:pic>
+        <p:nvPicPr>
+          <p:cNvPr id="6" name="图片 5">
+            <a:extLst>
+              <a:ext uri="{FF2B5EF4-FFF2-40B4-BE49-F238E27FC236}">
+                <a16:creationId xmlns:a16="http://schemas.microsoft.com/office/drawing/2014/main" id="{8A3B7D54-CF4A-49E8-A224-82C672C2467B}"/>
+              </a:ext>
+            </a:extLst>
+          </p:cNvPr>
+          <p:cNvPicPr>
+            <a:picLocks noChangeAspect="1"/>
+          </p:cNvPicPr>
+          <p:nvPr/>
+        </p:nvPicPr>
+        <p:blipFill>
+          <a:blip r:embed="rId4"/>
+          <a:stretch>
+            <a:fillRect/>
+          </a:stretch>
+        </p:blipFill>
+        <p:spPr>
+          <a:xfrm>
+            <a:off x="431146" y="2434918"/>
+            <a:ext cx="3980952" cy="1619048"/>
+          </a:xfrm>
+          <a:prstGeom prst="rect">
+            <a:avLst/>
+          </a:prstGeom>
+        </p:spPr>
+      </p:pic>
+      <p:pic>
+        <p:nvPicPr>
+          <p:cNvPr id="7" name="图片 6">
+            <a:extLst>
+              <a:ext uri="{FF2B5EF4-FFF2-40B4-BE49-F238E27FC236}">
+                <a16:creationId xmlns:a16="http://schemas.microsoft.com/office/drawing/2014/main" id="{0329E7F7-BC55-46AA-99F3-9EC46A90A768}"/>
+              </a:ext>
+            </a:extLst>
+          </p:cNvPr>
+          <p:cNvPicPr>
+            <a:picLocks noChangeAspect="1"/>
+          </p:cNvPicPr>
+          <p:nvPr/>
+        </p:nvPicPr>
+        <p:blipFill>
+          <a:blip r:embed="rId5"/>
+          <a:stretch>
+            <a:fillRect/>
+          </a:stretch>
+        </p:blipFill>
+        <p:spPr>
+          <a:xfrm>
+            <a:off x="4884830" y="2492061"/>
+            <a:ext cx="3361905" cy="1561905"/>
+          </a:xfrm>
+          <a:prstGeom prst="rect">
+            <a:avLst/>
+          </a:prstGeom>
+        </p:spPr>
+      </p:pic>
+    </p:spTree>
+    <p:extLst>
+      <p:ext uri="{BB962C8B-B14F-4D97-AF65-F5344CB8AC3E}">
+        <p14:creationId xmlns:p14="http://schemas.microsoft.com/office/powerpoint/2010/main" val="2265894934"/>
+      </p:ext>
+    </p:extLst>
+  </p:cSld>
+  <p:clrMapOvr>
+    <a:masterClrMapping/>
+  </p:clrMapOvr>
+</p:sld>
+</file>
+
+<file path=ppt/slides/slide49.xml><?xml version="1.0" encoding="utf-8"?>
+<p:sld xmlns:a="http://schemas.openxmlformats.org/drawingml/2006/main" xmlns:r="http://schemas.openxmlformats.org/officeDocument/2006/relationships" xmlns:p="http://schemas.openxmlformats.org/presentationml/2006/main">
+  <p:cSld>
+    <p:spTree>
+      <p:nvGrpSpPr>
+        <p:cNvPr id="1" name=""/>
+        <p:cNvGrpSpPr/>
+        <p:nvPr/>
+      </p:nvGrpSpPr>
+      <p:grpSpPr>
+        <a:xfrm>
+          <a:off x="0" y="0"/>
+          <a:ext cx="0" cy="0"/>
+          <a:chOff x="0" y="0"/>
+          <a:chExt cx="0" cy="0"/>
+        </a:xfrm>
+      </p:grpSpPr>
+      <p:pic>
+        <p:nvPicPr>
+          <p:cNvPr id="4" name="图片 3">
+            <a:extLst>
+              <a:ext uri="{FF2B5EF4-FFF2-40B4-BE49-F238E27FC236}">
+                <a16:creationId xmlns:a16="http://schemas.microsoft.com/office/drawing/2014/main" id="{6E7EABA5-2CD5-4BBD-B11F-86028B52DD31}"/>
+              </a:ext>
+            </a:extLst>
+          </p:cNvPr>
+          <p:cNvPicPr>
+            <a:picLocks noChangeAspect="1"/>
+          </p:cNvPicPr>
+          <p:nvPr/>
+        </p:nvPicPr>
+        <p:blipFill>
+          <a:blip r:embed="rId2"/>
+          <a:stretch>
+            <a:fillRect/>
+          </a:stretch>
+        </p:blipFill>
+        <p:spPr>
+          <a:xfrm>
+            <a:off x="412299" y="350800"/>
+            <a:ext cx="4652851" cy="2056840"/>
+          </a:xfrm>
+          <a:prstGeom prst="rect">
+            <a:avLst/>
+          </a:prstGeom>
+        </p:spPr>
+      </p:pic>
+      <p:pic>
+        <p:nvPicPr>
+          <p:cNvPr id="5" name="图片 4">
+            <a:extLst>
+              <a:ext uri="{FF2B5EF4-FFF2-40B4-BE49-F238E27FC236}">
+                <a16:creationId xmlns:a16="http://schemas.microsoft.com/office/drawing/2014/main" id="{AA24773D-8A6C-48B1-85F1-786894767BEB}"/>
+              </a:ext>
+            </a:extLst>
+          </p:cNvPr>
+          <p:cNvPicPr>
+            <a:picLocks noChangeAspect="1"/>
+          </p:cNvPicPr>
+          <p:nvPr/>
+        </p:nvPicPr>
+        <p:blipFill>
+          <a:blip r:embed="rId3"/>
+          <a:stretch>
+            <a:fillRect/>
+          </a:stretch>
+        </p:blipFill>
+        <p:spPr>
+          <a:xfrm>
+            <a:off x="5239330" y="332608"/>
+            <a:ext cx="4628571" cy="4457143"/>
+          </a:xfrm>
+          <a:prstGeom prst="rect">
+            <a:avLst/>
+          </a:prstGeom>
+        </p:spPr>
+      </p:pic>
+      <p:pic>
+        <p:nvPicPr>
+          <p:cNvPr id="6" name="图片 5">
+            <a:extLst>
+              <a:ext uri="{FF2B5EF4-FFF2-40B4-BE49-F238E27FC236}">
+                <a16:creationId xmlns:a16="http://schemas.microsoft.com/office/drawing/2014/main" id="{CEC78AF6-8436-4184-9A3A-3F3439415F9D}"/>
+              </a:ext>
+            </a:extLst>
+          </p:cNvPr>
+          <p:cNvPicPr>
+            <a:picLocks noChangeAspect="1"/>
+          </p:cNvPicPr>
+          <p:nvPr/>
+        </p:nvPicPr>
+        <p:blipFill>
+          <a:blip r:embed="rId4"/>
+          <a:stretch>
+            <a:fillRect/>
+          </a:stretch>
+        </p:blipFill>
+        <p:spPr>
+          <a:xfrm>
+            <a:off x="358133" y="2561180"/>
+            <a:ext cx="4761182" cy="3292383"/>
+          </a:xfrm>
+          <a:prstGeom prst="rect">
+            <a:avLst/>
+          </a:prstGeom>
+        </p:spPr>
+      </p:pic>
+    </p:spTree>
+    <p:extLst>
+      <p:ext uri="{BB962C8B-B14F-4D97-AF65-F5344CB8AC3E}">
+        <p14:creationId xmlns:p14="http://schemas.microsoft.com/office/powerpoint/2010/main" val="2837570814"/>
       </p:ext>
     </p:extLst>
   </p:cSld>
@@ -13310,6 +13824,126 @@
     <p:extLst>
       <p:ext uri="{BB962C8B-B14F-4D97-AF65-F5344CB8AC3E}">
         <p14:creationId xmlns:p14="http://schemas.microsoft.com/office/powerpoint/2010/main" val="1930989333"/>
+      </p:ext>
+    </p:extLst>
+  </p:cSld>
+  <p:clrMapOvr>
+    <a:masterClrMapping/>
+  </p:clrMapOvr>
+</p:sld>
+</file>
+
+<file path=ppt/slides/slide50.xml><?xml version="1.0" encoding="utf-8"?>
+<p:sld xmlns:a="http://schemas.openxmlformats.org/drawingml/2006/main" xmlns:r="http://schemas.openxmlformats.org/officeDocument/2006/relationships" xmlns:p="http://schemas.openxmlformats.org/presentationml/2006/main">
+  <p:cSld>
+    <p:spTree>
+      <p:nvGrpSpPr>
+        <p:cNvPr id="1" name=""/>
+        <p:cNvGrpSpPr/>
+        <p:nvPr/>
+      </p:nvGrpSpPr>
+      <p:grpSpPr>
+        <a:xfrm>
+          <a:off x="0" y="0"/>
+          <a:ext cx="0" cy="0"/>
+          <a:chOff x="0" y="0"/>
+          <a:chExt cx="0" cy="0"/>
+        </a:xfrm>
+      </p:grpSpPr>
+      <p:pic>
+        <p:nvPicPr>
+          <p:cNvPr id="4" name="图片 3">
+            <a:extLst>
+              <a:ext uri="{FF2B5EF4-FFF2-40B4-BE49-F238E27FC236}">
+                <a16:creationId xmlns:a16="http://schemas.microsoft.com/office/drawing/2014/main" id="{2BAF3525-86D3-4D43-9984-713A7B39AD4C}"/>
+              </a:ext>
+            </a:extLst>
+          </p:cNvPr>
+          <p:cNvPicPr>
+            <a:picLocks noChangeAspect="1"/>
+          </p:cNvPicPr>
+          <p:nvPr/>
+        </p:nvPicPr>
+        <p:blipFill>
+          <a:blip r:embed="rId2"/>
+          <a:stretch>
+            <a:fillRect/>
+          </a:stretch>
+        </p:blipFill>
+        <p:spPr>
+          <a:xfrm>
+            <a:off x="6657357" y="302004"/>
+            <a:ext cx="5028370" cy="4240342"/>
+          </a:xfrm>
+          <a:prstGeom prst="rect">
+            <a:avLst/>
+          </a:prstGeom>
+        </p:spPr>
+      </p:pic>
+      <p:pic>
+        <p:nvPicPr>
+          <p:cNvPr id="5" name="图片 4">
+            <a:extLst>
+              <a:ext uri="{FF2B5EF4-FFF2-40B4-BE49-F238E27FC236}">
+                <a16:creationId xmlns:a16="http://schemas.microsoft.com/office/drawing/2014/main" id="{3EFBB805-94A6-44DE-90D9-84CF3B3512B4}"/>
+              </a:ext>
+            </a:extLst>
+          </p:cNvPr>
+          <p:cNvPicPr>
+            <a:picLocks noChangeAspect="1"/>
+          </p:cNvPicPr>
+          <p:nvPr/>
+        </p:nvPicPr>
+        <p:blipFill>
+          <a:blip r:embed="rId3"/>
+          <a:stretch>
+            <a:fillRect/>
+          </a:stretch>
+        </p:blipFill>
+        <p:spPr>
+          <a:xfrm>
+            <a:off x="143851" y="141075"/>
+            <a:ext cx="4652851" cy="2056840"/>
+          </a:xfrm>
+          <a:prstGeom prst="rect">
+            <a:avLst/>
+          </a:prstGeom>
+        </p:spPr>
+      </p:pic>
+      <p:pic>
+        <p:nvPicPr>
+          <p:cNvPr id="6" name="图片 5">
+            <a:extLst>
+              <a:ext uri="{FF2B5EF4-FFF2-40B4-BE49-F238E27FC236}">
+                <a16:creationId xmlns:a16="http://schemas.microsoft.com/office/drawing/2014/main" id="{CF490546-4588-43B1-8B98-E3D12698B377}"/>
+              </a:ext>
+            </a:extLst>
+          </p:cNvPr>
+          <p:cNvPicPr>
+            <a:picLocks noChangeAspect="1"/>
+          </p:cNvPicPr>
+          <p:nvPr/>
+        </p:nvPicPr>
+        <p:blipFill>
+          <a:blip r:embed="rId4"/>
+          <a:stretch>
+            <a:fillRect/>
+          </a:stretch>
+        </p:blipFill>
+        <p:spPr>
+          <a:xfrm>
+            <a:off x="506273" y="2335973"/>
+            <a:ext cx="3819048" cy="4380952"/>
+          </a:xfrm>
+          <a:prstGeom prst="rect">
+            <a:avLst/>
+          </a:prstGeom>
+        </p:spPr>
+      </p:pic>
+    </p:spTree>
+    <p:extLst>
+      <p:ext uri="{BB962C8B-B14F-4D97-AF65-F5344CB8AC3E}">
+        <p14:creationId xmlns:p14="http://schemas.microsoft.com/office/powerpoint/2010/main" val="3150781440"/>
       </p:ext>
     </p:extLst>
   </p:cSld>

--- a/docs/scade.pptx
+++ b/docs/scade.pptx
@@ -5,7 +5,7 @@
     <p:sldMasterId id="2147483648" r:id="rId1"/>
   </p:sldMasterIdLst>
   <p:notesMasterIdLst>
-    <p:notesMasterId r:id="rId52"/>
+    <p:notesMasterId r:id="rId53"/>
   </p:notesMasterIdLst>
   <p:sldIdLst>
     <p:sldId id="256" r:id="rId2"/>
@@ -58,6 +58,7 @@
     <p:sldId id="304" r:id="rId49"/>
     <p:sldId id="305" r:id="rId50"/>
     <p:sldId id="306" r:id="rId51"/>
+    <p:sldId id="307" r:id="rId52"/>
   </p:sldIdLst>
   <p:sldSz cx="12192000" cy="6858000"/>
   <p:notesSz cx="6858000" cy="9144000"/>
@@ -246,7 +247,7 @@
           <a:p>
             <a:fld id="{3744C8BF-56B8-46D4-ADA5-A0AF811348DF}" type="datetimeFigureOut">
               <a:rPr lang="zh-CN" altLang="en-US" smtClean="0"/>
-              <a:t>2024/5/19</a:t>
+              <a:t>2024/5/26</a:t>
             </a:fld>
             <a:endParaRPr lang="zh-CN" altLang="en-US"/>
           </a:p>
@@ -744,7 +745,7 @@
           <a:p>
             <a:fld id="{C61D74A4-027F-4A2B-8B92-D0C194C50910}" type="datetimeFigureOut">
               <a:rPr lang="zh-CN" altLang="en-US" smtClean="0"/>
-              <a:t>2024/5/19</a:t>
+              <a:t>2024/5/26</a:t>
             </a:fld>
             <a:endParaRPr lang="zh-CN" altLang="en-US"/>
           </a:p>
@@ -942,7 +943,7 @@
           <a:p>
             <a:fld id="{C61D74A4-027F-4A2B-8B92-D0C194C50910}" type="datetimeFigureOut">
               <a:rPr lang="zh-CN" altLang="en-US" smtClean="0"/>
-              <a:t>2024/5/19</a:t>
+              <a:t>2024/5/26</a:t>
             </a:fld>
             <a:endParaRPr lang="zh-CN" altLang="en-US"/>
           </a:p>
@@ -1150,7 +1151,7 @@
           <a:p>
             <a:fld id="{C61D74A4-027F-4A2B-8B92-D0C194C50910}" type="datetimeFigureOut">
               <a:rPr lang="zh-CN" altLang="en-US" smtClean="0"/>
-              <a:t>2024/5/19</a:t>
+              <a:t>2024/5/26</a:t>
             </a:fld>
             <a:endParaRPr lang="zh-CN" altLang="en-US"/>
           </a:p>
@@ -1348,7 +1349,7 @@
           <a:p>
             <a:fld id="{C61D74A4-027F-4A2B-8B92-D0C194C50910}" type="datetimeFigureOut">
               <a:rPr lang="zh-CN" altLang="en-US" smtClean="0"/>
-              <a:t>2024/5/19</a:t>
+              <a:t>2024/5/26</a:t>
             </a:fld>
             <a:endParaRPr lang="zh-CN" altLang="en-US"/>
           </a:p>
@@ -1623,7 +1624,7 @@
           <a:p>
             <a:fld id="{C61D74A4-027F-4A2B-8B92-D0C194C50910}" type="datetimeFigureOut">
               <a:rPr lang="zh-CN" altLang="en-US" smtClean="0"/>
-              <a:t>2024/5/19</a:t>
+              <a:t>2024/5/26</a:t>
             </a:fld>
             <a:endParaRPr lang="zh-CN" altLang="en-US"/>
           </a:p>
@@ -1888,7 +1889,7 @@
           <a:p>
             <a:fld id="{C61D74A4-027F-4A2B-8B92-D0C194C50910}" type="datetimeFigureOut">
               <a:rPr lang="zh-CN" altLang="en-US" smtClean="0"/>
-              <a:t>2024/5/19</a:t>
+              <a:t>2024/5/26</a:t>
             </a:fld>
             <a:endParaRPr lang="zh-CN" altLang="en-US"/>
           </a:p>
@@ -2300,7 +2301,7 @@
           <a:p>
             <a:fld id="{C61D74A4-027F-4A2B-8B92-D0C194C50910}" type="datetimeFigureOut">
               <a:rPr lang="zh-CN" altLang="en-US" smtClean="0"/>
-              <a:t>2024/5/19</a:t>
+              <a:t>2024/5/26</a:t>
             </a:fld>
             <a:endParaRPr lang="zh-CN" altLang="en-US"/>
           </a:p>
@@ -2441,7 +2442,7 @@
           <a:p>
             <a:fld id="{C61D74A4-027F-4A2B-8B92-D0C194C50910}" type="datetimeFigureOut">
               <a:rPr lang="zh-CN" altLang="en-US" smtClean="0"/>
-              <a:t>2024/5/19</a:t>
+              <a:t>2024/5/26</a:t>
             </a:fld>
             <a:endParaRPr lang="zh-CN" altLang="en-US"/>
           </a:p>
@@ -2554,7 +2555,7 @@
           <a:p>
             <a:fld id="{C61D74A4-027F-4A2B-8B92-D0C194C50910}" type="datetimeFigureOut">
               <a:rPr lang="zh-CN" altLang="en-US" smtClean="0"/>
-              <a:t>2024/5/19</a:t>
+              <a:t>2024/5/26</a:t>
             </a:fld>
             <a:endParaRPr lang="zh-CN" altLang="en-US"/>
           </a:p>
@@ -2865,7 +2866,7 @@
           <a:p>
             <a:fld id="{C61D74A4-027F-4A2B-8B92-D0C194C50910}" type="datetimeFigureOut">
               <a:rPr lang="zh-CN" altLang="en-US" smtClean="0"/>
-              <a:t>2024/5/19</a:t>
+              <a:t>2024/5/26</a:t>
             </a:fld>
             <a:endParaRPr lang="zh-CN" altLang="en-US"/>
           </a:p>
@@ -3153,7 +3154,7 @@
           <a:p>
             <a:fld id="{C61D74A4-027F-4A2B-8B92-D0C194C50910}" type="datetimeFigureOut">
               <a:rPr lang="zh-CN" altLang="en-US" smtClean="0"/>
-              <a:t>2024/5/19</a:t>
+              <a:t>2024/5/26</a:t>
             </a:fld>
             <a:endParaRPr lang="zh-CN" altLang="en-US"/>
           </a:p>
@@ -3394,7 +3395,7 @@
           <a:p>
             <a:fld id="{C61D74A4-027F-4A2B-8B92-D0C194C50910}" type="datetimeFigureOut">
               <a:rPr lang="zh-CN" altLang="en-US" smtClean="0"/>
-              <a:t>2024/5/19</a:t>
+              <a:t>2024/5/26</a:t>
             </a:fld>
             <a:endParaRPr lang="zh-CN" altLang="en-US"/>
           </a:p>
@@ -13944,6 +13945,186 @@
     <p:extLst>
       <p:ext uri="{BB962C8B-B14F-4D97-AF65-F5344CB8AC3E}">
         <p14:creationId xmlns:p14="http://schemas.microsoft.com/office/powerpoint/2010/main" val="3150781440"/>
+      </p:ext>
+    </p:extLst>
+  </p:cSld>
+  <p:clrMapOvr>
+    <a:masterClrMapping/>
+  </p:clrMapOvr>
+</p:sld>
+</file>
+
+<file path=ppt/slides/slide51.xml><?xml version="1.0" encoding="utf-8"?>
+<p:sld xmlns:a="http://schemas.openxmlformats.org/drawingml/2006/main" xmlns:r="http://schemas.openxmlformats.org/officeDocument/2006/relationships" xmlns:p="http://schemas.openxmlformats.org/presentationml/2006/main">
+  <p:cSld>
+    <p:spTree>
+      <p:nvGrpSpPr>
+        <p:cNvPr id="1" name=""/>
+        <p:cNvGrpSpPr/>
+        <p:nvPr/>
+      </p:nvGrpSpPr>
+      <p:grpSpPr>
+        <a:xfrm>
+          <a:off x="0" y="0"/>
+          <a:ext cx="0" cy="0"/>
+          <a:chOff x="0" y="0"/>
+          <a:chExt cx="0" cy="0"/>
+        </a:xfrm>
+      </p:grpSpPr>
+      <p:pic>
+        <p:nvPicPr>
+          <p:cNvPr id="4" name="图片 3">
+            <a:extLst>
+              <a:ext uri="{FF2B5EF4-FFF2-40B4-BE49-F238E27FC236}">
+                <a16:creationId xmlns:a16="http://schemas.microsoft.com/office/drawing/2014/main" id="{D5B216DE-0DBA-4658-A944-B6B68979143C}"/>
+              </a:ext>
+            </a:extLst>
+          </p:cNvPr>
+          <p:cNvPicPr>
+            <a:picLocks noChangeAspect="1"/>
+          </p:cNvPicPr>
+          <p:nvPr/>
+        </p:nvPicPr>
+        <p:blipFill>
+          <a:blip r:embed="rId2"/>
+          <a:stretch>
+            <a:fillRect/>
+          </a:stretch>
+        </p:blipFill>
+        <p:spPr>
+          <a:xfrm>
+            <a:off x="0" y="2648"/>
+            <a:ext cx="5514286" cy="2352381"/>
+          </a:xfrm>
+          <a:prstGeom prst="rect">
+            <a:avLst/>
+          </a:prstGeom>
+        </p:spPr>
+      </p:pic>
+      <p:pic>
+        <p:nvPicPr>
+          <p:cNvPr id="5" name="图片 4">
+            <a:extLst>
+              <a:ext uri="{FF2B5EF4-FFF2-40B4-BE49-F238E27FC236}">
+                <a16:creationId xmlns:a16="http://schemas.microsoft.com/office/drawing/2014/main" id="{103C6BCD-B4CA-4130-B637-72CE91AE545B}"/>
+              </a:ext>
+            </a:extLst>
+          </p:cNvPr>
+          <p:cNvPicPr>
+            <a:picLocks noChangeAspect="1"/>
+          </p:cNvPicPr>
+          <p:nvPr/>
+        </p:nvPicPr>
+        <p:blipFill>
+          <a:blip r:embed="rId3"/>
+          <a:stretch>
+            <a:fillRect/>
+          </a:stretch>
+        </p:blipFill>
+        <p:spPr>
+          <a:xfrm>
+            <a:off x="-102100" y="2355029"/>
+            <a:ext cx="6590476" cy="2428571"/>
+          </a:xfrm>
+          <a:prstGeom prst="rect">
+            <a:avLst/>
+          </a:prstGeom>
+        </p:spPr>
+      </p:pic>
+      <p:pic>
+        <p:nvPicPr>
+          <p:cNvPr id="6" name="图片 5">
+            <a:extLst>
+              <a:ext uri="{FF2B5EF4-FFF2-40B4-BE49-F238E27FC236}">
+                <a16:creationId xmlns:a16="http://schemas.microsoft.com/office/drawing/2014/main" id="{CA96AC4F-8BC6-45F9-BDAC-A8DFE8C1273D}"/>
+              </a:ext>
+            </a:extLst>
+          </p:cNvPr>
+          <p:cNvPicPr>
+            <a:picLocks noChangeAspect="1"/>
+          </p:cNvPicPr>
+          <p:nvPr/>
+        </p:nvPicPr>
+        <p:blipFill>
+          <a:blip r:embed="rId4"/>
+          <a:stretch>
+            <a:fillRect/>
+          </a:stretch>
+        </p:blipFill>
+        <p:spPr>
+          <a:xfrm>
+            <a:off x="6488376" y="187538"/>
+            <a:ext cx="5171429" cy="2295238"/>
+          </a:xfrm>
+          <a:prstGeom prst="rect">
+            <a:avLst/>
+          </a:prstGeom>
+        </p:spPr>
+      </p:pic>
+      <p:pic>
+        <p:nvPicPr>
+          <p:cNvPr id="7" name="图片 6">
+            <a:extLst>
+              <a:ext uri="{FF2B5EF4-FFF2-40B4-BE49-F238E27FC236}">
+                <a16:creationId xmlns:a16="http://schemas.microsoft.com/office/drawing/2014/main" id="{9FF1C3F3-4912-4F4F-910B-64A497DA0901}"/>
+              </a:ext>
+            </a:extLst>
+          </p:cNvPr>
+          <p:cNvPicPr>
+            <a:picLocks noChangeAspect="1"/>
+          </p:cNvPicPr>
+          <p:nvPr/>
+        </p:nvPicPr>
+        <p:blipFill>
+          <a:blip r:embed="rId5"/>
+          <a:stretch>
+            <a:fillRect/>
+          </a:stretch>
+        </p:blipFill>
+        <p:spPr>
+          <a:xfrm>
+            <a:off x="1716726" y="4303311"/>
+            <a:ext cx="4771650" cy="2517912"/>
+          </a:xfrm>
+          <a:prstGeom prst="rect">
+            <a:avLst/>
+          </a:prstGeom>
+        </p:spPr>
+      </p:pic>
+      <p:pic>
+        <p:nvPicPr>
+          <p:cNvPr id="8" name="图片 7">
+            <a:extLst>
+              <a:ext uri="{FF2B5EF4-FFF2-40B4-BE49-F238E27FC236}">
+                <a16:creationId xmlns:a16="http://schemas.microsoft.com/office/drawing/2014/main" id="{F812F11D-CB3F-4EFA-AFFF-0CC4E728FF7B}"/>
+              </a:ext>
+            </a:extLst>
+          </p:cNvPr>
+          <p:cNvPicPr>
+            <a:picLocks noChangeAspect="1"/>
+          </p:cNvPicPr>
+          <p:nvPr/>
+        </p:nvPicPr>
+        <p:blipFill>
+          <a:blip r:embed="rId6"/>
+          <a:stretch>
+            <a:fillRect/>
+          </a:stretch>
+        </p:blipFill>
+        <p:spPr>
+          <a:xfrm>
+            <a:off x="6700007" y="2528554"/>
+            <a:ext cx="4621230" cy="4329446"/>
+          </a:xfrm>
+          <a:prstGeom prst="rect">
+            <a:avLst/>
+          </a:prstGeom>
+        </p:spPr>
+      </p:pic>
+    </p:spTree>
+    <p:extLst>
+      <p:ext uri="{BB962C8B-B14F-4D97-AF65-F5344CB8AC3E}">
+        <p14:creationId xmlns:p14="http://schemas.microsoft.com/office/powerpoint/2010/main" val="2200630414"/>
       </p:ext>
     </p:extLst>
   </p:cSld>
